--- a/lecons/F3/45_FORM4_LESSON41_Floods_Droughts_Desertification.pptx
+++ b/lecons/F3/45_FORM4_LESSON41_Floods_Droughts_Desertification.pptx
@@ -53,9 +53,12 @@
     <p:sldId id="301" r:id="rId47"/>
     <p:sldId id="302" r:id="rId48"/>
     <p:sldId id="303" r:id="rId49"/>
+    <p:sldId id="304" r:id="rId50"/>
+    <p:sldId id="305" r:id="rId51"/>
+    <p:sldId id="306" r:id="rId52"/>
   </p:sldIdLst>
   <p:notesMasterIdLst>
-    <p:notesMasterId r:id="rId50"/>
+    <p:notesMasterId r:id="rId53"/>
   </p:notesMasterIdLst>
   <p:sldSz cx="12192000" cy="6858000"/>
   <p:notesSz cx="6858000" cy="12192000"/>
@@ -637,7 +640,7 @@
           <a:p>
             <a:r>
               <a:rPr lang="en-US" dirty="0"/>
-              <a:t>Listen carefully to this situation from real life. In September 2012, floods destroyed villages along the Benue near Garoua. Six months later, in the Far North, the rains stopped early and the crops dried up. Think about it, because I am going to ask you some questions.</a:t>
+              <a:t>Listen carefully to this situation from real life. In September 2012, floods destroyed villages along the Benue near Garoua. Six months later, in the Far North, the rains stopped early, the crops dried up and sand covered some fields. A pupil asks: "How can the same region suffer from too much water and too little water, and what can people do?" Think about it, because I am going to ask you some questions.</a:t>
             </a:r>
             <a:endParaRPr lang="en-US" dirty="0"/>
           </a:p>
@@ -813,7 +816,7 @@
           <a:p>
             <a:r>
               <a:rPr lang="en-US" dirty="0"/>
-              <a:t>Good. The North suffers from both floods and droughts.</a:t>
+              <a:t>Good. The pupil does not understand how the region suffers both floods and droughts, and what can be done.</a:t>
             </a:r>
             <a:endParaRPr lang="en-US" dirty="0"/>
           </a:p>
@@ -901,7 +904,7 @@
           <a:p>
             <a:r>
               <a:rPr lang="en-US" dirty="0"/>
-              <a:t>Question 2: What happened in 2012? Think for a moment, then raise your hand to answer.</a:t>
+              <a:t>Question 2: What happened along the Benue in 2012? Think for a moment, then raise your hand to answer.</a:t>
             </a:r>
             <a:endParaRPr lang="en-US" dirty="0"/>
           </a:p>
@@ -989,7 +992,7 @@
           <a:p>
             <a:r>
               <a:rPr lang="en-US" dirty="0"/>
-              <a:t>Good. Floods along the Benue.</a:t>
+              <a:t>Good. Floods destroyed villages.</a:t>
             </a:r>
             <a:endParaRPr lang="en-US" dirty="0"/>
           </a:p>
@@ -1165,7 +1168,7 @@
           <a:p>
             <a:r>
               <a:rPr lang="en-US" dirty="0"/>
-              <a:t>Good. A drought: the rains stopped early.</a:t>
+              <a:t>Good. The rains stopped early and the crops dried up.</a:t>
             </a:r>
             <a:endParaRPr lang="en-US" dirty="0"/>
           </a:p>
@@ -1429,7 +1432,7 @@
           <a:p>
             <a:r>
               <a:rPr lang="en-US" dirty="0"/>
-              <a:t>Activity 1. Look carefully at this picture: a flooded street. Observe every detail before I ask the question.</a:t>
+              <a:t>Activity 1. Look carefully at this picture: a flooded village. Observe every detail before I ask the question.</a:t>
             </a:r>
             <a:endParaRPr lang="en-US" dirty="0"/>
           </a:p>
@@ -1605,7 +1608,7 @@
           <a:p>
             <a:r>
               <a:rPr lang="en-US" dirty="0"/>
-              <a:t>Here is the question for Activity 1: Give two causes of floods along the Benue. Take one minute to think and write your answer in your rough notebook.</a:t>
+              <a:t>Here is the question for Activity 1: Give one cause of the floods along the Benue. Take one minute to think and write your answer in your rough notebook.</a:t>
             </a:r>
             <a:endParaRPr lang="en-US" dirty="0"/>
           </a:p>
@@ -1693,7 +1696,7 @@
           <a:p>
             <a:r>
               <a:rPr lang="en-US" dirty="0"/>
-              <a:t>Let us check the answer together. Heavy rain and water released from the Lagdo Dam.</a:t>
+              <a:t>Let us check the answer together. Heavy rain (or water released from the Lagdo Dam).</a:t>
             </a:r>
             <a:endParaRPr lang="en-US" dirty="0"/>
           </a:p>
@@ -1781,7 +1784,7 @@
           <a:p>
             <a:r>
               <a:rPr lang="en-US" dirty="0"/>
-              <a:t>Activity 2. Look carefully at this picture: dry, cracked soil in a drought. Observe every detail before I ask the question.</a:t>
+              <a:t>Activity 2. Look carefully at this picture: dry, cracked land. Observe every detail before I ask the question.</a:t>
             </a:r>
             <a:endParaRPr lang="en-US" dirty="0"/>
           </a:p>
@@ -1957,7 +1960,7 @@
           <a:p>
             <a:r>
               <a:rPr lang="en-US" dirty="0"/>
-              <a:t>Let us check the answer together. A drought is a period without rain; desertification is the spread of the desert.</a:t>
+              <a:t>Let us check the answer together. A drought is a period without enough rain; desertification is the lasting spread of desert conditions.</a:t>
             </a:r>
             <a:endParaRPr lang="en-US" dirty="0"/>
           </a:p>
@@ -2045,7 +2048,7 @@
           <a:p>
             <a:r>
               <a:rPr lang="en-US" dirty="0"/>
-              <a:t>Activity 3. Look carefully at this picture: farmers dig small pits (zaï) to keep water for plants. Observe every detail before I ask the question.</a:t>
+              <a:t>Activity 3. Look carefully at this picture: planting pits in dry land. Observe every detail before I ask the question.</a:t>
             </a:r>
             <a:endParaRPr lang="en-US" dirty="0"/>
           </a:p>
@@ -2661,7 +2664,7 @@
           <a:p>
             <a:r>
               <a:rPr lang="en-US" dirty="0"/>
-              <a:t>Let us copy Causes. These hazards have the following causes. On this slide we have Floods and Drought. Write each point on a new line, with the key term first, and explain it in your own words when we revise. When you finish, we go to the next slide.</a:t>
+              <a:t>Let us copy Floods. Floods are explained as follows. Copy the point on Areas of occurrence on the left, then draw the diagram on the right: a flooded village. Give it a title and label it clearly.</a:t>
             </a:r>
             <a:endParaRPr lang="en-US" dirty="0"/>
           </a:p>
@@ -2749,7 +2752,7 @@
           <a:p>
             <a:r>
               <a:rPr lang="en-US" dirty="0"/>
-              <a:t>We continue with Causes. On this slide we have Desertification. Write each point on a new line, with the key term first, and explain it in your own words when we revise.</a:t>
+              <a:t>Copy the point on Causes on the left, then draw the diagram on the right: causes of floods. Give it a title and label it clearly.</a:t>
             </a:r>
             <a:endParaRPr lang="en-US" dirty="0"/>
           </a:p>
@@ -2837,7 +2840,7 @@
           <a:p>
             <a:r>
               <a:rPr lang="en-US" dirty="0"/>
-              <a:t>Let us copy Effects. These hazards have the following effects. On this slide we have Floods and Drought. Write each point on a new line, with the key term first, and explain it in your own words when we revise. When you finish, we go to the next slide.</a:t>
+              <a:t>We continue with Floods. On this slide we have Effects and Adaptation and mitigation. Write each point on a new line, with the key term first, and explain it in your own words when we revise.</a:t>
             </a:r>
             <a:endParaRPr lang="en-US" dirty="0"/>
           </a:p>
@@ -2925,7 +2928,7 @@
           <a:p>
             <a:r>
               <a:rPr lang="en-US" dirty="0"/>
-              <a:t>We continue with Effects. On this slide we have Desertification. Write each point on a new line, with the key term first, and explain it in your own words when we revise.</a:t>
+              <a:t>Let us copy Droughts. Droughts are explained as follows. Copy the point on Areas of occurrence on the left, then draw the diagram on the right: dry land. Give it a title and label it clearly.</a:t>
             </a:r>
             <a:endParaRPr lang="en-US" dirty="0"/>
           </a:p>
@@ -3013,7 +3016,7 @@
           <a:p>
             <a:r>
               <a:rPr lang="en-US" dirty="0"/>
-              <a:t>Let us copy Adaptation and Mitigation. These hazards are managed with the following measures. On this slide we have Floods and Drought. Write each point on a new line, with the key term first, and explain it in your own words when we revise. When you finish, we go to the next slide.</a:t>
+              <a:t>We continue with Droughts. On this slide we have Causes and Effects. Write each point on a new line, with the key term first, and explain it in your own words when we revise. When you finish, we go to the next slide.</a:t>
             </a:r>
             <a:endParaRPr lang="en-US" dirty="0"/>
           </a:p>
@@ -3101,7 +3104,7 @@
           <a:p>
             <a:r>
               <a:rPr lang="en-US" dirty="0"/>
-              <a:t>We continue with Adaptation and Mitigation. On this slide we have Desertification. Write each point on a new line, with the key term first, and explain it in your own words when we revise.</a:t>
+              <a:t>We continue with Droughts. On this slide we have Adaptation and mitigation. Write each point on a new line, with the key term first, and explain it in your own words when we revise.</a:t>
             </a:r>
             <a:endParaRPr lang="en-US" dirty="0"/>
           </a:p>
@@ -3189,7 +3192,7 @@
           <a:p>
             <a:r>
               <a:rPr lang="en-US" dirty="0"/>
-              <a:t>Now let us check what you have understood. Question 1: What is desertification? Answer in your exercise book.</a:t>
+              <a:t>Let us copy Desertification. Desertification is explained as follows. Copy the point on Areas of occurrence on the left, then draw the diagram on the right: crops dried by drought. Give it a title and label it clearly.</a:t>
             </a:r>
             <a:endParaRPr lang="en-US" dirty="0"/>
           </a:p>
@@ -3277,7 +3280,7 @@
           <a:p>
             <a:r>
               <a:rPr lang="en-US" dirty="0"/>
-              <a:t>The expected answer is: the spread of the desert. If you got it right, well done.</a:t>
+              <a:t>We continue with Desertification. On this slide we have Causes and Effects. Write each point on a new line, with the key term first, and explain it in your own words when we revise.</a:t>
             </a:r>
             <a:endParaRPr lang="en-US" dirty="0"/>
           </a:p>
@@ -3365,7 +3368,7 @@
           <a:p>
             <a:r>
               <a:rPr lang="en-US" dirty="0"/>
-              <a:t>Now let us check what you have understood. Question 2: Give one way to fight desertification. Answer in your exercise book.</a:t>
+              <a:t>Copy the point on Adaptation and mitigation on the left, then draw the diagram on the right: zaï planting pits. Give it a title and label it clearly.</a:t>
             </a:r>
             <a:endParaRPr lang="en-US" dirty="0"/>
           </a:p>
@@ -3541,7 +3544,7 @@
           <a:p>
             <a:r>
               <a:rPr lang="en-US" dirty="0"/>
-              <a:t>The expected answer is: plant trees (or stop overgrazing). If you got it right, well done.</a:t>
+              <a:t>Now let us check what you have understood. Question 1: What is desertification? Answer in your exercise book.</a:t>
             </a:r>
             <a:endParaRPr lang="en-US" dirty="0"/>
           </a:p>
@@ -3629,7 +3632,7 @@
           <a:p>
             <a:r>
               <a:rPr lang="en-US" dirty="0"/>
-              <a:t>For those who need more practice, fill in the blanks in your exercise book. The answers are: number 1, drought; number 2, desertification; number 3, Lagdo.</a:t>
+              <a:t>The expected answer is: the spread of the desert. If you got it right, well done.</a:t>
             </a:r>
             <a:endParaRPr lang="en-US" dirty="0"/>
           </a:p>
@@ -3717,7 +3720,7 @@
           <a:p>
             <a:r>
               <a:rPr lang="en-US" dirty="0"/>
-              <a:t>For your homework: Count how many buckets (or litres) of water your family uses in one day, and list the main uses (drinking, cooking, washing). We shall correct it at the beginning of our next lesson.</a:t>
+              <a:t>Now let us check what you have understood. Question 2: Give one way to fight desertification. Answer in your exercise book.</a:t>
             </a:r>
             <a:endParaRPr lang="en-US" dirty="0"/>
           </a:p>
@@ -3805,7 +3808,7 @@
           <a:p>
             <a:r>
               <a:rPr lang="en-US" dirty="0"/>
-              <a:t>Our next lesson will be on Lesson 42: Water Scarcity. Thank you for your attention, and see you next time.</a:t>
+              <a:t>The expected answer is: plant trees (or stop overgrazing). If you got it right, well done.</a:t>
             </a:r>
             <a:endParaRPr lang="en-US" dirty="0"/>
           </a:p>
@@ -3893,7 +3896,7 @@
           <a:p>
             <a:r>
               <a:rPr lang="en-US" dirty="0"/>
-              <a:t>Let us play the bilingual game. I say a word in English, and you give me the French word. Then we do the reverse.</a:t>
+              <a:t>For those who need more practice, fill in the blanks in your exercise book. The answers are: number 1, drought; number 2, desertification; number 3, Lagdo.</a:t>
             </a:r>
             <a:endParaRPr lang="en-US" dirty="0"/>
           </a:p>
@@ -3981,7 +3984,7 @@
           <a:p>
             <a:r>
               <a:rPr lang="en-US" dirty="0"/>
-              <a:t>I record this information in the official logbook of the class after the lesson.</a:t>
+              <a:t>For your homework: Count how many buckets (or litres) of water your family uses in one day, and list the main uses (drinking, cooking, washing). We shall correct it at the beginning of our next lesson.</a:t>
             </a:r>
             <a:endParaRPr lang="en-US" dirty="0"/>
           </a:p>
@@ -4069,7 +4072,7 @@
           <a:p>
             <a:r>
               <a:rPr lang="en-US" dirty="0"/>
-              <a:t>I complete the second page of the logbook: the matter taught, the evaluation, the homework and the attendance.</a:t>
+              <a:t>Our next lesson will be on Lesson 42: Water Scarcity. Thank you for your attention, and see you next time.</a:t>
             </a:r>
             <a:endParaRPr lang="en-US" dirty="0"/>
           </a:p>
@@ -4157,7 +4160,7 @@
           <a:p>
             <a:r>
               <a:rPr lang="en-US" dirty="0"/>
-              <a:t>This slide is for me, the teacher: it gives the timing of the lesson and what to do if the projector is not available.</a:t>
+              <a:t>Let us play the bilingual game. I say a word in English, and you give me the French word. Then we do the reverse.</a:t>
             </a:r>
             <a:endParaRPr lang="en-US" dirty="0"/>
           </a:p>
@@ -4245,7 +4248,7 @@
           <a:p>
             <a:r>
               <a:rPr lang="en-US" dirty="0"/>
-              <a:t>These are the references and picture credits used to prepare this lesson.</a:t>
+              <a:t>I record this information in the official logbook of the class after the lesson.</a:t>
             </a:r>
             <a:endParaRPr lang="en-US" dirty="0"/>
           </a:p>
@@ -4269,6 +4272,94 @@
             <a:fld id="{F7021451-1387-4CA6-816F-3879F97B5CBC}" type="slidenum">
               <a:rPr lang="en-US"/>
               <a:t>48</a:t>
+            </a:fld>
+            <a:endParaRPr lang="en-US"/>
+          </a:p>
+        </p:txBody>
+      </p:sp>
+    </p:spTree>
+    <p:extLst>
+      <p:ext uri="{BB962C8B-B14F-4D97-AF65-F5344CB8AC3E}">
+        <p14:creationId xmlns:p14="http://schemas.microsoft.com/office/powerpoint/2010/main" val="1024086991"/>
+      </p:ext>
+    </p:extLst>
+  </p:cSld>
+  <p:clrMapOvr>
+    <a:masterClrMapping/>
+  </p:clrMapOvr>
+</p:notes>
+</file>
+
+<file path=ppt/notesSlides/notesSlide49.xml><?xml version="1.0" encoding="utf-8"?>
+<p:notes xmlns:a="http://schemas.openxmlformats.org/drawingml/2006/main" xmlns:r="http://schemas.openxmlformats.org/officeDocument/2006/relationships" xmlns:p="http://schemas.openxmlformats.org/presentationml/2006/main">
+  <p:cSld>
+    <p:spTree>
+      <p:nvGrpSpPr>
+        <p:cNvPr id="1" name=""/>
+        <p:cNvGrpSpPr/>
+        <p:nvPr/>
+      </p:nvGrpSpPr>
+      <p:grpSpPr>
+        <a:xfrm>
+          <a:off x="0" y="0"/>
+          <a:ext cx="0" cy="0"/>
+          <a:chOff x="0" y="0"/>
+          <a:chExt cx="0" cy="0"/>
+        </a:xfrm>
+      </p:grpSpPr>
+      <p:sp>
+        <p:nvSpPr>
+          <p:cNvPr id="2" name="Slide Image Placeholder 1"/>
+          <p:cNvSpPr>
+            <a:spLocks noGrp="1" noRot="1" noChangeAspect="1"/>
+          </p:cNvSpPr>
+          <p:nvPr>
+            <p:ph type="sldImg"/>
+          </p:nvPr>
+        </p:nvSpPr>
+        <p:spPr/>
+      </p:sp>
+      <p:sp>
+        <p:nvSpPr>
+          <p:cNvPr id="3" name="Notes Placeholder 2"/>
+          <p:cNvSpPr>
+            <a:spLocks noGrp="1"/>
+          </p:cNvSpPr>
+          <p:nvPr>
+            <p:ph type="body" idx="1"/>
+          </p:nvPr>
+        </p:nvSpPr>
+        <p:spPr/>
+        <p:txBody>
+          <a:bodyPr/>
+          <a:lstStyle/>
+          <a:p>
+            <a:r>
+              <a:rPr lang="en-US" dirty="0"/>
+              <a:t>I complete the second page of the logbook: the matter taught, the evaluation, the homework and the attendance.</a:t>
+            </a:r>
+            <a:endParaRPr lang="en-US" dirty="0"/>
+          </a:p>
+        </p:txBody>
+      </p:sp>
+      <p:sp>
+        <p:nvSpPr>
+          <p:cNvPr id="4" name="Slide Number Placeholder 3"/>
+          <p:cNvSpPr>
+            <a:spLocks noGrp="1"/>
+          </p:cNvSpPr>
+          <p:nvPr>
+            <p:ph type="sldNum" sz="quarter" idx="10"/>
+          </p:nvPr>
+        </p:nvSpPr>
+        <p:spPr/>
+        <p:txBody>
+          <a:bodyPr/>
+          <a:lstStyle/>
+          <a:p>
+            <a:fld id="{F7021451-1387-4CA6-816F-3879F97B5CBC}" type="slidenum">
+              <a:rPr lang="en-US"/>
+              <a:t>49</a:t>
             </a:fld>
             <a:endParaRPr lang="en-US"/>
           </a:p>
@@ -4375,6 +4466,182 @@
 </p:notes>
 </file>
 
+<file path=ppt/notesSlides/notesSlide50.xml><?xml version="1.0" encoding="utf-8"?>
+<p:notes xmlns:a="http://schemas.openxmlformats.org/drawingml/2006/main" xmlns:r="http://schemas.openxmlformats.org/officeDocument/2006/relationships" xmlns:p="http://schemas.openxmlformats.org/presentationml/2006/main">
+  <p:cSld>
+    <p:spTree>
+      <p:nvGrpSpPr>
+        <p:cNvPr id="1" name=""/>
+        <p:cNvGrpSpPr/>
+        <p:nvPr/>
+      </p:nvGrpSpPr>
+      <p:grpSpPr>
+        <a:xfrm>
+          <a:off x="0" y="0"/>
+          <a:ext cx="0" cy="0"/>
+          <a:chOff x="0" y="0"/>
+          <a:chExt cx="0" cy="0"/>
+        </a:xfrm>
+      </p:grpSpPr>
+      <p:sp>
+        <p:nvSpPr>
+          <p:cNvPr id="2" name="Slide Image Placeholder 1"/>
+          <p:cNvSpPr>
+            <a:spLocks noGrp="1" noRot="1" noChangeAspect="1"/>
+          </p:cNvSpPr>
+          <p:nvPr>
+            <p:ph type="sldImg"/>
+          </p:nvPr>
+        </p:nvSpPr>
+        <p:spPr/>
+      </p:sp>
+      <p:sp>
+        <p:nvSpPr>
+          <p:cNvPr id="3" name="Notes Placeholder 2"/>
+          <p:cNvSpPr>
+            <a:spLocks noGrp="1"/>
+          </p:cNvSpPr>
+          <p:nvPr>
+            <p:ph type="body" idx="1"/>
+          </p:nvPr>
+        </p:nvSpPr>
+        <p:spPr/>
+        <p:txBody>
+          <a:bodyPr/>
+          <a:lstStyle/>
+          <a:p>
+            <a:r>
+              <a:rPr lang="en-US" dirty="0"/>
+              <a:t>This slide is for me, the teacher: it gives the timing of the lesson and what to do if the projector is not available.</a:t>
+            </a:r>
+            <a:endParaRPr lang="en-US" dirty="0"/>
+          </a:p>
+        </p:txBody>
+      </p:sp>
+      <p:sp>
+        <p:nvSpPr>
+          <p:cNvPr id="4" name="Slide Number Placeholder 3"/>
+          <p:cNvSpPr>
+            <a:spLocks noGrp="1"/>
+          </p:cNvSpPr>
+          <p:nvPr>
+            <p:ph type="sldNum" sz="quarter" idx="10"/>
+          </p:nvPr>
+        </p:nvSpPr>
+        <p:spPr/>
+        <p:txBody>
+          <a:bodyPr/>
+          <a:lstStyle/>
+          <a:p>
+            <a:fld id="{F7021451-1387-4CA6-816F-3879F97B5CBC}" type="slidenum">
+              <a:rPr lang="en-US"/>
+              <a:t>50</a:t>
+            </a:fld>
+            <a:endParaRPr lang="en-US"/>
+          </a:p>
+        </p:txBody>
+      </p:sp>
+    </p:spTree>
+    <p:extLst>
+      <p:ext uri="{BB962C8B-B14F-4D97-AF65-F5344CB8AC3E}">
+        <p14:creationId xmlns:p14="http://schemas.microsoft.com/office/powerpoint/2010/main" val="1024086991"/>
+      </p:ext>
+    </p:extLst>
+  </p:cSld>
+  <p:clrMapOvr>
+    <a:masterClrMapping/>
+  </p:clrMapOvr>
+</p:notes>
+</file>
+
+<file path=ppt/notesSlides/notesSlide51.xml><?xml version="1.0" encoding="utf-8"?>
+<p:notes xmlns:a="http://schemas.openxmlformats.org/drawingml/2006/main" xmlns:r="http://schemas.openxmlformats.org/officeDocument/2006/relationships" xmlns:p="http://schemas.openxmlformats.org/presentationml/2006/main">
+  <p:cSld>
+    <p:spTree>
+      <p:nvGrpSpPr>
+        <p:cNvPr id="1" name=""/>
+        <p:cNvGrpSpPr/>
+        <p:nvPr/>
+      </p:nvGrpSpPr>
+      <p:grpSpPr>
+        <a:xfrm>
+          <a:off x="0" y="0"/>
+          <a:ext cx="0" cy="0"/>
+          <a:chOff x="0" y="0"/>
+          <a:chExt cx="0" cy="0"/>
+        </a:xfrm>
+      </p:grpSpPr>
+      <p:sp>
+        <p:nvSpPr>
+          <p:cNvPr id="2" name="Slide Image Placeholder 1"/>
+          <p:cNvSpPr>
+            <a:spLocks noGrp="1" noRot="1" noChangeAspect="1"/>
+          </p:cNvSpPr>
+          <p:nvPr>
+            <p:ph type="sldImg"/>
+          </p:nvPr>
+        </p:nvSpPr>
+        <p:spPr/>
+      </p:sp>
+      <p:sp>
+        <p:nvSpPr>
+          <p:cNvPr id="3" name="Notes Placeholder 2"/>
+          <p:cNvSpPr>
+            <a:spLocks noGrp="1"/>
+          </p:cNvSpPr>
+          <p:nvPr>
+            <p:ph type="body" idx="1"/>
+          </p:nvPr>
+        </p:nvSpPr>
+        <p:spPr/>
+        <p:txBody>
+          <a:bodyPr/>
+          <a:lstStyle/>
+          <a:p>
+            <a:r>
+              <a:rPr lang="en-US" dirty="0"/>
+              <a:t>These are the references and picture credits used to prepare this lesson.</a:t>
+            </a:r>
+            <a:endParaRPr lang="en-US" dirty="0"/>
+          </a:p>
+        </p:txBody>
+      </p:sp>
+      <p:sp>
+        <p:nvSpPr>
+          <p:cNvPr id="4" name="Slide Number Placeholder 3"/>
+          <p:cNvSpPr>
+            <a:spLocks noGrp="1"/>
+          </p:cNvSpPr>
+          <p:nvPr>
+            <p:ph type="sldNum" sz="quarter" idx="10"/>
+          </p:nvPr>
+        </p:nvSpPr>
+        <p:spPr/>
+        <p:txBody>
+          <a:bodyPr/>
+          <a:lstStyle/>
+          <a:p>
+            <a:fld id="{F7021451-1387-4CA6-816F-3879F97B5CBC}" type="slidenum">
+              <a:rPr lang="en-US"/>
+              <a:t>51</a:t>
+            </a:fld>
+            <a:endParaRPr lang="en-US"/>
+          </a:p>
+        </p:txBody>
+      </p:sp>
+    </p:spTree>
+    <p:extLst>
+      <p:ext uri="{BB962C8B-B14F-4D97-AF65-F5344CB8AC3E}">
+        <p14:creationId xmlns:p14="http://schemas.microsoft.com/office/powerpoint/2010/main" val="1024086991"/>
+      </p:ext>
+    </p:extLst>
+  </p:cSld>
+  <p:clrMapOvr>
+    <a:masterClrMapping/>
+  </p:clrMapOvr>
+</p:notes>
+</file>
+
 <file path=ppt/notesSlides/notesSlide6.xml><?xml version="1.0" encoding="utf-8"?>
 <p:notes xmlns:a="http://schemas.openxmlformats.org/drawingml/2006/main" xmlns:r="http://schemas.openxmlformats.org/officeDocument/2006/relationships" xmlns:p="http://schemas.openxmlformats.org/presentationml/2006/main">
   <p:cSld>
@@ -4597,7 +4864,7 @@
           <a:p>
             <a:r>
               <a:rPr lang="en-US" dirty="0"/>
-              <a:t>By the end of this lesson, you should be able to do three things. Number 1: define floods, droughts and desertification and give their areas of occurrence. Number 2: explain their causes. Number 3: describe their effects. Number 4: propose adaptation and mitigation measures.</a:t>
+              <a:t>By the end of this lesson, you should be able to do four things. Number 1: define floods, droughts and desertification and give their areas of occurrence. Number 2: explain their causes. Number 3: describe their effects. Number 4: propose adaptation and mitigation measures.</a:t>
             </a:r>
             <a:endParaRPr lang="en-US" dirty="0"/>
           </a:p>
@@ -6065,7 +6332,7 @@
         <p:spPr>
           <a:xfrm>
             <a:off x="0" y="658368"/>
-            <a:ext cx="5120640" cy="5833872"/>
+            <a:ext cx="1463040" cy="5833872"/>
           </a:xfrm>
           <a:prstGeom prst="rect">
             <a:avLst/>
@@ -6080,8 +6347,8 @@
         </p:nvSpPr>
         <p:spPr>
           <a:xfrm>
-            <a:off x="5349240" y="1005840"/>
-            <a:ext cx="6522415" cy="731520"/>
+            <a:off x="1691640" y="1005840"/>
+            <a:ext cx="10180015" cy="731520"/>
           </a:xfrm>
           <a:prstGeom prst="rect">
             <a:avLst/>
@@ -6121,8 +6388,8 @@
         </p:nvSpPr>
         <p:spPr>
           <a:xfrm>
-            <a:off x="5349240" y="1783080"/>
-            <a:ext cx="6522415" cy="4663440"/>
+            <a:off x="1691640" y="1783080"/>
+            <a:ext cx="10180015" cy="4663440"/>
           </a:xfrm>
           <a:prstGeom prst="rect">
             <a:avLst/>
@@ -6149,7 +6416,7 @@
                 <a:ea typeface="Times New Roman" pitchFamily="34" charset="-122"/>
                 <a:cs typeface="Times New Roman" pitchFamily="34" charset="-120"/>
               </a:rPr>
-              <a:t>In September 2012, floods destroyed villages along the Benue near Garoua. Six months later, in the Far North, the rains stopped early and the crops dried up.</a:t>
+              <a:t>In September 2012, floods destroyed villages along the Benue near Garoua. Six months later, in the Far North, the rains stopped early, the crops dried up and sand covered some fields. A pupil asks: "How can the same region suffer from too much water and too little water, and what can people do?"</a:t>
             </a:r>
             <a:endParaRPr lang="en-US" sz="4000" dirty="0"/>
           </a:p>
@@ -6587,7 +6854,7 @@
                 <a:ea typeface="Times New Roman" pitchFamily="34" charset="-122"/>
                 <a:cs typeface="Times New Roman" pitchFamily="34" charset="-120"/>
               </a:rPr>
-              <a:t>The North suffers from both floods and droughts.</a:t>
+              <a:t>The pupil does not understand how the region suffers both floods and droughts, and what can be done.</a:t>
             </a:r>
             <a:endParaRPr lang="en-US" sz="4000" dirty="0"/>
           </a:p>
@@ -6806,7 +7073,7 @@
                 <a:ea typeface="Times New Roman" pitchFamily="34" charset="-122"/>
                 <a:cs typeface="Times New Roman" pitchFamily="34" charset="-120"/>
               </a:rPr>
-              <a:t>What happened in 2012?</a:t>
+              <a:t>What happened along the Benue in 2012?</a:t>
             </a:r>
             <a:endParaRPr lang="en-US" sz="4000" dirty="0"/>
           </a:p>
@@ -7025,7 +7292,7 @@
                 <a:ea typeface="Times New Roman" pitchFamily="34" charset="-122"/>
                 <a:cs typeface="Times New Roman" pitchFamily="34" charset="-120"/>
               </a:rPr>
-              <a:t>Floods along the Benue.</a:t>
+              <a:t>Floods destroyed villages.</a:t>
             </a:r>
             <a:endParaRPr lang="en-US" sz="4000" dirty="0"/>
           </a:p>
@@ -7463,7 +7730,7 @@
                 <a:ea typeface="Times New Roman" pitchFamily="34" charset="-122"/>
                 <a:cs typeface="Times New Roman" pitchFamily="34" charset="-120"/>
               </a:rPr>
-              <a:t>A drought: the rains stopped early.</a:t>
+              <a:t>The rains stopped early and the crops dried up.</a:t>
             </a:r>
             <a:endParaRPr lang="en-US" sz="4000" dirty="0"/>
           </a:p>
@@ -8115,7 +8382,7 @@
                 <a:ea typeface="Times New Roman" pitchFamily="34" charset="-122"/>
                 <a:cs typeface="Times New Roman" pitchFamily="34" charset="-120"/>
               </a:rPr>
-              <a:t>A flooded street.</a:t>
+              <a:t>A flooded village.</a:t>
             </a:r>
             <a:endParaRPr lang="en-US" sz="1800" dirty="0"/>
           </a:p>
@@ -8929,7 +9196,7 @@
                 <a:ea typeface="Times New Roman" pitchFamily="34" charset="-122"/>
                 <a:cs typeface="Times New Roman" pitchFamily="34" charset="-120"/>
               </a:rPr>
-              <a:t>Give two causes of floods along the Benue.</a:t>
+              <a:t>Give one cause of the floods along the Benue.</a:t>
             </a:r>
             <a:endParaRPr lang="en-US" sz="4000" dirty="0"/>
           </a:p>
@@ -9148,7 +9415,7 @@
                 <a:ea typeface="Times New Roman" pitchFamily="34" charset="-122"/>
                 <a:cs typeface="Times New Roman" pitchFamily="34" charset="-120"/>
               </a:rPr>
-              <a:t>Heavy rain and water released from the Lagdo Dam.</a:t>
+              <a:t>Heavy rain (or water released from the Lagdo Dam).</a:t>
             </a:r>
             <a:endParaRPr lang="en-US" sz="4000" dirty="0"/>
           </a:p>
@@ -9260,7 +9527,7 @@
                 <a:ea typeface="Calibri" pitchFamily="34" charset="-122"/>
                 <a:cs typeface="Calibri" pitchFamily="34" charset="-120"/>
               </a:rPr>
-              <a:t>2. DROUGHT</a:t>
+              <a:t>2. DROUGHTS</a:t>
             </a:r>
             <a:endParaRPr lang="en-US" sz="1400" dirty="0"/>
           </a:p>
@@ -9362,7 +9629,7 @@
                 <a:ea typeface="Times New Roman" pitchFamily="34" charset="-122"/>
                 <a:cs typeface="Times New Roman" pitchFamily="34" charset="-120"/>
               </a:rPr>
-              <a:t>Dry, cracked soil in a drought.</a:t>
+              <a:t>Dry, cracked land.</a:t>
             </a:r>
             <a:endParaRPr lang="en-US" sz="1800" dirty="0"/>
           </a:p>
@@ -9474,7 +9741,7 @@
                 <a:ea typeface="Calibri" pitchFamily="34" charset="-122"/>
                 <a:cs typeface="Calibri" pitchFamily="34" charset="-120"/>
               </a:rPr>
-              <a:t>2. DROUGHT</a:t>
+              <a:t>2. DROUGHTS</a:t>
             </a:r>
             <a:endParaRPr lang="en-US" sz="1400" dirty="0"/>
           </a:p>
@@ -9693,7 +9960,7 @@
                 <a:ea typeface="Calibri" pitchFamily="34" charset="-122"/>
                 <a:cs typeface="Calibri" pitchFamily="34" charset="-120"/>
               </a:rPr>
-              <a:t>2. DROUGHT</a:t>
+              <a:t>2. DROUGHTS</a:t>
             </a:r>
             <a:endParaRPr lang="en-US" sz="1400" dirty="0"/>
           </a:p>
@@ -9800,7 +10067,7 @@
                 <a:ea typeface="Times New Roman" pitchFamily="34" charset="-122"/>
                 <a:cs typeface="Times New Roman" pitchFamily="34" charset="-120"/>
               </a:rPr>
-              <a:t>A drought is a period without rain; desertification is the spread of the desert.</a:t>
+              <a:t>A drought is a period without enough rain; desertification is the lasting spread of desert conditions.</a:t>
             </a:r>
             <a:endParaRPr lang="en-US" sz="4000" dirty="0"/>
           </a:p>
@@ -9912,7 +10179,7 @@
                 <a:ea typeface="Calibri" pitchFamily="34" charset="-122"/>
                 <a:cs typeface="Calibri" pitchFamily="34" charset="-120"/>
               </a:rPr>
-              <a:t>4. ADAPTATION AND MITIGATION</a:t>
+              <a:t>3. DESERTIFICATION</a:t>
             </a:r>
             <a:endParaRPr lang="en-US" sz="1400" dirty="0"/>
           </a:p>
@@ -10014,7 +10281,7 @@
                 <a:ea typeface="Times New Roman" pitchFamily="34" charset="-122"/>
                 <a:cs typeface="Times New Roman" pitchFamily="34" charset="-120"/>
               </a:rPr>
-              <a:t>Farmers dig small pits (zaï) to keep water for plants.</a:t>
+              <a:t>Planting pits in dry land.</a:t>
             </a:r>
             <a:endParaRPr lang="en-US" sz="1800" dirty="0"/>
           </a:p>
@@ -10126,7 +10393,7 @@
                 <a:ea typeface="Calibri" pitchFamily="34" charset="-122"/>
                 <a:cs typeface="Calibri" pitchFamily="34" charset="-120"/>
               </a:rPr>
-              <a:t>4. ADAPTATION AND MITIGATION</a:t>
+              <a:t>3. DESERTIFICATION</a:t>
             </a:r>
             <a:endParaRPr lang="en-US" sz="1400" dirty="0"/>
           </a:p>
@@ -10345,7 +10612,7 @@
                 <a:ea typeface="Calibri" pitchFamily="34" charset="-122"/>
                 <a:cs typeface="Calibri" pitchFamily="34" charset="-120"/>
               </a:rPr>
-              <a:t>4. ADAPTATION AND MITIGATION</a:t>
+              <a:t>3. DESERTIFICATION</a:t>
             </a:r>
             <a:endParaRPr lang="en-US" sz="1400" dirty="0"/>
           </a:p>
@@ -10663,7 +10930,7 @@
               <a:buNone/>
             </a:pPr>
             <a:r>
-              <a:rPr lang="en-US" sz="4000" b="1" dirty="0">
+              <a:rPr lang="en-US" sz="3200" b="1" dirty="0">
                 <a:solidFill>
                   <a:srgbClr val="111111"/>
                 </a:solidFill>
@@ -10673,7 +10940,7 @@
               </a:rPr>
               <a:t>Topic: Management of Climate and Hydrological Related Hazards</a:t>
             </a:r>
-            <a:endParaRPr lang="en-US" sz="4000" dirty="0"/>
+            <a:endParaRPr lang="en-US" sz="3200" dirty="0"/>
           </a:p>
           <a:p>
             <a:pPr algn="l" indent="0" marL="0">
@@ -10683,7 +10950,7 @@
               <a:buNone/>
             </a:pPr>
             <a:r>
-              <a:rPr lang="en-US" sz="4000" b="1" dirty="0">
+              <a:rPr lang="en-US" sz="3200" b="1" dirty="0">
                 <a:solidFill>
                   <a:srgbClr val="111111"/>
                 </a:solidFill>
@@ -10693,7 +10960,7 @@
               </a:rPr>
               <a:t>Sub-topic: Hydro-climatic Hazards</a:t>
             </a:r>
-            <a:endParaRPr lang="en-US" sz="4000" dirty="0"/>
+            <a:endParaRPr lang="en-US" sz="3200" dirty="0"/>
           </a:p>
           <a:p>
             <a:pPr algn="l" indent="0" marL="0">
@@ -10703,7 +10970,7 @@
               <a:buNone/>
             </a:pPr>
             <a:r>
-              <a:rPr lang="en-US" sz="4000" b="1" dirty="0">
+              <a:rPr lang="en-US" sz="3200" b="1" dirty="0">
                 <a:solidFill>
                   <a:srgbClr val="990011"/>
                 </a:solidFill>
@@ -10713,7 +10980,7 @@
               </a:rPr>
               <a:t>Lesson 41: Floods, Droughts and Desertification</a:t>
             </a:r>
-            <a:endParaRPr lang="en-US" sz="4000" dirty="0"/>
+            <a:endParaRPr lang="en-US" sz="3200" dirty="0"/>
           </a:p>
         </p:txBody>
       </p:sp>
@@ -10846,7 +11113,7 @@
         <p:spPr>
           <a:xfrm>
             <a:off x="0" y="658368"/>
-            <a:ext cx="2468880" cy="5833872"/>
+            <a:ext cx="3840480" cy="5833872"/>
           </a:xfrm>
           <a:prstGeom prst="rect">
             <a:avLst/>
@@ -10861,8 +11128,8 @@
         </p:nvSpPr>
         <p:spPr>
           <a:xfrm>
-            <a:off x="2697480" y="1005840"/>
-            <a:ext cx="9174175" cy="731520"/>
+            <a:off x="4069080" y="1005840"/>
+            <a:ext cx="7802575" cy="731520"/>
           </a:xfrm>
           <a:prstGeom prst="rect">
             <a:avLst/>
@@ -10902,8 +11169,8 @@
         </p:nvSpPr>
         <p:spPr>
           <a:xfrm>
-            <a:off x="2697480" y="1783080"/>
-            <a:ext cx="9174175" cy="4663440"/>
+            <a:off x="4069080" y="1783080"/>
+            <a:ext cx="7802575" cy="4663440"/>
           </a:xfrm>
           <a:prstGeom prst="rect">
             <a:avLst/>
@@ -10967,7 +11234,7 @@
                 <a:ea typeface="Times New Roman" pitchFamily="34" charset="-122"/>
                 <a:cs typeface="Times New Roman" pitchFamily="34" charset="-120"/>
               </a:rPr>
-              <a:t>It is when water covers land that is usually dry, as along the Benue and the Logone.</a:t>
+              <a:t>It is the covering by water of land that is usually dry.</a:t>
             </a:r>
             <a:endParaRPr lang="en-US" sz="4000" dirty="0"/>
           </a:p>
@@ -11004,7 +11271,7 @@
                 <a:ea typeface="Times New Roman" pitchFamily="34" charset="-122"/>
                 <a:cs typeface="Times New Roman" pitchFamily="34" charset="-120"/>
               </a:rPr>
-              <a:t>It is a long period without enough rain, common in the Sahel.</a:t>
+              <a:t>It is a long period with much less rain than normal.</a:t>
             </a:r>
             <a:endParaRPr lang="en-US" sz="4000" dirty="0"/>
           </a:p>
@@ -12249,7 +12516,7 @@
                 <a:ea typeface="Times New Roman" pitchFamily="34" charset="-122"/>
                 <a:cs typeface="Times New Roman" pitchFamily="34" charset="-120"/>
               </a:rPr>
-              <a:t>It is the spread of desert conditions into dry lands, as in the Far North.</a:t>
+              <a:t>It is the lasting spread of desert conditions into dry lands.</a:t>
             </a:r>
             <a:endParaRPr lang="en-US" sz="4000" dirty="0"/>
           </a:p>
@@ -12367,9 +12634,129 @@
           </a:p>
         </p:txBody>
       </p:sp>
+      <p:sp>
+        <p:nvSpPr>
+          <p:cNvPr id="3" name="Text 1"/>
+          <p:cNvSpPr/>
+          <p:nvPr/>
+        </p:nvSpPr>
+        <p:spPr>
+          <a:xfrm>
+            <a:off x="365760" y="1005840"/>
+            <a:ext cx="11460175" cy="731520"/>
+          </a:xfrm>
+          <a:prstGeom prst="rect">
+            <a:avLst/>
+          </a:prstGeom>
+          <a:noFill/>
+          <a:ln/>
+        </p:spPr>
+        <p:txBody>
+          <a:bodyPr wrap="square" lIns="0" tIns="0" rIns="0" bIns="0" rtlCol="0" anchor="ctr">
+            <a:normAutofit/>
+          </a:bodyPr>
+          <a:lstStyle/>
+          <a:p>
+            <a:pPr algn="ctr" indent="0" marL="0">
+              <a:buNone/>
+            </a:pPr>
+            <a:r>
+              <a:rPr lang="en-US" sz="3600" b="1" dirty="0">
+                <a:solidFill>
+                  <a:srgbClr val="990011"/>
+                </a:solidFill>
+                <a:latin typeface="Times New Roman" pitchFamily="34" charset="0"/>
+                <a:ea typeface="Times New Roman" pitchFamily="34" charset="-122"/>
+                <a:cs typeface="Times New Roman" pitchFamily="34" charset="-120"/>
+              </a:rPr>
+              <a:t>1. Floods</a:t>
+            </a:r>
+            <a:endParaRPr lang="en-US" sz="3600" dirty="0"/>
+          </a:p>
+        </p:txBody>
+      </p:sp>
+      <p:sp>
+        <p:nvSpPr>
+          <p:cNvPr id="4" name="Text 2"/>
+          <p:cNvSpPr/>
+          <p:nvPr/>
+        </p:nvSpPr>
+        <p:spPr>
+          <a:xfrm>
+            <a:off x="365760" y="1783080"/>
+            <a:ext cx="4846320" cy="4617720"/>
+          </a:xfrm>
+          <a:prstGeom prst="rect">
+            <a:avLst/>
+          </a:prstGeom>
+          <a:noFill/>
+          <a:ln/>
+        </p:spPr>
+        <p:txBody>
+          <a:bodyPr wrap="square" lIns="0" tIns="0" rIns="0" bIns="0" rtlCol="0" anchor="t"/>
+          <a:lstStyle/>
+          <a:p>
+            <a:pPr algn="l" indent="0" marL="0">
+              <a:spcAft>
+                <a:spcPts val="800"/>
+              </a:spcAft>
+              <a:buNone/>
+            </a:pPr>
+            <a:r>
+              <a:rPr lang="en-US" sz="3600" i="1" dirty="0">
+                <a:solidFill>
+                  <a:srgbClr val="111111"/>
+                </a:solidFill>
+                <a:latin typeface="Times New Roman" pitchFamily="34" charset="0"/>
+                <a:ea typeface="Times New Roman" pitchFamily="34" charset="-122"/>
+                <a:cs typeface="Times New Roman" pitchFamily="34" charset="-120"/>
+              </a:rPr>
+              <a:t>Floods are explained as follows:</a:t>
+            </a:r>
+            <a:endParaRPr lang="en-US" sz="3600" dirty="0"/>
+          </a:p>
+          <a:p>
+            <a:pPr algn="l" indent="0" marL="0">
+              <a:spcAft>
+                <a:spcPts val="800"/>
+              </a:spcAft>
+              <a:buNone/>
+            </a:pPr>
+            <a:r>
+              <a:rPr lang="en-US" sz="3600" b="1" dirty="0">
+                <a:solidFill>
+                  <a:srgbClr val="111111"/>
+                </a:solidFill>
+                <a:latin typeface="Times New Roman" pitchFamily="34" charset="0"/>
+                <a:ea typeface="Times New Roman" pitchFamily="34" charset="-122"/>
+                <a:cs typeface="Times New Roman" pitchFamily="34" charset="-120"/>
+              </a:rPr>
+              <a:t>Areas of occurrence: </a:t>
+            </a:r>
+            <a:pPr algn="l" indent="0" marL="0">
+              <a:spcAft>
+                <a:spcPts val="800"/>
+              </a:spcAft>
+              <a:buNone/>
+            </a:pPr>
+            <a:r>
+              <a:rPr lang="en-US" sz="3600" dirty="0">
+                <a:solidFill>
+                  <a:srgbClr val="111111"/>
+                </a:solidFill>
+                <a:latin typeface="Times New Roman" pitchFamily="34" charset="0"/>
+                <a:ea typeface="Times New Roman" pitchFamily="34" charset="-122"/>
+                <a:cs typeface="Times New Roman" pitchFamily="34" charset="-120"/>
+              </a:rPr>
+              <a:t>Floods occur along the Benue, the Logone and the Chari, and in towns such as Douala and Yaoundé.</a:t>
+            </a:r>
+            <a:endParaRPr lang="en-US" sz="3600" dirty="0"/>
+          </a:p>
+        </p:txBody>
+      </p:sp>
       <p:pic>
         <p:nvPicPr>
-          <p:cNvPr id="3" name="Image 0" descr="/home/claude/f4/img/minesec_sheet.png">    </p:cNvPr>
+          <p:cNvPr id="5" name="Image 0" descr="/home/claude/f4/img/v2/f4_floodvillage.jpg">    </p:cNvPr>
           <p:cNvPicPr>
             <a:picLocks noChangeAspect="1"/>
           </p:cNvPicPr>
@@ -12383,8 +12770,8 @@
         </p:blipFill>
         <p:spPr>
           <a:xfrm>
-            <a:off x="0" y="658368"/>
-            <a:ext cx="3840480" cy="5833872"/>
+            <a:off x="5349240" y="2071212"/>
+            <a:ext cx="6659575" cy="3693983"/>
           </a:xfrm>
           <a:prstGeom prst="rect">
             <a:avLst/>
@@ -12393,14 +12780,14 @@
       </p:pic>
       <p:sp>
         <p:nvSpPr>
-          <p:cNvPr id="4" name="Text 1"/>
+          <p:cNvPr id="6" name="Text 3"/>
           <p:cNvSpPr/>
           <p:nvPr/>
         </p:nvSpPr>
         <p:spPr>
           <a:xfrm>
-            <a:off x="4069080" y="1005840"/>
-            <a:ext cx="7802575" cy="731520"/>
+            <a:off x="5349240" y="6089904"/>
+            <a:ext cx="6659575" cy="347472"/>
           </a:xfrm>
           <a:prstGeom prst="rect">
             <a:avLst/>
@@ -12409,142 +12796,24 @@
           <a:ln/>
         </p:spPr>
         <p:txBody>
-          <a:bodyPr wrap="square" lIns="0" tIns="0" rIns="0" bIns="0" rtlCol="0" anchor="ctr">
-            <a:normAutofit/>
-          </a:bodyPr>
+          <a:bodyPr wrap="square" lIns="0" tIns="0" rIns="0" bIns="0" rtlCol="0" anchor="ctr"/>
           <a:lstStyle/>
           <a:p>
             <a:pPr algn="ctr" indent="0" marL="0">
               <a:buNone/>
             </a:pPr>
             <a:r>
-              <a:rPr lang="en-US" sz="3600" b="1" dirty="0">
-                <a:solidFill>
-                  <a:srgbClr val="990011"/>
+              <a:rPr lang="en-US" sz="1600" i="1" dirty="0">
+                <a:solidFill>
+                  <a:srgbClr val="555555"/>
                 </a:solidFill>
                 <a:latin typeface="Times New Roman" pitchFamily="34" charset="0"/>
                 <a:ea typeface="Times New Roman" pitchFamily="34" charset="-122"/>
                 <a:cs typeface="Times New Roman" pitchFamily="34" charset="-120"/>
               </a:rPr>
-              <a:t>1. Causes</a:t>
-            </a:r>
-            <a:endParaRPr lang="en-US" sz="3600" dirty="0"/>
-          </a:p>
-        </p:txBody>
-      </p:sp>
-      <p:sp>
-        <p:nvSpPr>
-          <p:cNvPr id="5" name="Text 2"/>
-          <p:cNvSpPr/>
-          <p:nvPr/>
-        </p:nvSpPr>
-        <p:spPr>
-          <a:xfrm>
-            <a:off x="4069080" y="1783080"/>
-            <a:ext cx="7802575" cy="4663440"/>
-          </a:xfrm>
-          <a:prstGeom prst="rect">
-            <a:avLst/>
-          </a:prstGeom>
-          <a:noFill/>
-          <a:ln/>
-        </p:spPr>
-        <p:txBody>
-          <a:bodyPr wrap="square" lIns="0" tIns="0" rIns="0" bIns="0" rtlCol="0" anchor="t"/>
-          <a:lstStyle/>
-          <a:p>
-            <a:pPr algn="l" indent="0" marL="0">
-              <a:spcAft>
-                <a:spcPts val="800"/>
-              </a:spcAft>
-              <a:buNone/>
-            </a:pPr>
-            <a:r>
-              <a:rPr lang="en-US" sz="4000" i="1" dirty="0">
-                <a:solidFill>
-                  <a:srgbClr val="111111"/>
-                </a:solidFill>
-                <a:latin typeface="Times New Roman" pitchFamily="34" charset="0"/>
-                <a:ea typeface="Times New Roman" pitchFamily="34" charset="-122"/>
-                <a:cs typeface="Times New Roman" pitchFamily="34" charset="-120"/>
-              </a:rPr>
-              <a:t>These hazards have the following causes:</a:t>
-            </a:r>
-            <a:endParaRPr lang="en-US" sz="4000" dirty="0"/>
-          </a:p>
-          <a:p>
-            <a:pPr algn="l" indent="0" marL="0">
-              <a:spcAft>
-                <a:spcPts val="800"/>
-              </a:spcAft>
-              <a:buNone/>
-            </a:pPr>
-            <a:r>
-              <a:rPr lang="en-US" sz="4000" b="1" dirty="0">
-                <a:solidFill>
-                  <a:srgbClr val="111111"/>
-                </a:solidFill>
-                <a:latin typeface="Times New Roman" pitchFamily="34" charset="0"/>
-                <a:ea typeface="Times New Roman" pitchFamily="34" charset="-122"/>
-                <a:cs typeface="Times New Roman" pitchFamily="34" charset="-120"/>
-              </a:rPr>
-              <a:t>Floods: </a:t>
-            </a:r>
-            <a:pPr algn="l" indent="0" marL="0">
-              <a:spcAft>
-                <a:spcPts val="800"/>
-              </a:spcAft>
-              <a:buNone/>
-            </a:pPr>
-            <a:r>
-              <a:rPr lang="en-US" sz="4000" dirty="0">
-                <a:solidFill>
-                  <a:srgbClr val="111111"/>
-                </a:solidFill>
-                <a:latin typeface="Times New Roman" pitchFamily="34" charset="0"/>
-                <a:ea typeface="Times New Roman" pitchFamily="34" charset="-122"/>
-                <a:cs typeface="Times New Roman" pitchFamily="34" charset="-120"/>
-              </a:rPr>
-              <a:t>Floods are caused by heavy rain, blocked drains and water released from dams.</a:t>
-            </a:r>
-            <a:endParaRPr lang="en-US" sz="4000" dirty="0"/>
-          </a:p>
-          <a:p>
-            <a:pPr algn="l" indent="0" marL="0">
-              <a:spcAft>
-                <a:spcPts val="800"/>
-              </a:spcAft>
-              <a:buNone/>
-            </a:pPr>
-            <a:r>
-              <a:rPr lang="en-US" sz="4000" b="1" dirty="0">
-                <a:solidFill>
-                  <a:srgbClr val="111111"/>
-                </a:solidFill>
-                <a:latin typeface="Times New Roman" pitchFamily="34" charset="0"/>
-                <a:ea typeface="Times New Roman" pitchFamily="34" charset="-122"/>
-                <a:cs typeface="Times New Roman" pitchFamily="34" charset="-120"/>
-              </a:rPr>
-              <a:t>Drought: </a:t>
-            </a:r>
-            <a:pPr algn="l" indent="0" marL="0">
-              <a:spcAft>
-                <a:spcPts val="800"/>
-              </a:spcAft>
-              <a:buNone/>
-            </a:pPr>
-            <a:r>
-              <a:rPr lang="en-US" sz="4000" dirty="0">
-                <a:solidFill>
-                  <a:srgbClr val="111111"/>
-                </a:solidFill>
-                <a:latin typeface="Times New Roman" pitchFamily="34" charset="0"/>
-                <a:ea typeface="Times New Roman" pitchFamily="34" charset="-122"/>
-                <a:cs typeface="Times New Roman" pitchFamily="34" charset="-120"/>
-              </a:rPr>
-              <a:t>Drought is caused by low and irregular rainfall.</a:t>
-            </a:r>
-            <a:endParaRPr lang="en-US" sz="4000" dirty="0"/>
+              <a:t>Illustration: a flooded village</a:t>
+            </a:r>
+            <a:endParaRPr lang="en-US" sz="1600" dirty="0"/>
           </a:p>
         </p:txBody>
       </p:sp>
@@ -12660,9 +12929,109 @@
           </a:p>
         </p:txBody>
       </p:sp>
+      <p:sp>
+        <p:nvSpPr>
+          <p:cNvPr id="3" name="Text 1"/>
+          <p:cNvSpPr/>
+          <p:nvPr/>
+        </p:nvSpPr>
+        <p:spPr>
+          <a:xfrm>
+            <a:off x="365760" y="1005840"/>
+            <a:ext cx="11460175" cy="731520"/>
+          </a:xfrm>
+          <a:prstGeom prst="rect">
+            <a:avLst/>
+          </a:prstGeom>
+          <a:noFill/>
+          <a:ln/>
+        </p:spPr>
+        <p:txBody>
+          <a:bodyPr wrap="square" lIns="0" tIns="0" rIns="0" bIns="0" rtlCol="0" anchor="ctr">
+            <a:normAutofit/>
+          </a:bodyPr>
+          <a:lstStyle/>
+          <a:p>
+            <a:pPr algn="ctr" indent="0" marL="0">
+              <a:buNone/>
+            </a:pPr>
+            <a:r>
+              <a:rPr lang="en-US" sz="3600" b="1" dirty="0">
+                <a:solidFill>
+                  <a:srgbClr val="990011"/>
+                </a:solidFill>
+                <a:latin typeface="Times New Roman" pitchFamily="34" charset="0"/>
+                <a:ea typeface="Times New Roman" pitchFamily="34" charset="-122"/>
+                <a:cs typeface="Times New Roman" pitchFamily="34" charset="-120"/>
+              </a:rPr>
+              <a:t>1. Floods</a:t>
+            </a:r>
+            <a:endParaRPr lang="en-US" sz="3600" dirty="0"/>
+          </a:p>
+        </p:txBody>
+      </p:sp>
+      <p:sp>
+        <p:nvSpPr>
+          <p:cNvPr id="4" name="Text 2"/>
+          <p:cNvSpPr/>
+          <p:nvPr/>
+        </p:nvSpPr>
+        <p:spPr>
+          <a:xfrm>
+            <a:off x="365760" y="1783080"/>
+            <a:ext cx="4846320" cy="4617720"/>
+          </a:xfrm>
+          <a:prstGeom prst="rect">
+            <a:avLst/>
+          </a:prstGeom>
+          <a:noFill/>
+          <a:ln/>
+        </p:spPr>
+        <p:txBody>
+          <a:bodyPr wrap="square" lIns="0" tIns="0" rIns="0" bIns="0" rtlCol="0" anchor="t"/>
+          <a:lstStyle/>
+          <a:p>
+            <a:pPr algn="l" indent="0" marL="0">
+              <a:spcAft>
+                <a:spcPts val="800"/>
+              </a:spcAft>
+              <a:buNone/>
+            </a:pPr>
+            <a:r>
+              <a:rPr lang="en-US" sz="3600" b="1" dirty="0">
+                <a:solidFill>
+                  <a:srgbClr val="111111"/>
+                </a:solidFill>
+                <a:latin typeface="Times New Roman" pitchFamily="34" charset="0"/>
+                <a:ea typeface="Times New Roman" pitchFamily="34" charset="-122"/>
+                <a:cs typeface="Times New Roman" pitchFamily="34" charset="-120"/>
+              </a:rPr>
+              <a:t>Causes: </a:t>
+            </a:r>
+            <a:pPr algn="l" indent="0" marL="0">
+              <a:spcAft>
+                <a:spcPts val="800"/>
+              </a:spcAft>
+              <a:buNone/>
+            </a:pPr>
+            <a:r>
+              <a:rPr lang="en-US" sz="3600" dirty="0">
+                <a:solidFill>
+                  <a:srgbClr val="111111"/>
+                </a:solidFill>
+                <a:latin typeface="Times New Roman" pitchFamily="34" charset="0"/>
+                <a:ea typeface="Times New Roman" pitchFamily="34" charset="-122"/>
+                <a:cs typeface="Times New Roman" pitchFamily="34" charset="-120"/>
+              </a:rPr>
+              <a:t>Heavy rain, water released from dams, blocked drains and building on floodplains cause floods.</a:t>
+            </a:r>
+            <a:endParaRPr lang="en-US" sz="3600" dirty="0"/>
+          </a:p>
+        </p:txBody>
+      </p:sp>
       <p:pic>
         <p:nvPicPr>
-          <p:cNvPr id="3" name="Image 0" descr="/home/claude/f4/img/minesec_sheet.png">    </p:cNvPr>
+          <p:cNvPr id="5" name="Image 0" descr="/home/claude/f4/img/v2/flood_causes_big.png">    </p:cNvPr>
           <p:cNvPicPr>
             <a:picLocks noChangeAspect="1"/>
           </p:cNvPicPr>
@@ -12676,8 +13045,8 @@
         </p:blipFill>
         <p:spPr>
           <a:xfrm>
-            <a:off x="0" y="658368"/>
-            <a:ext cx="5120640" cy="5833872"/>
+            <a:off x="5349240" y="2617506"/>
+            <a:ext cx="6659575" cy="2601397"/>
           </a:xfrm>
           <a:prstGeom prst="rect">
             <a:avLst/>
@@ -12686,14 +13055,14 @@
       </p:pic>
       <p:sp>
         <p:nvSpPr>
-          <p:cNvPr id="4" name="Text 1"/>
+          <p:cNvPr id="6" name="Text 3"/>
           <p:cNvSpPr/>
           <p:nvPr/>
         </p:nvSpPr>
         <p:spPr>
           <a:xfrm>
-            <a:off x="5349240" y="1005840"/>
-            <a:ext cx="6522415" cy="731520"/>
+            <a:off x="5349240" y="6089904"/>
+            <a:ext cx="6659575" cy="347472"/>
           </a:xfrm>
           <a:prstGeom prst="rect">
             <a:avLst/>
@@ -12702,85 +13071,24 @@
           <a:ln/>
         </p:spPr>
         <p:txBody>
-          <a:bodyPr wrap="square" lIns="0" tIns="0" rIns="0" bIns="0" rtlCol="0" anchor="ctr">
-            <a:normAutofit/>
-          </a:bodyPr>
+          <a:bodyPr wrap="square" lIns="0" tIns="0" rIns="0" bIns="0" rtlCol="0" anchor="ctr"/>
           <a:lstStyle/>
           <a:p>
             <a:pPr algn="ctr" indent="0" marL="0">
               <a:buNone/>
             </a:pPr>
             <a:r>
-              <a:rPr lang="en-US" sz="3600" b="1" dirty="0">
-                <a:solidFill>
-                  <a:srgbClr val="990011"/>
+              <a:rPr lang="en-US" sz="1600" i="1" dirty="0">
+                <a:solidFill>
+                  <a:srgbClr val="555555"/>
                 </a:solidFill>
                 <a:latin typeface="Times New Roman" pitchFamily="34" charset="0"/>
                 <a:ea typeface="Times New Roman" pitchFamily="34" charset="-122"/>
                 <a:cs typeface="Times New Roman" pitchFamily="34" charset="-120"/>
               </a:rPr>
-              <a:t>1. Causes (continued)</a:t>
-            </a:r>
-            <a:endParaRPr lang="en-US" sz="3600" dirty="0"/>
-          </a:p>
-        </p:txBody>
-      </p:sp>
-      <p:sp>
-        <p:nvSpPr>
-          <p:cNvPr id="5" name="Text 2"/>
-          <p:cNvSpPr/>
-          <p:nvPr/>
-        </p:nvSpPr>
-        <p:spPr>
-          <a:xfrm>
-            <a:off x="5349240" y="1783080"/>
-            <a:ext cx="6522415" cy="4663440"/>
-          </a:xfrm>
-          <a:prstGeom prst="rect">
-            <a:avLst/>
-          </a:prstGeom>
-          <a:noFill/>
-          <a:ln/>
-        </p:spPr>
-        <p:txBody>
-          <a:bodyPr wrap="square" lIns="0" tIns="0" rIns="0" bIns="0" rtlCol="0" anchor="t"/>
-          <a:lstStyle/>
-          <a:p>
-            <a:pPr algn="l" indent="0" marL="0">
-              <a:spcAft>
-                <a:spcPts val="800"/>
-              </a:spcAft>
-              <a:buNone/>
-            </a:pPr>
-            <a:r>
-              <a:rPr lang="en-US" sz="4000" b="1" dirty="0">
-                <a:solidFill>
-                  <a:srgbClr val="111111"/>
-                </a:solidFill>
-                <a:latin typeface="Times New Roman" pitchFamily="34" charset="0"/>
-                <a:ea typeface="Times New Roman" pitchFamily="34" charset="-122"/>
-                <a:cs typeface="Times New Roman" pitchFamily="34" charset="-120"/>
-              </a:rPr>
-              <a:t>Desertification: </a:t>
-            </a:r>
-            <a:pPr algn="l" indent="0" marL="0">
-              <a:spcAft>
-                <a:spcPts val="800"/>
-              </a:spcAft>
-              <a:buNone/>
-            </a:pPr>
-            <a:r>
-              <a:rPr lang="en-US" sz="4000" dirty="0">
-                <a:solidFill>
-                  <a:srgbClr val="111111"/>
-                </a:solidFill>
-                <a:latin typeface="Times New Roman" pitchFamily="34" charset="0"/>
-                <a:ea typeface="Times New Roman" pitchFamily="34" charset="-122"/>
-                <a:cs typeface="Times New Roman" pitchFamily="34" charset="-120"/>
-              </a:rPr>
-              <a:t>Desertification is caused by overgrazing, cutting trees, bush fires and drought.</a:t>
-            </a:r>
-            <a:endParaRPr lang="en-US" sz="4000" dirty="0"/>
+              <a:t>Illustration: causes of floods</a:t>
+            </a:r>
+            <a:endParaRPr lang="en-US" sz="1600" dirty="0"/>
           </a:p>
         </p:txBody>
       </p:sp>
@@ -12955,7 +13263,7 @@
                 <a:ea typeface="Times New Roman" pitchFamily="34" charset="-122"/>
                 <a:cs typeface="Times New Roman" pitchFamily="34" charset="-120"/>
               </a:rPr>
-              <a:t>2. Effects</a:t>
+              <a:t>1. Floods</a:t>
             </a:r>
             <a:endParaRPr lang="en-US" sz="3600" dirty="0"/>
           </a:p>
@@ -12989,7 +13297,7 @@
               <a:buNone/>
             </a:pPr>
             <a:r>
-              <a:rPr lang="en-US" sz="4000" i="1" dirty="0">
+              <a:rPr lang="en-US" sz="4000" b="1" dirty="0">
                 <a:solidFill>
                   <a:srgbClr val="111111"/>
                 </a:solidFill>
@@ -12997,11 +13305,8 @@
                 <a:ea typeface="Times New Roman" pitchFamily="34" charset="-122"/>
                 <a:cs typeface="Times New Roman" pitchFamily="34" charset="-120"/>
               </a:rPr>
-              <a:t>These hazards have the following effects:</a:t>
-            </a:r>
-            <a:endParaRPr lang="en-US" sz="4000" dirty="0"/>
-          </a:p>
-          <a:p>
+              <a:t>Effects: </a:t>
+            </a:r>
             <a:pPr algn="l" indent="0" marL="0">
               <a:spcAft>
                 <a:spcPts val="800"/>
@@ -13009,7 +13314,7 @@
               <a:buNone/>
             </a:pPr>
             <a:r>
-              <a:rPr lang="en-US" sz="4000" b="1" dirty="0">
+              <a:rPr lang="en-US" sz="4000" dirty="0">
                 <a:solidFill>
                   <a:srgbClr val="111111"/>
                 </a:solidFill>
@@ -13017,8 +13322,11 @@
                 <a:ea typeface="Times New Roman" pitchFamily="34" charset="-122"/>
                 <a:cs typeface="Times New Roman" pitchFamily="34" charset="-120"/>
               </a:rPr>
-              <a:t>Floods: </a:t>
-            </a:r>
+              <a:t>Floods destroy houses, crops and roads, drown people and spread cholera and malaria.</a:t>
+            </a:r>
+            <a:endParaRPr lang="en-US" sz="4000" dirty="0"/>
+          </a:p>
+          <a:p>
             <a:pPr algn="l" indent="0" marL="0">
               <a:spcAft>
                 <a:spcPts val="800"/>
@@ -13026,7 +13334,7 @@
               <a:buNone/>
             </a:pPr>
             <a:r>
-              <a:rPr lang="en-US" sz="4000" dirty="0">
+              <a:rPr lang="en-US" sz="4000" b="1" dirty="0">
                 <a:solidFill>
                   <a:srgbClr val="111111"/>
                 </a:solidFill>
@@ -13034,11 +13342,8 @@
                 <a:ea typeface="Times New Roman" pitchFamily="34" charset="-122"/>
                 <a:cs typeface="Times New Roman" pitchFamily="34" charset="-120"/>
               </a:rPr>
-              <a:t>Floods destroy houses and crops and spread diseases.</a:t>
-            </a:r>
-            <a:endParaRPr lang="en-US" sz="4000" dirty="0"/>
-          </a:p>
-          <a:p>
+              <a:t>Adaptation and mitigation: </a:t>
+            </a:r>
             <a:pPr algn="l" indent="0" marL="0">
               <a:spcAft>
                 <a:spcPts val="800"/>
@@ -13046,7 +13351,7 @@
               <a:buNone/>
             </a:pPr>
             <a:r>
-              <a:rPr lang="en-US" sz="4000" b="1" dirty="0">
+              <a:rPr lang="en-US" sz="4000" dirty="0">
                 <a:solidFill>
                   <a:srgbClr val="111111"/>
                 </a:solidFill>
@@ -13054,24 +13359,7 @@
                 <a:ea typeface="Times New Roman" pitchFamily="34" charset="-122"/>
                 <a:cs typeface="Times New Roman" pitchFamily="34" charset="-120"/>
               </a:rPr>
-              <a:t>Drought: </a:t>
-            </a:r>
-            <a:pPr algn="l" indent="0" marL="0">
-              <a:spcAft>
-                <a:spcPts val="800"/>
-              </a:spcAft>
-              <a:buNone/>
-            </a:pPr>
-            <a:r>
-              <a:rPr lang="en-US" sz="4000" dirty="0">
-                <a:solidFill>
-                  <a:srgbClr val="111111"/>
-                </a:solidFill>
-                <a:latin typeface="Times New Roman" pitchFamily="34" charset="0"/>
-                <a:ea typeface="Times New Roman" pitchFamily="34" charset="-122"/>
-                <a:cs typeface="Times New Roman" pitchFamily="34" charset="-120"/>
-              </a:rPr>
-              <a:t>Drought causes hunger and the death of animals.</a:t>
+              <a:t>Dykes, clean drains, early warnings and building on high ground reduce flood damage.</a:t>
             </a:r>
             <a:endParaRPr lang="en-US" sz="4000" dirty="0"/>
           </a:p>
@@ -13189,9 +13477,129 @@
           </a:p>
         </p:txBody>
       </p:sp>
+      <p:sp>
+        <p:nvSpPr>
+          <p:cNvPr id="3" name="Text 1"/>
+          <p:cNvSpPr/>
+          <p:nvPr/>
+        </p:nvSpPr>
+        <p:spPr>
+          <a:xfrm>
+            <a:off x="365760" y="1005840"/>
+            <a:ext cx="11460175" cy="731520"/>
+          </a:xfrm>
+          <a:prstGeom prst="rect">
+            <a:avLst/>
+          </a:prstGeom>
+          <a:noFill/>
+          <a:ln/>
+        </p:spPr>
+        <p:txBody>
+          <a:bodyPr wrap="square" lIns="0" tIns="0" rIns="0" bIns="0" rtlCol="0" anchor="ctr">
+            <a:normAutofit/>
+          </a:bodyPr>
+          <a:lstStyle/>
+          <a:p>
+            <a:pPr algn="ctr" indent="0" marL="0">
+              <a:buNone/>
+            </a:pPr>
+            <a:r>
+              <a:rPr lang="en-US" sz="3600" b="1" dirty="0">
+                <a:solidFill>
+                  <a:srgbClr val="990011"/>
+                </a:solidFill>
+                <a:latin typeface="Times New Roman" pitchFamily="34" charset="0"/>
+                <a:ea typeface="Times New Roman" pitchFamily="34" charset="-122"/>
+                <a:cs typeface="Times New Roman" pitchFamily="34" charset="-120"/>
+              </a:rPr>
+              <a:t>2. Droughts</a:t>
+            </a:r>
+            <a:endParaRPr lang="en-US" sz="3600" dirty="0"/>
+          </a:p>
+        </p:txBody>
+      </p:sp>
+      <p:sp>
+        <p:nvSpPr>
+          <p:cNvPr id="4" name="Text 2"/>
+          <p:cNvSpPr/>
+          <p:nvPr/>
+        </p:nvSpPr>
+        <p:spPr>
+          <a:xfrm>
+            <a:off x="365760" y="1783080"/>
+            <a:ext cx="4846320" cy="4617720"/>
+          </a:xfrm>
+          <a:prstGeom prst="rect">
+            <a:avLst/>
+          </a:prstGeom>
+          <a:noFill/>
+          <a:ln/>
+        </p:spPr>
+        <p:txBody>
+          <a:bodyPr wrap="square" lIns="0" tIns="0" rIns="0" bIns="0" rtlCol="0" anchor="t"/>
+          <a:lstStyle/>
+          <a:p>
+            <a:pPr algn="l" indent="0" marL="0">
+              <a:spcAft>
+                <a:spcPts val="800"/>
+              </a:spcAft>
+              <a:buNone/>
+            </a:pPr>
+            <a:r>
+              <a:rPr lang="en-US" sz="3600" i="1" dirty="0">
+                <a:solidFill>
+                  <a:srgbClr val="111111"/>
+                </a:solidFill>
+                <a:latin typeface="Times New Roman" pitchFamily="34" charset="0"/>
+                <a:ea typeface="Times New Roman" pitchFamily="34" charset="-122"/>
+                <a:cs typeface="Times New Roman" pitchFamily="34" charset="-120"/>
+              </a:rPr>
+              <a:t>Droughts are explained as follows:</a:t>
+            </a:r>
+            <a:endParaRPr lang="en-US" sz="3600" dirty="0"/>
+          </a:p>
+          <a:p>
+            <a:pPr algn="l" indent="0" marL="0">
+              <a:spcAft>
+                <a:spcPts val="800"/>
+              </a:spcAft>
+              <a:buNone/>
+            </a:pPr>
+            <a:r>
+              <a:rPr lang="en-US" sz="3600" b="1" dirty="0">
+                <a:solidFill>
+                  <a:srgbClr val="111111"/>
+                </a:solidFill>
+                <a:latin typeface="Times New Roman" pitchFamily="34" charset="0"/>
+                <a:ea typeface="Times New Roman" pitchFamily="34" charset="-122"/>
+                <a:cs typeface="Times New Roman" pitchFamily="34" charset="-120"/>
+              </a:rPr>
+              <a:t>Areas of occurrence: </a:t>
+            </a:r>
+            <a:pPr algn="l" indent="0" marL="0">
+              <a:spcAft>
+                <a:spcPts val="800"/>
+              </a:spcAft>
+              <a:buNone/>
+            </a:pPr>
+            <a:r>
+              <a:rPr lang="en-US" sz="3600" dirty="0">
+                <a:solidFill>
+                  <a:srgbClr val="111111"/>
+                </a:solidFill>
+                <a:latin typeface="Times New Roman" pitchFamily="34" charset="0"/>
+                <a:ea typeface="Times New Roman" pitchFamily="34" charset="-122"/>
+                <a:cs typeface="Times New Roman" pitchFamily="34" charset="-120"/>
+              </a:rPr>
+              <a:t>Droughts occur in the Sahel, including the North and the Far North of Cameroon.</a:t>
+            </a:r>
+            <a:endParaRPr lang="en-US" sz="3600" dirty="0"/>
+          </a:p>
+        </p:txBody>
+      </p:sp>
       <p:pic>
         <p:nvPicPr>
-          <p:cNvPr id="3" name="Image 0" descr="/home/claude/f4/img/minesec_sheet.png">    </p:cNvPr>
+          <p:cNvPr id="5" name="Image 0" descr="/home/claude/f4/img/v2/f2t_drought.jpg">    </p:cNvPr>
           <p:cNvPicPr>
             <a:picLocks noChangeAspect="1"/>
           </p:cNvPicPr>
@@ -13205,8 +13613,8 @@
         </p:blipFill>
         <p:spPr>
           <a:xfrm>
-            <a:off x="0" y="658368"/>
-            <a:ext cx="5120640" cy="5833872"/>
+            <a:off x="5349240" y="2071212"/>
+            <a:ext cx="6659575" cy="3693983"/>
           </a:xfrm>
           <a:prstGeom prst="rect">
             <a:avLst/>
@@ -13215,14 +13623,14 @@
       </p:pic>
       <p:sp>
         <p:nvSpPr>
-          <p:cNvPr id="4" name="Text 1"/>
+          <p:cNvPr id="6" name="Text 3"/>
           <p:cNvSpPr/>
           <p:nvPr/>
         </p:nvSpPr>
         <p:spPr>
           <a:xfrm>
-            <a:off x="5349240" y="1005840"/>
-            <a:ext cx="6522415" cy="731520"/>
+            <a:off x="5349240" y="6089904"/>
+            <a:ext cx="6659575" cy="347472"/>
           </a:xfrm>
           <a:prstGeom prst="rect">
             <a:avLst/>
@@ -13231,85 +13639,24 @@
           <a:ln/>
         </p:spPr>
         <p:txBody>
-          <a:bodyPr wrap="square" lIns="0" tIns="0" rIns="0" bIns="0" rtlCol="0" anchor="ctr">
-            <a:normAutofit/>
-          </a:bodyPr>
+          <a:bodyPr wrap="square" lIns="0" tIns="0" rIns="0" bIns="0" rtlCol="0" anchor="ctr"/>
           <a:lstStyle/>
           <a:p>
             <a:pPr algn="ctr" indent="0" marL="0">
               <a:buNone/>
             </a:pPr>
             <a:r>
-              <a:rPr lang="en-US" sz="3600" b="1" dirty="0">
-                <a:solidFill>
-                  <a:srgbClr val="990011"/>
+              <a:rPr lang="en-US" sz="1600" i="1" dirty="0">
+                <a:solidFill>
+                  <a:srgbClr val="555555"/>
                 </a:solidFill>
                 <a:latin typeface="Times New Roman" pitchFamily="34" charset="0"/>
                 <a:ea typeface="Times New Roman" pitchFamily="34" charset="-122"/>
                 <a:cs typeface="Times New Roman" pitchFamily="34" charset="-120"/>
               </a:rPr>
-              <a:t>2. Effects (continued)</a:t>
-            </a:r>
-            <a:endParaRPr lang="en-US" sz="3600" dirty="0"/>
-          </a:p>
-        </p:txBody>
-      </p:sp>
-      <p:sp>
-        <p:nvSpPr>
-          <p:cNvPr id="5" name="Text 2"/>
-          <p:cNvSpPr/>
-          <p:nvPr/>
-        </p:nvSpPr>
-        <p:spPr>
-          <a:xfrm>
-            <a:off x="5349240" y="1783080"/>
-            <a:ext cx="6522415" cy="4663440"/>
-          </a:xfrm>
-          <a:prstGeom prst="rect">
-            <a:avLst/>
-          </a:prstGeom>
-          <a:noFill/>
-          <a:ln/>
-        </p:spPr>
-        <p:txBody>
-          <a:bodyPr wrap="square" lIns="0" tIns="0" rIns="0" bIns="0" rtlCol="0" anchor="t"/>
-          <a:lstStyle/>
-          <a:p>
-            <a:pPr algn="l" indent="0" marL="0">
-              <a:spcAft>
-                <a:spcPts val="800"/>
-              </a:spcAft>
-              <a:buNone/>
-            </a:pPr>
-            <a:r>
-              <a:rPr lang="en-US" sz="4000" b="1" dirty="0">
-                <a:solidFill>
-                  <a:srgbClr val="111111"/>
-                </a:solidFill>
-                <a:latin typeface="Times New Roman" pitchFamily="34" charset="0"/>
-                <a:ea typeface="Times New Roman" pitchFamily="34" charset="-122"/>
-                <a:cs typeface="Times New Roman" pitchFamily="34" charset="-120"/>
-              </a:rPr>
-              <a:t>Desertification: </a:t>
-            </a:r>
-            <a:pPr algn="l" indent="0" marL="0">
-              <a:spcAft>
-                <a:spcPts val="800"/>
-              </a:spcAft>
-              <a:buNone/>
-            </a:pPr>
-            <a:r>
-              <a:rPr lang="en-US" sz="4000" dirty="0">
-                <a:solidFill>
-                  <a:srgbClr val="111111"/>
-                </a:solidFill>
-                <a:latin typeface="Times New Roman" pitchFamily="34" charset="0"/>
-                <a:ea typeface="Times New Roman" pitchFamily="34" charset="-122"/>
-                <a:cs typeface="Times New Roman" pitchFamily="34" charset="-120"/>
-              </a:rPr>
-              <a:t>Desertification makes the land poor and forces people to migrate.</a:t>
-            </a:r>
-            <a:endParaRPr lang="en-US" sz="4000" dirty="0"/>
+              <a:t>Illustration: dry land</a:t>
+            </a:r>
+            <a:endParaRPr lang="en-US" sz="1600" dirty="0"/>
           </a:p>
         </p:txBody>
       </p:sp>
@@ -13484,7 +13831,7 @@
                 <a:ea typeface="Times New Roman" pitchFamily="34" charset="-122"/>
                 <a:cs typeface="Times New Roman" pitchFamily="34" charset="-120"/>
               </a:rPr>
-              <a:t>3. Adaptation and Mitigation</a:t>
+              <a:t>2. Droughts</a:t>
             </a:r>
             <a:endParaRPr lang="en-US" sz="3600" dirty="0"/>
           </a:p>
@@ -13518,7 +13865,7 @@
               <a:buNone/>
             </a:pPr>
             <a:r>
-              <a:rPr lang="en-US" sz="4000" i="1" dirty="0">
+              <a:rPr lang="en-US" sz="4000" b="1" dirty="0">
                 <a:solidFill>
                   <a:srgbClr val="111111"/>
                 </a:solidFill>
@@ -13526,11 +13873,8 @@
                 <a:ea typeface="Times New Roman" pitchFamily="34" charset="-122"/>
                 <a:cs typeface="Times New Roman" pitchFamily="34" charset="-120"/>
               </a:rPr>
-              <a:t>These hazards are managed with the following measures:</a:t>
-            </a:r>
-            <a:endParaRPr lang="en-US" sz="4000" dirty="0"/>
-          </a:p>
-          <a:p>
+              <a:t>Causes: </a:t>
+            </a:r>
             <a:pPr algn="l" indent="0" marL="0">
               <a:spcAft>
                 <a:spcPts val="800"/>
@@ -13538,7 +13882,7 @@
               <a:buNone/>
             </a:pPr>
             <a:r>
-              <a:rPr lang="en-US" sz="4000" b="1" dirty="0">
+              <a:rPr lang="en-US" sz="4000" dirty="0">
                 <a:solidFill>
                   <a:srgbClr val="111111"/>
                 </a:solidFill>
@@ -13546,8 +13890,11 @@
                 <a:ea typeface="Times New Roman" pitchFamily="34" charset="-122"/>
                 <a:cs typeface="Times New Roman" pitchFamily="34" charset="-120"/>
               </a:rPr>
-              <a:t>Floods: </a:t>
-            </a:r>
+              <a:t>Low and irregular rainfall, very high temperatures and a long dry season cause droughts.</a:t>
+            </a:r>
+            <a:endParaRPr lang="en-US" sz="4000" dirty="0"/>
+          </a:p>
+          <a:p>
             <a:pPr algn="l" indent="0" marL="0">
               <a:spcAft>
                 <a:spcPts val="800"/>
@@ -13555,7 +13902,7 @@
               <a:buNone/>
             </a:pPr>
             <a:r>
-              <a:rPr lang="en-US" sz="4000" dirty="0">
+              <a:rPr lang="en-US" sz="4000" b="1" dirty="0">
                 <a:solidFill>
                   <a:srgbClr val="111111"/>
                 </a:solidFill>
@@ -13563,11 +13910,8 @@
                 <a:ea typeface="Times New Roman" pitchFamily="34" charset="-122"/>
                 <a:cs typeface="Times New Roman" pitchFamily="34" charset="-120"/>
               </a:rPr>
-              <a:t>Dykes, good drains and warnings reduce flood damage.</a:t>
-            </a:r>
-            <a:endParaRPr lang="en-US" sz="4000" dirty="0"/>
-          </a:p>
-          <a:p>
+              <a:t>Effects: </a:t>
+            </a:r>
             <a:pPr algn="l" indent="0" marL="0">
               <a:spcAft>
                 <a:spcPts val="800"/>
@@ -13575,7 +13919,7 @@
               <a:buNone/>
             </a:pPr>
             <a:r>
-              <a:rPr lang="en-US" sz="4000" b="1" dirty="0">
+              <a:rPr lang="en-US" sz="4000" dirty="0">
                 <a:solidFill>
                   <a:srgbClr val="111111"/>
                 </a:solidFill>
@@ -13583,24 +13927,7 @@
                 <a:ea typeface="Times New Roman" pitchFamily="34" charset="-122"/>
                 <a:cs typeface="Times New Roman" pitchFamily="34" charset="-120"/>
               </a:rPr>
-              <a:t>Drought: </a:t>
-            </a:r>
-            <a:pPr algn="l" indent="0" marL="0">
-              <a:spcAft>
-                <a:spcPts val="800"/>
-              </a:spcAft>
-              <a:buNone/>
-            </a:pPr>
-            <a:r>
-              <a:rPr lang="en-US" sz="4000" dirty="0">
-                <a:solidFill>
-                  <a:srgbClr val="111111"/>
-                </a:solidFill>
-                <a:latin typeface="Times New Roman" pitchFamily="34" charset="0"/>
-                <a:ea typeface="Times New Roman" pitchFamily="34" charset="-122"/>
-                <a:cs typeface="Times New Roman" pitchFamily="34" charset="-120"/>
-              </a:rPr>
-              <a:t>Irrigation and drought-resistant seeds reduce the effects of drought.</a:t>
+              <a:t>Crops fail, animals die, wells dry up, and people suffer hunger and migrate.</a:t>
             </a:r>
             <a:endParaRPr lang="en-US" sz="4000" dirty="0"/>
           </a:p>
@@ -13777,7 +14104,7 @@
                 <a:ea typeface="Times New Roman" pitchFamily="34" charset="-122"/>
                 <a:cs typeface="Times New Roman" pitchFamily="34" charset="-120"/>
               </a:rPr>
-              <a:t>3. Adaptation and Mitigation (continued)</a:t>
+              <a:t>2. Droughts (continued)</a:t>
             </a:r>
             <a:endParaRPr lang="en-US" sz="3600" dirty="0"/>
           </a:p>
@@ -13819,7 +14146,7 @@
                 <a:ea typeface="Times New Roman" pitchFamily="34" charset="-122"/>
                 <a:cs typeface="Times New Roman" pitchFamily="34" charset="-120"/>
               </a:rPr>
-              <a:t>Desertification: </a:t>
+              <a:t>Adaptation and mitigation: </a:t>
             </a:r>
             <a:pPr algn="l" indent="0" marL="0">
               <a:spcAft>
@@ -13836,7 +14163,7 @@
                 <a:ea typeface="Times New Roman" pitchFamily="34" charset="-122"/>
                 <a:cs typeface="Times New Roman" pitchFamily="34" charset="-120"/>
               </a:rPr>
-              <a:t>Tree planting, such as the Sahel Vert operation, stops the spread of the desert.</a:t>
+              <a:t>Irrigation, water storage, drought-resistant crops and food reserves reduce the effects.</a:t>
             </a:r>
             <a:endParaRPr lang="en-US" sz="4000" dirty="0"/>
           </a:p>
@@ -13948,15 +14275,135 @@
                 <a:ea typeface="Calibri" pitchFamily="34" charset="-122"/>
                 <a:cs typeface="Calibri" pitchFamily="34" charset="-120"/>
               </a:rPr>
-              <a:t>FORMATIVE EVALUATION</a:t>
+              <a:t>BOARD SUMMARY</a:t>
             </a:r>
             <a:endParaRPr lang="en-US" sz="1400" dirty="0"/>
+          </a:p>
+        </p:txBody>
+      </p:sp>
+      <p:sp>
+        <p:nvSpPr>
+          <p:cNvPr id="3" name="Text 1"/>
+          <p:cNvSpPr/>
+          <p:nvPr/>
+        </p:nvSpPr>
+        <p:spPr>
+          <a:xfrm>
+            <a:off x="365760" y="1005840"/>
+            <a:ext cx="11460175" cy="731520"/>
+          </a:xfrm>
+          <a:prstGeom prst="rect">
+            <a:avLst/>
+          </a:prstGeom>
+          <a:noFill/>
+          <a:ln/>
+        </p:spPr>
+        <p:txBody>
+          <a:bodyPr wrap="square" lIns="0" tIns="0" rIns="0" bIns="0" rtlCol="0" anchor="ctr">
+            <a:normAutofit/>
+          </a:bodyPr>
+          <a:lstStyle/>
+          <a:p>
+            <a:pPr algn="ctr" indent="0" marL="0">
+              <a:buNone/>
+            </a:pPr>
+            <a:r>
+              <a:rPr lang="en-US" sz="3600" b="1" dirty="0">
+                <a:solidFill>
+                  <a:srgbClr val="990011"/>
+                </a:solidFill>
+                <a:latin typeface="Times New Roman" pitchFamily="34" charset="0"/>
+                <a:ea typeface="Times New Roman" pitchFamily="34" charset="-122"/>
+                <a:cs typeface="Times New Roman" pitchFamily="34" charset="-120"/>
+              </a:rPr>
+              <a:t>3. Desertification</a:t>
+            </a:r>
+            <a:endParaRPr lang="en-US" sz="3600" dirty="0"/>
+          </a:p>
+        </p:txBody>
+      </p:sp>
+      <p:sp>
+        <p:nvSpPr>
+          <p:cNvPr id="4" name="Text 2"/>
+          <p:cNvSpPr/>
+          <p:nvPr/>
+        </p:nvSpPr>
+        <p:spPr>
+          <a:xfrm>
+            <a:off x="365760" y="1783080"/>
+            <a:ext cx="4846320" cy="4617720"/>
+          </a:xfrm>
+          <a:prstGeom prst="rect">
+            <a:avLst/>
+          </a:prstGeom>
+          <a:noFill/>
+          <a:ln/>
+        </p:spPr>
+        <p:txBody>
+          <a:bodyPr wrap="square" lIns="0" tIns="0" rIns="0" bIns="0" rtlCol="0" anchor="t"/>
+          <a:lstStyle/>
+          <a:p>
+            <a:pPr algn="l" indent="0" marL="0">
+              <a:spcAft>
+                <a:spcPts val="800"/>
+              </a:spcAft>
+              <a:buNone/>
+            </a:pPr>
+            <a:r>
+              <a:rPr lang="en-US" sz="3600" i="1" dirty="0">
+                <a:solidFill>
+                  <a:srgbClr val="111111"/>
+                </a:solidFill>
+                <a:latin typeface="Times New Roman" pitchFamily="34" charset="0"/>
+                <a:ea typeface="Times New Roman" pitchFamily="34" charset="-122"/>
+                <a:cs typeface="Times New Roman" pitchFamily="34" charset="-120"/>
+              </a:rPr>
+              <a:t>Desertification is explained as follows:</a:t>
+            </a:r>
+            <a:endParaRPr lang="en-US" sz="3600" dirty="0"/>
+          </a:p>
+          <a:p>
+            <a:pPr algn="l" indent="0" marL="0">
+              <a:spcAft>
+                <a:spcPts val="800"/>
+              </a:spcAft>
+              <a:buNone/>
+            </a:pPr>
+            <a:r>
+              <a:rPr lang="en-US" sz="3600" b="1" dirty="0">
+                <a:solidFill>
+                  <a:srgbClr val="111111"/>
+                </a:solidFill>
+                <a:latin typeface="Times New Roman" pitchFamily="34" charset="0"/>
+                <a:ea typeface="Times New Roman" pitchFamily="34" charset="-122"/>
+                <a:cs typeface="Times New Roman" pitchFamily="34" charset="-120"/>
+              </a:rPr>
+              <a:t>Areas of occurrence: </a:t>
+            </a:r>
+            <a:pPr algn="l" indent="0" marL="0">
+              <a:spcAft>
+                <a:spcPts val="800"/>
+              </a:spcAft>
+              <a:buNone/>
+            </a:pPr>
+            <a:r>
+              <a:rPr lang="en-US" sz="3600" dirty="0">
+                <a:solidFill>
+                  <a:srgbClr val="111111"/>
+                </a:solidFill>
+                <a:latin typeface="Times New Roman" pitchFamily="34" charset="0"/>
+                <a:ea typeface="Times New Roman" pitchFamily="34" charset="-122"/>
+                <a:cs typeface="Times New Roman" pitchFamily="34" charset="-120"/>
+              </a:rPr>
+              <a:t>Desertification affects the Sahel, including the Far North of Cameroon around Lake Chad.</a:t>
+            </a:r>
+            <a:endParaRPr lang="en-US" sz="3600" dirty="0"/>
           </a:p>
         </p:txBody>
       </p:sp>
       <p:pic>
         <p:nvPicPr>
-          <p:cNvPr id="3" name="Image 0" descr="/home/claude/f4/img/minesec_sheet.png">    </p:cNvPr>
+          <p:cNvPr id="5" name="Image 0" descr="/home/claude/f4/img/v2/drought_big.png">    </p:cNvPr>
           <p:cNvPicPr>
             <a:picLocks noChangeAspect="1"/>
           </p:cNvPicPr>
@@ -13970,8 +14417,8 @@
         </p:blipFill>
         <p:spPr>
           <a:xfrm>
-            <a:off x="0" y="658368"/>
-            <a:ext cx="5120640" cy="5833872"/>
+            <a:off x="5349240" y="2617506"/>
+            <a:ext cx="6659575" cy="2601397"/>
           </a:xfrm>
           <a:prstGeom prst="rect">
             <a:avLst/>
@@ -13980,14 +14427,14 @@
       </p:pic>
       <p:sp>
         <p:nvSpPr>
-          <p:cNvPr id="4" name="Text 1"/>
+          <p:cNvPr id="6" name="Text 3"/>
           <p:cNvSpPr/>
           <p:nvPr/>
         </p:nvSpPr>
         <p:spPr>
           <a:xfrm>
-            <a:off x="5349240" y="1005840"/>
-            <a:ext cx="6522415" cy="731520"/>
+            <a:off x="5349240" y="6089904"/>
+            <a:ext cx="6659575" cy="347472"/>
           </a:xfrm>
           <a:prstGeom prst="rect">
             <a:avLst/>
@@ -13996,68 +14443,24 @@
           <a:ln/>
         </p:spPr>
         <p:txBody>
-          <a:bodyPr wrap="square" lIns="0" tIns="0" rIns="0" bIns="0" rtlCol="0" anchor="ctr">
-            <a:normAutofit/>
-          </a:bodyPr>
+          <a:bodyPr wrap="square" lIns="0" tIns="0" rIns="0" bIns="0" rtlCol="0" anchor="ctr"/>
           <a:lstStyle/>
           <a:p>
             <a:pPr algn="ctr" indent="0" marL="0">
               <a:buNone/>
             </a:pPr>
             <a:r>
-              <a:rPr lang="en-US" sz="3600" b="1" dirty="0">
-                <a:solidFill>
-                  <a:srgbClr val="990011"/>
+              <a:rPr lang="en-US" sz="1600" i="1" dirty="0">
+                <a:solidFill>
+                  <a:srgbClr val="555555"/>
                 </a:solidFill>
                 <a:latin typeface="Times New Roman" pitchFamily="34" charset="0"/>
                 <a:ea typeface="Times New Roman" pitchFamily="34" charset="-122"/>
                 <a:cs typeface="Times New Roman" pitchFamily="34" charset="-120"/>
               </a:rPr>
-              <a:t>Evaluation 1</a:t>
-            </a:r>
-            <a:endParaRPr lang="en-US" sz="3600" dirty="0"/>
-          </a:p>
-        </p:txBody>
-      </p:sp>
-      <p:sp>
-        <p:nvSpPr>
-          <p:cNvPr id="5" name="Text 2"/>
-          <p:cNvSpPr/>
-          <p:nvPr/>
-        </p:nvSpPr>
-        <p:spPr>
-          <a:xfrm>
-            <a:off x="5349240" y="1783080"/>
-            <a:ext cx="6522415" cy="4663440"/>
-          </a:xfrm>
-          <a:prstGeom prst="rect">
-            <a:avLst/>
-          </a:prstGeom>
-          <a:noFill/>
-          <a:ln/>
-        </p:spPr>
-        <p:txBody>
-          <a:bodyPr wrap="square" lIns="0" tIns="0" rIns="0" bIns="0" rtlCol="0" anchor="t"/>
-          <a:lstStyle/>
-          <a:p>
-            <a:pPr algn="l" indent="0" marL="0">
-              <a:spcAft>
-                <a:spcPts val="800"/>
-              </a:spcAft>
-              <a:buNone/>
-            </a:pPr>
-            <a:r>
-              <a:rPr lang="en-US" sz="4000" dirty="0">
-                <a:solidFill>
-                  <a:srgbClr val="111111"/>
-                </a:solidFill>
-                <a:latin typeface="Times New Roman" pitchFamily="34" charset="0"/>
-                <a:ea typeface="Times New Roman" pitchFamily="34" charset="-122"/>
-                <a:cs typeface="Times New Roman" pitchFamily="34" charset="-120"/>
-              </a:rPr>
-              <a:t>What is desertification?</a:t>
-            </a:r>
-            <a:endParaRPr lang="en-US" sz="4000" dirty="0"/>
+              <a:t>Illustration: crops dried by drought</a:t>
+            </a:r>
+            <a:endParaRPr lang="en-US" sz="1600" dirty="0"/>
           </a:p>
         </p:txBody>
       </p:sp>
@@ -14167,7 +14570,7 @@
                 <a:ea typeface="Calibri" pitchFamily="34" charset="-122"/>
                 <a:cs typeface="Calibri" pitchFamily="34" charset="-120"/>
               </a:rPr>
-              <a:t>FORMATIVE EVALUATION</a:t>
+              <a:t>BOARD SUMMARY</a:t>
             </a:r>
             <a:endParaRPr lang="en-US" sz="1400" dirty="0"/>
           </a:p>
@@ -14190,7 +14593,7 @@
         <p:spPr>
           <a:xfrm>
             <a:off x="0" y="658368"/>
-            <a:ext cx="5120640" cy="5833872"/>
+            <a:ext cx="3840480" cy="5833872"/>
           </a:xfrm>
           <a:prstGeom prst="rect">
             <a:avLst/>
@@ -14205,8 +14608,8 @@
         </p:nvSpPr>
         <p:spPr>
           <a:xfrm>
-            <a:off x="5349240" y="1005840"/>
-            <a:ext cx="6522415" cy="731520"/>
+            <a:off x="4069080" y="1005840"/>
+            <a:ext cx="7802575" cy="731520"/>
           </a:xfrm>
           <a:prstGeom prst="rect">
             <a:avLst/>
@@ -14232,7 +14635,7 @@
                 <a:ea typeface="Times New Roman" pitchFamily="34" charset="-122"/>
                 <a:cs typeface="Times New Roman" pitchFamily="34" charset="-120"/>
               </a:rPr>
-              <a:t>Expected Answer</a:t>
+              <a:t>3. Desertification</a:t>
             </a:r>
             <a:endParaRPr lang="en-US" sz="3600" dirty="0"/>
           </a:p>
@@ -14246,8 +14649,8 @@
         </p:nvSpPr>
         <p:spPr>
           <a:xfrm>
-            <a:off x="5349240" y="1783080"/>
-            <a:ext cx="6522415" cy="4663440"/>
+            <a:off x="4069080" y="1783080"/>
+            <a:ext cx="7802575" cy="4663440"/>
           </a:xfrm>
           <a:prstGeom prst="rect">
             <a:avLst/>
@@ -14266,7 +14669,7 @@
               <a:buNone/>
             </a:pPr>
             <a:r>
-              <a:rPr lang="en-US" sz="4000" dirty="0">
+              <a:rPr lang="en-US" sz="4000" b="1" dirty="0">
                 <a:solidFill>
                   <a:srgbClr val="111111"/>
                 </a:solidFill>
@@ -14274,7 +14677,61 @@
                 <a:ea typeface="Times New Roman" pitchFamily="34" charset="-122"/>
                 <a:cs typeface="Times New Roman" pitchFamily="34" charset="-120"/>
               </a:rPr>
-              <a:t>The spread of the desert.</a:t>
+              <a:t>Causes: </a:t>
+            </a:r>
+            <a:pPr algn="l" indent="0" marL="0">
+              <a:spcAft>
+                <a:spcPts val="800"/>
+              </a:spcAft>
+              <a:buNone/>
+            </a:pPr>
+            <a:r>
+              <a:rPr lang="en-US" sz="4000" dirty="0">
+                <a:solidFill>
+                  <a:srgbClr val="111111"/>
+                </a:solidFill>
+                <a:latin typeface="Times New Roman" pitchFamily="34" charset="0"/>
+                <a:ea typeface="Times New Roman" pitchFamily="34" charset="-122"/>
+                <a:cs typeface="Times New Roman" pitchFamily="34" charset="-120"/>
+              </a:rPr>
+              <a:t>Overgrazing, cutting trees for firewood, bush fires, poor farming and repeated droughts cause desertification.</a:t>
+            </a:r>
+            <a:endParaRPr lang="en-US" sz="4000" dirty="0"/>
+          </a:p>
+          <a:p>
+            <a:pPr algn="l" indent="0" marL="0">
+              <a:spcAft>
+                <a:spcPts val="800"/>
+              </a:spcAft>
+              <a:buNone/>
+            </a:pPr>
+            <a:r>
+              <a:rPr lang="en-US" sz="4000" b="1" dirty="0">
+                <a:solidFill>
+                  <a:srgbClr val="111111"/>
+                </a:solidFill>
+                <a:latin typeface="Times New Roman" pitchFamily="34" charset="0"/>
+                <a:ea typeface="Times New Roman" pitchFamily="34" charset="-122"/>
+                <a:cs typeface="Times New Roman" pitchFamily="34" charset="-120"/>
+              </a:rPr>
+              <a:t>Effects: </a:t>
+            </a:r>
+            <a:pPr algn="l" indent="0" marL="0">
+              <a:spcAft>
+                <a:spcPts val="800"/>
+              </a:spcAft>
+              <a:buNone/>
+            </a:pPr>
+            <a:r>
+              <a:rPr lang="en-US" sz="4000" dirty="0">
+                <a:solidFill>
+                  <a:srgbClr val="111111"/>
+                </a:solidFill>
+                <a:latin typeface="Times New Roman" pitchFamily="34" charset="0"/>
+                <a:ea typeface="Times New Roman" pitchFamily="34" charset="-122"/>
+                <a:cs typeface="Times New Roman" pitchFamily="34" charset="-120"/>
+              </a:rPr>
+              <a:t>Soils become poor, sand covers fields, water becomes scarce and people migrate.</a:t>
             </a:r>
             <a:endParaRPr lang="en-US" sz="4000" dirty="0"/>
           </a:p>
@@ -14386,15 +14843,115 @@
                 <a:ea typeface="Calibri" pitchFamily="34" charset="-122"/>
                 <a:cs typeface="Calibri" pitchFamily="34" charset="-120"/>
               </a:rPr>
-              <a:t>FORMATIVE EVALUATION</a:t>
+              <a:t>BOARD SUMMARY</a:t>
             </a:r>
             <a:endParaRPr lang="en-US" sz="1400" dirty="0"/>
+          </a:p>
+        </p:txBody>
+      </p:sp>
+      <p:sp>
+        <p:nvSpPr>
+          <p:cNvPr id="3" name="Text 1"/>
+          <p:cNvSpPr/>
+          <p:nvPr/>
+        </p:nvSpPr>
+        <p:spPr>
+          <a:xfrm>
+            <a:off x="365760" y="1005840"/>
+            <a:ext cx="11460175" cy="731520"/>
+          </a:xfrm>
+          <a:prstGeom prst="rect">
+            <a:avLst/>
+          </a:prstGeom>
+          <a:noFill/>
+          <a:ln/>
+        </p:spPr>
+        <p:txBody>
+          <a:bodyPr wrap="square" lIns="0" tIns="0" rIns="0" bIns="0" rtlCol="0" anchor="ctr">
+            <a:normAutofit/>
+          </a:bodyPr>
+          <a:lstStyle/>
+          <a:p>
+            <a:pPr algn="ctr" indent="0" marL="0">
+              <a:buNone/>
+            </a:pPr>
+            <a:r>
+              <a:rPr lang="en-US" sz="3600" b="1" dirty="0">
+                <a:solidFill>
+                  <a:srgbClr val="990011"/>
+                </a:solidFill>
+                <a:latin typeface="Times New Roman" pitchFamily="34" charset="0"/>
+                <a:ea typeface="Times New Roman" pitchFamily="34" charset="-122"/>
+                <a:cs typeface="Times New Roman" pitchFamily="34" charset="-120"/>
+              </a:rPr>
+              <a:t>3. Desertification</a:t>
+            </a:r>
+            <a:endParaRPr lang="en-US" sz="3600" dirty="0"/>
+          </a:p>
+        </p:txBody>
+      </p:sp>
+      <p:sp>
+        <p:nvSpPr>
+          <p:cNvPr id="4" name="Text 2"/>
+          <p:cNvSpPr/>
+          <p:nvPr/>
+        </p:nvSpPr>
+        <p:spPr>
+          <a:xfrm>
+            <a:off x="365760" y="1783080"/>
+            <a:ext cx="4846320" cy="4617720"/>
+          </a:xfrm>
+          <a:prstGeom prst="rect">
+            <a:avLst/>
+          </a:prstGeom>
+          <a:noFill/>
+          <a:ln/>
+        </p:spPr>
+        <p:txBody>
+          <a:bodyPr wrap="square" lIns="0" tIns="0" rIns="0" bIns="0" rtlCol="0" anchor="t"/>
+          <a:lstStyle/>
+          <a:p>
+            <a:pPr algn="l" indent="0" marL="0">
+              <a:spcAft>
+                <a:spcPts val="800"/>
+              </a:spcAft>
+              <a:buNone/>
+            </a:pPr>
+            <a:r>
+              <a:rPr lang="en-US" sz="3600" b="1" dirty="0">
+                <a:solidFill>
+                  <a:srgbClr val="111111"/>
+                </a:solidFill>
+                <a:latin typeface="Times New Roman" pitchFamily="34" charset="0"/>
+                <a:ea typeface="Times New Roman" pitchFamily="34" charset="-122"/>
+                <a:cs typeface="Times New Roman" pitchFamily="34" charset="-120"/>
+              </a:rPr>
+              <a:t>Adaptation and mitigation: </a:t>
+            </a:r>
+            <a:pPr algn="l" indent="0" marL="0">
+              <a:spcAft>
+                <a:spcPts val="800"/>
+              </a:spcAft>
+              <a:buNone/>
+            </a:pPr>
+            <a:r>
+              <a:rPr lang="en-US" sz="3600" dirty="0">
+                <a:solidFill>
+                  <a:srgbClr val="111111"/>
+                </a:solidFill>
+                <a:latin typeface="Times New Roman" pitchFamily="34" charset="0"/>
+                <a:ea typeface="Times New Roman" pitchFamily="34" charset="-122"/>
+                <a:cs typeface="Times New Roman" pitchFamily="34" charset="-120"/>
+              </a:rPr>
+              <a:t>Tree planting (Sahel Vert, Great Green Wall), zaï pits, stone lines and control of grazing stop the desert.</a:t>
+            </a:r>
+            <a:endParaRPr lang="en-US" sz="3600" dirty="0"/>
           </a:p>
         </p:txBody>
       </p:sp>
       <p:pic>
         <p:nvPicPr>
-          <p:cNvPr id="3" name="Image 0" descr="/home/claude/f4/img/minesec_sheet.png">    </p:cNvPr>
+          <p:cNvPr id="5" name="Image 0" descr="/home/claude/f4/img/v2/f4_zai.jpg">    </p:cNvPr>
           <p:cNvPicPr>
             <a:picLocks noChangeAspect="1"/>
           </p:cNvPicPr>
@@ -14408,8 +14965,8 @@
         </p:blipFill>
         <p:spPr>
           <a:xfrm>
-            <a:off x="0" y="658368"/>
-            <a:ext cx="5120640" cy="5833872"/>
+            <a:off x="5349240" y="2071212"/>
+            <a:ext cx="6659575" cy="3693983"/>
           </a:xfrm>
           <a:prstGeom prst="rect">
             <a:avLst/>
@@ -14418,14 +14975,14 @@
       </p:pic>
       <p:sp>
         <p:nvSpPr>
-          <p:cNvPr id="4" name="Text 1"/>
+          <p:cNvPr id="6" name="Text 3"/>
           <p:cNvSpPr/>
           <p:nvPr/>
         </p:nvSpPr>
         <p:spPr>
           <a:xfrm>
-            <a:off x="5349240" y="1005840"/>
-            <a:ext cx="6522415" cy="731520"/>
+            <a:off x="5349240" y="6089904"/>
+            <a:ext cx="6659575" cy="347472"/>
           </a:xfrm>
           <a:prstGeom prst="rect">
             <a:avLst/>
@@ -14434,68 +14991,24 @@
           <a:ln/>
         </p:spPr>
         <p:txBody>
-          <a:bodyPr wrap="square" lIns="0" tIns="0" rIns="0" bIns="0" rtlCol="0" anchor="ctr">
-            <a:normAutofit/>
-          </a:bodyPr>
+          <a:bodyPr wrap="square" lIns="0" tIns="0" rIns="0" bIns="0" rtlCol="0" anchor="ctr"/>
           <a:lstStyle/>
           <a:p>
             <a:pPr algn="ctr" indent="0" marL="0">
               <a:buNone/>
             </a:pPr>
             <a:r>
-              <a:rPr lang="en-US" sz="3600" b="1" dirty="0">
-                <a:solidFill>
-                  <a:srgbClr val="990011"/>
+              <a:rPr lang="en-US" sz="1600" i="1" dirty="0">
+                <a:solidFill>
+                  <a:srgbClr val="555555"/>
                 </a:solidFill>
                 <a:latin typeface="Times New Roman" pitchFamily="34" charset="0"/>
                 <a:ea typeface="Times New Roman" pitchFamily="34" charset="-122"/>
                 <a:cs typeface="Times New Roman" pitchFamily="34" charset="-120"/>
               </a:rPr>
-              <a:t>Evaluation 2</a:t>
-            </a:r>
-            <a:endParaRPr lang="en-US" sz="3600" dirty="0"/>
-          </a:p>
-        </p:txBody>
-      </p:sp>
-      <p:sp>
-        <p:nvSpPr>
-          <p:cNvPr id="5" name="Text 2"/>
-          <p:cNvSpPr/>
-          <p:nvPr/>
-        </p:nvSpPr>
-        <p:spPr>
-          <a:xfrm>
-            <a:off x="5349240" y="1783080"/>
-            <a:ext cx="6522415" cy="4663440"/>
-          </a:xfrm>
-          <a:prstGeom prst="rect">
-            <a:avLst/>
-          </a:prstGeom>
-          <a:noFill/>
-          <a:ln/>
-        </p:spPr>
-        <p:txBody>
-          <a:bodyPr wrap="square" lIns="0" tIns="0" rIns="0" bIns="0" rtlCol="0" anchor="t"/>
-          <a:lstStyle/>
-          <a:p>
-            <a:pPr algn="l" indent="0" marL="0">
-              <a:spcAft>
-                <a:spcPts val="800"/>
-              </a:spcAft>
-              <a:buNone/>
-            </a:pPr>
-            <a:r>
-              <a:rPr lang="en-US" sz="4000" dirty="0">
-                <a:solidFill>
-                  <a:srgbClr val="111111"/>
-                </a:solidFill>
-                <a:latin typeface="Times New Roman" pitchFamily="34" charset="0"/>
-                <a:ea typeface="Times New Roman" pitchFamily="34" charset="-122"/>
-                <a:cs typeface="Times New Roman" pitchFamily="34" charset="-120"/>
-              </a:rPr>
-              <a:t>Give one way to fight desertification.</a:t>
-            </a:r>
-            <a:endParaRPr lang="en-US" sz="4000" dirty="0"/>
+              <a:t>Illustration: zaï planting pits</a:t>
+            </a:r>
+            <a:endParaRPr lang="en-US" sz="1600" dirty="0"/>
           </a:p>
         </p:txBody>
       </p:sp>
@@ -14909,7 +15422,7 @@
                 <a:ea typeface="Times New Roman" pitchFamily="34" charset="-122"/>
                 <a:cs typeface="Times New Roman" pitchFamily="34" charset="-120"/>
               </a:rPr>
-              <a:t>Expected Answer</a:t>
+              <a:t>Evaluation 1</a:t>
             </a:r>
             <a:endParaRPr lang="en-US" sz="3600" dirty="0"/>
           </a:p>
@@ -14951,7 +15464,7 @@
                 <a:ea typeface="Times New Roman" pitchFamily="34" charset="-122"/>
                 <a:cs typeface="Times New Roman" pitchFamily="34" charset="-120"/>
               </a:rPr>
-              <a:t>Plant trees (or stop overgrazing).</a:t>
+              <a:t>What is desertification?</a:t>
             </a:r>
             <a:endParaRPr lang="en-US" sz="4000" dirty="0"/>
           </a:p>
@@ -15063,7 +15576,7 @@
                 <a:ea typeface="Calibri" pitchFamily="34" charset="-122"/>
                 <a:cs typeface="Calibri" pitchFamily="34" charset="-120"/>
               </a:rPr>
-              <a:t>REMEDIATION</a:t>
+              <a:t>FORMATIVE EVALUATION</a:t>
             </a:r>
             <a:endParaRPr lang="en-US" sz="1400" dirty="0"/>
           </a:p>
@@ -15086,7 +15599,7 @@
         <p:spPr>
           <a:xfrm>
             <a:off x="0" y="658368"/>
-            <a:ext cx="2468880" cy="5833872"/>
+            <a:ext cx="5120640" cy="5833872"/>
           </a:xfrm>
           <a:prstGeom prst="rect">
             <a:avLst/>
@@ -15101,8 +15614,8 @@
         </p:nvSpPr>
         <p:spPr>
           <a:xfrm>
-            <a:off x="2697480" y="1005840"/>
-            <a:ext cx="9174175" cy="731520"/>
+            <a:off x="5349240" y="1005840"/>
+            <a:ext cx="6522415" cy="731520"/>
           </a:xfrm>
           <a:prstGeom prst="rect">
             <a:avLst/>
@@ -15128,7 +15641,7 @@
                 <a:ea typeface="Times New Roman" pitchFamily="34" charset="-122"/>
                 <a:cs typeface="Times New Roman" pitchFamily="34" charset="-120"/>
               </a:rPr>
-              <a:t>Remediation</a:t>
+              <a:t>Expected Answer</a:t>
             </a:r>
             <a:endParaRPr lang="en-US" sz="3600" dirty="0"/>
           </a:p>
@@ -15142,8 +15655,8 @@
         </p:nvSpPr>
         <p:spPr>
           <a:xfrm>
-            <a:off x="2697480" y="1783080"/>
-            <a:ext cx="9174175" cy="4663440"/>
+            <a:off x="5349240" y="1783080"/>
+            <a:ext cx="6522415" cy="4663440"/>
           </a:xfrm>
           <a:prstGeom prst="rect">
             <a:avLst/>
@@ -15162,7 +15675,7 @@
               <a:buNone/>
             </a:pPr>
             <a:r>
-              <a:rPr lang="en-US" sz="4000" b="1" dirty="0">
+              <a:rPr lang="en-US" sz="4000" dirty="0">
                 <a:solidFill>
                   <a:srgbClr val="111111"/>
                 </a:solidFill>
@@ -15170,73 +15683,7 @@
                 <a:ea typeface="Times New Roman" pitchFamily="34" charset="-122"/>
                 <a:cs typeface="Times New Roman" pitchFamily="34" charset="-120"/>
               </a:rPr>
-              <a:t>Fill in the blanks:</a:t>
-            </a:r>
-            <a:endParaRPr lang="en-US" sz="4000" dirty="0"/>
-          </a:p>
-          <a:p>
-            <a:pPr algn="l" marL="342900" indent="-342900">
-              <a:spcAft>
-                <a:spcPts val="800"/>
-              </a:spcAft>
-              <a:buSzPct val="100000"/>
-              <a:buFont typeface="+mj-lt"/>
-              <a:buAutoNum type="arabicPeriod" startAt="1"/>
-            </a:pPr>
-            <a:r>
-              <a:rPr lang="en-US" sz="4000" dirty="0">
-                <a:solidFill>
-                  <a:srgbClr val="111111"/>
-                </a:solidFill>
-                <a:latin typeface="Times New Roman" pitchFamily="34" charset="0"/>
-                <a:ea typeface="Times New Roman" pitchFamily="34" charset="-122"/>
-                <a:cs typeface="Times New Roman" pitchFamily="34" charset="-120"/>
-              </a:rPr>
-              <a:t>A long period without enough rain is a ______.</a:t>
-            </a:r>
-            <a:endParaRPr lang="en-US" sz="4000" dirty="0"/>
-          </a:p>
-          <a:p>
-            <a:pPr algn="l" marL="342900" indent="-342900">
-              <a:spcAft>
-                <a:spcPts val="800"/>
-              </a:spcAft>
-              <a:buSzPct val="100000"/>
-              <a:buFont typeface="+mj-lt"/>
-              <a:buAutoNum type="arabicPeriod" startAt="1"/>
-            </a:pPr>
-            <a:r>
-              <a:rPr lang="en-US" sz="4000" dirty="0">
-                <a:solidFill>
-                  <a:srgbClr val="111111"/>
-                </a:solidFill>
-                <a:latin typeface="Times New Roman" pitchFamily="34" charset="0"/>
-                <a:ea typeface="Times New Roman" pitchFamily="34" charset="-122"/>
-                <a:cs typeface="Times New Roman" pitchFamily="34" charset="-120"/>
-              </a:rPr>
-              <a:t>The spread of the desert is ______.</a:t>
-            </a:r>
-            <a:endParaRPr lang="en-US" sz="4000" dirty="0"/>
-          </a:p>
-          <a:p>
-            <a:pPr algn="l" marL="342900" indent="-342900">
-              <a:spcAft>
-                <a:spcPts val="800"/>
-              </a:spcAft>
-              <a:buSzPct val="100000"/>
-              <a:buFont typeface="+mj-lt"/>
-              <a:buAutoNum type="arabicPeriod" startAt="1"/>
-            </a:pPr>
-            <a:r>
-              <a:rPr lang="en-US" sz="4000" dirty="0">
-                <a:solidFill>
-                  <a:srgbClr val="111111"/>
-                </a:solidFill>
-                <a:latin typeface="Times New Roman" pitchFamily="34" charset="0"/>
-                <a:ea typeface="Times New Roman" pitchFamily="34" charset="-122"/>
-                <a:cs typeface="Times New Roman" pitchFamily="34" charset="-120"/>
-              </a:rPr>
-              <a:t>In 2012, water from the ______ Dam flooded villages.</a:t>
+              <a:t>The spread of the desert.</a:t>
             </a:r>
             <a:endParaRPr lang="en-US" sz="4000" dirty="0"/>
           </a:p>
@@ -15348,7 +15795,7 @@
                 <a:ea typeface="Calibri" pitchFamily="34" charset="-122"/>
                 <a:cs typeface="Calibri" pitchFamily="34" charset="-120"/>
               </a:rPr>
-              <a:t>HOMEWORK</a:t>
+              <a:t>FORMATIVE EVALUATION</a:t>
             </a:r>
             <a:endParaRPr lang="en-US" sz="1400" dirty="0"/>
           </a:p>
@@ -15413,7 +15860,7 @@
                 <a:ea typeface="Times New Roman" pitchFamily="34" charset="-122"/>
                 <a:cs typeface="Times New Roman" pitchFamily="34" charset="-120"/>
               </a:rPr>
-              <a:t>Homework</a:t>
+              <a:t>Evaluation 2</a:t>
             </a:r>
             <a:endParaRPr lang="en-US" sz="3600" dirty="0"/>
           </a:p>
@@ -15455,7 +15902,7 @@
                 <a:ea typeface="Times New Roman" pitchFamily="34" charset="-122"/>
                 <a:cs typeface="Times New Roman" pitchFamily="34" charset="-120"/>
               </a:rPr>
-              <a:t>Count how many buckets (or litres) of water your family uses in one day, and list the main uses (drinking, cooking, washing).</a:t>
+              <a:t>Give one way to fight desertification.</a:t>
             </a:r>
             <a:endParaRPr lang="en-US" sz="4000" dirty="0"/>
           </a:p>
@@ -15567,7 +16014,7 @@
                 <a:ea typeface="Calibri" pitchFamily="34" charset="-122"/>
                 <a:cs typeface="Calibri" pitchFamily="34" charset="-120"/>
               </a:rPr>
-              <a:t>NEXT LESSON</a:t>
+              <a:t>FORMATIVE EVALUATION</a:t>
             </a:r>
             <a:endParaRPr lang="en-US" sz="1400" dirty="0"/>
           </a:p>
@@ -15632,7 +16079,7 @@
                 <a:ea typeface="Times New Roman" pitchFamily="34" charset="-122"/>
                 <a:cs typeface="Times New Roman" pitchFamily="34" charset="-120"/>
               </a:rPr>
-              <a:t>Next Lesson</a:t>
+              <a:t>Expected Answer</a:t>
             </a:r>
             <a:endParaRPr lang="en-US" sz="3600" dirty="0"/>
           </a:p>
@@ -15656,17 +16103,17 @@
           <a:ln/>
         </p:spPr>
         <p:txBody>
-          <a:bodyPr wrap="square" lIns="0" tIns="0" rIns="0" bIns="0" rtlCol="0" anchor="ctr"/>
-          <a:lstStyle/>
-          <a:p>
-            <a:pPr algn="ctr" indent="0" marL="0">
+          <a:bodyPr wrap="square" lIns="0" tIns="0" rIns="0" bIns="0" rtlCol="0" anchor="t"/>
+          <a:lstStyle/>
+          <a:p>
+            <a:pPr algn="l" indent="0" marL="0">
               <a:spcAft>
                 <a:spcPts val="800"/>
               </a:spcAft>
               <a:buNone/>
             </a:pPr>
             <a:r>
-              <a:rPr lang="en-US" sz="4000" b="1" dirty="0">
+              <a:rPr lang="en-US" sz="4000" dirty="0">
                 <a:solidFill>
                   <a:srgbClr val="111111"/>
                 </a:solidFill>
@@ -15674,27 +16121,7 @@
                 <a:ea typeface="Times New Roman" pitchFamily="34" charset="-122"/>
                 <a:cs typeface="Times New Roman" pitchFamily="34" charset="-120"/>
               </a:rPr>
-              <a:t>Our next lesson will be on:</a:t>
-            </a:r>
-            <a:endParaRPr lang="en-US" sz="4000" dirty="0"/>
-          </a:p>
-          <a:p>
-            <a:pPr algn="ctr" indent="0" marL="0">
-              <a:spcAft>
-                <a:spcPts val="800"/>
-              </a:spcAft>
-              <a:buNone/>
-            </a:pPr>
-            <a:r>
-              <a:rPr lang="en-US" sz="4000" b="1" dirty="0">
-                <a:solidFill>
-                  <a:srgbClr val="990011"/>
-                </a:solidFill>
-                <a:latin typeface="Times New Roman" pitchFamily="34" charset="0"/>
-                <a:ea typeface="Times New Roman" pitchFamily="34" charset="-122"/>
-                <a:cs typeface="Times New Roman" pitchFamily="34" charset="-120"/>
-              </a:rPr>
-              <a:t>Lesson 42: Water Scarcity</a:t>
+              <a:t>Plant trees (or stop overgrazing).</a:t>
             </a:r>
             <a:endParaRPr lang="en-US" sz="4000" dirty="0"/>
           </a:p>
@@ -15806,6 +16233,749 @@
                 <a:ea typeface="Calibri" pitchFamily="34" charset="-122"/>
                 <a:cs typeface="Calibri" pitchFamily="34" charset="-120"/>
               </a:rPr>
+              <a:t>REMEDIATION</a:t>
+            </a:r>
+            <a:endParaRPr lang="en-US" sz="1400" dirty="0"/>
+          </a:p>
+        </p:txBody>
+      </p:sp>
+      <p:pic>
+        <p:nvPicPr>
+          <p:cNvPr id="3" name="Image 0" descr="/home/claude/f4/img/minesec_sheet.png">    </p:cNvPr>
+          <p:cNvPicPr>
+            <a:picLocks noChangeAspect="1"/>
+          </p:cNvPicPr>
+          <p:nvPr/>
+        </p:nvPicPr>
+        <p:blipFill>
+          <a:blip r:embed="rId1"/>
+          <a:stretch>
+            <a:fillRect/>
+          </a:stretch>
+        </p:blipFill>
+        <p:spPr>
+          <a:xfrm>
+            <a:off x="0" y="658368"/>
+            <a:ext cx="2468880" cy="5833872"/>
+          </a:xfrm>
+          <a:prstGeom prst="rect">
+            <a:avLst/>
+          </a:prstGeom>
+        </p:spPr>
+      </p:pic>
+      <p:sp>
+        <p:nvSpPr>
+          <p:cNvPr id="4" name="Text 1"/>
+          <p:cNvSpPr/>
+          <p:nvPr/>
+        </p:nvSpPr>
+        <p:spPr>
+          <a:xfrm>
+            <a:off x="2697480" y="1005840"/>
+            <a:ext cx="9174175" cy="731520"/>
+          </a:xfrm>
+          <a:prstGeom prst="rect">
+            <a:avLst/>
+          </a:prstGeom>
+          <a:noFill/>
+          <a:ln/>
+        </p:spPr>
+        <p:txBody>
+          <a:bodyPr wrap="square" lIns="0" tIns="0" rIns="0" bIns="0" rtlCol="0" anchor="ctr">
+            <a:normAutofit/>
+          </a:bodyPr>
+          <a:lstStyle/>
+          <a:p>
+            <a:pPr algn="ctr" indent="0" marL="0">
+              <a:buNone/>
+            </a:pPr>
+            <a:r>
+              <a:rPr lang="en-US" sz="3600" b="1" dirty="0">
+                <a:solidFill>
+                  <a:srgbClr val="990011"/>
+                </a:solidFill>
+                <a:latin typeface="Times New Roman" pitchFamily="34" charset="0"/>
+                <a:ea typeface="Times New Roman" pitchFamily="34" charset="-122"/>
+                <a:cs typeface="Times New Roman" pitchFamily="34" charset="-120"/>
+              </a:rPr>
+              <a:t>Remediation</a:t>
+            </a:r>
+            <a:endParaRPr lang="en-US" sz="3600" dirty="0"/>
+          </a:p>
+        </p:txBody>
+      </p:sp>
+      <p:sp>
+        <p:nvSpPr>
+          <p:cNvPr id="5" name="Text 2"/>
+          <p:cNvSpPr/>
+          <p:nvPr/>
+        </p:nvSpPr>
+        <p:spPr>
+          <a:xfrm>
+            <a:off x="2697480" y="1783080"/>
+            <a:ext cx="9174175" cy="4663440"/>
+          </a:xfrm>
+          <a:prstGeom prst="rect">
+            <a:avLst/>
+          </a:prstGeom>
+          <a:noFill/>
+          <a:ln/>
+        </p:spPr>
+        <p:txBody>
+          <a:bodyPr wrap="square" lIns="0" tIns="0" rIns="0" bIns="0" rtlCol="0" anchor="t"/>
+          <a:lstStyle/>
+          <a:p>
+            <a:pPr algn="l" indent="0" marL="0">
+              <a:spcAft>
+                <a:spcPts val="800"/>
+              </a:spcAft>
+              <a:buNone/>
+            </a:pPr>
+            <a:r>
+              <a:rPr lang="en-US" sz="4000" b="1" dirty="0">
+                <a:solidFill>
+                  <a:srgbClr val="111111"/>
+                </a:solidFill>
+                <a:latin typeface="Times New Roman" pitchFamily="34" charset="0"/>
+                <a:ea typeface="Times New Roman" pitchFamily="34" charset="-122"/>
+                <a:cs typeface="Times New Roman" pitchFamily="34" charset="-120"/>
+              </a:rPr>
+              <a:t>Fill in the blanks:</a:t>
+            </a:r>
+            <a:endParaRPr lang="en-US" sz="4000" dirty="0"/>
+          </a:p>
+          <a:p>
+            <a:pPr algn="l" marL="342900" indent="-342900">
+              <a:spcAft>
+                <a:spcPts val="800"/>
+              </a:spcAft>
+              <a:buSzPct val="100000"/>
+              <a:buFont typeface="+mj-lt"/>
+              <a:buAutoNum type="arabicPeriod" startAt="1"/>
+            </a:pPr>
+            <a:r>
+              <a:rPr lang="en-US" sz="4000" dirty="0">
+                <a:solidFill>
+                  <a:srgbClr val="111111"/>
+                </a:solidFill>
+                <a:latin typeface="Times New Roman" pitchFamily="34" charset="0"/>
+                <a:ea typeface="Times New Roman" pitchFamily="34" charset="-122"/>
+                <a:cs typeface="Times New Roman" pitchFamily="34" charset="-120"/>
+              </a:rPr>
+              <a:t>A long period without enough rain is a ______.</a:t>
+            </a:r>
+            <a:endParaRPr lang="en-US" sz="4000" dirty="0"/>
+          </a:p>
+          <a:p>
+            <a:pPr algn="l" marL="342900" indent="-342900">
+              <a:spcAft>
+                <a:spcPts val="800"/>
+              </a:spcAft>
+              <a:buSzPct val="100000"/>
+              <a:buFont typeface="+mj-lt"/>
+              <a:buAutoNum type="arabicPeriod" startAt="1"/>
+            </a:pPr>
+            <a:r>
+              <a:rPr lang="en-US" sz="4000" dirty="0">
+                <a:solidFill>
+                  <a:srgbClr val="111111"/>
+                </a:solidFill>
+                <a:latin typeface="Times New Roman" pitchFamily="34" charset="0"/>
+                <a:ea typeface="Times New Roman" pitchFamily="34" charset="-122"/>
+                <a:cs typeface="Times New Roman" pitchFamily="34" charset="-120"/>
+              </a:rPr>
+              <a:t>The spread of the desert is ______.</a:t>
+            </a:r>
+            <a:endParaRPr lang="en-US" sz="4000" dirty="0"/>
+          </a:p>
+          <a:p>
+            <a:pPr algn="l" marL="342900" indent="-342900">
+              <a:spcAft>
+                <a:spcPts val="800"/>
+              </a:spcAft>
+              <a:buSzPct val="100000"/>
+              <a:buFont typeface="+mj-lt"/>
+              <a:buAutoNum type="arabicPeriod" startAt="1"/>
+            </a:pPr>
+            <a:r>
+              <a:rPr lang="en-US" sz="4000" dirty="0">
+                <a:solidFill>
+                  <a:srgbClr val="111111"/>
+                </a:solidFill>
+                <a:latin typeface="Times New Roman" pitchFamily="34" charset="0"/>
+                <a:ea typeface="Times New Roman" pitchFamily="34" charset="-122"/>
+                <a:cs typeface="Times New Roman" pitchFamily="34" charset="-120"/>
+              </a:rPr>
+              <a:t>In 2012, water from the ______ Dam flooded villages.</a:t>
+            </a:r>
+            <a:endParaRPr lang="en-US" sz="4000" dirty="0"/>
+          </a:p>
+        </p:txBody>
+      </p:sp>
+      <p:sp>
+        <p:nvSpPr>
+          <p:cNvPr id="25" name="Slide Number Placeholder 0"/>
+          <p:cNvSpPr>
+            <a:spLocks noGrp="1"/>
+          </p:cNvSpPr>
+          <p:nvPr>
+            <p:ph type="sldNum" sz="quarter" idx="4294967295"/>
+          </p:nvPr>
+        </p:nvSpPr>
+        <p:spPr>
+          <a:xfrm>
+            <a:off x="27432" y="91440"/>
+            <a:ext cx="585216" cy="475488"/>
+          </a:xfrm>
+          <a:prstGeom prst="rect">
+            <a:avLst/>
+          </a:prstGeom>
+          <a:extLst>
+            <a:ext uri="{C572A759-6A51-4108-AA02-DFA0A04FC94B}">
+              <ma14:wrappingTextBoxFlag xmlns:ma14="http://schemas.microsoft.com/office/mac/drawingml/2011/main" val="0"/>
+            </a:ext>
+          </a:extLst>
+        </p:spPr>
+        <p:txBody>
+          <a:bodyPr/>
+          <a:lstStyle>
+            <a:lvl1pPr>
+              <a:defRPr sz="2000">
+                <a:solidFill>
+                  <a:srgbClr val="FFFFFF"/>
+                </a:solidFill>
+                <a:latin typeface="Calibri"/>
+                <a:ea typeface="Calibri"/>
+                <a:cs typeface="Calibri"/>
+              </a:defRPr>
+            </a:lvl1pPr>
+          </a:lstStyle>
+          <a:p>
+            <a:pPr algn="ctr"/>
+            <a:fld id="{F7021451-1387-4CA6-816F-3879F97B5CBC}" type="slidenum">
+              <a:rPr b="1" lang="en-US"/>
+              <a:t>44</a:t>
+            </a:fld>
+            <a:endParaRPr lang="en-US"/>
+          </a:p>
+        </p:txBody>
+      </p:sp>
+    </p:spTree>
+  </p:cSld>
+  <p:clrMapOvr>
+    <a:masterClrMapping/>
+  </p:clrMapOvr>
+</p:sld>
+</file>
+
+<file path=ppt/slides/slide45.xml><?xml version="1.0" encoding="utf-8"?>
+<p:sld xmlns:a="http://schemas.openxmlformats.org/drawingml/2006/main" xmlns:r="http://schemas.openxmlformats.org/officeDocument/2006/relationships" xmlns:p="http://schemas.openxmlformats.org/presentationml/2006/main">
+  <p:cSld name="Slide 45">
+    <p:spTree>
+      <p:nvGrpSpPr>
+        <p:cNvPr id="1" name=""/>
+        <p:cNvGrpSpPr/>
+        <p:nvPr/>
+      </p:nvGrpSpPr>
+      <p:grpSpPr>
+        <a:xfrm>
+          <a:off x="0" y="0"/>
+          <a:ext cx="0" cy="0"/>
+          <a:chOff x="0" y="0"/>
+          <a:chExt cx="0" cy="0"/>
+        </a:xfrm>
+      </p:grpSpPr>
+      <p:sp>
+        <p:nvSpPr>
+          <p:cNvPr id="2" name="Text 0"/>
+          <p:cNvSpPr/>
+          <p:nvPr/>
+        </p:nvSpPr>
+        <p:spPr>
+          <a:xfrm>
+            <a:off x="457200" y="713232"/>
+            <a:ext cx="11368735" cy="274320"/>
+          </a:xfrm>
+          <a:prstGeom prst="rect">
+            <a:avLst/>
+          </a:prstGeom>
+          <a:noFill/>
+          <a:ln/>
+        </p:spPr>
+        <p:txBody>
+          <a:bodyPr wrap="square" lIns="0" tIns="0" rIns="0" bIns="0" rtlCol="0" anchor="ctr"/>
+          <a:lstStyle/>
+          <a:p>
+            <a:pPr algn="r" indent="0" marL="0">
+              <a:buNone/>
+            </a:pPr>
+            <a:r>
+              <a:rPr lang="en-US" sz="1400" b="1" dirty="0">
+                <a:solidFill>
+                  <a:srgbClr val="1C3F6E"/>
+                </a:solidFill>
+                <a:latin typeface="Calibri" pitchFamily="34" charset="0"/>
+                <a:ea typeface="Calibri" pitchFamily="34" charset="-122"/>
+                <a:cs typeface="Calibri" pitchFamily="34" charset="-120"/>
+              </a:rPr>
+              <a:t>HOMEWORK</a:t>
+            </a:r>
+            <a:endParaRPr lang="en-US" sz="1400" dirty="0"/>
+          </a:p>
+        </p:txBody>
+      </p:sp>
+      <p:pic>
+        <p:nvPicPr>
+          <p:cNvPr id="3" name="Image 0" descr="/home/claude/f4/img/minesec_sheet.png">    </p:cNvPr>
+          <p:cNvPicPr>
+            <a:picLocks noChangeAspect="1"/>
+          </p:cNvPicPr>
+          <p:nvPr/>
+        </p:nvPicPr>
+        <p:blipFill>
+          <a:blip r:embed="rId1"/>
+          <a:stretch>
+            <a:fillRect/>
+          </a:stretch>
+        </p:blipFill>
+        <p:spPr>
+          <a:xfrm>
+            <a:off x="0" y="658368"/>
+            <a:ext cx="5120640" cy="5833872"/>
+          </a:xfrm>
+          <a:prstGeom prst="rect">
+            <a:avLst/>
+          </a:prstGeom>
+        </p:spPr>
+      </p:pic>
+      <p:sp>
+        <p:nvSpPr>
+          <p:cNvPr id="4" name="Text 1"/>
+          <p:cNvSpPr/>
+          <p:nvPr/>
+        </p:nvSpPr>
+        <p:spPr>
+          <a:xfrm>
+            <a:off x="5349240" y="1005840"/>
+            <a:ext cx="6522415" cy="731520"/>
+          </a:xfrm>
+          <a:prstGeom prst="rect">
+            <a:avLst/>
+          </a:prstGeom>
+          <a:noFill/>
+          <a:ln/>
+        </p:spPr>
+        <p:txBody>
+          <a:bodyPr wrap="square" lIns="0" tIns="0" rIns="0" bIns="0" rtlCol="0" anchor="ctr">
+            <a:normAutofit/>
+          </a:bodyPr>
+          <a:lstStyle/>
+          <a:p>
+            <a:pPr algn="ctr" indent="0" marL="0">
+              <a:buNone/>
+            </a:pPr>
+            <a:r>
+              <a:rPr lang="en-US" sz="3600" b="1" dirty="0">
+                <a:solidFill>
+                  <a:srgbClr val="990011"/>
+                </a:solidFill>
+                <a:latin typeface="Times New Roman" pitchFamily="34" charset="0"/>
+                <a:ea typeface="Times New Roman" pitchFamily="34" charset="-122"/>
+                <a:cs typeface="Times New Roman" pitchFamily="34" charset="-120"/>
+              </a:rPr>
+              <a:t>Homework</a:t>
+            </a:r>
+            <a:endParaRPr lang="en-US" sz="3600" dirty="0"/>
+          </a:p>
+        </p:txBody>
+      </p:sp>
+      <p:sp>
+        <p:nvSpPr>
+          <p:cNvPr id="5" name="Text 2"/>
+          <p:cNvSpPr/>
+          <p:nvPr/>
+        </p:nvSpPr>
+        <p:spPr>
+          <a:xfrm>
+            <a:off x="5349240" y="1783080"/>
+            <a:ext cx="6522415" cy="4663440"/>
+          </a:xfrm>
+          <a:prstGeom prst="rect">
+            <a:avLst/>
+          </a:prstGeom>
+          <a:noFill/>
+          <a:ln/>
+        </p:spPr>
+        <p:txBody>
+          <a:bodyPr wrap="square" lIns="0" tIns="0" rIns="0" bIns="0" rtlCol="0" anchor="t"/>
+          <a:lstStyle/>
+          <a:p>
+            <a:pPr algn="l" indent="0" marL="0">
+              <a:spcAft>
+                <a:spcPts val="800"/>
+              </a:spcAft>
+              <a:buNone/>
+            </a:pPr>
+            <a:r>
+              <a:rPr lang="en-US" sz="4000" dirty="0">
+                <a:solidFill>
+                  <a:srgbClr val="111111"/>
+                </a:solidFill>
+                <a:latin typeface="Times New Roman" pitchFamily="34" charset="0"/>
+                <a:ea typeface="Times New Roman" pitchFamily="34" charset="-122"/>
+                <a:cs typeface="Times New Roman" pitchFamily="34" charset="-120"/>
+              </a:rPr>
+              <a:t>Count how many buckets (or litres) of water your family uses in one day, and list the main uses (drinking, cooking, washing).</a:t>
+            </a:r>
+            <a:endParaRPr lang="en-US" sz="4000" dirty="0"/>
+          </a:p>
+        </p:txBody>
+      </p:sp>
+      <p:sp>
+        <p:nvSpPr>
+          <p:cNvPr id="25" name="Slide Number Placeholder 0"/>
+          <p:cNvSpPr>
+            <a:spLocks noGrp="1"/>
+          </p:cNvSpPr>
+          <p:nvPr>
+            <p:ph type="sldNum" sz="quarter" idx="4294967295"/>
+          </p:nvPr>
+        </p:nvSpPr>
+        <p:spPr>
+          <a:xfrm>
+            <a:off x="27432" y="91440"/>
+            <a:ext cx="585216" cy="475488"/>
+          </a:xfrm>
+          <a:prstGeom prst="rect">
+            <a:avLst/>
+          </a:prstGeom>
+          <a:extLst>
+            <a:ext uri="{C572A759-6A51-4108-AA02-DFA0A04FC94B}">
+              <ma14:wrappingTextBoxFlag xmlns:ma14="http://schemas.microsoft.com/office/mac/drawingml/2011/main" val="0"/>
+            </a:ext>
+          </a:extLst>
+        </p:spPr>
+        <p:txBody>
+          <a:bodyPr/>
+          <a:lstStyle>
+            <a:lvl1pPr>
+              <a:defRPr sz="2000">
+                <a:solidFill>
+                  <a:srgbClr val="FFFFFF"/>
+                </a:solidFill>
+                <a:latin typeface="Calibri"/>
+                <a:ea typeface="Calibri"/>
+                <a:cs typeface="Calibri"/>
+              </a:defRPr>
+            </a:lvl1pPr>
+          </a:lstStyle>
+          <a:p>
+            <a:pPr algn="ctr"/>
+            <a:fld id="{F7021451-1387-4CA6-816F-3879F97B5CBC}" type="slidenum">
+              <a:rPr b="1" lang="en-US"/>
+              <a:t>45</a:t>
+            </a:fld>
+            <a:endParaRPr lang="en-US"/>
+          </a:p>
+        </p:txBody>
+      </p:sp>
+    </p:spTree>
+  </p:cSld>
+  <p:clrMapOvr>
+    <a:masterClrMapping/>
+  </p:clrMapOvr>
+</p:sld>
+</file>
+
+<file path=ppt/slides/slide46.xml><?xml version="1.0" encoding="utf-8"?>
+<p:sld xmlns:a="http://schemas.openxmlformats.org/drawingml/2006/main" xmlns:r="http://schemas.openxmlformats.org/officeDocument/2006/relationships" xmlns:p="http://schemas.openxmlformats.org/presentationml/2006/main">
+  <p:cSld name="Slide 46">
+    <p:spTree>
+      <p:nvGrpSpPr>
+        <p:cNvPr id="1" name=""/>
+        <p:cNvGrpSpPr/>
+        <p:nvPr/>
+      </p:nvGrpSpPr>
+      <p:grpSpPr>
+        <a:xfrm>
+          <a:off x="0" y="0"/>
+          <a:ext cx="0" cy="0"/>
+          <a:chOff x="0" y="0"/>
+          <a:chExt cx="0" cy="0"/>
+        </a:xfrm>
+      </p:grpSpPr>
+      <p:sp>
+        <p:nvSpPr>
+          <p:cNvPr id="2" name="Text 0"/>
+          <p:cNvSpPr/>
+          <p:nvPr/>
+        </p:nvSpPr>
+        <p:spPr>
+          <a:xfrm>
+            <a:off x="457200" y="713232"/>
+            <a:ext cx="11368735" cy="274320"/>
+          </a:xfrm>
+          <a:prstGeom prst="rect">
+            <a:avLst/>
+          </a:prstGeom>
+          <a:noFill/>
+          <a:ln/>
+        </p:spPr>
+        <p:txBody>
+          <a:bodyPr wrap="square" lIns="0" tIns="0" rIns="0" bIns="0" rtlCol="0" anchor="ctr"/>
+          <a:lstStyle/>
+          <a:p>
+            <a:pPr algn="r" indent="0" marL="0">
+              <a:buNone/>
+            </a:pPr>
+            <a:r>
+              <a:rPr lang="en-US" sz="1400" b="1" dirty="0">
+                <a:solidFill>
+                  <a:srgbClr val="1C3F6E"/>
+                </a:solidFill>
+                <a:latin typeface="Calibri" pitchFamily="34" charset="0"/>
+                <a:ea typeface="Calibri" pitchFamily="34" charset="-122"/>
+                <a:cs typeface="Calibri" pitchFamily="34" charset="-120"/>
+              </a:rPr>
+              <a:t>NEXT LESSON</a:t>
+            </a:r>
+            <a:endParaRPr lang="en-US" sz="1400" dirty="0"/>
+          </a:p>
+        </p:txBody>
+      </p:sp>
+      <p:pic>
+        <p:nvPicPr>
+          <p:cNvPr id="3" name="Image 0" descr="/home/claude/f4/img/minesec_sheet.png">    </p:cNvPr>
+          <p:cNvPicPr>
+            <a:picLocks noChangeAspect="1"/>
+          </p:cNvPicPr>
+          <p:nvPr/>
+        </p:nvPicPr>
+        <p:blipFill>
+          <a:blip r:embed="rId1"/>
+          <a:stretch>
+            <a:fillRect/>
+          </a:stretch>
+        </p:blipFill>
+        <p:spPr>
+          <a:xfrm>
+            <a:off x="0" y="658368"/>
+            <a:ext cx="5120640" cy="5833872"/>
+          </a:xfrm>
+          <a:prstGeom prst="rect">
+            <a:avLst/>
+          </a:prstGeom>
+        </p:spPr>
+      </p:pic>
+      <p:sp>
+        <p:nvSpPr>
+          <p:cNvPr id="4" name="Text 1"/>
+          <p:cNvSpPr/>
+          <p:nvPr/>
+        </p:nvSpPr>
+        <p:spPr>
+          <a:xfrm>
+            <a:off x="5349240" y="1005840"/>
+            <a:ext cx="6522415" cy="731520"/>
+          </a:xfrm>
+          <a:prstGeom prst="rect">
+            <a:avLst/>
+          </a:prstGeom>
+          <a:noFill/>
+          <a:ln/>
+        </p:spPr>
+        <p:txBody>
+          <a:bodyPr wrap="square" lIns="0" tIns="0" rIns="0" bIns="0" rtlCol="0" anchor="ctr">
+            <a:normAutofit/>
+          </a:bodyPr>
+          <a:lstStyle/>
+          <a:p>
+            <a:pPr algn="ctr" indent="0" marL="0">
+              <a:buNone/>
+            </a:pPr>
+            <a:r>
+              <a:rPr lang="en-US" sz="3600" b="1" dirty="0">
+                <a:solidFill>
+                  <a:srgbClr val="990011"/>
+                </a:solidFill>
+                <a:latin typeface="Times New Roman" pitchFamily="34" charset="0"/>
+                <a:ea typeface="Times New Roman" pitchFamily="34" charset="-122"/>
+                <a:cs typeface="Times New Roman" pitchFamily="34" charset="-120"/>
+              </a:rPr>
+              <a:t>Next Lesson</a:t>
+            </a:r>
+            <a:endParaRPr lang="en-US" sz="3600" dirty="0"/>
+          </a:p>
+        </p:txBody>
+      </p:sp>
+      <p:sp>
+        <p:nvSpPr>
+          <p:cNvPr id="5" name="Text 2"/>
+          <p:cNvSpPr/>
+          <p:nvPr/>
+        </p:nvSpPr>
+        <p:spPr>
+          <a:xfrm>
+            <a:off x="5349240" y="1783080"/>
+            <a:ext cx="6522415" cy="4663440"/>
+          </a:xfrm>
+          <a:prstGeom prst="rect">
+            <a:avLst/>
+          </a:prstGeom>
+          <a:noFill/>
+          <a:ln/>
+        </p:spPr>
+        <p:txBody>
+          <a:bodyPr wrap="square" lIns="0" tIns="0" rIns="0" bIns="0" rtlCol="0" anchor="ctr"/>
+          <a:lstStyle/>
+          <a:p>
+            <a:pPr algn="ctr" indent="0" marL="0">
+              <a:spcAft>
+                <a:spcPts val="800"/>
+              </a:spcAft>
+              <a:buNone/>
+            </a:pPr>
+            <a:r>
+              <a:rPr lang="en-US" sz="4000" b="1" dirty="0">
+                <a:solidFill>
+                  <a:srgbClr val="111111"/>
+                </a:solidFill>
+                <a:latin typeface="Times New Roman" pitchFamily="34" charset="0"/>
+                <a:ea typeface="Times New Roman" pitchFamily="34" charset="-122"/>
+                <a:cs typeface="Times New Roman" pitchFamily="34" charset="-120"/>
+              </a:rPr>
+              <a:t>Our next lesson will be on:</a:t>
+            </a:r>
+            <a:endParaRPr lang="en-US" sz="4000" dirty="0"/>
+          </a:p>
+          <a:p>
+            <a:pPr algn="ctr" indent="0" marL="0">
+              <a:spcAft>
+                <a:spcPts val="800"/>
+              </a:spcAft>
+              <a:buNone/>
+            </a:pPr>
+            <a:r>
+              <a:rPr lang="en-US" sz="4000" b="1" dirty="0">
+                <a:solidFill>
+                  <a:srgbClr val="990011"/>
+                </a:solidFill>
+                <a:latin typeface="Times New Roman" pitchFamily="34" charset="0"/>
+                <a:ea typeface="Times New Roman" pitchFamily="34" charset="-122"/>
+                <a:cs typeface="Times New Roman" pitchFamily="34" charset="-120"/>
+              </a:rPr>
+              <a:t>Lesson 42: Water Scarcity</a:t>
+            </a:r>
+            <a:endParaRPr lang="en-US" sz="4000" dirty="0"/>
+          </a:p>
+        </p:txBody>
+      </p:sp>
+      <p:sp>
+        <p:nvSpPr>
+          <p:cNvPr id="25" name="Slide Number Placeholder 0"/>
+          <p:cNvSpPr>
+            <a:spLocks noGrp="1"/>
+          </p:cNvSpPr>
+          <p:nvPr>
+            <p:ph type="sldNum" sz="quarter" idx="4294967295"/>
+          </p:nvPr>
+        </p:nvSpPr>
+        <p:spPr>
+          <a:xfrm>
+            <a:off x="27432" y="91440"/>
+            <a:ext cx="585216" cy="475488"/>
+          </a:xfrm>
+          <a:prstGeom prst="rect">
+            <a:avLst/>
+          </a:prstGeom>
+          <a:extLst>
+            <a:ext uri="{C572A759-6A51-4108-AA02-DFA0A04FC94B}">
+              <ma14:wrappingTextBoxFlag xmlns:ma14="http://schemas.microsoft.com/office/mac/drawingml/2011/main" val="0"/>
+            </a:ext>
+          </a:extLst>
+        </p:spPr>
+        <p:txBody>
+          <a:bodyPr/>
+          <a:lstStyle>
+            <a:lvl1pPr>
+              <a:defRPr sz="2000">
+                <a:solidFill>
+                  <a:srgbClr val="FFFFFF"/>
+                </a:solidFill>
+                <a:latin typeface="Calibri"/>
+                <a:ea typeface="Calibri"/>
+                <a:cs typeface="Calibri"/>
+              </a:defRPr>
+            </a:lvl1pPr>
+          </a:lstStyle>
+          <a:p>
+            <a:pPr algn="ctr"/>
+            <a:fld id="{F7021451-1387-4CA6-816F-3879F97B5CBC}" type="slidenum">
+              <a:rPr b="1" lang="en-US"/>
+              <a:t>46</a:t>
+            </a:fld>
+            <a:endParaRPr lang="en-US"/>
+          </a:p>
+        </p:txBody>
+      </p:sp>
+    </p:spTree>
+  </p:cSld>
+  <p:clrMapOvr>
+    <a:masterClrMapping/>
+  </p:clrMapOvr>
+</p:sld>
+</file>
+
+<file path=ppt/slides/slide47.xml><?xml version="1.0" encoding="utf-8"?>
+<p:sld xmlns:a="http://schemas.openxmlformats.org/drawingml/2006/main" xmlns:r="http://schemas.openxmlformats.org/officeDocument/2006/relationships" xmlns:p="http://schemas.openxmlformats.org/presentationml/2006/main">
+  <p:cSld name="Slide 47">
+    <p:spTree>
+      <p:nvGrpSpPr>
+        <p:cNvPr id="1" name=""/>
+        <p:cNvGrpSpPr/>
+        <p:nvPr/>
+      </p:nvGrpSpPr>
+      <p:grpSpPr>
+        <a:xfrm>
+          <a:off x="0" y="0"/>
+          <a:ext cx="0" cy="0"/>
+          <a:chOff x="0" y="0"/>
+          <a:chExt cx="0" cy="0"/>
+        </a:xfrm>
+      </p:grpSpPr>
+      <p:sp>
+        <p:nvSpPr>
+          <p:cNvPr id="2" name="Text 0"/>
+          <p:cNvSpPr/>
+          <p:nvPr/>
+        </p:nvSpPr>
+        <p:spPr>
+          <a:xfrm>
+            <a:off x="457200" y="713232"/>
+            <a:ext cx="11368735" cy="274320"/>
+          </a:xfrm>
+          <a:prstGeom prst="rect">
+            <a:avLst/>
+          </a:prstGeom>
+          <a:noFill/>
+          <a:ln/>
+        </p:spPr>
+        <p:txBody>
+          <a:bodyPr wrap="square" lIns="0" tIns="0" rIns="0" bIns="0" rtlCol="0" anchor="ctr"/>
+          <a:lstStyle/>
+          <a:p>
+            <a:pPr algn="r" indent="0" marL="0">
+              <a:buNone/>
+            </a:pPr>
+            <a:r>
+              <a:rPr lang="en-US" sz="1400" b="1" dirty="0">
+                <a:solidFill>
+                  <a:srgbClr val="1C3F6E"/>
+                </a:solidFill>
+                <a:latin typeface="Calibri" pitchFamily="34" charset="0"/>
+                <a:ea typeface="Calibri" pitchFamily="34" charset="-122"/>
+                <a:cs typeface="Calibri" pitchFamily="34" charset="-120"/>
+              </a:rPr>
               <a:t>BILINGUAL GAME</a:t>
             </a:r>
             <a:endParaRPr lang="en-US" sz="1400" dirty="0"/>
@@ -15853,7 +17023,7 @@
       </p:sp>
       <p:graphicFrame>
         <p:nvGraphicFramePr>
-          <p:cNvPr id="45" name="Table 0"/>
+          <p:cNvPr id="48" name="Table 0"/>
           <p:cNvGraphicFramePr>
             <a:graphicFrameLocks noGrp="1"/>
           </p:cNvGraphicFramePr>
@@ -17165,7 +18335,7 @@
             <a:pPr algn="ctr"/>
             <a:fld id="{F7021451-1387-4CA6-816F-3879F97B5CBC}" type="slidenum">
               <a:rPr b="1" lang="en-US"/>
-              <a:t>44</a:t>
+              <a:t>47</a:t>
             </a:fld>
             <a:endParaRPr lang="en-US"/>
           </a:p>
@@ -17179,9 +18349,9 @@
 </p:sld>
 </file>
 
-<file path=ppt/slides/slide45.xml><?xml version="1.0" encoding="utf-8"?>
+<file path=ppt/slides/slide48.xml><?xml version="1.0" encoding="utf-8"?>
 <p:sld xmlns:a="http://schemas.openxmlformats.org/drawingml/2006/main" xmlns:r="http://schemas.openxmlformats.org/officeDocument/2006/relationships" xmlns:p="http://schemas.openxmlformats.org/presentationml/2006/main">
-  <p:cSld name="Slide 45">
+  <p:cSld name="Slide 48">
     <p:spTree>
       <p:nvGrpSpPr>
         <p:cNvPr id="1" name=""/>
@@ -17276,7 +18446,7 @@
       </p:sp>
       <p:graphicFrame>
         <p:nvGraphicFramePr>
-          <p:cNvPr id="46" name="Table 0"/>
+          <p:cNvPr id="49" name="Table 0"/>
           <p:cNvGraphicFramePr>
             <a:graphicFrameLocks noGrp="1"/>
           </p:cNvGraphicFramePr>
@@ -17898,7 +19068,7 @@
             <a:pPr algn="ctr"/>
             <a:fld id="{F7021451-1387-4CA6-816F-3879F97B5CBC}" type="slidenum">
               <a:rPr b="1" lang="en-US"/>
-              <a:t>45</a:t>
+              <a:t>48</a:t>
             </a:fld>
             <a:endParaRPr lang="en-US"/>
           </a:p>
@@ -17912,9 +19082,9 @@
 </p:sld>
 </file>
 
-<file path=ppt/slides/slide46.xml><?xml version="1.0" encoding="utf-8"?>
+<file path=ppt/slides/slide49.xml><?xml version="1.0" encoding="utf-8"?>
 <p:sld xmlns:a="http://schemas.openxmlformats.org/drawingml/2006/main" xmlns:r="http://schemas.openxmlformats.org/officeDocument/2006/relationships" xmlns:p="http://schemas.openxmlformats.org/presentationml/2006/main">
-  <p:cSld name="Slide 46">
+  <p:cSld name="Slide 49">
     <p:spTree>
       <p:nvGrpSpPr>
         <p:cNvPr id="1" name=""/>
@@ -18009,7 +19179,7 @@
       </p:sp>
       <p:graphicFrame>
         <p:nvGraphicFramePr>
-          <p:cNvPr id="47" name="Table 0"/>
+          <p:cNvPr id="50" name="Table 0"/>
           <p:cNvGraphicFramePr>
             <a:graphicFrameLocks noGrp="1"/>
           </p:cNvGraphicFramePr>
@@ -18119,7 +19289,7 @@
                           <a:ea typeface="Calibri" pitchFamily="34" charset="-122"/>
                           <a:cs typeface="Calibri" pitchFamily="34" charset="-120"/>
                         </a:rPr>
-                        <a:t>DEFINITIONS; Causes; Effects; Adaptation and Mitigation.</a:t>
+                        <a:t>DEFINITIONS; Floods; Droughts; Desertification.</a:t>
                       </a:r>
                       <a:endParaRPr lang="en-US" sz="1600" dirty="0">
                         <a:latin typeface="Calibri" charset="0"/>
@@ -18769,636 +19939,7 @@
             <a:pPr algn="ctr"/>
             <a:fld id="{F7021451-1387-4CA6-816F-3879F97B5CBC}" type="slidenum">
               <a:rPr b="1" lang="en-US"/>
-              <a:t>46</a:t>
-            </a:fld>
-            <a:endParaRPr lang="en-US"/>
-          </a:p>
-        </p:txBody>
-      </p:sp>
-    </p:spTree>
-  </p:cSld>
-  <p:clrMapOvr>
-    <a:masterClrMapping/>
-  </p:clrMapOvr>
-</p:sld>
-</file>
-
-<file path=ppt/slides/slide47.xml><?xml version="1.0" encoding="utf-8"?>
-<p:sld xmlns:a="http://schemas.openxmlformats.org/drawingml/2006/main" xmlns:r="http://schemas.openxmlformats.org/officeDocument/2006/relationships" xmlns:p="http://schemas.openxmlformats.org/presentationml/2006/main">
-  <p:cSld name="Slide 47">
-    <p:spTree>
-      <p:nvGrpSpPr>
-        <p:cNvPr id="1" name=""/>
-        <p:cNvGrpSpPr/>
-        <p:nvPr/>
-      </p:nvGrpSpPr>
-      <p:grpSpPr>
-        <a:xfrm>
-          <a:off x="0" y="0"/>
-          <a:ext cx="0" cy="0"/>
-          <a:chOff x="0" y="0"/>
-          <a:chExt cx="0" cy="0"/>
-        </a:xfrm>
-      </p:grpSpPr>
-      <p:sp>
-        <p:nvSpPr>
-          <p:cNvPr id="2" name="Text 0"/>
-          <p:cNvSpPr/>
-          <p:nvPr/>
-        </p:nvSpPr>
-        <p:spPr>
-          <a:xfrm>
-            <a:off x="457200" y="713232"/>
-            <a:ext cx="11368735" cy="274320"/>
-          </a:xfrm>
-          <a:prstGeom prst="rect">
-            <a:avLst/>
-          </a:prstGeom>
-          <a:noFill/>
-          <a:ln/>
-        </p:spPr>
-        <p:txBody>
-          <a:bodyPr wrap="square" lIns="0" tIns="0" rIns="0" bIns="0" rtlCol="0" anchor="ctr"/>
-          <a:lstStyle/>
-          <a:p>
-            <a:pPr algn="r" indent="0" marL="0">
-              <a:buNone/>
-            </a:pPr>
-            <a:r>
-              <a:rPr lang="en-US" sz="1400" b="1" dirty="0">
-                <a:solidFill>
-                  <a:srgbClr val="1C3F6E"/>
-                </a:solidFill>
-                <a:latin typeface="Calibri" pitchFamily="34" charset="0"/>
-                <a:ea typeface="Calibri" pitchFamily="34" charset="-122"/>
-                <a:cs typeface="Calibri" pitchFamily="34" charset="-120"/>
-              </a:rPr>
-              <a:t>TEACHER'S NOTE</a:t>
-            </a:r>
-            <a:endParaRPr lang="en-US" sz="1400" dirty="0"/>
-          </a:p>
-        </p:txBody>
-      </p:sp>
-      <p:pic>
-        <p:nvPicPr>
-          <p:cNvPr id="3" name="Image 0" descr="/home/claude/f4/img/minesec_sheet.png">    </p:cNvPr>
-          <p:cNvPicPr>
-            <a:picLocks noChangeAspect="1"/>
-          </p:cNvPicPr>
-          <p:nvPr/>
-        </p:nvPicPr>
-        <p:blipFill>
-          <a:blip r:embed="rId1"/>
-          <a:stretch>
-            <a:fillRect/>
-          </a:stretch>
-        </p:blipFill>
-        <p:spPr>
-          <a:xfrm>
-            <a:off x="0" y="658368"/>
-            <a:ext cx="5120640" cy="5833872"/>
-          </a:xfrm>
-          <a:prstGeom prst="rect">
-            <a:avLst/>
-          </a:prstGeom>
-        </p:spPr>
-      </p:pic>
-      <p:sp>
-        <p:nvSpPr>
-          <p:cNvPr id="4" name="Text 1"/>
-          <p:cNvSpPr/>
-          <p:nvPr/>
-        </p:nvSpPr>
-        <p:spPr>
-          <a:xfrm>
-            <a:off x="5349240" y="1005840"/>
-            <a:ext cx="6522415" cy="731520"/>
-          </a:xfrm>
-          <a:prstGeom prst="rect">
-            <a:avLst/>
-          </a:prstGeom>
-          <a:noFill/>
-          <a:ln/>
-        </p:spPr>
-        <p:txBody>
-          <a:bodyPr wrap="square" lIns="0" tIns="0" rIns="0" bIns="0" rtlCol="0" anchor="ctr">
-            <a:normAutofit/>
-          </a:bodyPr>
-          <a:lstStyle/>
-          <a:p>
-            <a:pPr algn="ctr" indent="0" marL="0">
-              <a:buNone/>
-            </a:pPr>
-            <a:r>
-              <a:rPr lang="en-US" sz="3600" b="1" dirty="0">
-                <a:solidFill>
-                  <a:srgbClr val="990011"/>
-                </a:solidFill>
-                <a:latin typeface="Times New Roman" pitchFamily="34" charset="0"/>
-                <a:ea typeface="Times New Roman" pitchFamily="34" charset="-122"/>
-                <a:cs typeface="Times New Roman" pitchFamily="34" charset="-120"/>
-              </a:rPr>
-              <a:t>Teacher's Note</a:t>
-            </a:r>
-            <a:endParaRPr lang="en-US" sz="3600" dirty="0"/>
-          </a:p>
-        </p:txBody>
-      </p:sp>
-      <p:sp>
-        <p:nvSpPr>
-          <p:cNvPr id="5" name="Text 2"/>
-          <p:cNvSpPr/>
-          <p:nvPr/>
-        </p:nvSpPr>
-        <p:spPr>
-          <a:xfrm>
-            <a:off x="5349240" y="1783080"/>
-            <a:ext cx="6522415" cy="4663440"/>
-          </a:xfrm>
-          <a:prstGeom prst="rect">
-            <a:avLst/>
-          </a:prstGeom>
-          <a:noFill/>
-          <a:ln/>
-        </p:spPr>
-        <p:txBody>
-          <a:bodyPr wrap="square" lIns="0" tIns="0" rIns="0" bIns="0" rtlCol="0" anchor="t"/>
-          <a:lstStyle/>
-          <a:p>
-            <a:pPr algn="l" marL="342900" indent="-342900">
-              <a:spcAft>
-                <a:spcPts val="800"/>
-              </a:spcAft>
-              <a:buSzPct val="100000"/>
-              <a:buChar char="•"/>
-            </a:pPr>
-            <a:r>
-              <a:rPr lang="en-US" sz="2000" dirty="0">
-                <a:solidFill>
-                  <a:srgbClr val="111111"/>
-                </a:solidFill>
-                <a:latin typeface="Calibri" pitchFamily="34" charset="0"/>
-                <a:ea typeface="Calibri" pitchFamily="34" charset="-122"/>
-                <a:cs typeface="Calibri" pitchFamily="34" charset="-120"/>
-              </a:rPr>
-              <a:t>Timing: Homework correction, plan, objectives 4 min | Recall, situation, action 6 min | 3 activities 12 min | Board summary (copying) 15 min | Evaluation, remediation 5 min | Homework, next lesson 3 min | Logbook 5 min</a:t>
-            </a:r>
-            <a:endParaRPr lang="en-US" sz="2000" dirty="0"/>
-          </a:p>
-          <a:p>
-            <a:pPr algn="l" marL="342900" indent="-342900">
-              <a:spcAft>
-                <a:spcPts val="800"/>
-              </a:spcAft>
-              <a:buSzPct val="100000"/>
-              <a:buChar char="•"/>
-            </a:pPr>
-            <a:r>
-              <a:rPr lang="en-US" sz="2000" dirty="0">
-                <a:solidFill>
-                  <a:srgbClr val="111111"/>
-                </a:solidFill>
-                <a:latin typeface="Calibri" pitchFamily="34" charset="0"/>
-                <a:ea typeface="Calibri" pitchFamily="34" charset="-122"/>
-                <a:cs typeface="Calibri" pitchFamily="34" charset="-120"/>
-              </a:rPr>
-              <a:t>Without the projector (Activity 1): describe the flood of 2012.</a:t>
-            </a:r>
-            <a:endParaRPr lang="en-US" sz="2000" dirty="0"/>
-          </a:p>
-          <a:p>
-            <a:pPr algn="l" marL="342900" indent="-342900">
-              <a:spcAft>
-                <a:spcPts val="800"/>
-              </a:spcAft>
-              <a:buSzPct val="100000"/>
-              <a:buChar char="•"/>
-            </a:pPr>
-            <a:r>
-              <a:rPr lang="en-US" sz="2000" dirty="0">
-                <a:solidFill>
-                  <a:srgbClr val="111111"/>
-                </a:solidFill>
-                <a:latin typeface="Calibri" pitchFamily="34" charset="0"/>
-                <a:ea typeface="Calibri" pitchFamily="34" charset="-122"/>
-                <a:cs typeface="Calibri" pitchFamily="34" charset="-120"/>
-              </a:rPr>
-              <a:t>Without the projector (Activity 2): describe a year when the rains stopped early.</a:t>
-            </a:r>
-            <a:endParaRPr lang="en-US" sz="2000" dirty="0"/>
-          </a:p>
-          <a:p>
-            <a:pPr algn="l" marL="342900" indent="-342900">
-              <a:spcAft>
-                <a:spcPts val="800"/>
-              </a:spcAft>
-              <a:buSzPct val="100000"/>
-              <a:buChar char="•"/>
-            </a:pPr>
-            <a:r>
-              <a:rPr lang="en-US" sz="2000" dirty="0">
-                <a:solidFill>
-                  <a:srgbClr val="111111"/>
-                </a:solidFill>
-                <a:latin typeface="Calibri" pitchFamily="34" charset="0"/>
-                <a:ea typeface="Calibri" pitchFamily="34" charset="-122"/>
-                <a:cs typeface="Calibri" pitchFamily="34" charset="-120"/>
-              </a:rPr>
-              <a:t>Without the projector (Activity 3): describe the zaï pits of the Sahel.</a:t>
-            </a:r>
-            <a:endParaRPr lang="en-US" sz="2000" dirty="0"/>
-          </a:p>
-        </p:txBody>
-      </p:sp>
-      <p:sp>
-        <p:nvSpPr>
-          <p:cNvPr id="25" name="Slide Number Placeholder 0"/>
-          <p:cNvSpPr>
-            <a:spLocks noGrp="1"/>
-          </p:cNvSpPr>
-          <p:nvPr>
-            <p:ph type="sldNum" sz="quarter" idx="4294967295"/>
-          </p:nvPr>
-        </p:nvSpPr>
-        <p:spPr>
-          <a:xfrm>
-            <a:off x="27432" y="91440"/>
-            <a:ext cx="585216" cy="475488"/>
-          </a:xfrm>
-          <a:prstGeom prst="rect">
-            <a:avLst/>
-          </a:prstGeom>
-          <a:extLst>
-            <a:ext uri="{C572A759-6A51-4108-AA02-DFA0A04FC94B}">
-              <ma14:wrappingTextBoxFlag xmlns:ma14="http://schemas.microsoft.com/office/mac/drawingml/2011/main" val="0"/>
-            </a:ext>
-          </a:extLst>
-        </p:spPr>
-        <p:txBody>
-          <a:bodyPr/>
-          <a:lstStyle>
-            <a:lvl1pPr>
-              <a:defRPr sz="2000">
-                <a:solidFill>
-                  <a:srgbClr val="FFFFFF"/>
-                </a:solidFill>
-                <a:latin typeface="Calibri"/>
-                <a:ea typeface="Calibri"/>
-                <a:cs typeface="Calibri"/>
-              </a:defRPr>
-            </a:lvl1pPr>
-          </a:lstStyle>
-          <a:p>
-            <a:pPr algn="ctr"/>
-            <a:fld id="{F7021451-1387-4CA6-816F-3879F97B5CBC}" type="slidenum">
-              <a:rPr b="1" lang="en-US"/>
-              <a:t>47</a:t>
-            </a:fld>
-            <a:endParaRPr lang="en-US"/>
-          </a:p>
-        </p:txBody>
-      </p:sp>
-    </p:spTree>
-  </p:cSld>
-  <p:clrMapOvr>
-    <a:masterClrMapping/>
-  </p:clrMapOvr>
-</p:sld>
-</file>
-
-<file path=ppt/slides/slide48.xml><?xml version="1.0" encoding="utf-8"?>
-<p:sld xmlns:a="http://schemas.openxmlformats.org/drawingml/2006/main" xmlns:r="http://schemas.openxmlformats.org/officeDocument/2006/relationships" xmlns:p="http://schemas.openxmlformats.org/presentationml/2006/main">
-  <p:cSld name="Slide 48">
-    <p:spTree>
-      <p:nvGrpSpPr>
-        <p:cNvPr id="1" name=""/>
-        <p:cNvGrpSpPr/>
-        <p:nvPr/>
-      </p:nvGrpSpPr>
-      <p:grpSpPr>
-        <a:xfrm>
-          <a:off x="0" y="0"/>
-          <a:ext cx="0" cy="0"/>
-          <a:chOff x="0" y="0"/>
-          <a:chExt cx="0" cy="0"/>
-        </a:xfrm>
-      </p:grpSpPr>
-      <p:sp>
-        <p:nvSpPr>
-          <p:cNvPr id="2" name="Text 0"/>
-          <p:cNvSpPr/>
-          <p:nvPr/>
-        </p:nvSpPr>
-        <p:spPr>
-          <a:xfrm>
-            <a:off x="457200" y="713232"/>
-            <a:ext cx="11368735" cy="274320"/>
-          </a:xfrm>
-          <a:prstGeom prst="rect">
-            <a:avLst/>
-          </a:prstGeom>
-          <a:noFill/>
-          <a:ln/>
-        </p:spPr>
-        <p:txBody>
-          <a:bodyPr wrap="square" lIns="0" tIns="0" rIns="0" bIns="0" rtlCol="0" anchor="ctr"/>
-          <a:lstStyle/>
-          <a:p>
-            <a:pPr algn="r" indent="0" marL="0">
-              <a:buNone/>
-            </a:pPr>
-            <a:r>
-              <a:rPr lang="en-US" sz="1400" b="1" dirty="0">
-                <a:solidFill>
-                  <a:srgbClr val="1C3F6E"/>
-                </a:solidFill>
-                <a:latin typeface="Calibri" pitchFamily="34" charset="0"/>
-                <a:ea typeface="Calibri" pitchFamily="34" charset="-122"/>
-                <a:cs typeface="Calibri" pitchFamily="34" charset="-120"/>
-              </a:rPr>
-              <a:t>REFERENCES</a:t>
-            </a:r>
-            <a:endParaRPr lang="en-US" sz="1400" dirty="0"/>
-          </a:p>
-        </p:txBody>
-      </p:sp>
-      <p:pic>
-        <p:nvPicPr>
-          <p:cNvPr id="3" name="Image 0" descr="/home/claude/f4/img/minesec_sheet.png">    </p:cNvPr>
-          <p:cNvPicPr>
-            <a:picLocks noChangeAspect="1"/>
-          </p:cNvPicPr>
-          <p:nvPr/>
-        </p:nvPicPr>
-        <p:blipFill>
-          <a:blip r:embed="rId1"/>
-          <a:stretch>
-            <a:fillRect/>
-          </a:stretch>
-        </p:blipFill>
-        <p:spPr>
-          <a:xfrm>
-            <a:off x="0" y="658368"/>
-            <a:ext cx="3840480" cy="5833872"/>
-          </a:xfrm>
-          <a:prstGeom prst="rect">
-            <a:avLst/>
-          </a:prstGeom>
-        </p:spPr>
-      </p:pic>
-      <p:sp>
-        <p:nvSpPr>
-          <p:cNvPr id="4" name="Text 1"/>
-          <p:cNvSpPr/>
-          <p:nvPr/>
-        </p:nvSpPr>
-        <p:spPr>
-          <a:xfrm>
-            <a:off x="4069080" y="1005840"/>
-            <a:ext cx="7802575" cy="731520"/>
-          </a:xfrm>
-          <a:prstGeom prst="rect">
-            <a:avLst/>
-          </a:prstGeom>
-          <a:noFill/>
-          <a:ln/>
-        </p:spPr>
-        <p:txBody>
-          <a:bodyPr wrap="square" lIns="0" tIns="0" rIns="0" bIns="0" rtlCol="0" anchor="ctr">
-            <a:normAutofit/>
-          </a:bodyPr>
-          <a:lstStyle/>
-          <a:p>
-            <a:pPr algn="ctr" indent="0" marL="0">
-              <a:buNone/>
-            </a:pPr>
-            <a:r>
-              <a:rPr lang="en-US" sz="3600" b="1" dirty="0">
-                <a:solidFill>
-                  <a:srgbClr val="990011"/>
-                </a:solidFill>
-                <a:latin typeface="Times New Roman" pitchFamily="34" charset="0"/>
-                <a:ea typeface="Times New Roman" pitchFamily="34" charset="-122"/>
-                <a:cs typeface="Times New Roman" pitchFamily="34" charset="-120"/>
-              </a:rPr>
-              <a:t>References</a:t>
-            </a:r>
-            <a:endParaRPr lang="en-US" sz="3600" dirty="0"/>
-          </a:p>
-        </p:txBody>
-      </p:sp>
-      <p:sp>
-        <p:nvSpPr>
-          <p:cNvPr id="5" name="Text 2"/>
-          <p:cNvSpPr/>
-          <p:nvPr/>
-        </p:nvSpPr>
-        <p:spPr>
-          <a:xfrm>
-            <a:off x="4069080" y="1783080"/>
-            <a:ext cx="7802575" cy="4663440"/>
-          </a:xfrm>
-          <a:prstGeom prst="rect">
-            <a:avLst/>
-          </a:prstGeom>
-          <a:noFill/>
-          <a:ln/>
-        </p:spPr>
-        <p:txBody>
-          <a:bodyPr wrap="square" lIns="0" tIns="0" rIns="0" bIns="0" rtlCol="0" anchor="t"/>
-          <a:lstStyle/>
-          <a:p>
-            <a:pPr algn="l" marL="342900" indent="-342900">
-              <a:spcAft>
-                <a:spcPts val="800"/>
-              </a:spcAft>
-              <a:buSzPct val="100000"/>
-              <a:buChar char="•"/>
-            </a:pPr>
-            <a:r>
-              <a:rPr lang="en-US" sz="1800" dirty="0">
-                <a:solidFill>
-                  <a:srgbClr val="111111"/>
-                </a:solidFill>
-                <a:latin typeface="Calibri" pitchFamily="34" charset="0"/>
-                <a:ea typeface="Calibri" pitchFamily="34" charset="-122"/>
-                <a:cs typeface="Calibri" pitchFamily="34" charset="-120"/>
-              </a:rPr>
-              <a:t>National Geography Syllabus (MINESEC), Form 4 — Module 3: Weather and Climate.</a:t>
-            </a:r>
-            <a:endParaRPr lang="en-US" sz="1800" dirty="0"/>
-          </a:p>
-          <a:p>
-            <a:pPr algn="l" marL="342900" indent="-342900">
-              <a:spcAft>
-                <a:spcPts val="800"/>
-              </a:spcAft>
-              <a:buSzPct val="100000"/>
-              <a:buChar char="•"/>
-            </a:pPr>
-            <a:r>
-              <a:rPr lang="en-US" sz="1800" dirty="0">
-                <a:solidFill>
-                  <a:srgbClr val="111111"/>
-                </a:solidFill>
-                <a:latin typeface="Calibri" pitchFamily="34" charset="0"/>
-                <a:ea typeface="Calibri" pitchFamily="34" charset="-122"/>
-                <a:cs typeface="Calibri" pitchFamily="34" charset="-120"/>
-              </a:rPr>
-              <a:t>Teacher's lesson notes (f4.docx), checked and corrected where necessary.</a:t>
-            </a:r>
-            <a:endParaRPr lang="en-US" sz="1800" dirty="0"/>
-          </a:p>
-          <a:p>
-            <a:pPr algn="l" marL="342900" indent="-342900">
-              <a:spcAft>
-                <a:spcPts val="800"/>
-              </a:spcAft>
-              <a:buSzPct val="100000"/>
-              <a:buChar char="•"/>
-            </a:pPr>
-            <a:r>
-              <a:rPr lang="en-US" sz="1800" dirty="0">
-                <a:solidFill>
-                  <a:srgbClr val="111111"/>
-                </a:solidFill>
-                <a:latin typeface="Calibri" pitchFamily="34" charset="0"/>
-                <a:ea typeface="Calibri" pitchFamily="34" charset="-122"/>
-                <a:cs typeface="Calibri" pitchFamily="34" charset="-120"/>
-              </a:rPr>
-              <a:t>MINEPDED: Opération Sahel Vert; African Union: Great Green Wall.</a:t>
-            </a:r>
-            <a:endParaRPr lang="en-US" sz="1800" dirty="0"/>
-          </a:p>
-          <a:p>
-            <a:pPr algn="l" marL="342900" indent="-342900">
-              <a:spcAft>
-                <a:spcPts val="800"/>
-              </a:spcAft>
-              <a:buSzPct val="100000"/>
-              <a:buChar char="•"/>
-            </a:pPr>
-            <a:r>
-              <a:rPr lang="en-US" sz="1800" dirty="0">
-                <a:solidFill>
-                  <a:srgbClr val="111111"/>
-                </a:solidFill>
-                <a:latin typeface="Calibri" pitchFamily="34" charset="0"/>
-                <a:ea typeface="Calibri" pitchFamily="34" charset="-122"/>
-                <a:cs typeface="Calibri" pitchFamily="34" charset="-120"/>
-              </a:rPr>
-              <a:t>Photo, Activity 1: “Flood in Accra” by Stig Nygaard, CC BY 2.0, via Flickr (https://www.flickr.com/photos/10259776@N00/181742000)</a:t>
-            </a:r>
-            <a:endParaRPr lang="en-US" sz="1800" dirty="0"/>
-          </a:p>
-          <a:p>
-            <a:pPr algn="l" marL="342900" indent="-342900">
-              <a:spcAft>
-                <a:spcPts val="800"/>
-              </a:spcAft>
-              <a:buSzPct val="100000"/>
-              <a:buChar char="•"/>
-            </a:pPr>
-            <a:r>
-              <a:rPr lang="en-US" sz="1800" dirty="0">
-                <a:solidFill>
-                  <a:srgbClr val="111111"/>
-                </a:solidFill>
-                <a:latin typeface="Calibri" pitchFamily="34" charset="0"/>
-                <a:ea typeface="Calibri" pitchFamily="34" charset="-122"/>
-                <a:cs typeface="Calibri" pitchFamily="34" charset="-120"/>
-              </a:rPr>
-              <a:t>Photo, Activity 2: “Imagine a world without trees” by aloshbennett, CC BY 2.0, via Flickr (https://www.flickr.com/photos/13203757@N00/3480223314)</a:t>
-            </a:r>
-            <a:endParaRPr lang="en-US" sz="1800" dirty="0"/>
-          </a:p>
-          <a:p>
-            <a:pPr algn="l" marL="342900" indent="-342900">
-              <a:spcAft>
-                <a:spcPts val="800"/>
-              </a:spcAft>
-              <a:buSzPct val="100000"/>
-              <a:buChar char="•"/>
-            </a:pPr>
-            <a:r>
-              <a:rPr lang="en-US" sz="1800" dirty="0">
-                <a:solidFill>
-                  <a:srgbClr val="111111"/>
-                </a:solidFill>
-                <a:latin typeface="Calibri" pitchFamily="34" charset="0"/>
-                <a:ea typeface="Calibri" pitchFamily="34" charset="-122"/>
-                <a:cs typeface="Calibri" pitchFamily="34" charset="-120"/>
-              </a:rPr>
-              <a:t>Photo, Activity 3: “Women sowing okra in zai holes” by abossuet, CC BY-NC 2.0, via Flickr (https://www.flickr.com/photos/30450178@N07/7175750825)</a:t>
-            </a:r>
-            <a:endParaRPr lang="en-US" sz="1800" dirty="0"/>
-          </a:p>
-          <a:p>
-            <a:pPr algn="l" marL="342900" indent="-342900">
-              <a:spcAft>
-                <a:spcPts val="800"/>
-              </a:spcAft>
-              <a:buSzPct val="100000"/>
-              <a:buChar char="•"/>
-            </a:pPr>
-            <a:r>
-              <a:rPr lang="en-US" sz="1800" dirty="0">
-                <a:solidFill>
-                  <a:srgbClr val="111111"/>
-                </a:solidFill>
-                <a:latin typeface="Calibri" pitchFamily="34" charset="0"/>
-                <a:ea typeface="Calibri" pitchFamily="34" charset="-122"/>
-                <a:cs typeface="Calibri" pitchFamily="34" charset="-120"/>
-              </a:rPr>
-              <a:t>Diagrams and animations: drawn for this lesson (Geography Department).</a:t>
-            </a:r>
-            <a:endParaRPr lang="en-US" sz="1800" dirty="0"/>
-          </a:p>
-        </p:txBody>
-      </p:sp>
-      <p:sp>
-        <p:nvSpPr>
-          <p:cNvPr id="25" name="Slide Number Placeholder 0"/>
-          <p:cNvSpPr>
-            <a:spLocks noGrp="1"/>
-          </p:cNvSpPr>
-          <p:nvPr>
-            <p:ph type="sldNum" sz="quarter" idx="4294967295"/>
-          </p:nvPr>
-        </p:nvSpPr>
-        <p:spPr>
-          <a:xfrm>
-            <a:off x="27432" y="91440"/>
-            <a:ext cx="585216" cy="475488"/>
-          </a:xfrm>
-          <a:prstGeom prst="rect">
-            <a:avLst/>
-          </a:prstGeom>
-          <a:extLst>
-            <a:ext uri="{C572A759-6A51-4108-AA02-DFA0A04FC94B}">
-              <ma14:wrappingTextBoxFlag xmlns:ma14="http://schemas.microsoft.com/office/mac/drawingml/2011/main" val="0"/>
-            </a:ext>
-          </a:extLst>
-        </p:spPr>
-        <p:txBody>
-          <a:bodyPr/>
-          <a:lstStyle>
-            <a:lvl1pPr>
-              <a:defRPr sz="2000">
-                <a:solidFill>
-                  <a:srgbClr val="FFFFFF"/>
-                </a:solidFill>
-                <a:latin typeface="Calibri"/>
-                <a:ea typeface="Calibri"/>
-                <a:cs typeface="Calibri"/>
-              </a:defRPr>
-            </a:lvl1pPr>
-          </a:lstStyle>
-          <a:p>
-            <a:pPr algn="ctr"/>
-            <a:fld id="{F7021451-1387-4CA6-816F-3879F97B5CBC}" type="slidenum">
-              <a:rPr b="1" lang="en-US"/>
-              <a:t>48</a:t>
+              <a:t>49</a:t>
             </a:fld>
             <a:endParaRPr lang="en-US"/>
           </a:p>
@@ -19618,6 +20159,635 @@
             <a:fld id="{F7021451-1387-4CA6-816F-3879F97B5CBC}" type="slidenum">
               <a:rPr b="1" lang="en-US"/>
               <a:t>5</a:t>
+            </a:fld>
+            <a:endParaRPr lang="en-US"/>
+          </a:p>
+        </p:txBody>
+      </p:sp>
+    </p:spTree>
+  </p:cSld>
+  <p:clrMapOvr>
+    <a:masterClrMapping/>
+  </p:clrMapOvr>
+</p:sld>
+</file>
+
+<file path=ppt/slides/slide50.xml><?xml version="1.0" encoding="utf-8"?>
+<p:sld xmlns:a="http://schemas.openxmlformats.org/drawingml/2006/main" xmlns:r="http://schemas.openxmlformats.org/officeDocument/2006/relationships" xmlns:p="http://schemas.openxmlformats.org/presentationml/2006/main">
+  <p:cSld name="Slide 50">
+    <p:spTree>
+      <p:nvGrpSpPr>
+        <p:cNvPr id="1" name=""/>
+        <p:cNvGrpSpPr/>
+        <p:nvPr/>
+      </p:nvGrpSpPr>
+      <p:grpSpPr>
+        <a:xfrm>
+          <a:off x="0" y="0"/>
+          <a:ext cx="0" cy="0"/>
+          <a:chOff x="0" y="0"/>
+          <a:chExt cx="0" cy="0"/>
+        </a:xfrm>
+      </p:grpSpPr>
+      <p:sp>
+        <p:nvSpPr>
+          <p:cNvPr id="2" name="Text 0"/>
+          <p:cNvSpPr/>
+          <p:nvPr/>
+        </p:nvSpPr>
+        <p:spPr>
+          <a:xfrm>
+            <a:off x="457200" y="713232"/>
+            <a:ext cx="11368735" cy="274320"/>
+          </a:xfrm>
+          <a:prstGeom prst="rect">
+            <a:avLst/>
+          </a:prstGeom>
+          <a:noFill/>
+          <a:ln/>
+        </p:spPr>
+        <p:txBody>
+          <a:bodyPr wrap="square" lIns="0" tIns="0" rIns="0" bIns="0" rtlCol="0" anchor="ctr"/>
+          <a:lstStyle/>
+          <a:p>
+            <a:pPr algn="r" indent="0" marL="0">
+              <a:buNone/>
+            </a:pPr>
+            <a:r>
+              <a:rPr lang="en-US" sz="1400" b="1" dirty="0">
+                <a:solidFill>
+                  <a:srgbClr val="1C3F6E"/>
+                </a:solidFill>
+                <a:latin typeface="Calibri" pitchFamily="34" charset="0"/>
+                <a:ea typeface="Calibri" pitchFamily="34" charset="-122"/>
+                <a:cs typeface="Calibri" pitchFamily="34" charset="-120"/>
+              </a:rPr>
+              <a:t>TEACHER'S NOTE</a:t>
+            </a:r>
+            <a:endParaRPr lang="en-US" sz="1400" dirty="0"/>
+          </a:p>
+        </p:txBody>
+      </p:sp>
+      <p:pic>
+        <p:nvPicPr>
+          <p:cNvPr id="3" name="Image 0" descr="/home/claude/f4/img/minesec_sheet.png">    </p:cNvPr>
+          <p:cNvPicPr>
+            <a:picLocks noChangeAspect="1"/>
+          </p:cNvPicPr>
+          <p:nvPr/>
+        </p:nvPicPr>
+        <p:blipFill>
+          <a:blip r:embed="rId1"/>
+          <a:stretch>
+            <a:fillRect/>
+          </a:stretch>
+        </p:blipFill>
+        <p:spPr>
+          <a:xfrm>
+            <a:off x="0" y="658368"/>
+            <a:ext cx="5120640" cy="5833872"/>
+          </a:xfrm>
+          <a:prstGeom prst="rect">
+            <a:avLst/>
+          </a:prstGeom>
+        </p:spPr>
+      </p:pic>
+      <p:sp>
+        <p:nvSpPr>
+          <p:cNvPr id="4" name="Text 1"/>
+          <p:cNvSpPr/>
+          <p:nvPr/>
+        </p:nvSpPr>
+        <p:spPr>
+          <a:xfrm>
+            <a:off x="5349240" y="1005840"/>
+            <a:ext cx="6522415" cy="731520"/>
+          </a:xfrm>
+          <a:prstGeom prst="rect">
+            <a:avLst/>
+          </a:prstGeom>
+          <a:noFill/>
+          <a:ln/>
+        </p:spPr>
+        <p:txBody>
+          <a:bodyPr wrap="square" lIns="0" tIns="0" rIns="0" bIns="0" rtlCol="0" anchor="ctr">
+            <a:normAutofit/>
+          </a:bodyPr>
+          <a:lstStyle/>
+          <a:p>
+            <a:pPr algn="ctr" indent="0" marL="0">
+              <a:buNone/>
+            </a:pPr>
+            <a:r>
+              <a:rPr lang="en-US" sz="3600" b="1" dirty="0">
+                <a:solidFill>
+                  <a:srgbClr val="990011"/>
+                </a:solidFill>
+                <a:latin typeface="Times New Roman" pitchFamily="34" charset="0"/>
+                <a:ea typeface="Times New Roman" pitchFamily="34" charset="-122"/>
+                <a:cs typeface="Times New Roman" pitchFamily="34" charset="-120"/>
+              </a:rPr>
+              <a:t>Teacher's Note</a:t>
+            </a:r>
+            <a:endParaRPr lang="en-US" sz="3600" dirty="0"/>
+          </a:p>
+        </p:txBody>
+      </p:sp>
+      <p:sp>
+        <p:nvSpPr>
+          <p:cNvPr id="5" name="Text 2"/>
+          <p:cNvSpPr/>
+          <p:nvPr/>
+        </p:nvSpPr>
+        <p:spPr>
+          <a:xfrm>
+            <a:off x="5349240" y="1783080"/>
+            <a:ext cx="6522415" cy="4663440"/>
+          </a:xfrm>
+          <a:prstGeom prst="rect">
+            <a:avLst/>
+          </a:prstGeom>
+          <a:noFill/>
+          <a:ln/>
+        </p:spPr>
+        <p:txBody>
+          <a:bodyPr wrap="square" lIns="0" tIns="0" rIns="0" bIns="0" rtlCol="0" anchor="t"/>
+          <a:lstStyle/>
+          <a:p>
+            <a:pPr algn="l" marL="342900" indent="-342900">
+              <a:spcAft>
+                <a:spcPts val="800"/>
+              </a:spcAft>
+              <a:buSzPct val="100000"/>
+              <a:buChar char="•"/>
+            </a:pPr>
+            <a:r>
+              <a:rPr lang="en-US" sz="2000" dirty="0">
+                <a:solidFill>
+                  <a:srgbClr val="111111"/>
+                </a:solidFill>
+                <a:latin typeface="Calibri" pitchFamily="34" charset="0"/>
+                <a:ea typeface="Calibri" pitchFamily="34" charset="-122"/>
+                <a:cs typeface="Calibri" pitchFamily="34" charset="-120"/>
+              </a:rPr>
+              <a:t>Timing: Homework correction, plan, objectives 4 min | Recall, situation, action 6 min | 3 activities 12 min | Board summary (copying) 15 min | Evaluation, remediation 5 min | Homework, next lesson 3 min | Logbook 5 min</a:t>
+            </a:r>
+            <a:endParaRPr lang="en-US" sz="2000" dirty="0"/>
+          </a:p>
+          <a:p>
+            <a:pPr algn="l" marL="342900" indent="-342900">
+              <a:spcAft>
+                <a:spcPts val="800"/>
+              </a:spcAft>
+              <a:buSzPct val="100000"/>
+              <a:buChar char="•"/>
+            </a:pPr>
+            <a:r>
+              <a:rPr lang="en-US" sz="2000" dirty="0">
+                <a:solidFill>
+                  <a:srgbClr val="111111"/>
+                </a:solidFill>
+                <a:latin typeface="Calibri" pitchFamily="34" charset="0"/>
+                <a:ea typeface="Calibri" pitchFamily="34" charset="-122"/>
+                <a:cs typeface="Calibri" pitchFamily="34" charset="-120"/>
+              </a:rPr>
+              <a:t>Without the projector (Activity 1): describe the flood of 2012.</a:t>
+            </a:r>
+            <a:endParaRPr lang="en-US" sz="2000" dirty="0"/>
+          </a:p>
+          <a:p>
+            <a:pPr algn="l" marL="342900" indent="-342900">
+              <a:spcAft>
+                <a:spcPts val="800"/>
+              </a:spcAft>
+              <a:buSzPct val="100000"/>
+              <a:buChar char="•"/>
+            </a:pPr>
+            <a:r>
+              <a:rPr lang="en-US" sz="2000" dirty="0">
+                <a:solidFill>
+                  <a:srgbClr val="111111"/>
+                </a:solidFill>
+                <a:latin typeface="Calibri" pitchFamily="34" charset="0"/>
+                <a:ea typeface="Calibri" pitchFamily="34" charset="-122"/>
+                <a:cs typeface="Calibri" pitchFamily="34" charset="-120"/>
+              </a:rPr>
+              <a:t>Without the projector (Activity 2): compare a dry year and a spreading desert.</a:t>
+            </a:r>
+            <a:endParaRPr lang="en-US" sz="2000" dirty="0"/>
+          </a:p>
+          <a:p>
+            <a:pPr algn="l" marL="342900" indent="-342900">
+              <a:spcAft>
+                <a:spcPts val="800"/>
+              </a:spcAft>
+              <a:buSzPct val="100000"/>
+              <a:buChar char="•"/>
+            </a:pPr>
+            <a:r>
+              <a:rPr lang="en-US" sz="2000" dirty="0">
+                <a:solidFill>
+                  <a:srgbClr val="111111"/>
+                </a:solidFill>
+                <a:latin typeface="Calibri" pitchFamily="34" charset="0"/>
+                <a:ea typeface="Calibri" pitchFamily="34" charset="-122"/>
+                <a:cs typeface="Calibri" pitchFamily="34" charset="-120"/>
+              </a:rPr>
+              <a:t>Without the projector (Activity 3): describe the zaï method.</a:t>
+            </a:r>
+            <a:endParaRPr lang="en-US" sz="2000" dirty="0"/>
+          </a:p>
+        </p:txBody>
+      </p:sp>
+      <p:sp>
+        <p:nvSpPr>
+          <p:cNvPr id="25" name="Slide Number Placeholder 0"/>
+          <p:cNvSpPr>
+            <a:spLocks noGrp="1"/>
+          </p:cNvSpPr>
+          <p:nvPr>
+            <p:ph type="sldNum" sz="quarter" idx="4294967295"/>
+          </p:nvPr>
+        </p:nvSpPr>
+        <p:spPr>
+          <a:xfrm>
+            <a:off x="27432" y="91440"/>
+            <a:ext cx="585216" cy="475488"/>
+          </a:xfrm>
+          <a:prstGeom prst="rect">
+            <a:avLst/>
+          </a:prstGeom>
+          <a:extLst>
+            <a:ext uri="{C572A759-6A51-4108-AA02-DFA0A04FC94B}">
+              <ma14:wrappingTextBoxFlag xmlns:ma14="http://schemas.microsoft.com/office/mac/drawingml/2011/main" val="0"/>
+            </a:ext>
+          </a:extLst>
+        </p:spPr>
+        <p:txBody>
+          <a:bodyPr/>
+          <a:lstStyle>
+            <a:lvl1pPr>
+              <a:defRPr sz="2000">
+                <a:solidFill>
+                  <a:srgbClr val="FFFFFF"/>
+                </a:solidFill>
+                <a:latin typeface="Calibri"/>
+                <a:ea typeface="Calibri"/>
+                <a:cs typeface="Calibri"/>
+              </a:defRPr>
+            </a:lvl1pPr>
+          </a:lstStyle>
+          <a:p>
+            <a:pPr algn="ctr"/>
+            <a:fld id="{F7021451-1387-4CA6-816F-3879F97B5CBC}" type="slidenum">
+              <a:rPr b="1" lang="en-US"/>
+              <a:t>50</a:t>
+            </a:fld>
+            <a:endParaRPr lang="en-US"/>
+          </a:p>
+        </p:txBody>
+      </p:sp>
+    </p:spTree>
+  </p:cSld>
+  <p:clrMapOvr>
+    <a:masterClrMapping/>
+  </p:clrMapOvr>
+</p:sld>
+</file>
+
+<file path=ppt/slides/slide51.xml><?xml version="1.0" encoding="utf-8"?>
+<p:sld xmlns:a="http://schemas.openxmlformats.org/drawingml/2006/main" xmlns:r="http://schemas.openxmlformats.org/officeDocument/2006/relationships" xmlns:p="http://schemas.openxmlformats.org/presentationml/2006/main">
+  <p:cSld name="Slide 51">
+    <p:spTree>
+      <p:nvGrpSpPr>
+        <p:cNvPr id="1" name=""/>
+        <p:cNvGrpSpPr/>
+        <p:nvPr/>
+      </p:nvGrpSpPr>
+      <p:grpSpPr>
+        <a:xfrm>
+          <a:off x="0" y="0"/>
+          <a:ext cx="0" cy="0"/>
+          <a:chOff x="0" y="0"/>
+          <a:chExt cx="0" cy="0"/>
+        </a:xfrm>
+      </p:grpSpPr>
+      <p:sp>
+        <p:nvSpPr>
+          <p:cNvPr id="2" name="Text 0"/>
+          <p:cNvSpPr/>
+          <p:nvPr/>
+        </p:nvSpPr>
+        <p:spPr>
+          <a:xfrm>
+            <a:off x="457200" y="713232"/>
+            <a:ext cx="11368735" cy="274320"/>
+          </a:xfrm>
+          <a:prstGeom prst="rect">
+            <a:avLst/>
+          </a:prstGeom>
+          <a:noFill/>
+          <a:ln/>
+        </p:spPr>
+        <p:txBody>
+          <a:bodyPr wrap="square" lIns="0" tIns="0" rIns="0" bIns="0" rtlCol="0" anchor="ctr"/>
+          <a:lstStyle/>
+          <a:p>
+            <a:pPr algn="r" indent="0" marL="0">
+              <a:buNone/>
+            </a:pPr>
+            <a:r>
+              <a:rPr lang="en-US" sz="1400" b="1" dirty="0">
+                <a:solidFill>
+                  <a:srgbClr val="1C3F6E"/>
+                </a:solidFill>
+                <a:latin typeface="Calibri" pitchFamily="34" charset="0"/>
+                <a:ea typeface="Calibri" pitchFamily="34" charset="-122"/>
+                <a:cs typeface="Calibri" pitchFamily="34" charset="-120"/>
+              </a:rPr>
+              <a:t>REFERENCES</a:t>
+            </a:r>
+            <a:endParaRPr lang="en-US" sz="1400" dirty="0"/>
+          </a:p>
+        </p:txBody>
+      </p:sp>
+      <p:pic>
+        <p:nvPicPr>
+          <p:cNvPr id="3" name="Image 0" descr="/home/claude/f4/img/minesec_sheet.png">    </p:cNvPr>
+          <p:cNvPicPr>
+            <a:picLocks noChangeAspect="1"/>
+          </p:cNvPicPr>
+          <p:nvPr/>
+        </p:nvPicPr>
+        <p:blipFill>
+          <a:blip r:embed="rId1"/>
+          <a:stretch>
+            <a:fillRect/>
+          </a:stretch>
+        </p:blipFill>
+        <p:spPr>
+          <a:xfrm>
+            <a:off x="0" y="658368"/>
+            <a:ext cx="3840480" cy="5833872"/>
+          </a:xfrm>
+          <a:prstGeom prst="rect">
+            <a:avLst/>
+          </a:prstGeom>
+        </p:spPr>
+      </p:pic>
+      <p:sp>
+        <p:nvSpPr>
+          <p:cNvPr id="4" name="Text 1"/>
+          <p:cNvSpPr/>
+          <p:nvPr/>
+        </p:nvSpPr>
+        <p:spPr>
+          <a:xfrm>
+            <a:off x="4069080" y="1005840"/>
+            <a:ext cx="7802575" cy="731520"/>
+          </a:xfrm>
+          <a:prstGeom prst="rect">
+            <a:avLst/>
+          </a:prstGeom>
+          <a:noFill/>
+          <a:ln/>
+        </p:spPr>
+        <p:txBody>
+          <a:bodyPr wrap="square" lIns="0" tIns="0" rIns="0" bIns="0" rtlCol="0" anchor="ctr">
+            <a:normAutofit/>
+          </a:bodyPr>
+          <a:lstStyle/>
+          <a:p>
+            <a:pPr algn="ctr" indent="0" marL="0">
+              <a:buNone/>
+            </a:pPr>
+            <a:r>
+              <a:rPr lang="en-US" sz="3600" b="1" dirty="0">
+                <a:solidFill>
+                  <a:srgbClr val="990011"/>
+                </a:solidFill>
+                <a:latin typeface="Times New Roman" pitchFamily="34" charset="0"/>
+                <a:ea typeface="Times New Roman" pitchFamily="34" charset="-122"/>
+                <a:cs typeface="Times New Roman" pitchFamily="34" charset="-120"/>
+              </a:rPr>
+              <a:t>References</a:t>
+            </a:r>
+            <a:endParaRPr lang="en-US" sz="3600" dirty="0"/>
+          </a:p>
+        </p:txBody>
+      </p:sp>
+      <p:sp>
+        <p:nvSpPr>
+          <p:cNvPr id="5" name="Text 2"/>
+          <p:cNvSpPr/>
+          <p:nvPr/>
+        </p:nvSpPr>
+        <p:spPr>
+          <a:xfrm>
+            <a:off x="4069080" y="1783080"/>
+            <a:ext cx="7802575" cy="4663440"/>
+          </a:xfrm>
+          <a:prstGeom prst="rect">
+            <a:avLst/>
+          </a:prstGeom>
+          <a:noFill/>
+          <a:ln/>
+        </p:spPr>
+        <p:txBody>
+          <a:bodyPr wrap="square" lIns="0" tIns="0" rIns="0" bIns="0" rtlCol="0" anchor="t"/>
+          <a:lstStyle/>
+          <a:p>
+            <a:pPr algn="l" marL="342900" indent="-342900">
+              <a:spcAft>
+                <a:spcPts val="800"/>
+              </a:spcAft>
+              <a:buSzPct val="100000"/>
+              <a:buChar char="•"/>
+            </a:pPr>
+            <a:r>
+              <a:rPr lang="en-US" sz="1800" dirty="0">
+                <a:solidFill>
+                  <a:srgbClr val="111111"/>
+                </a:solidFill>
+                <a:latin typeface="Calibri" pitchFamily="34" charset="0"/>
+                <a:ea typeface="Calibri" pitchFamily="34" charset="-122"/>
+                <a:cs typeface="Calibri" pitchFamily="34" charset="-120"/>
+              </a:rPr>
+              <a:t>National Geography Syllabus (MINESEC), Form 4 — Module 3: Weather and Climate.</a:t>
+            </a:r>
+            <a:endParaRPr lang="en-US" sz="1800" dirty="0"/>
+          </a:p>
+          <a:p>
+            <a:pPr algn="l" marL="342900" indent="-342900">
+              <a:spcAft>
+                <a:spcPts val="800"/>
+              </a:spcAft>
+              <a:buSzPct val="100000"/>
+              <a:buChar char="•"/>
+            </a:pPr>
+            <a:r>
+              <a:rPr lang="en-US" sz="1800" dirty="0">
+                <a:solidFill>
+                  <a:srgbClr val="111111"/>
+                </a:solidFill>
+                <a:latin typeface="Calibri" pitchFamily="34" charset="0"/>
+                <a:ea typeface="Calibri" pitchFamily="34" charset="-122"/>
+                <a:cs typeface="Calibri" pitchFamily="34" charset="-120"/>
+              </a:rPr>
+              <a:t>Teacher's lesson notes (f4.docx), checked and corrected where necessary.</a:t>
+            </a:r>
+            <a:endParaRPr lang="en-US" sz="1800" dirty="0"/>
+          </a:p>
+          <a:p>
+            <a:pPr algn="l" marL="342900" indent="-342900">
+              <a:spcAft>
+                <a:spcPts val="800"/>
+              </a:spcAft>
+              <a:buSzPct val="100000"/>
+              <a:buChar char="•"/>
+            </a:pPr>
+            <a:r>
+              <a:rPr lang="en-US" sz="1800" dirty="0">
+                <a:solidFill>
+                  <a:srgbClr val="111111"/>
+                </a:solidFill>
+                <a:latin typeface="Calibri" pitchFamily="34" charset="0"/>
+                <a:ea typeface="Calibri" pitchFamily="34" charset="-122"/>
+                <a:cs typeface="Calibri" pitchFamily="34" charset="-120"/>
+              </a:rPr>
+              <a:t>MINEPDED: Opération Sahel Vert; African Union: Great Green Wall.</a:t>
+            </a:r>
+            <a:endParaRPr lang="en-US" sz="1800" dirty="0"/>
+          </a:p>
+          <a:p>
+            <a:pPr algn="l" marL="342900" indent="-342900">
+              <a:spcAft>
+                <a:spcPts val="800"/>
+              </a:spcAft>
+              <a:buSzPct val="100000"/>
+              <a:buChar char="•"/>
+            </a:pPr>
+            <a:r>
+              <a:rPr lang="en-US" sz="1800" dirty="0">
+                <a:solidFill>
+                  <a:srgbClr val="111111"/>
+                </a:solidFill>
+                <a:latin typeface="Calibri" pitchFamily="34" charset="0"/>
+                <a:ea typeface="Calibri" pitchFamily="34" charset="-122"/>
+                <a:cs typeface="Calibri" pitchFamily="34" charset="-120"/>
+              </a:rPr>
+              <a:t>Photo, Activity 1: “Flood in Accra” by Stig Nygaard, CC BY 2.0, via Flickr (https://www.flickr.com/photos/10259776@N00/181742000)</a:t>
+            </a:r>
+            <a:endParaRPr lang="en-US" sz="1800" dirty="0"/>
+          </a:p>
+          <a:p>
+            <a:pPr algn="l" marL="342900" indent="-342900">
+              <a:spcAft>
+                <a:spcPts val="800"/>
+              </a:spcAft>
+              <a:buSzPct val="100000"/>
+              <a:buChar char="•"/>
+            </a:pPr>
+            <a:r>
+              <a:rPr lang="en-US" sz="1800" dirty="0">
+                <a:solidFill>
+                  <a:srgbClr val="111111"/>
+                </a:solidFill>
+                <a:latin typeface="Calibri" pitchFamily="34" charset="0"/>
+                <a:ea typeface="Calibri" pitchFamily="34" charset="-122"/>
+                <a:cs typeface="Calibri" pitchFamily="34" charset="-120"/>
+              </a:rPr>
+              <a:t>Photo, Activity 2: “Imagine a world without trees” by aloshbennett, CC BY 2.0, via Flickr (https://www.flickr.com/photos/13203757@N00/3480223314)</a:t>
+            </a:r>
+            <a:endParaRPr lang="en-US" sz="1800" dirty="0"/>
+          </a:p>
+          <a:p>
+            <a:pPr algn="l" marL="342900" indent="-342900">
+              <a:spcAft>
+                <a:spcPts val="800"/>
+              </a:spcAft>
+              <a:buSzPct val="100000"/>
+              <a:buChar char="•"/>
+            </a:pPr>
+            <a:r>
+              <a:rPr lang="en-US" sz="1800" dirty="0">
+                <a:solidFill>
+                  <a:srgbClr val="111111"/>
+                </a:solidFill>
+                <a:latin typeface="Calibri" pitchFamily="34" charset="0"/>
+                <a:ea typeface="Calibri" pitchFamily="34" charset="-122"/>
+                <a:cs typeface="Calibri" pitchFamily="34" charset="-120"/>
+              </a:rPr>
+              <a:t>Photo, Activity 3: “Women sowing okra in zai holes” by abossuet, CC BY-NC 2.0, via Flickr (https://www.flickr.com/photos/30450178@N07/7175750825)</a:t>
+            </a:r>
+            <a:endParaRPr lang="en-US" sz="1800" dirty="0"/>
+          </a:p>
+          <a:p>
+            <a:pPr algn="l" marL="342900" indent="-342900">
+              <a:spcAft>
+                <a:spcPts val="800"/>
+              </a:spcAft>
+              <a:buSzPct val="100000"/>
+              <a:buChar char="•"/>
+            </a:pPr>
+            <a:r>
+              <a:rPr lang="en-US" sz="1800" dirty="0">
+                <a:solidFill>
+                  <a:srgbClr val="111111"/>
+                </a:solidFill>
+                <a:latin typeface="Calibri" pitchFamily="34" charset="0"/>
+                <a:ea typeface="Calibri" pitchFamily="34" charset="-122"/>
+                <a:cs typeface="Calibri" pitchFamily="34" charset="-120"/>
+              </a:rPr>
+              <a:t>Diagrams and animations: drawn for this lesson (Geography Department).</a:t>
+            </a:r>
+            <a:endParaRPr lang="en-US" sz="1800" dirty="0"/>
+          </a:p>
+        </p:txBody>
+      </p:sp>
+      <p:sp>
+        <p:nvSpPr>
+          <p:cNvPr id="25" name="Slide Number Placeholder 0"/>
+          <p:cNvSpPr>
+            <a:spLocks noGrp="1"/>
+          </p:cNvSpPr>
+          <p:nvPr>
+            <p:ph type="sldNum" sz="quarter" idx="4294967295"/>
+          </p:nvPr>
+        </p:nvSpPr>
+        <p:spPr>
+          <a:xfrm>
+            <a:off x="27432" y="91440"/>
+            <a:ext cx="585216" cy="475488"/>
+          </a:xfrm>
+          <a:prstGeom prst="rect">
+            <a:avLst/>
+          </a:prstGeom>
+          <a:extLst>
+            <a:ext uri="{C572A759-6A51-4108-AA02-DFA0A04FC94B}">
+              <ma14:wrappingTextBoxFlag xmlns:ma14="http://schemas.microsoft.com/office/mac/drawingml/2011/main" val="0"/>
+            </a:ext>
+          </a:extLst>
+        </p:spPr>
+        <p:txBody>
+          <a:bodyPr/>
+          <a:lstStyle>
+            <a:lvl1pPr>
+              <a:defRPr sz="2000">
+                <a:solidFill>
+                  <a:srgbClr val="FFFFFF"/>
+                </a:solidFill>
+                <a:latin typeface="Calibri"/>
+                <a:ea typeface="Calibri"/>
+                <a:cs typeface="Calibri"/>
+              </a:defRPr>
+            </a:lvl1pPr>
+          </a:lstStyle>
+          <a:p>
+            <a:pPr algn="ctr"/>
+            <a:fld id="{F7021451-1387-4CA6-816F-3879F97B5CBC}" type="slidenum">
+              <a:rPr b="1" lang="en-US"/>
+              <a:t>51</a:t>
             </a:fld>
             <a:endParaRPr lang="en-US"/>
           </a:p>

--- a/lecons/F3/45_FORM4_LESSON41_Floods_Droughts_Desertification.pptx
+++ b/lecons/F3/45_FORM4_LESSON41_Floods_Droughts_Desertification.pptx
@@ -3456,7 +3456,7 @@
           <a:p>
             <a:r>
               <a:rPr lang="en-US" dirty="0"/>
-              <a:t>Before we start the new lesson, let us correct the homework I gave you at the end of Lesson 40: Global Warming. The question was: Ask an adult in your family whether your area has ever been flooded or has suffered a very dry year. Write down when it happened and what damage it caused. Take out your exercise books.</a:t>
+              <a:t>Before we start the new lesson, let us correct the homework I gave you at the end of Lesson 40: Global Warming. The question was: Define desertification. Take out your exercise books.</a:t>
             </a:r>
             <a:endParaRPr lang="en-US" dirty="0"/>
           </a:p>
@@ -3984,7 +3984,7 @@
           <a:p>
             <a:r>
               <a:rPr lang="en-US" dirty="0"/>
-              <a:t>For your homework: Count how many buckets (or litres) of water your family uses in one day, and list the main uses (drinking, cooking, washing). We shall correct it at the beginning of our next lesson.</a:t>
+              <a:t>For your homework: Give two causes of water scarcity. We shall correct it at the beginning of our next lesson.</a:t>
             </a:r>
             <a:endParaRPr lang="en-US" dirty="0"/>
           </a:p>
@@ -4424,7 +4424,7 @@
           <a:p>
             <a:r>
               <a:rPr lang="en-US" dirty="0"/>
-              <a:t>Here is a good answer. Answers vary. Example: in 2012 the Benue flooded after the Lagdo Dam released water; houses, rice and onion fields were destroyed and many people were displaced. Compare it with your own answer and correct your work in red.</a:t>
+              <a:t>Here is a good answer. It is the lasting spread of desert conditions into dry lands. Compare it with your own answer and correct your work in red.</a:t>
             </a:r>
             <a:endParaRPr lang="en-US" dirty="0"/>
           </a:p>
@@ -15141,7 +15141,7 @@
         <p:spPr>
           <a:xfrm>
             <a:off x="0" y="658368"/>
-            <a:ext cx="3840480" cy="5833872"/>
+            <a:ext cx="5120640" cy="5833872"/>
           </a:xfrm>
           <a:prstGeom prst="rect">
             <a:avLst/>
@@ -15156,8 +15156,8 @@
         </p:nvSpPr>
         <p:spPr>
           <a:xfrm>
-            <a:off x="4069080" y="1005840"/>
-            <a:ext cx="7802575" cy="731520"/>
+            <a:off x="5349240" y="1005840"/>
+            <a:ext cx="6522415" cy="731520"/>
           </a:xfrm>
           <a:prstGeom prst="rect">
             <a:avLst/>
@@ -15197,8 +15197,8 @@
         </p:nvSpPr>
         <p:spPr>
           <a:xfrm>
-            <a:off x="4069080" y="1783080"/>
-            <a:ext cx="7802575" cy="4663440"/>
+            <a:off x="5349240" y="1783080"/>
+            <a:ext cx="6522415" cy="4663440"/>
           </a:xfrm>
           <a:prstGeom prst="rect">
             <a:avLst/>
@@ -15245,7 +15245,7 @@
                 <a:ea typeface="Times New Roman" pitchFamily="34" charset="-122"/>
                 <a:cs typeface="Times New Roman" pitchFamily="34" charset="-120"/>
               </a:rPr>
-              <a:t>Ask an adult in your family whether your area has ever been flooded or has suffered a very dry year. Write down when it happened and what damage it caused.</a:t>
+              <a:t>Define desertification.</a:t>
             </a:r>
             <a:endParaRPr lang="en-US" sz="4000" dirty="0"/>
           </a:p>
@@ -16625,7 +16625,7 @@
                 <a:ea typeface="Times New Roman" pitchFamily="34" charset="-122"/>
                 <a:cs typeface="Times New Roman" pitchFamily="34" charset="-120"/>
               </a:rPr>
-              <a:t>Count how many buckets (or litres) of water your family uses in one day, and list the main uses (drinking, cooking, washing).</a:t>
+              <a:t>Give two causes of water scarcity.</a:t>
             </a:r>
             <a:endParaRPr lang="en-US" sz="4000" dirty="0"/>
           </a:p>
@@ -19565,7 +19565,7 @@
                           <a:ea typeface="Calibri" pitchFamily="34" charset="-122"/>
                           <a:cs typeface="Calibri" pitchFamily="34" charset="-120"/>
                         </a:rPr>
-                        <a:t>Count how many buckets (or litres) of water your family uses in one day, and list the main uses (drinking, cooking, washing).</a:t>
+                        <a:t>Give two causes of water scarcity.</a:t>
                       </a:r>
                       <a:endParaRPr lang="en-US" sz="1600" dirty="0">
                         <a:latin typeface="Calibri" charset="0"/>
@@ -20110,7 +20110,7 @@
                 <a:ea typeface="Times New Roman" pitchFamily="34" charset="-122"/>
                 <a:cs typeface="Times New Roman" pitchFamily="34" charset="-120"/>
               </a:rPr>
-              <a:t>Answers vary. Example: in 2012 the Benue flooded after the Lagdo Dam released water; houses, rice and onion fields were destroyed and many people were displaced.</a:t>
+              <a:t>It is the lasting spread of desert conditions into dry lands.</a:t>
             </a:r>
             <a:endParaRPr lang="en-US" sz="4000" dirty="0"/>
           </a:p>

--- a/lecons/F3/45_FORM4_LESSON41_Floods_Droughts_Desertification.pptx
+++ b/lecons/F3/45_FORM4_LESSON41_Floods_Droughts_Desertification.pptx
@@ -56,9 +56,21 @@
     <p:sldId id="304" r:id="rId50"/>
     <p:sldId id="305" r:id="rId51"/>
     <p:sldId id="306" r:id="rId52"/>
+    <p:sldId id="307" r:id="rId53"/>
+    <p:sldId id="308" r:id="rId54"/>
+    <p:sldId id="309" r:id="rId55"/>
+    <p:sldId id="310" r:id="rId56"/>
+    <p:sldId id="311" r:id="rId57"/>
+    <p:sldId id="312" r:id="rId58"/>
+    <p:sldId id="313" r:id="rId59"/>
+    <p:sldId id="314" r:id="rId60"/>
+    <p:sldId id="315" r:id="rId61"/>
+    <p:sldId id="316" r:id="rId62"/>
+    <p:sldId id="317" r:id="rId63"/>
+    <p:sldId id="318" r:id="rId64"/>
   </p:sldIdLst>
   <p:notesMasterIdLst>
-    <p:notesMasterId r:id="rId53"/>
+    <p:notesMasterId r:id="rId65"/>
   </p:notesMasterIdLst>
   <p:sldSz cx="12192000" cy="6858000"/>
   <p:notesSz cx="6858000" cy="12192000"/>
@@ -2664,7 +2676,7 @@
           <a:p>
             <a:r>
               <a:rPr lang="en-US" dirty="0"/>
-              <a:t>Let us copy Floods. Floods are explained as follows. Copy the point on Areas of occurrence on the left, then draw the diagram on the right: a flooded village. Give it a title and label it clearly.</a:t>
+              <a:t>Let us copy Areas of Occurrence. Floods occur in the following areas. Copy the point on River valleys on the left, then draw the diagram on the right: a flooded village. Give it a title and label it clearly.</a:t>
             </a:r>
             <a:endParaRPr lang="en-US" dirty="0"/>
           </a:p>
@@ -2752,7 +2764,7 @@
           <a:p>
             <a:r>
               <a:rPr lang="en-US" dirty="0"/>
-              <a:t>Copy the point on Causes on the left, then draw the diagram on the right: causes of floods. Give it a title and label it clearly.</a:t>
+              <a:t>We continue with Areas of Occurrence. On this slide we have Towns. Write each point on a new line, with the key term first, and explain it in your own words when we revise.</a:t>
             </a:r>
             <a:endParaRPr lang="en-US" dirty="0"/>
           </a:p>
@@ -2840,7 +2852,7 @@
           <a:p>
             <a:r>
               <a:rPr lang="en-US" dirty="0"/>
-              <a:t>We continue with Floods. On this slide we have Effects and Adaptation and mitigation. Write each point on a new line, with the key term first, and explain it in your own words when we revise.</a:t>
+              <a:t>Let us copy Causes. Floods are caused by the following factors. Copy the point on Heavy rain on the left, then draw the diagram on the right: causes of floods. Give it a title and label it clearly.</a:t>
             </a:r>
             <a:endParaRPr lang="en-US" dirty="0"/>
           </a:p>
@@ -2928,7 +2940,7 @@
           <a:p>
             <a:r>
               <a:rPr lang="en-US" dirty="0"/>
-              <a:t>Let us copy Droughts. Droughts are explained as follows. Copy the point on Areas of occurrence on the left, then draw the diagram on the right: dry land. Give it a title and label it clearly.</a:t>
+              <a:t>We continue with Causes. On this slide we have Water released from dams, Blocked drains and Building on floodplains. Write each point on a new line, with the key term first, and explain it in your own words when we revise.</a:t>
             </a:r>
             <a:endParaRPr lang="en-US" dirty="0"/>
           </a:p>
@@ -3016,7 +3028,7 @@
           <a:p>
             <a:r>
               <a:rPr lang="en-US" dirty="0"/>
-              <a:t>We continue with Droughts. On this slide we have Causes and Effects. Write each point on a new line, with the key term first, and explain it in your own words when we revise. When you finish, we go to the next slide.</a:t>
+              <a:t>Let us copy Effects. Floods have the following effects. On this slide we have Destruction, Loss of life and Diseases. Write each point on a new line, with the key term first, and explain it in your own words when we revise.</a:t>
             </a:r>
             <a:endParaRPr lang="en-US" dirty="0"/>
           </a:p>
@@ -3104,7 +3116,7 @@
           <a:p>
             <a:r>
               <a:rPr lang="en-US" dirty="0"/>
-              <a:t>We continue with Droughts. On this slide we have Adaptation and mitigation. Write each point on a new line, with the key term first, and explain it in your own words when we revise.</a:t>
+              <a:t>Let us copy Adaptation and Mitigation. Flood damage is reduced by the following measures. On this slide we have Dykes and Clean drains. Write each point on a new line, with the key term first, and explain it in your own words when we revise. When you finish, we go to the next slide.</a:t>
             </a:r>
             <a:endParaRPr lang="en-US" dirty="0"/>
           </a:p>
@@ -3192,7 +3204,7 @@
           <a:p>
             <a:r>
               <a:rPr lang="en-US" dirty="0"/>
-              <a:t>Let us copy Desertification. Desertification is explained as follows. Copy the point on Areas of occurrence on the left, then draw the diagram on the right: crops dried by drought. Give it a title and label it clearly.</a:t>
+              <a:t>We continue with Adaptation and Mitigation. On this slide we have Early warnings and Building on high ground. Write each point on a new line, with the key term first, and explain it in your own words when we revise.</a:t>
             </a:r>
             <a:endParaRPr lang="en-US" dirty="0"/>
           </a:p>
@@ -3280,7 +3292,7 @@
           <a:p>
             <a:r>
               <a:rPr lang="en-US" dirty="0"/>
-              <a:t>We continue with Desertification. On this slide we have Causes and Effects. Write each point on a new line, with the key term first, and explain it in your own words when we revise.</a:t>
+              <a:t>Let us copy Areas of Occurrence. Droughts occur in the following areas. Copy the point on The Sahel on the left, then draw the diagram on the right: dry land. Give it a title and label it clearly.</a:t>
             </a:r>
             <a:endParaRPr lang="en-US" dirty="0"/>
           </a:p>
@@ -3368,7 +3380,7 @@
           <a:p>
             <a:r>
               <a:rPr lang="en-US" dirty="0"/>
-              <a:t>Copy the point on Adaptation and mitigation on the left, then draw the diagram on the right: zaï planting pits. Give it a title and label it clearly.</a:t>
+              <a:t>Let us copy Causes. Droughts are caused by the following factors. On this slide we have Low and irregular rainfall and Very high temperatures. Write each point on a new line, with the key term first, and explain it in your own words when we revise. When you finish, we go to the next slide.</a:t>
             </a:r>
             <a:endParaRPr lang="en-US" dirty="0"/>
           </a:p>
@@ -3544,7 +3556,7 @@
           <a:p>
             <a:r>
               <a:rPr lang="en-US" dirty="0"/>
-              <a:t>Now let us check what you have understood. Question 1: What is desertification? Answer in your exercise book.</a:t>
+              <a:t>We continue with Causes. On this slide we have A long dry season. Write each point on a new line, with the key term first, and explain it in your own words when we revise.</a:t>
             </a:r>
             <a:endParaRPr lang="en-US" dirty="0"/>
           </a:p>
@@ -3632,7 +3644,7 @@
           <a:p>
             <a:r>
               <a:rPr lang="en-US" dirty="0"/>
-              <a:t>The expected answer is: the spread of the desert. If you got it right, well done.</a:t>
+              <a:t>Let us copy Effects. Droughts have the following effects. On this slide we have Crop failure, Death of animals and Drying wells. Write each point on a new line, with the key term first, and explain it in your own words when we revise. When you finish, we go to the next slide.</a:t>
             </a:r>
             <a:endParaRPr lang="en-US" dirty="0"/>
           </a:p>
@@ -3720,7 +3732,7 @@
           <a:p>
             <a:r>
               <a:rPr lang="en-US" dirty="0"/>
-              <a:t>Now let us check what you have understood. Question 2: Give one way to fight desertification. Answer in your exercise book.</a:t>
+              <a:t>We continue with Effects. On this slide we have Hunger and migration. Write each point on a new line, with the key term first, and explain it in your own words when we revise.</a:t>
             </a:r>
             <a:endParaRPr lang="en-US" dirty="0"/>
           </a:p>
@@ -3808,7 +3820,7 @@
           <a:p>
             <a:r>
               <a:rPr lang="en-US" dirty="0"/>
-              <a:t>The expected answer is: plant trees (or stop overgrazing). If you got it right, well done.</a:t>
+              <a:t>Let us copy Adaptation and Mitigation. The effects of droughts are reduced by the following measures. On this slide we have Irrigation and Water storage. Write each point on a new line, with the key term first, and explain it in your own words when we revise. When you finish, we go to the next slide.</a:t>
             </a:r>
             <a:endParaRPr lang="en-US" dirty="0"/>
           </a:p>
@@ -3896,7 +3908,7 @@
           <a:p>
             <a:r>
               <a:rPr lang="en-US" dirty="0"/>
-              <a:t>For those who need more practice, fill in the blanks in your exercise book. The answers are: number 1, drought; number 2, desertification; number 3, Lagdo.</a:t>
+              <a:t>We continue with Adaptation and Mitigation. On this slide we have Drought-resistant crops and Food reserves. Write each point on a new line, with the key term first, and explain it in your own words when we revise.</a:t>
             </a:r>
             <a:endParaRPr lang="en-US" dirty="0"/>
           </a:p>
@@ -3984,7 +3996,7 @@
           <a:p>
             <a:r>
               <a:rPr lang="en-US" dirty="0"/>
-              <a:t>For your homework: Give two causes of water scarcity. We shall correct it at the beginning of our next lesson.</a:t>
+              <a:t>Let us copy Areas of Occurrence. Desertification occurs in the following areas. Copy the point on The Sahel on the left, then draw the diagram on the right: crops dried by drought. Give it a title and label it clearly.</a:t>
             </a:r>
             <a:endParaRPr lang="en-US" dirty="0"/>
           </a:p>
@@ -4072,7 +4084,7 @@
           <a:p>
             <a:r>
               <a:rPr lang="en-US" dirty="0"/>
-              <a:t>Our next lesson will be on Lesson 42: Water Scarcity. Thank you for your attention, and see you next time.</a:t>
+              <a:t>Let us copy Causes. Desertification is caused by the following factors. On this slide we have Overgrazing, Cutting trees and Bush fires. Write each point on a new line, with the key term first, and explain it in your own words when we revise. When you finish, we go to the next slide.</a:t>
             </a:r>
             <a:endParaRPr lang="en-US" dirty="0"/>
           </a:p>
@@ -4160,7 +4172,7 @@
           <a:p>
             <a:r>
               <a:rPr lang="en-US" dirty="0"/>
-              <a:t>Let us play the bilingual game. I say a word in English, and you give me the French word. Then we do the reverse.</a:t>
+              <a:t>We continue with Causes. On this slide we have Repeated droughts. Write each point on a new line, with the key term first, and explain it in your own words when we revise.</a:t>
             </a:r>
             <a:endParaRPr lang="en-US" dirty="0"/>
           </a:p>
@@ -4248,7 +4260,7 @@
           <a:p>
             <a:r>
               <a:rPr lang="en-US" dirty="0"/>
-              <a:t>I record this information in the official logbook of the class after the lesson.</a:t>
+              <a:t>Let us copy Effects. Desertification has the following effects. On this slide we have Poor soils, Moving sand, Water shortage and Migration. Write each point on a new line, with the key term first, and explain it in your own words when we revise.</a:t>
             </a:r>
             <a:endParaRPr lang="en-US" dirty="0"/>
           </a:p>
@@ -4336,7 +4348,7 @@
           <a:p>
             <a:r>
               <a:rPr lang="en-US" dirty="0"/>
-              <a:t>I complete the second page of the logbook: the matter taught, the evaluation, the homework and the attendance.</a:t>
+              <a:t>Let us copy Adaptation and Mitigation. Desertification is stopped by the following measures. On this slide we have Tree planting. Write each point on a new line, with the key term first, and explain it in your own words when we revise.</a:t>
             </a:r>
             <a:endParaRPr lang="en-US" dirty="0"/>
           </a:p>
@@ -4512,7 +4524,7 @@
           <a:p>
             <a:r>
               <a:rPr lang="en-US" dirty="0"/>
-              <a:t>This slide is for me, the teacher: it gives the timing of the lesson and what to do if the projector is not available.</a:t>
+              <a:t>Copy the point on Zaï pits on the left, then draw the diagram on the right: zaï planting pits. Give it a title and label it clearly.</a:t>
             </a:r>
             <a:endParaRPr lang="en-US" dirty="0"/>
           </a:p>
@@ -4600,7 +4612,7 @@
           <a:p>
             <a:r>
               <a:rPr lang="en-US" dirty="0"/>
-              <a:t>These are the references and picture credits used to prepare this lesson.</a:t>
+              <a:t>We continue with Adaptation and Mitigation. On this slide we have Stone lines and Control of grazing. Write each point on a new line, with the key term first, and explain it in your own words when we revise.</a:t>
             </a:r>
             <a:endParaRPr lang="en-US" dirty="0"/>
           </a:p>
@@ -4624,6 +4636,710 @@
             <a:fld id="{F7021451-1387-4CA6-816F-3879F97B5CBC}" type="slidenum">
               <a:rPr lang="en-US"/>
               <a:t>51</a:t>
+            </a:fld>
+            <a:endParaRPr lang="en-US"/>
+          </a:p>
+        </p:txBody>
+      </p:sp>
+    </p:spTree>
+    <p:extLst>
+      <p:ext uri="{BB962C8B-B14F-4D97-AF65-F5344CB8AC3E}">
+        <p14:creationId xmlns:p14="http://schemas.microsoft.com/office/powerpoint/2010/main" val="1024086991"/>
+      </p:ext>
+    </p:extLst>
+  </p:cSld>
+  <p:clrMapOvr>
+    <a:masterClrMapping/>
+  </p:clrMapOvr>
+</p:notes>
+</file>
+
+<file path=ppt/notesSlides/notesSlide52.xml><?xml version="1.0" encoding="utf-8"?>
+<p:notes xmlns:a="http://schemas.openxmlformats.org/drawingml/2006/main" xmlns:r="http://schemas.openxmlformats.org/officeDocument/2006/relationships" xmlns:p="http://schemas.openxmlformats.org/presentationml/2006/main">
+  <p:cSld>
+    <p:spTree>
+      <p:nvGrpSpPr>
+        <p:cNvPr id="1" name=""/>
+        <p:cNvGrpSpPr/>
+        <p:nvPr/>
+      </p:nvGrpSpPr>
+      <p:grpSpPr>
+        <a:xfrm>
+          <a:off x="0" y="0"/>
+          <a:ext cx="0" cy="0"/>
+          <a:chOff x="0" y="0"/>
+          <a:chExt cx="0" cy="0"/>
+        </a:xfrm>
+      </p:grpSpPr>
+      <p:sp>
+        <p:nvSpPr>
+          <p:cNvPr id="2" name="Slide Image Placeholder 1"/>
+          <p:cNvSpPr>
+            <a:spLocks noGrp="1" noRot="1" noChangeAspect="1"/>
+          </p:cNvSpPr>
+          <p:nvPr>
+            <p:ph type="sldImg"/>
+          </p:nvPr>
+        </p:nvSpPr>
+        <p:spPr/>
+      </p:sp>
+      <p:sp>
+        <p:nvSpPr>
+          <p:cNvPr id="3" name="Notes Placeholder 2"/>
+          <p:cNvSpPr>
+            <a:spLocks noGrp="1"/>
+          </p:cNvSpPr>
+          <p:nvPr>
+            <p:ph type="body" idx="1"/>
+          </p:nvPr>
+        </p:nvSpPr>
+        <p:spPr/>
+        <p:txBody>
+          <a:bodyPr/>
+          <a:lstStyle/>
+          <a:p>
+            <a:r>
+              <a:rPr lang="en-US" dirty="0"/>
+              <a:t>Now let us check what you have understood. Question 1: What is desertification? Answer in your exercise book.</a:t>
+            </a:r>
+            <a:endParaRPr lang="en-US" dirty="0"/>
+          </a:p>
+        </p:txBody>
+      </p:sp>
+      <p:sp>
+        <p:nvSpPr>
+          <p:cNvPr id="4" name="Slide Number Placeholder 3"/>
+          <p:cNvSpPr>
+            <a:spLocks noGrp="1"/>
+          </p:cNvSpPr>
+          <p:nvPr>
+            <p:ph type="sldNum" sz="quarter" idx="10"/>
+          </p:nvPr>
+        </p:nvSpPr>
+        <p:spPr/>
+        <p:txBody>
+          <a:bodyPr/>
+          <a:lstStyle/>
+          <a:p>
+            <a:fld id="{F7021451-1387-4CA6-816F-3879F97B5CBC}" type="slidenum">
+              <a:rPr lang="en-US"/>
+              <a:t>52</a:t>
+            </a:fld>
+            <a:endParaRPr lang="en-US"/>
+          </a:p>
+        </p:txBody>
+      </p:sp>
+    </p:spTree>
+    <p:extLst>
+      <p:ext uri="{BB962C8B-B14F-4D97-AF65-F5344CB8AC3E}">
+        <p14:creationId xmlns:p14="http://schemas.microsoft.com/office/powerpoint/2010/main" val="1024086991"/>
+      </p:ext>
+    </p:extLst>
+  </p:cSld>
+  <p:clrMapOvr>
+    <a:masterClrMapping/>
+  </p:clrMapOvr>
+</p:notes>
+</file>
+
+<file path=ppt/notesSlides/notesSlide53.xml><?xml version="1.0" encoding="utf-8"?>
+<p:notes xmlns:a="http://schemas.openxmlformats.org/drawingml/2006/main" xmlns:r="http://schemas.openxmlformats.org/officeDocument/2006/relationships" xmlns:p="http://schemas.openxmlformats.org/presentationml/2006/main">
+  <p:cSld>
+    <p:spTree>
+      <p:nvGrpSpPr>
+        <p:cNvPr id="1" name=""/>
+        <p:cNvGrpSpPr/>
+        <p:nvPr/>
+      </p:nvGrpSpPr>
+      <p:grpSpPr>
+        <a:xfrm>
+          <a:off x="0" y="0"/>
+          <a:ext cx="0" cy="0"/>
+          <a:chOff x="0" y="0"/>
+          <a:chExt cx="0" cy="0"/>
+        </a:xfrm>
+      </p:grpSpPr>
+      <p:sp>
+        <p:nvSpPr>
+          <p:cNvPr id="2" name="Slide Image Placeholder 1"/>
+          <p:cNvSpPr>
+            <a:spLocks noGrp="1" noRot="1" noChangeAspect="1"/>
+          </p:cNvSpPr>
+          <p:nvPr>
+            <p:ph type="sldImg"/>
+          </p:nvPr>
+        </p:nvSpPr>
+        <p:spPr/>
+      </p:sp>
+      <p:sp>
+        <p:nvSpPr>
+          <p:cNvPr id="3" name="Notes Placeholder 2"/>
+          <p:cNvSpPr>
+            <a:spLocks noGrp="1"/>
+          </p:cNvSpPr>
+          <p:nvPr>
+            <p:ph type="body" idx="1"/>
+          </p:nvPr>
+        </p:nvSpPr>
+        <p:spPr/>
+        <p:txBody>
+          <a:bodyPr/>
+          <a:lstStyle/>
+          <a:p>
+            <a:r>
+              <a:rPr lang="en-US" dirty="0"/>
+              <a:t>The expected answer is: the spread of the desert. If you got it right, well done.</a:t>
+            </a:r>
+            <a:endParaRPr lang="en-US" dirty="0"/>
+          </a:p>
+        </p:txBody>
+      </p:sp>
+      <p:sp>
+        <p:nvSpPr>
+          <p:cNvPr id="4" name="Slide Number Placeholder 3"/>
+          <p:cNvSpPr>
+            <a:spLocks noGrp="1"/>
+          </p:cNvSpPr>
+          <p:nvPr>
+            <p:ph type="sldNum" sz="quarter" idx="10"/>
+          </p:nvPr>
+        </p:nvSpPr>
+        <p:spPr/>
+        <p:txBody>
+          <a:bodyPr/>
+          <a:lstStyle/>
+          <a:p>
+            <a:fld id="{F7021451-1387-4CA6-816F-3879F97B5CBC}" type="slidenum">
+              <a:rPr lang="en-US"/>
+              <a:t>53</a:t>
+            </a:fld>
+            <a:endParaRPr lang="en-US"/>
+          </a:p>
+        </p:txBody>
+      </p:sp>
+    </p:spTree>
+    <p:extLst>
+      <p:ext uri="{BB962C8B-B14F-4D97-AF65-F5344CB8AC3E}">
+        <p14:creationId xmlns:p14="http://schemas.microsoft.com/office/powerpoint/2010/main" val="1024086991"/>
+      </p:ext>
+    </p:extLst>
+  </p:cSld>
+  <p:clrMapOvr>
+    <a:masterClrMapping/>
+  </p:clrMapOvr>
+</p:notes>
+</file>
+
+<file path=ppt/notesSlides/notesSlide54.xml><?xml version="1.0" encoding="utf-8"?>
+<p:notes xmlns:a="http://schemas.openxmlformats.org/drawingml/2006/main" xmlns:r="http://schemas.openxmlformats.org/officeDocument/2006/relationships" xmlns:p="http://schemas.openxmlformats.org/presentationml/2006/main">
+  <p:cSld>
+    <p:spTree>
+      <p:nvGrpSpPr>
+        <p:cNvPr id="1" name=""/>
+        <p:cNvGrpSpPr/>
+        <p:nvPr/>
+      </p:nvGrpSpPr>
+      <p:grpSpPr>
+        <a:xfrm>
+          <a:off x="0" y="0"/>
+          <a:ext cx="0" cy="0"/>
+          <a:chOff x="0" y="0"/>
+          <a:chExt cx="0" cy="0"/>
+        </a:xfrm>
+      </p:grpSpPr>
+      <p:sp>
+        <p:nvSpPr>
+          <p:cNvPr id="2" name="Slide Image Placeholder 1"/>
+          <p:cNvSpPr>
+            <a:spLocks noGrp="1" noRot="1" noChangeAspect="1"/>
+          </p:cNvSpPr>
+          <p:nvPr>
+            <p:ph type="sldImg"/>
+          </p:nvPr>
+        </p:nvSpPr>
+        <p:spPr/>
+      </p:sp>
+      <p:sp>
+        <p:nvSpPr>
+          <p:cNvPr id="3" name="Notes Placeholder 2"/>
+          <p:cNvSpPr>
+            <a:spLocks noGrp="1"/>
+          </p:cNvSpPr>
+          <p:nvPr>
+            <p:ph type="body" idx="1"/>
+          </p:nvPr>
+        </p:nvSpPr>
+        <p:spPr/>
+        <p:txBody>
+          <a:bodyPr/>
+          <a:lstStyle/>
+          <a:p>
+            <a:r>
+              <a:rPr lang="en-US" dirty="0"/>
+              <a:t>Now let us check what you have understood. Question 2: Give one way to fight desertification. Answer in your exercise book.</a:t>
+            </a:r>
+            <a:endParaRPr lang="en-US" dirty="0"/>
+          </a:p>
+        </p:txBody>
+      </p:sp>
+      <p:sp>
+        <p:nvSpPr>
+          <p:cNvPr id="4" name="Slide Number Placeholder 3"/>
+          <p:cNvSpPr>
+            <a:spLocks noGrp="1"/>
+          </p:cNvSpPr>
+          <p:nvPr>
+            <p:ph type="sldNum" sz="quarter" idx="10"/>
+          </p:nvPr>
+        </p:nvSpPr>
+        <p:spPr/>
+        <p:txBody>
+          <a:bodyPr/>
+          <a:lstStyle/>
+          <a:p>
+            <a:fld id="{F7021451-1387-4CA6-816F-3879F97B5CBC}" type="slidenum">
+              <a:rPr lang="en-US"/>
+              <a:t>54</a:t>
+            </a:fld>
+            <a:endParaRPr lang="en-US"/>
+          </a:p>
+        </p:txBody>
+      </p:sp>
+    </p:spTree>
+    <p:extLst>
+      <p:ext uri="{BB962C8B-B14F-4D97-AF65-F5344CB8AC3E}">
+        <p14:creationId xmlns:p14="http://schemas.microsoft.com/office/powerpoint/2010/main" val="1024086991"/>
+      </p:ext>
+    </p:extLst>
+  </p:cSld>
+  <p:clrMapOvr>
+    <a:masterClrMapping/>
+  </p:clrMapOvr>
+</p:notes>
+</file>
+
+<file path=ppt/notesSlides/notesSlide55.xml><?xml version="1.0" encoding="utf-8"?>
+<p:notes xmlns:a="http://schemas.openxmlformats.org/drawingml/2006/main" xmlns:r="http://schemas.openxmlformats.org/officeDocument/2006/relationships" xmlns:p="http://schemas.openxmlformats.org/presentationml/2006/main">
+  <p:cSld>
+    <p:spTree>
+      <p:nvGrpSpPr>
+        <p:cNvPr id="1" name=""/>
+        <p:cNvGrpSpPr/>
+        <p:nvPr/>
+      </p:nvGrpSpPr>
+      <p:grpSpPr>
+        <a:xfrm>
+          <a:off x="0" y="0"/>
+          <a:ext cx="0" cy="0"/>
+          <a:chOff x="0" y="0"/>
+          <a:chExt cx="0" cy="0"/>
+        </a:xfrm>
+      </p:grpSpPr>
+      <p:sp>
+        <p:nvSpPr>
+          <p:cNvPr id="2" name="Slide Image Placeholder 1"/>
+          <p:cNvSpPr>
+            <a:spLocks noGrp="1" noRot="1" noChangeAspect="1"/>
+          </p:cNvSpPr>
+          <p:nvPr>
+            <p:ph type="sldImg"/>
+          </p:nvPr>
+        </p:nvSpPr>
+        <p:spPr/>
+      </p:sp>
+      <p:sp>
+        <p:nvSpPr>
+          <p:cNvPr id="3" name="Notes Placeholder 2"/>
+          <p:cNvSpPr>
+            <a:spLocks noGrp="1"/>
+          </p:cNvSpPr>
+          <p:nvPr>
+            <p:ph type="body" idx="1"/>
+          </p:nvPr>
+        </p:nvSpPr>
+        <p:spPr/>
+        <p:txBody>
+          <a:bodyPr/>
+          <a:lstStyle/>
+          <a:p>
+            <a:r>
+              <a:rPr lang="en-US" dirty="0"/>
+              <a:t>The expected answer is: plant trees (or stop overgrazing). If you got it right, well done.</a:t>
+            </a:r>
+            <a:endParaRPr lang="en-US" dirty="0"/>
+          </a:p>
+        </p:txBody>
+      </p:sp>
+      <p:sp>
+        <p:nvSpPr>
+          <p:cNvPr id="4" name="Slide Number Placeholder 3"/>
+          <p:cNvSpPr>
+            <a:spLocks noGrp="1"/>
+          </p:cNvSpPr>
+          <p:nvPr>
+            <p:ph type="sldNum" sz="quarter" idx="10"/>
+          </p:nvPr>
+        </p:nvSpPr>
+        <p:spPr/>
+        <p:txBody>
+          <a:bodyPr/>
+          <a:lstStyle/>
+          <a:p>
+            <a:fld id="{F7021451-1387-4CA6-816F-3879F97B5CBC}" type="slidenum">
+              <a:rPr lang="en-US"/>
+              <a:t>55</a:t>
+            </a:fld>
+            <a:endParaRPr lang="en-US"/>
+          </a:p>
+        </p:txBody>
+      </p:sp>
+    </p:spTree>
+    <p:extLst>
+      <p:ext uri="{BB962C8B-B14F-4D97-AF65-F5344CB8AC3E}">
+        <p14:creationId xmlns:p14="http://schemas.microsoft.com/office/powerpoint/2010/main" val="1024086991"/>
+      </p:ext>
+    </p:extLst>
+  </p:cSld>
+  <p:clrMapOvr>
+    <a:masterClrMapping/>
+  </p:clrMapOvr>
+</p:notes>
+</file>
+
+<file path=ppt/notesSlides/notesSlide56.xml><?xml version="1.0" encoding="utf-8"?>
+<p:notes xmlns:a="http://schemas.openxmlformats.org/drawingml/2006/main" xmlns:r="http://schemas.openxmlformats.org/officeDocument/2006/relationships" xmlns:p="http://schemas.openxmlformats.org/presentationml/2006/main">
+  <p:cSld>
+    <p:spTree>
+      <p:nvGrpSpPr>
+        <p:cNvPr id="1" name=""/>
+        <p:cNvGrpSpPr/>
+        <p:nvPr/>
+      </p:nvGrpSpPr>
+      <p:grpSpPr>
+        <a:xfrm>
+          <a:off x="0" y="0"/>
+          <a:ext cx="0" cy="0"/>
+          <a:chOff x="0" y="0"/>
+          <a:chExt cx="0" cy="0"/>
+        </a:xfrm>
+      </p:grpSpPr>
+      <p:sp>
+        <p:nvSpPr>
+          <p:cNvPr id="2" name="Slide Image Placeholder 1"/>
+          <p:cNvSpPr>
+            <a:spLocks noGrp="1" noRot="1" noChangeAspect="1"/>
+          </p:cNvSpPr>
+          <p:nvPr>
+            <p:ph type="sldImg"/>
+          </p:nvPr>
+        </p:nvSpPr>
+        <p:spPr/>
+      </p:sp>
+      <p:sp>
+        <p:nvSpPr>
+          <p:cNvPr id="3" name="Notes Placeholder 2"/>
+          <p:cNvSpPr>
+            <a:spLocks noGrp="1"/>
+          </p:cNvSpPr>
+          <p:nvPr>
+            <p:ph type="body" idx="1"/>
+          </p:nvPr>
+        </p:nvSpPr>
+        <p:spPr/>
+        <p:txBody>
+          <a:bodyPr/>
+          <a:lstStyle/>
+          <a:p>
+            <a:r>
+              <a:rPr lang="en-US" dirty="0"/>
+              <a:t>For those who need more practice, fill in the blanks in your exercise book. The answers are: number 1, drought; number 2, desertification; number 3, Lagdo.</a:t>
+            </a:r>
+            <a:endParaRPr lang="en-US" dirty="0"/>
+          </a:p>
+        </p:txBody>
+      </p:sp>
+      <p:sp>
+        <p:nvSpPr>
+          <p:cNvPr id="4" name="Slide Number Placeholder 3"/>
+          <p:cNvSpPr>
+            <a:spLocks noGrp="1"/>
+          </p:cNvSpPr>
+          <p:nvPr>
+            <p:ph type="sldNum" sz="quarter" idx="10"/>
+          </p:nvPr>
+        </p:nvSpPr>
+        <p:spPr/>
+        <p:txBody>
+          <a:bodyPr/>
+          <a:lstStyle/>
+          <a:p>
+            <a:fld id="{F7021451-1387-4CA6-816F-3879F97B5CBC}" type="slidenum">
+              <a:rPr lang="en-US"/>
+              <a:t>56</a:t>
+            </a:fld>
+            <a:endParaRPr lang="en-US"/>
+          </a:p>
+        </p:txBody>
+      </p:sp>
+    </p:spTree>
+    <p:extLst>
+      <p:ext uri="{BB962C8B-B14F-4D97-AF65-F5344CB8AC3E}">
+        <p14:creationId xmlns:p14="http://schemas.microsoft.com/office/powerpoint/2010/main" val="1024086991"/>
+      </p:ext>
+    </p:extLst>
+  </p:cSld>
+  <p:clrMapOvr>
+    <a:masterClrMapping/>
+  </p:clrMapOvr>
+</p:notes>
+</file>
+
+<file path=ppt/notesSlides/notesSlide57.xml><?xml version="1.0" encoding="utf-8"?>
+<p:notes xmlns:a="http://schemas.openxmlformats.org/drawingml/2006/main" xmlns:r="http://schemas.openxmlformats.org/officeDocument/2006/relationships" xmlns:p="http://schemas.openxmlformats.org/presentationml/2006/main">
+  <p:cSld>
+    <p:spTree>
+      <p:nvGrpSpPr>
+        <p:cNvPr id="1" name=""/>
+        <p:cNvGrpSpPr/>
+        <p:nvPr/>
+      </p:nvGrpSpPr>
+      <p:grpSpPr>
+        <a:xfrm>
+          <a:off x="0" y="0"/>
+          <a:ext cx="0" cy="0"/>
+          <a:chOff x="0" y="0"/>
+          <a:chExt cx="0" cy="0"/>
+        </a:xfrm>
+      </p:grpSpPr>
+      <p:sp>
+        <p:nvSpPr>
+          <p:cNvPr id="2" name="Slide Image Placeholder 1"/>
+          <p:cNvSpPr>
+            <a:spLocks noGrp="1" noRot="1" noChangeAspect="1"/>
+          </p:cNvSpPr>
+          <p:nvPr>
+            <p:ph type="sldImg"/>
+          </p:nvPr>
+        </p:nvSpPr>
+        <p:spPr/>
+      </p:sp>
+      <p:sp>
+        <p:nvSpPr>
+          <p:cNvPr id="3" name="Notes Placeholder 2"/>
+          <p:cNvSpPr>
+            <a:spLocks noGrp="1"/>
+          </p:cNvSpPr>
+          <p:nvPr>
+            <p:ph type="body" idx="1"/>
+          </p:nvPr>
+        </p:nvSpPr>
+        <p:spPr/>
+        <p:txBody>
+          <a:bodyPr/>
+          <a:lstStyle/>
+          <a:p>
+            <a:r>
+              <a:rPr lang="en-US" dirty="0"/>
+              <a:t>For your homework: Give two causes of water scarcity. We shall correct it at the beginning of our next lesson.</a:t>
+            </a:r>
+            <a:endParaRPr lang="en-US" dirty="0"/>
+          </a:p>
+        </p:txBody>
+      </p:sp>
+      <p:sp>
+        <p:nvSpPr>
+          <p:cNvPr id="4" name="Slide Number Placeholder 3"/>
+          <p:cNvSpPr>
+            <a:spLocks noGrp="1"/>
+          </p:cNvSpPr>
+          <p:nvPr>
+            <p:ph type="sldNum" sz="quarter" idx="10"/>
+          </p:nvPr>
+        </p:nvSpPr>
+        <p:spPr/>
+        <p:txBody>
+          <a:bodyPr/>
+          <a:lstStyle/>
+          <a:p>
+            <a:fld id="{F7021451-1387-4CA6-816F-3879F97B5CBC}" type="slidenum">
+              <a:rPr lang="en-US"/>
+              <a:t>57</a:t>
+            </a:fld>
+            <a:endParaRPr lang="en-US"/>
+          </a:p>
+        </p:txBody>
+      </p:sp>
+    </p:spTree>
+    <p:extLst>
+      <p:ext uri="{BB962C8B-B14F-4D97-AF65-F5344CB8AC3E}">
+        <p14:creationId xmlns:p14="http://schemas.microsoft.com/office/powerpoint/2010/main" val="1024086991"/>
+      </p:ext>
+    </p:extLst>
+  </p:cSld>
+  <p:clrMapOvr>
+    <a:masterClrMapping/>
+  </p:clrMapOvr>
+</p:notes>
+</file>
+
+<file path=ppt/notesSlides/notesSlide58.xml><?xml version="1.0" encoding="utf-8"?>
+<p:notes xmlns:a="http://schemas.openxmlformats.org/drawingml/2006/main" xmlns:r="http://schemas.openxmlformats.org/officeDocument/2006/relationships" xmlns:p="http://schemas.openxmlformats.org/presentationml/2006/main">
+  <p:cSld>
+    <p:spTree>
+      <p:nvGrpSpPr>
+        <p:cNvPr id="1" name=""/>
+        <p:cNvGrpSpPr/>
+        <p:nvPr/>
+      </p:nvGrpSpPr>
+      <p:grpSpPr>
+        <a:xfrm>
+          <a:off x="0" y="0"/>
+          <a:ext cx="0" cy="0"/>
+          <a:chOff x="0" y="0"/>
+          <a:chExt cx="0" cy="0"/>
+        </a:xfrm>
+      </p:grpSpPr>
+      <p:sp>
+        <p:nvSpPr>
+          <p:cNvPr id="2" name="Slide Image Placeholder 1"/>
+          <p:cNvSpPr>
+            <a:spLocks noGrp="1" noRot="1" noChangeAspect="1"/>
+          </p:cNvSpPr>
+          <p:nvPr>
+            <p:ph type="sldImg"/>
+          </p:nvPr>
+        </p:nvSpPr>
+        <p:spPr/>
+      </p:sp>
+      <p:sp>
+        <p:nvSpPr>
+          <p:cNvPr id="3" name="Notes Placeholder 2"/>
+          <p:cNvSpPr>
+            <a:spLocks noGrp="1"/>
+          </p:cNvSpPr>
+          <p:nvPr>
+            <p:ph type="body" idx="1"/>
+          </p:nvPr>
+        </p:nvSpPr>
+        <p:spPr/>
+        <p:txBody>
+          <a:bodyPr/>
+          <a:lstStyle/>
+          <a:p>
+            <a:r>
+              <a:rPr lang="en-US" dirty="0"/>
+              <a:t>Our next lesson will be on Lesson 42: Water Scarcity. Thank you for your attention, and see you next time.</a:t>
+            </a:r>
+            <a:endParaRPr lang="en-US" dirty="0"/>
+          </a:p>
+        </p:txBody>
+      </p:sp>
+      <p:sp>
+        <p:nvSpPr>
+          <p:cNvPr id="4" name="Slide Number Placeholder 3"/>
+          <p:cNvSpPr>
+            <a:spLocks noGrp="1"/>
+          </p:cNvSpPr>
+          <p:nvPr>
+            <p:ph type="sldNum" sz="quarter" idx="10"/>
+          </p:nvPr>
+        </p:nvSpPr>
+        <p:spPr/>
+        <p:txBody>
+          <a:bodyPr/>
+          <a:lstStyle/>
+          <a:p>
+            <a:fld id="{F7021451-1387-4CA6-816F-3879F97B5CBC}" type="slidenum">
+              <a:rPr lang="en-US"/>
+              <a:t>58</a:t>
+            </a:fld>
+            <a:endParaRPr lang="en-US"/>
+          </a:p>
+        </p:txBody>
+      </p:sp>
+    </p:spTree>
+    <p:extLst>
+      <p:ext uri="{BB962C8B-B14F-4D97-AF65-F5344CB8AC3E}">
+        <p14:creationId xmlns:p14="http://schemas.microsoft.com/office/powerpoint/2010/main" val="1024086991"/>
+      </p:ext>
+    </p:extLst>
+  </p:cSld>
+  <p:clrMapOvr>
+    <a:masterClrMapping/>
+  </p:clrMapOvr>
+</p:notes>
+</file>
+
+<file path=ppt/notesSlides/notesSlide59.xml><?xml version="1.0" encoding="utf-8"?>
+<p:notes xmlns:a="http://schemas.openxmlformats.org/drawingml/2006/main" xmlns:r="http://schemas.openxmlformats.org/officeDocument/2006/relationships" xmlns:p="http://schemas.openxmlformats.org/presentationml/2006/main">
+  <p:cSld>
+    <p:spTree>
+      <p:nvGrpSpPr>
+        <p:cNvPr id="1" name=""/>
+        <p:cNvGrpSpPr/>
+        <p:nvPr/>
+      </p:nvGrpSpPr>
+      <p:grpSpPr>
+        <a:xfrm>
+          <a:off x="0" y="0"/>
+          <a:ext cx="0" cy="0"/>
+          <a:chOff x="0" y="0"/>
+          <a:chExt cx="0" cy="0"/>
+        </a:xfrm>
+      </p:grpSpPr>
+      <p:sp>
+        <p:nvSpPr>
+          <p:cNvPr id="2" name="Slide Image Placeholder 1"/>
+          <p:cNvSpPr>
+            <a:spLocks noGrp="1" noRot="1" noChangeAspect="1"/>
+          </p:cNvSpPr>
+          <p:nvPr>
+            <p:ph type="sldImg"/>
+          </p:nvPr>
+        </p:nvSpPr>
+        <p:spPr/>
+      </p:sp>
+      <p:sp>
+        <p:nvSpPr>
+          <p:cNvPr id="3" name="Notes Placeholder 2"/>
+          <p:cNvSpPr>
+            <a:spLocks noGrp="1"/>
+          </p:cNvSpPr>
+          <p:nvPr>
+            <p:ph type="body" idx="1"/>
+          </p:nvPr>
+        </p:nvSpPr>
+        <p:spPr/>
+        <p:txBody>
+          <a:bodyPr/>
+          <a:lstStyle/>
+          <a:p>
+            <a:r>
+              <a:rPr lang="en-US" dirty="0"/>
+              <a:t>Let us play the bilingual game. I say a word in English, and you give me the French word. Then we do the reverse.</a:t>
+            </a:r>
+            <a:endParaRPr lang="en-US" dirty="0"/>
+          </a:p>
+        </p:txBody>
+      </p:sp>
+      <p:sp>
+        <p:nvSpPr>
+          <p:cNvPr id="4" name="Slide Number Placeholder 3"/>
+          <p:cNvSpPr>
+            <a:spLocks noGrp="1"/>
+          </p:cNvSpPr>
+          <p:nvPr>
+            <p:ph type="sldNum" sz="quarter" idx="10"/>
+          </p:nvPr>
+        </p:nvSpPr>
+        <p:spPr/>
+        <p:txBody>
+          <a:bodyPr/>
+          <a:lstStyle/>
+          <a:p>
+            <a:fld id="{F7021451-1387-4CA6-816F-3879F97B5CBC}" type="slidenum">
+              <a:rPr lang="en-US"/>
+              <a:t>59</a:t>
             </a:fld>
             <a:endParaRPr lang="en-US"/>
           </a:p>
@@ -4712,6 +5428,358 @@
             <a:fld id="{F7021451-1387-4CA6-816F-3879F97B5CBC}" type="slidenum">
               <a:rPr lang="en-US"/>
               <a:t>6</a:t>
+            </a:fld>
+            <a:endParaRPr lang="en-US"/>
+          </a:p>
+        </p:txBody>
+      </p:sp>
+    </p:spTree>
+    <p:extLst>
+      <p:ext uri="{BB962C8B-B14F-4D97-AF65-F5344CB8AC3E}">
+        <p14:creationId xmlns:p14="http://schemas.microsoft.com/office/powerpoint/2010/main" val="1024086991"/>
+      </p:ext>
+    </p:extLst>
+  </p:cSld>
+  <p:clrMapOvr>
+    <a:masterClrMapping/>
+  </p:clrMapOvr>
+</p:notes>
+</file>
+
+<file path=ppt/notesSlides/notesSlide60.xml><?xml version="1.0" encoding="utf-8"?>
+<p:notes xmlns:a="http://schemas.openxmlformats.org/drawingml/2006/main" xmlns:r="http://schemas.openxmlformats.org/officeDocument/2006/relationships" xmlns:p="http://schemas.openxmlformats.org/presentationml/2006/main">
+  <p:cSld>
+    <p:spTree>
+      <p:nvGrpSpPr>
+        <p:cNvPr id="1" name=""/>
+        <p:cNvGrpSpPr/>
+        <p:nvPr/>
+      </p:nvGrpSpPr>
+      <p:grpSpPr>
+        <a:xfrm>
+          <a:off x="0" y="0"/>
+          <a:ext cx="0" cy="0"/>
+          <a:chOff x="0" y="0"/>
+          <a:chExt cx="0" cy="0"/>
+        </a:xfrm>
+      </p:grpSpPr>
+      <p:sp>
+        <p:nvSpPr>
+          <p:cNvPr id="2" name="Slide Image Placeholder 1"/>
+          <p:cNvSpPr>
+            <a:spLocks noGrp="1" noRot="1" noChangeAspect="1"/>
+          </p:cNvSpPr>
+          <p:nvPr>
+            <p:ph type="sldImg"/>
+          </p:nvPr>
+        </p:nvSpPr>
+        <p:spPr/>
+      </p:sp>
+      <p:sp>
+        <p:nvSpPr>
+          <p:cNvPr id="3" name="Notes Placeholder 2"/>
+          <p:cNvSpPr>
+            <a:spLocks noGrp="1"/>
+          </p:cNvSpPr>
+          <p:nvPr>
+            <p:ph type="body" idx="1"/>
+          </p:nvPr>
+        </p:nvSpPr>
+        <p:spPr/>
+        <p:txBody>
+          <a:bodyPr/>
+          <a:lstStyle/>
+          <a:p>
+            <a:r>
+              <a:rPr lang="en-US" dirty="0"/>
+              <a:t>I record this information in the official logbook of the class after the lesson.</a:t>
+            </a:r>
+            <a:endParaRPr lang="en-US" dirty="0"/>
+          </a:p>
+        </p:txBody>
+      </p:sp>
+      <p:sp>
+        <p:nvSpPr>
+          <p:cNvPr id="4" name="Slide Number Placeholder 3"/>
+          <p:cNvSpPr>
+            <a:spLocks noGrp="1"/>
+          </p:cNvSpPr>
+          <p:nvPr>
+            <p:ph type="sldNum" sz="quarter" idx="10"/>
+          </p:nvPr>
+        </p:nvSpPr>
+        <p:spPr/>
+        <p:txBody>
+          <a:bodyPr/>
+          <a:lstStyle/>
+          <a:p>
+            <a:fld id="{F7021451-1387-4CA6-816F-3879F97B5CBC}" type="slidenum">
+              <a:rPr lang="en-US"/>
+              <a:t>60</a:t>
+            </a:fld>
+            <a:endParaRPr lang="en-US"/>
+          </a:p>
+        </p:txBody>
+      </p:sp>
+    </p:spTree>
+    <p:extLst>
+      <p:ext uri="{BB962C8B-B14F-4D97-AF65-F5344CB8AC3E}">
+        <p14:creationId xmlns:p14="http://schemas.microsoft.com/office/powerpoint/2010/main" val="1024086991"/>
+      </p:ext>
+    </p:extLst>
+  </p:cSld>
+  <p:clrMapOvr>
+    <a:masterClrMapping/>
+  </p:clrMapOvr>
+</p:notes>
+</file>
+
+<file path=ppt/notesSlides/notesSlide61.xml><?xml version="1.0" encoding="utf-8"?>
+<p:notes xmlns:a="http://schemas.openxmlformats.org/drawingml/2006/main" xmlns:r="http://schemas.openxmlformats.org/officeDocument/2006/relationships" xmlns:p="http://schemas.openxmlformats.org/presentationml/2006/main">
+  <p:cSld>
+    <p:spTree>
+      <p:nvGrpSpPr>
+        <p:cNvPr id="1" name=""/>
+        <p:cNvGrpSpPr/>
+        <p:nvPr/>
+      </p:nvGrpSpPr>
+      <p:grpSpPr>
+        <a:xfrm>
+          <a:off x="0" y="0"/>
+          <a:ext cx="0" cy="0"/>
+          <a:chOff x="0" y="0"/>
+          <a:chExt cx="0" cy="0"/>
+        </a:xfrm>
+      </p:grpSpPr>
+      <p:sp>
+        <p:nvSpPr>
+          <p:cNvPr id="2" name="Slide Image Placeholder 1"/>
+          <p:cNvSpPr>
+            <a:spLocks noGrp="1" noRot="1" noChangeAspect="1"/>
+          </p:cNvSpPr>
+          <p:nvPr>
+            <p:ph type="sldImg"/>
+          </p:nvPr>
+        </p:nvSpPr>
+        <p:spPr/>
+      </p:sp>
+      <p:sp>
+        <p:nvSpPr>
+          <p:cNvPr id="3" name="Notes Placeholder 2"/>
+          <p:cNvSpPr>
+            <a:spLocks noGrp="1"/>
+          </p:cNvSpPr>
+          <p:nvPr>
+            <p:ph type="body" idx="1"/>
+          </p:nvPr>
+        </p:nvSpPr>
+        <p:spPr/>
+        <p:txBody>
+          <a:bodyPr/>
+          <a:lstStyle/>
+          <a:p>
+            <a:r>
+              <a:rPr lang="en-US" dirty="0"/>
+              <a:t>I complete the second page of the logbook: the matter taught, the evaluation, the homework and the attendance.</a:t>
+            </a:r>
+            <a:endParaRPr lang="en-US" dirty="0"/>
+          </a:p>
+        </p:txBody>
+      </p:sp>
+      <p:sp>
+        <p:nvSpPr>
+          <p:cNvPr id="4" name="Slide Number Placeholder 3"/>
+          <p:cNvSpPr>
+            <a:spLocks noGrp="1"/>
+          </p:cNvSpPr>
+          <p:nvPr>
+            <p:ph type="sldNum" sz="quarter" idx="10"/>
+          </p:nvPr>
+        </p:nvSpPr>
+        <p:spPr/>
+        <p:txBody>
+          <a:bodyPr/>
+          <a:lstStyle/>
+          <a:p>
+            <a:fld id="{F7021451-1387-4CA6-816F-3879F97B5CBC}" type="slidenum">
+              <a:rPr lang="en-US"/>
+              <a:t>61</a:t>
+            </a:fld>
+            <a:endParaRPr lang="en-US"/>
+          </a:p>
+        </p:txBody>
+      </p:sp>
+    </p:spTree>
+    <p:extLst>
+      <p:ext uri="{BB962C8B-B14F-4D97-AF65-F5344CB8AC3E}">
+        <p14:creationId xmlns:p14="http://schemas.microsoft.com/office/powerpoint/2010/main" val="1024086991"/>
+      </p:ext>
+    </p:extLst>
+  </p:cSld>
+  <p:clrMapOvr>
+    <a:masterClrMapping/>
+  </p:clrMapOvr>
+</p:notes>
+</file>
+
+<file path=ppt/notesSlides/notesSlide62.xml><?xml version="1.0" encoding="utf-8"?>
+<p:notes xmlns:a="http://schemas.openxmlformats.org/drawingml/2006/main" xmlns:r="http://schemas.openxmlformats.org/officeDocument/2006/relationships" xmlns:p="http://schemas.openxmlformats.org/presentationml/2006/main">
+  <p:cSld>
+    <p:spTree>
+      <p:nvGrpSpPr>
+        <p:cNvPr id="1" name=""/>
+        <p:cNvGrpSpPr/>
+        <p:nvPr/>
+      </p:nvGrpSpPr>
+      <p:grpSpPr>
+        <a:xfrm>
+          <a:off x="0" y="0"/>
+          <a:ext cx="0" cy="0"/>
+          <a:chOff x="0" y="0"/>
+          <a:chExt cx="0" cy="0"/>
+        </a:xfrm>
+      </p:grpSpPr>
+      <p:sp>
+        <p:nvSpPr>
+          <p:cNvPr id="2" name="Slide Image Placeholder 1"/>
+          <p:cNvSpPr>
+            <a:spLocks noGrp="1" noRot="1" noChangeAspect="1"/>
+          </p:cNvSpPr>
+          <p:nvPr>
+            <p:ph type="sldImg"/>
+          </p:nvPr>
+        </p:nvSpPr>
+        <p:spPr/>
+      </p:sp>
+      <p:sp>
+        <p:nvSpPr>
+          <p:cNvPr id="3" name="Notes Placeholder 2"/>
+          <p:cNvSpPr>
+            <a:spLocks noGrp="1"/>
+          </p:cNvSpPr>
+          <p:nvPr>
+            <p:ph type="body" idx="1"/>
+          </p:nvPr>
+        </p:nvSpPr>
+        <p:spPr/>
+        <p:txBody>
+          <a:bodyPr/>
+          <a:lstStyle/>
+          <a:p>
+            <a:r>
+              <a:rPr lang="en-US" dirty="0"/>
+              <a:t>This slide is for me, the teacher: it gives the timing of the lesson and what to do if the projector is not available.</a:t>
+            </a:r>
+            <a:endParaRPr lang="en-US" dirty="0"/>
+          </a:p>
+        </p:txBody>
+      </p:sp>
+      <p:sp>
+        <p:nvSpPr>
+          <p:cNvPr id="4" name="Slide Number Placeholder 3"/>
+          <p:cNvSpPr>
+            <a:spLocks noGrp="1"/>
+          </p:cNvSpPr>
+          <p:nvPr>
+            <p:ph type="sldNum" sz="quarter" idx="10"/>
+          </p:nvPr>
+        </p:nvSpPr>
+        <p:spPr/>
+        <p:txBody>
+          <a:bodyPr/>
+          <a:lstStyle/>
+          <a:p>
+            <a:fld id="{F7021451-1387-4CA6-816F-3879F97B5CBC}" type="slidenum">
+              <a:rPr lang="en-US"/>
+              <a:t>62</a:t>
+            </a:fld>
+            <a:endParaRPr lang="en-US"/>
+          </a:p>
+        </p:txBody>
+      </p:sp>
+    </p:spTree>
+    <p:extLst>
+      <p:ext uri="{BB962C8B-B14F-4D97-AF65-F5344CB8AC3E}">
+        <p14:creationId xmlns:p14="http://schemas.microsoft.com/office/powerpoint/2010/main" val="1024086991"/>
+      </p:ext>
+    </p:extLst>
+  </p:cSld>
+  <p:clrMapOvr>
+    <a:masterClrMapping/>
+  </p:clrMapOvr>
+</p:notes>
+</file>
+
+<file path=ppt/notesSlides/notesSlide63.xml><?xml version="1.0" encoding="utf-8"?>
+<p:notes xmlns:a="http://schemas.openxmlformats.org/drawingml/2006/main" xmlns:r="http://schemas.openxmlformats.org/officeDocument/2006/relationships" xmlns:p="http://schemas.openxmlformats.org/presentationml/2006/main">
+  <p:cSld>
+    <p:spTree>
+      <p:nvGrpSpPr>
+        <p:cNvPr id="1" name=""/>
+        <p:cNvGrpSpPr/>
+        <p:nvPr/>
+      </p:nvGrpSpPr>
+      <p:grpSpPr>
+        <a:xfrm>
+          <a:off x="0" y="0"/>
+          <a:ext cx="0" cy="0"/>
+          <a:chOff x="0" y="0"/>
+          <a:chExt cx="0" cy="0"/>
+        </a:xfrm>
+      </p:grpSpPr>
+      <p:sp>
+        <p:nvSpPr>
+          <p:cNvPr id="2" name="Slide Image Placeholder 1"/>
+          <p:cNvSpPr>
+            <a:spLocks noGrp="1" noRot="1" noChangeAspect="1"/>
+          </p:cNvSpPr>
+          <p:nvPr>
+            <p:ph type="sldImg"/>
+          </p:nvPr>
+        </p:nvSpPr>
+        <p:spPr/>
+      </p:sp>
+      <p:sp>
+        <p:nvSpPr>
+          <p:cNvPr id="3" name="Notes Placeholder 2"/>
+          <p:cNvSpPr>
+            <a:spLocks noGrp="1"/>
+          </p:cNvSpPr>
+          <p:nvPr>
+            <p:ph type="body" idx="1"/>
+          </p:nvPr>
+        </p:nvSpPr>
+        <p:spPr/>
+        <p:txBody>
+          <a:bodyPr/>
+          <a:lstStyle/>
+          <a:p>
+            <a:r>
+              <a:rPr lang="en-US" dirty="0"/>
+              <a:t>These are the references and picture credits used to prepare this lesson.</a:t>
+            </a:r>
+            <a:endParaRPr lang="en-US" dirty="0"/>
+          </a:p>
+        </p:txBody>
+      </p:sp>
+      <p:sp>
+        <p:nvSpPr>
+          <p:cNvPr id="4" name="Slide Number Placeholder 3"/>
+          <p:cNvSpPr>
+            <a:spLocks noGrp="1"/>
+          </p:cNvSpPr>
+          <p:nvPr>
+            <p:ph type="sldNum" sz="quarter" idx="10"/>
+          </p:nvPr>
+        </p:nvSpPr>
+        <p:spPr/>
+        <p:txBody>
+          <a:bodyPr/>
+          <a:lstStyle/>
+          <a:p>
+            <a:fld id="{F7021451-1387-4CA6-816F-3879F97B5CBC}" type="slidenum">
+              <a:rPr lang="en-US"/>
+              <a:t>63</a:t>
             </a:fld>
             <a:endParaRPr lang="en-US"/>
           </a:p>
@@ -12683,8 +13751,49 @@
         </p:nvSpPr>
         <p:spPr>
           <a:xfrm>
-            <a:off x="365760" y="1783080"/>
-            <a:ext cx="4846320" cy="4617720"/>
+            <a:off x="365760" y="1737360"/>
+            <a:ext cx="5120640" cy="457200"/>
+          </a:xfrm>
+          <a:prstGeom prst="rect">
+            <a:avLst/>
+          </a:prstGeom>
+          <a:noFill/>
+          <a:ln/>
+        </p:spPr>
+        <p:txBody>
+          <a:bodyPr wrap="square" lIns="0" tIns="0" rIns="0" bIns="0" rtlCol="0" anchor="ctr">
+            <a:normAutofit/>
+          </a:bodyPr>
+          <a:lstStyle/>
+          <a:p>
+            <a:pPr algn="l" indent="0" marL="0">
+              <a:buNone/>
+            </a:pPr>
+            <a:r>
+              <a:rPr lang="en-US" sz="3000" b="1" dirty="0">
+                <a:solidFill>
+                  <a:srgbClr val="990011"/>
+                </a:solidFill>
+                <a:latin typeface="Times New Roman" pitchFamily="34" charset="0"/>
+                <a:ea typeface="Times New Roman" pitchFamily="34" charset="-122"/>
+                <a:cs typeface="Times New Roman" pitchFamily="34" charset="-120"/>
+              </a:rPr>
+              <a:t>A) Areas of Occurrence</a:t>
+            </a:r>
+            <a:endParaRPr lang="en-US" sz="3000" dirty="0"/>
+          </a:p>
+        </p:txBody>
+      </p:sp>
+      <p:sp>
+        <p:nvSpPr>
+          <p:cNvPr id="5" name="Text 3"/>
+          <p:cNvSpPr/>
+          <p:nvPr/>
+        </p:nvSpPr>
+        <p:spPr>
+          <a:xfrm>
+            <a:off x="365760" y="2240280"/>
+            <a:ext cx="4846320" cy="4160520"/>
           </a:xfrm>
           <a:prstGeom prst="rect">
             <a:avLst/>
@@ -12711,7 +13820,7 @@
                 <a:ea typeface="Times New Roman" pitchFamily="34" charset="-122"/>
                 <a:cs typeface="Times New Roman" pitchFamily="34" charset="-120"/>
               </a:rPr>
-              <a:t>Floods are explained as follows:</a:t>
+              <a:t>Floods occur in the following areas:</a:t>
             </a:r>
             <a:endParaRPr lang="en-US" sz="3600" dirty="0"/>
           </a:p>
@@ -12731,7 +13840,7 @@
                 <a:ea typeface="Times New Roman" pitchFamily="34" charset="-122"/>
                 <a:cs typeface="Times New Roman" pitchFamily="34" charset="-120"/>
               </a:rPr>
-              <a:t>Areas of occurrence: </a:t>
+              <a:t>River valleys: </a:t>
             </a:r>
             <a:pPr algn="l" indent="0" marL="0">
               <a:spcAft>
@@ -12748,7 +13857,7 @@
                 <a:ea typeface="Times New Roman" pitchFamily="34" charset="-122"/>
                 <a:cs typeface="Times New Roman" pitchFamily="34" charset="-120"/>
               </a:rPr>
-              <a:t>Floods occur along the Benue, the Logone and the Chari, and in towns such as Douala and Yaoundé.</a:t>
+              <a:t>Along the Benue, the Logone and the Chari.</a:t>
             </a:r>
             <a:endParaRPr lang="en-US" sz="3600" dirty="0"/>
           </a:p>
@@ -12756,7 +13865,7 @@
       </p:sp>
       <p:pic>
         <p:nvPicPr>
-          <p:cNvPr id="5" name="Image 0" descr="/home/claude/f4/img/v2/f4_floodvillage.jpg">    </p:cNvPr>
+          <p:cNvPr id="6" name="Image 0" descr="/home/claude/f4/img/v2/f4_floodvillage.jpg">    </p:cNvPr>
           <p:cNvPicPr>
             <a:picLocks noChangeAspect="1"/>
           </p:cNvPicPr>
@@ -12780,7 +13889,7 @@
       </p:pic>
       <p:sp>
         <p:nvSpPr>
-          <p:cNvPr id="6" name="Text 3"/>
+          <p:cNvPr id="7" name="Text 4"/>
           <p:cNvSpPr/>
           <p:nvPr/>
         </p:nvSpPr>
@@ -12929,109 +14038,9 @@
           </a:p>
         </p:txBody>
       </p:sp>
-      <p:sp>
-        <p:nvSpPr>
-          <p:cNvPr id="3" name="Text 1"/>
-          <p:cNvSpPr/>
-          <p:nvPr/>
-        </p:nvSpPr>
-        <p:spPr>
-          <a:xfrm>
-            <a:off x="365760" y="1005840"/>
-            <a:ext cx="11460175" cy="731520"/>
-          </a:xfrm>
-          <a:prstGeom prst="rect">
-            <a:avLst/>
-          </a:prstGeom>
-          <a:noFill/>
-          <a:ln/>
-        </p:spPr>
-        <p:txBody>
-          <a:bodyPr wrap="square" lIns="0" tIns="0" rIns="0" bIns="0" rtlCol="0" anchor="ctr">
-            <a:normAutofit/>
-          </a:bodyPr>
-          <a:lstStyle/>
-          <a:p>
-            <a:pPr algn="ctr" indent="0" marL="0">
-              <a:buNone/>
-            </a:pPr>
-            <a:r>
-              <a:rPr lang="en-US" sz="3600" b="1" dirty="0">
-                <a:solidFill>
-                  <a:srgbClr val="990011"/>
-                </a:solidFill>
-                <a:latin typeface="Times New Roman" pitchFamily="34" charset="0"/>
-                <a:ea typeface="Times New Roman" pitchFamily="34" charset="-122"/>
-                <a:cs typeface="Times New Roman" pitchFamily="34" charset="-120"/>
-              </a:rPr>
-              <a:t>1. Floods</a:t>
-            </a:r>
-            <a:endParaRPr lang="en-US" sz="3600" dirty="0"/>
-          </a:p>
-        </p:txBody>
-      </p:sp>
-      <p:sp>
-        <p:nvSpPr>
-          <p:cNvPr id="4" name="Text 2"/>
-          <p:cNvSpPr/>
-          <p:nvPr/>
-        </p:nvSpPr>
-        <p:spPr>
-          <a:xfrm>
-            <a:off x="365760" y="1783080"/>
-            <a:ext cx="4846320" cy="4617720"/>
-          </a:xfrm>
-          <a:prstGeom prst="rect">
-            <a:avLst/>
-          </a:prstGeom>
-          <a:noFill/>
-          <a:ln/>
-        </p:spPr>
-        <p:txBody>
-          <a:bodyPr wrap="square" lIns="0" tIns="0" rIns="0" bIns="0" rtlCol="0" anchor="t"/>
-          <a:lstStyle/>
-          <a:p>
-            <a:pPr algn="l" indent="0" marL="0">
-              <a:spcAft>
-                <a:spcPts val="800"/>
-              </a:spcAft>
-              <a:buNone/>
-            </a:pPr>
-            <a:r>
-              <a:rPr lang="en-US" sz="3600" b="1" dirty="0">
-                <a:solidFill>
-                  <a:srgbClr val="111111"/>
-                </a:solidFill>
-                <a:latin typeface="Times New Roman" pitchFamily="34" charset="0"/>
-                <a:ea typeface="Times New Roman" pitchFamily="34" charset="-122"/>
-                <a:cs typeface="Times New Roman" pitchFamily="34" charset="-120"/>
-              </a:rPr>
-              <a:t>Causes: </a:t>
-            </a:r>
-            <a:pPr algn="l" indent="0" marL="0">
-              <a:spcAft>
-                <a:spcPts val="800"/>
-              </a:spcAft>
-              <a:buNone/>
-            </a:pPr>
-            <a:r>
-              <a:rPr lang="en-US" sz="3600" dirty="0">
-                <a:solidFill>
-                  <a:srgbClr val="111111"/>
-                </a:solidFill>
-                <a:latin typeface="Times New Roman" pitchFamily="34" charset="0"/>
-                <a:ea typeface="Times New Roman" pitchFamily="34" charset="-122"/>
-                <a:cs typeface="Times New Roman" pitchFamily="34" charset="-120"/>
-              </a:rPr>
-              <a:t>Heavy rain, water released from dams, blocked drains and building on floodplains cause floods.</a:t>
-            </a:r>
-            <a:endParaRPr lang="en-US" sz="3600" dirty="0"/>
-          </a:p>
-        </p:txBody>
-      </p:sp>
       <p:pic>
         <p:nvPicPr>
-          <p:cNvPr id="5" name="Image 0" descr="/home/claude/f4/img/v2/flood_causes_big.png">    </p:cNvPr>
+          <p:cNvPr id="3" name="Image 0" descr="/home/claude/f4/img/minesec_sheet.png">    </p:cNvPr>
           <p:cNvPicPr>
             <a:picLocks noChangeAspect="1"/>
           </p:cNvPicPr>
@@ -13045,8 +14054,8 @@
         </p:blipFill>
         <p:spPr>
           <a:xfrm>
-            <a:off x="5349240" y="2617506"/>
-            <a:ext cx="6659575" cy="2601397"/>
+            <a:off x="0" y="658368"/>
+            <a:ext cx="5120640" cy="5833872"/>
           </a:xfrm>
           <a:prstGeom prst="rect">
             <a:avLst/>
@@ -13055,14 +14064,14 @@
       </p:pic>
       <p:sp>
         <p:nvSpPr>
-          <p:cNvPr id="6" name="Text 3"/>
+          <p:cNvPr id="4" name="Text 1"/>
           <p:cNvSpPr/>
           <p:nvPr/>
         </p:nvSpPr>
         <p:spPr>
           <a:xfrm>
-            <a:off x="5349240" y="6089904"/>
-            <a:ext cx="6659575" cy="347472"/>
+            <a:off x="5349240" y="1005840"/>
+            <a:ext cx="6522415" cy="731520"/>
           </a:xfrm>
           <a:prstGeom prst="rect">
             <a:avLst/>
@@ -13071,24 +14080,124 @@
           <a:ln/>
         </p:spPr>
         <p:txBody>
-          <a:bodyPr wrap="square" lIns="0" tIns="0" rIns="0" bIns="0" rtlCol="0" anchor="ctr"/>
+          <a:bodyPr wrap="square" lIns="0" tIns="0" rIns="0" bIns="0" rtlCol="0" anchor="ctr">
+            <a:normAutofit/>
+          </a:bodyPr>
           <a:lstStyle/>
           <a:p>
             <a:pPr algn="ctr" indent="0" marL="0">
               <a:buNone/>
             </a:pPr>
             <a:r>
-              <a:rPr lang="en-US" sz="1600" i="1" dirty="0">
-                <a:solidFill>
-                  <a:srgbClr val="555555"/>
+              <a:rPr lang="en-US" sz="3600" b="1" dirty="0">
+                <a:solidFill>
+                  <a:srgbClr val="990011"/>
                 </a:solidFill>
                 <a:latin typeface="Times New Roman" pitchFamily="34" charset="0"/>
                 <a:ea typeface="Times New Roman" pitchFamily="34" charset="-122"/>
                 <a:cs typeface="Times New Roman" pitchFamily="34" charset="-120"/>
               </a:rPr>
-              <a:t>Illustration: causes of floods</a:t>
-            </a:r>
-            <a:endParaRPr lang="en-US" sz="1600" dirty="0"/>
+              <a:t>1. Floods</a:t>
+            </a:r>
+            <a:endParaRPr lang="en-US" sz="3600" dirty="0"/>
+          </a:p>
+        </p:txBody>
+      </p:sp>
+      <p:sp>
+        <p:nvSpPr>
+          <p:cNvPr id="5" name="Text 2"/>
+          <p:cNvSpPr/>
+          <p:nvPr/>
+        </p:nvSpPr>
+        <p:spPr>
+          <a:xfrm>
+            <a:off x="5349240" y="1737360"/>
+            <a:ext cx="6522415" cy="457200"/>
+          </a:xfrm>
+          <a:prstGeom prst="rect">
+            <a:avLst/>
+          </a:prstGeom>
+          <a:noFill/>
+          <a:ln/>
+        </p:spPr>
+        <p:txBody>
+          <a:bodyPr wrap="square" lIns="0" tIns="0" rIns="0" bIns="0" rtlCol="0" anchor="ctr"/>
+          <a:lstStyle/>
+          <a:p>
+            <a:pPr algn="l" indent="0" marL="0">
+              <a:buNone/>
+            </a:pPr>
+            <a:r>
+              <a:rPr lang="en-US" sz="3200" b="1" dirty="0">
+                <a:solidFill>
+                  <a:srgbClr val="990011"/>
+                </a:solidFill>
+                <a:latin typeface="Times New Roman" pitchFamily="34" charset="0"/>
+                <a:ea typeface="Times New Roman" pitchFamily="34" charset="-122"/>
+                <a:cs typeface="Times New Roman" pitchFamily="34" charset="-120"/>
+              </a:rPr>
+              <a:t>A) Areas of Occurrence</a:t>
+            </a:r>
+            <a:endParaRPr lang="en-US" sz="3200" dirty="0"/>
+          </a:p>
+        </p:txBody>
+      </p:sp>
+      <p:sp>
+        <p:nvSpPr>
+          <p:cNvPr id="6" name="Text 3"/>
+          <p:cNvSpPr/>
+          <p:nvPr/>
+        </p:nvSpPr>
+        <p:spPr>
+          <a:xfrm>
+            <a:off x="5349240" y="2240280"/>
+            <a:ext cx="6522415" cy="4206240"/>
+          </a:xfrm>
+          <a:prstGeom prst="rect">
+            <a:avLst/>
+          </a:prstGeom>
+          <a:noFill/>
+          <a:ln/>
+        </p:spPr>
+        <p:txBody>
+          <a:bodyPr wrap="square" lIns="0" tIns="0" rIns="0" bIns="0" rtlCol="0" anchor="t"/>
+          <a:lstStyle/>
+          <a:p>
+            <a:pPr algn="l" indent="0" marL="0">
+              <a:spcAft>
+                <a:spcPts val="800"/>
+              </a:spcAft>
+              <a:buNone/>
+            </a:pPr>
+            <a:r>
+              <a:rPr lang="en-US" sz="4000" b="1" dirty="0">
+                <a:solidFill>
+                  <a:srgbClr val="111111"/>
+                </a:solidFill>
+                <a:latin typeface="Times New Roman" pitchFamily="34" charset="0"/>
+                <a:ea typeface="Times New Roman" pitchFamily="34" charset="-122"/>
+                <a:cs typeface="Times New Roman" pitchFamily="34" charset="-120"/>
+              </a:rPr>
+              <a:t>Towns: </a:t>
+            </a:r>
+            <a:pPr algn="l" indent="0" marL="0">
+              <a:spcAft>
+                <a:spcPts val="800"/>
+              </a:spcAft>
+              <a:buNone/>
+            </a:pPr>
+            <a:r>
+              <a:rPr lang="en-US" sz="4000" dirty="0">
+                <a:solidFill>
+                  <a:srgbClr val="111111"/>
+                </a:solidFill>
+                <a:latin typeface="Times New Roman" pitchFamily="34" charset="0"/>
+                <a:ea typeface="Times New Roman" pitchFamily="34" charset="-122"/>
+                <a:cs typeface="Times New Roman" pitchFamily="34" charset="-120"/>
+              </a:rPr>
+              <a:t>In low quarters of Douala, Yaoundé and Garoua.</a:t>
+            </a:r>
+            <a:endParaRPr lang="en-US" sz="4000" dirty="0"/>
           </a:p>
         </p:txBody>
       </p:sp>
@@ -13204,9 +14313,170 @@
           </a:p>
         </p:txBody>
       </p:sp>
+      <p:sp>
+        <p:nvSpPr>
+          <p:cNvPr id="3" name="Text 1"/>
+          <p:cNvSpPr/>
+          <p:nvPr/>
+        </p:nvSpPr>
+        <p:spPr>
+          <a:xfrm>
+            <a:off x="365760" y="1005840"/>
+            <a:ext cx="11460175" cy="731520"/>
+          </a:xfrm>
+          <a:prstGeom prst="rect">
+            <a:avLst/>
+          </a:prstGeom>
+          <a:noFill/>
+          <a:ln/>
+        </p:spPr>
+        <p:txBody>
+          <a:bodyPr wrap="square" lIns="0" tIns="0" rIns="0" bIns="0" rtlCol="0" anchor="ctr">
+            <a:normAutofit/>
+          </a:bodyPr>
+          <a:lstStyle/>
+          <a:p>
+            <a:pPr algn="ctr" indent="0" marL="0">
+              <a:buNone/>
+            </a:pPr>
+            <a:r>
+              <a:rPr lang="en-US" sz="3600" b="1" dirty="0">
+                <a:solidFill>
+                  <a:srgbClr val="990011"/>
+                </a:solidFill>
+                <a:latin typeface="Times New Roman" pitchFamily="34" charset="0"/>
+                <a:ea typeface="Times New Roman" pitchFamily="34" charset="-122"/>
+                <a:cs typeface="Times New Roman" pitchFamily="34" charset="-120"/>
+              </a:rPr>
+              <a:t>1. Floods</a:t>
+            </a:r>
+            <a:endParaRPr lang="en-US" sz="3600" dirty="0"/>
+          </a:p>
+        </p:txBody>
+      </p:sp>
+      <p:sp>
+        <p:nvSpPr>
+          <p:cNvPr id="4" name="Text 2"/>
+          <p:cNvSpPr/>
+          <p:nvPr/>
+        </p:nvSpPr>
+        <p:spPr>
+          <a:xfrm>
+            <a:off x="365760" y="1737360"/>
+            <a:ext cx="5120640" cy="457200"/>
+          </a:xfrm>
+          <a:prstGeom prst="rect">
+            <a:avLst/>
+          </a:prstGeom>
+          <a:noFill/>
+          <a:ln/>
+        </p:spPr>
+        <p:txBody>
+          <a:bodyPr wrap="square" lIns="0" tIns="0" rIns="0" bIns="0" rtlCol="0" anchor="ctr">
+            <a:normAutofit/>
+          </a:bodyPr>
+          <a:lstStyle/>
+          <a:p>
+            <a:pPr algn="l" indent="0" marL="0">
+              <a:buNone/>
+            </a:pPr>
+            <a:r>
+              <a:rPr lang="en-US" sz="3000" b="1" dirty="0">
+                <a:solidFill>
+                  <a:srgbClr val="990011"/>
+                </a:solidFill>
+                <a:latin typeface="Times New Roman" pitchFamily="34" charset="0"/>
+                <a:ea typeface="Times New Roman" pitchFamily="34" charset="-122"/>
+                <a:cs typeface="Times New Roman" pitchFamily="34" charset="-120"/>
+              </a:rPr>
+              <a:t>B) Causes</a:t>
+            </a:r>
+            <a:endParaRPr lang="en-US" sz="3000" dirty="0"/>
+          </a:p>
+        </p:txBody>
+      </p:sp>
+      <p:sp>
+        <p:nvSpPr>
+          <p:cNvPr id="5" name="Text 3"/>
+          <p:cNvSpPr/>
+          <p:nvPr/>
+        </p:nvSpPr>
+        <p:spPr>
+          <a:xfrm>
+            <a:off x="365760" y="2240280"/>
+            <a:ext cx="4846320" cy="4160520"/>
+          </a:xfrm>
+          <a:prstGeom prst="rect">
+            <a:avLst/>
+          </a:prstGeom>
+          <a:noFill/>
+          <a:ln/>
+        </p:spPr>
+        <p:txBody>
+          <a:bodyPr wrap="square" lIns="0" tIns="0" rIns="0" bIns="0" rtlCol="0" anchor="t"/>
+          <a:lstStyle/>
+          <a:p>
+            <a:pPr algn="l" indent="0" marL="0">
+              <a:spcAft>
+                <a:spcPts val="800"/>
+              </a:spcAft>
+              <a:buNone/>
+            </a:pPr>
+            <a:r>
+              <a:rPr lang="en-US" sz="3600" i="1" dirty="0">
+                <a:solidFill>
+                  <a:srgbClr val="111111"/>
+                </a:solidFill>
+                <a:latin typeface="Times New Roman" pitchFamily="34" charset="0"/>
+                <a:ea typeface="Times New Roman" pitchFamily="34" charset="-122"/>
+                <a:cs typeface="Times New Roman" pitchFamily="34" charset="-120"/>
+              </a:rPr>
+              <a:t>Floods are caused by the following factors:</a:t>
+            </a:r>
+            <a:endParaRPr lang="en-US" sz="3600" dirty="0"/>
+          </a:p>
+          <a:p>
+            <a:pPr algn="l" indent="0" marL="0">
+              <a:spcAft>
+                <a:spcPts val="800"/>
+              </a:spcAft>
+              <a:buNone/>
+            </a:pPr>
+            <a:r>
+              <a:rPr lang="en-US" sz="3600" b="1" dirty="0">
+                <a:solidFill>
+                  <a:srgbClr val="111111"/>
+                </a:solidFill>
+                <a:latin typeface="Times New Roman" pitchFamily="34" charset="0"/>
+                <a:ea typeface="Times New Roman" pitchFamily="34" charset="-122"/>
+                <a:cs typeface="Times New Roman" pitchFamily="34" charset="-120"/>
+              </a:rPr>
+              <a:t>Heavy rain: </a:t>
+            </a:r>
+            <a:pPr algn="l" indent="0" marL="0">
+              <a:spcAft>
+                <a:spcPts val="800"/>
+              </a:spcAft>
+              <a:buNone/>
+            </a:pPr>
+            <a:r>
+              <a:rPr lang="en-US" sz="3600" dirty="0">
+                <a:solidFill>
+                  <a:srgbClr val="111111"/>
+                </a:solidFill>
+                <a:latin typeface="Times New Roman" pitchFamily="34" charset="0"/>
+                <a:ea typeface="Times New Roman" pitchFamily="34" charset="-122"/>
+                <a:cs typeface="Times New Roman" pitchFamily="34" charset="-120"/>
+              </a:rPr>
+              <a:t>Rivers overflow after long or very strong rains.</a:t>
+            </a:r>
+            <a:endParaRPr lang="en-US" sz="3600" dirty="0"/>
+          </a:p>
+        </p:txBody>
+      </p:sp>
       <p:pic>
         <p:nvPicPr>
-          <p:cNvPr id="3" name="Image 0" descr="/home/claude/f4/img/minesec_sheet.png">    </p:cNvPr>
+          <p:cNvPr id="6" name="Image 0" descr="/home/claude/f4/img/v2/flood_causes_big.png">    </p:cNvPr>
           <p:cNvPicPr>
             <a:picLocks noChangeAspect="1"/>
           </p:cNvPicPr>
@@ -13220,8 +14490,8 @@
         </p:blipFill>
         <p:spPr>
           <a:xfrm>
-            <a:off x="0" y="658368"/>
-            <a:ext cx="3840480" cy="5833872"/>
+            <a:off x="5349240" y="2617506"/>
+            <a:ext cx="6659575" cy="2601397"/>
           </a:xfrm>
           <a:prstGeom prst="rect">
             <a:avLst/>
@@ -13230,14 +14500,14 @@
       </p:pic>
       <p:sp>
         <p:nvSpPr>
-          <p:cNvPr id="4" name="Text 1"/>
+          <p:cNvPr id="7" name="Text 4"/>
           <p:cNvSpPr/>
           <p:nvPr/>
         </p:nvSpPr>
         <p:spPr>
           <a:xfrm>
-            <a:off x="4069080" y="1005840"/>
-            <a:ext cx="7802575" cy="731520"/>
+            <a:off x="5349240" y="6089904"/>
+            <a:ext cx="6659575" cy="347472"/>
           </a:xfrm>
           <a:prstGeom prst="rect">
             <a:avLst/>
@@ -13246,122 +14516,24 @@
           <a:ln/>
         </p:spPr>
         <p:txBody>
-          <a:bodyPr wrap="square" lIns="0" tIns="0" rIns="0" bIns="0" rtlCol="0" anchor="ctr">
-            <a:normAutofit/>
-          </a:bodyPr>
+          <a:bodyPr wrap="square" lIns="0" tIns="0" rIns="0" bIns="0" rtlCol="0" anchor="ctr"/>
           <a:lstStyle/>
           <a:p>
             <a:pPr algn="ctr" indent="0" marL="0">
               <a:buNone/>
             </a:pPr>
             <a:r>
-              <a:rPr lang="en-US" sz="3600" b="1" dirty="0">
-                <a:solidFill>
-                  <a:srgbClr val="990011"/>
+              <a:rPr lang="en-US" sz="1600" i="1" dirty="0">
+                <a:solidFill>
+                  <a:srgbClr val="555555"/>
                 </a:solidFill>
                 <a:latin typeface="Times New Roman" pitchFamily="34" charset="0"/>
                 <a:ea typeface="Times New Roman" pitchFamily="34" charset="-122"/>
                 <a:cs typeface="Times New Roman" pitchFamily="34" charset="-120"/>
               </a:rPr>
-              <a:t>1. Floods</a:t>
-            </a:r>
-            <a:endParaRPr lang="en-US" sz="3600" dirty="0"/>
-          </a:p>
-        </p:txBody>
-      </p:sp>
-      <p:sp>
-        <p:nvSpPr>
-          <p:cNvPr id="5" name="Text 2"/>
-          <p:cNvSpPr/>
-          <p:nvPr/>
-        </p:nvSpPr>
-        <p:spPr>
-          <a:xfrm>
-            <a:off x="4069080" y="1783080"/>
-            <a:ext cx="7802575" cy="4663440"/>
-          </a:xfrm>
-          <a:prstGeom prst="rect">
-            <a:avLst/>
-          </a:prstGeom>
-          <a:noFill/>
-          <a:ln/>
-        </p:spPr>
-        <p:txBody>
-          <a:bodyPr wrap="square" lIns="0" tIns="0" rIns="0" bIns="0" rtlCol="0" anchor="t"/>
-          <a:lstStyle/>
-          <a:p>
-            <a:pPr algn="l" indent="0" marL="0">
-              <a:spcAft>
-                <a:spcPts val="800"/>
-              </a:spcAft>
-              <a:buNone/>
-            </a:pPr>
-            <a:r>
-              <a:rPr lang="en-US" sz="4000" b="1" dirty="0">
-                <a:solidFill>
-                  <a:srgbClr val="111111"/>
-                </a:solidFill>
-                <a:latin typeface="Times New Roman" pitchFamily="34" charset="0"/>
-                <a:ea typeface="Times New Roman" pitchFamily="34" charset="-122"/>
-                <a:cs typeface="Times New Roman" pitchFamily="34" charset="-120"/>
-              </a:rPr>
-              <a:t>Effects: </a:t>
-            </a:r>
-            <a:pPr algn="l" indent="0" marL="0">
-              <a:spcAft>
-                <a:spcPts val="800"/>
-              </a:spcAft>
-              <a:buNone/>
-            </a:pPr>
-            <a:r>
-              <a:rPr lang="en-US" sz="4000" dirty="0">
-                <a:solidFill>
-                  <a:srgbClr val="111111"/>
-                </a:solidFill>
-                <a:latin typeface="Times New Roman" pitchFamily="34" charset="0"/>
-                <a:ea typeface="Times New Roman" pitchFamily="34" charset="-122"/>
-                <a:cs typeface="Times New Roman" pitchFamily="34" charset="-120"/>
-              </a:rPr>
-              <a:t>Floods destroy houses, crops and roads, drown people and spread cholera and malaria.</a:t>
-            </a:r>
-            <a:endParaRPr lang="en-US" sz="4000" dirty="0"/>
-          </a:p>
-          <a:p>
-            <a:pPr algn="l" indent="0" marL="0">
-              <a:spcAft>
-                <a:spcPts val="800"/>
-              </a:spcAft>
-              <a:buNone/>
-            </a:pPr>
-            <a:r>
-              <a:rPr lang="en-US" sz="4000" b="1" dirty="0">
-                <a:solidFill>
-                  <a:srgbClr val="111111"/>
-                </a:solidFill>
-                <a:latin typeface="Times New Roman" pitchFamily="34" charset="0"/>
-                <a:ea typeface="Times New Roman" pitchFamily="34" charset="-122"/>
-                <a:cs typeface="Times New Roman" pitchFamily="34" charset="-120"/>
-              </a:rPr>
-              <a:t>Adaptation and mitigation: </a:t>
-            </a:r>
-            <a:pPr algn="l" indent="0" marL="0">
-              <a:spcAft>
-                <a:spcPts val="800"/>
-              </a:spcAft>
-              <a:buNone/>
-            </a:pPr>
-            <a:r>
-              <a:rPr lang="en-US" sz="4000" dirty="0">
-                <a:solidFill>
-                  <a:srgbClr val="111111"/>
-                </a:solidFill>
-                <a:latin typeface="Times New Roman" pitchFamily="34" charset="0"/>
-                <a:ea typeface="Times New Roman" pitchFamily="34" charset="-122"/>
-                <a:cs typeface="Times New Roman" pitchFamily="34" charset="-120"/>
-              </a:rPr>
-              <a:t>Dykes, clean drains, early warnings and building on high ground reduce flood damage.</a:t>
-            </a:r>
-            <a:endParaRPr lang="en-US" sz="4000" dirty="0"/>
+              <a:t>Illustration: causes of floods</a:t>
+            </a:r>
+            <a:endParaRPr lang="en-US" sz="1600" dirty="0"/>
           </a:p>
         </p:txBody>
       </p:sp>
@@ -13477,129 +14649,9 @@
           </a:p>
         </p:txBody>
       </p:sp>
-      <p:sp>
-        <p:nvSpPr>
-          <p:cNvPr id="3" name="Text 1"/>
-          <p:cNvSpPr/>
-          <p:nvPr/>
-        </p:nvSpPr>
-        <p:spPr>
-          <a:xfrm>
-            <a:off x="365760" y="1005840"/>
-            <a:ext cx="11460175" cy="731520"/>
-          </a:xfrm>
-          <a:prstGeom prst="rect">
-            <a:avLst/>
-          </a:prstGeom>
-          <a:noFill/>
-          <a:ln/>
-        </p:spPr>
-        <p:txBody>
-          <a:bodyPr wrap="square" lIns="0" tIns="0" rIns="0" bIns="0" rtlCol="0" anchor="ctr">
-            <a:normAutofit/>
-          </a:bodyPr>
-          <a:lstStyle/>
-          <a:p>
-            <a:pPr algn="ctr" indent="0" marL="0">
-              <a:buNone/>
-            </a:pPr>
-            <a:r>
-              <a:rPr lang="en-US" sz="3600" b="1" dirty="0">
-                <a:solidFill>
-                  <a:srgbClr val="990011"/>
-                </a:solidFill>
-                <a:latin typeface="Times New Roman" pitchFamily="34" charset="0"/>
-                <a:ea typeface="Times New Roman" pitchFamily="34" charset="-122"/>
-                <a:cs typeface="Times New Roman" pitchFamily="34" charset="-120"/>
-              </a:rPr>
-              <a:t>2. Droughts</a:t>
-            </a:r>
-            <a:endParaRPr lang="en-US" sz="3600" dirty="0"/>
-          </a:p>
-        </p:txBody>
-      </p:sp>
-      <p:sp>
-        <p:nvSpPr>
-          <p:cNvPr id="4" name="Text 2"/>
-          <p:cNvSpPr/>
-          <p:nvPr/>
-        </p:nvSpPr>
-        <p:spPr>
-          <a:xfrm>
-            <a:off x="365760" y="1783080"/>
-            <a:ext cx="4846320" cy="4617720"/>
-          </a:xfrm>
-          <a:prstGeom prst="rect">
-            <a:avLst/>
-          </a:prstGeom>
-          <a:noFill/>
-          <a:ln/>
-        </p:spPr>
-        <p:txBody>
-          <a:bodyPr wrap="square" lIns="0" tIns="0" rIns="0" bIns="0" rtlCol="0" anchor="t"/>
-          <a:lstStyle/>
-          <a:p>
-            <a:pPr algn="l" indent="0" marL="0">
-              <a:spcAft>
-                <a:spcPts val="800"/>
-              </a:spcAft>
-              <a:buNone/>
-            </a:pPr>
-            <a:r>
-              <a:rPr lang="en-US" sz="3600" i="1" dirty="0">
-                <a:solidFill>
-                  <a:srgbClr val="111111"/>
-                </a:solidFill>
-                <a:latin typeface="Times New Roman" pitchFamily="34" charset="0"/>
-                <a:ea typeface="Times New Roman" pitchFamily="34" charset="-122"/>
-                <a:cs typeface="Times New Roman" pitchFamily="34" charset="-120"/>
-              </a:rPr>
-              <a:t>Droughts are explained as follows:</a:t>
-            </a:r>
-            <a:endParaRPr lang="en-US" sz="3600" dirty="0"/>
-          </a:p>
-          <a:p>
-            <a:pPr algn="l" indent="0" marL="0">
-              <a:spcAft>
-                <a:spcPts val="800"/>
-              </a:spcAft>
-              <a:buNone/>
-            </a:pPr>
-            <a:r>
-              <a:rPr lang="en-US" sz="3600" b="1" dirty="0">
-                <a:solidFill>
-                  <a:srgbClr val="111111"/>
-                </a:solidFill>
-                <a:latin typeface="Times New Roman" pitchFamily="34" charset="0"/>
-                <a:ea typeface="Times New Roman" pitchFamily="34" charset="-122"/>
-                <a:cs typeface="Times New Roman" pitchFamily="34" charset="-120"/>
-              </a:rPr>
-              <a:t>Areas of occurrence: </a:t>
-            </a:r>
-            <a:pPr algn="l" indent="0" marL="0">
-              <a:spcAft>
-                <a:spcPts val="800"/>
-              </a:spcAft>
-              <a:buNone/>
-            </a:pPr>
-            <a:r>
-              <a:rPr lang="en-US" sz="3600" dirty="0">
-                <a:solidFill>
-                  <a:srgbClr val="111111"/>
-                </a:solidFill>
-                <a:latin typeface="Times New Roman" pitchFamily="34" charset="0"/>
-                <a:ea typeface="Times New Roman" pitchFamily="34" charset="-122"/>
-                <a:cs typeface="Times New Roman" pitchFamily="34" charset="-120"/>
-              </a:rPr>
-              <a:t>Droughts occur in the Sahel, including the North and the Far North of Cameroon.</a:t>
-            </a:r>
-            <a:endParaRPr lang="en-US" sz="3600" dirty="0"/>
-          </a:p>
-        </p:txBody>
-      </p:sp>
       <p:pic>
         <p:nvPicPr>
-          <p:cNvPr id="5" name="Image 0" descr="/home/claude/f4/img/v2/f2t_drought.jpg">    </p:cNvPr>
+          <p:cNvPr id="3" name="Image 0" descr="/home/claude/f4/img/minesec_sheet.png">    </p:cNvPr>
           <p:cNvPicPr>
             <a:picLocks noChangeAspect="1"/>
           </p:cNvPicPr>
@@ -13613,8 +14665,8 @@
         </p:blipFill>
         <p:spPr>
           <a:xfrm>
-            <a:off x="5349240" y="2071212"/>
-            <a:ext cx="6659575" cy="3693983"/>
+            <a:off x="0" y="658368"/>
+            <a:ext cx="2468880" cy="5833872"/>
           </a:xfrm>
           <a:prstGeom prst="rect">
             <a:avLst/>
@@ -13623,14 +14675,14 @@
       </p:pic>
       <p:sp>
         <p:nvSpPr>
-          <p:cNvPr id="6" name="Text 3"/>
+          <p:cNvPr id="4" name="Text 1"/>
           <p:cNvSpPr/>
           <p:nvPr/>
         </p:nvSpPr>
         <p:spPr>
           <a:xfrm>
-            <a:off x="5349240" y="6089904"/>
-            <a:ext cx="6659575" cy="347472"/>
+            <a:off x="2697480" y="1005840"/>
+            <a:ext cx="9174175" cy="731520"/>
           </a:xfrm>
           <a:prstGeom prst="rect">
             <a:avLst/>
@@ -13639,24 +14691,198 @@
           <a:ln/>
         </p:spPr>
         <p:txBody>
-          <a:bodyPr wrap="square" lIns="0" tIns="0" rIns="0" bIns="0" rtlCol="0" anchor="ctr"/>
+          <a:bodyPr wrap="square" lIns="0" tIns="0" rIns="0" bIns="0" rtlCol="0" anchor="ctr">
+            <a:normAutofit/>
+          </a:bodyPr>
           <a:lstStyle/>
           <a:p>
             <a:pPr algn="ctr" indent="0" marL="0">
               <a:buNone/>
             </a:pPr>
             <a:r>
-              <a:rPr lang="en-US" sz="1600" i="1" dirty="0">
-                <a:solidFill>
-                  <a:srgbClr val="555555"/>
+              <a:rPr lang="en-US" sz="3600" b="1" dirty="0">
+                <a:solidFill>
+                  <a:srgbClr val="990011"/>
                 </a:solidFill>
                 <a:latin typeface="Times New Roman" pitchFamily="34" charset="0"/>
                 <a:ea typeface="Times New Roman" pitchFamily="34" charset="-122"/>
                 <a:cs typeface="Times New Roman" pitchFamily="34" charset="-120"/>
               </a:rPr>
-              <a:t>Illustration: dry land</a:t>
-            </a:r>
-            <a:endParaRPr lang="en-US" sz="1600" dirty="0"/>
+              <a:t>1. Floods</a:t>
+            </a:r>
+            <a:endParaRPr lang="en-US" sz="3600" dirty="0"/>
+          </a:p>
+        </p:txBody>
+      </p:sp>
+      <p:sp>
+        <p:nvSpPr>
+          <p:cNvPr id="5" name="Text 2"/>
+          <p:cNvSpPr/>
+          <p:nvPr/>
+        </p:nvSpPr>
+        <p:spPr>
+          <a:xfrm>
+            <a:off x="2697480" y="1737360"/>
+            <a:ext cx="9174175" cy="457200"/>
+          </a:xfrm>
+          <a:prstGeom prst="rect">
+            <a:avLst/>
+          </a:prstGeom>
+          <a:noFill/>
+          <a:ln/>
+        </p:spPr>
+        <p:txBody>
+          <a:bodyPr wrap="square" lIns="0" tIns="0" rIns="0" bIns="0" rtlCol="0" anchor="ctr"/>
+          <a:lstStyle/>
+          <a:p>
+            <a:pPr algn="l" indent="0" marL="0">
+              <a:buNone/>
+            </a:pPr>
+            <a:r>
+              <a:rPr lang="en-US" sz="3200" b="1" dirty="0">
+                <a:solidFill>
+                  <a:srgbClr val="990011"/>
+                </a:solidFill>
+                <a:latin typeface="Times New Roman" pitchFamily="34" charset="0"/>
+                <a:ea typeface="Times New Roman" pitchFamily="34" charset="-122"/>
+                <a:cs typeface="Times New Roman" pitchFamily="34" charset="-120"/>
+              </a:rPr>
+              <a:t>B) Causes</a:t>
+            </a:r>
+            <a:endParaRPr lang="en-US" sz="3200" dirty="0"/>
+          </a:p>
+        </p:txBody>
+      </p:sp>
+      <p:sp>
+        <p:nvSpPr>
+          <p:cNvPr id="6" name="Text 3"/>
+          <p:cNvSpPr/>
+          <p:nvPr/>
+        </p:nvSpPr>
+        <p:spPr>
+          <a:xfrm>
+            <a:off x="2697480" y="2240280"/>
+            <a:ext cx="9174175" cy="4206240"/>
+          </a:xfrm>
+          <a:prstGeom prst="rect">
+            <a:avLst/>
+          </a:prstGeom>
+          <a:noFill/>
+          <a:ln/>
+        </p:spPr>
+        <p:txBody>
+          <a:bodyPr wrap="square" lIns="0" tIns="0" rIns="0" bIns="0" rtlCol="0" anchor="t"/>
+          <a:lstStyle/>
+          <a:p>
+            <a:pPr algn="l" indent="0" marL="0">
+              <a:spcAft>
+                <a:spcPts val="800"/>
+              </a:spcAft>
+              <a:buNone/>
+            </a:pPr>
+            <a:r>
+              <a:rPr lang="en-US" sz="4000" b="1" dirty="0">
+                <a:solidFill>
+                  <a:srgbClr val="111111"/>
+                </a:solidFill>
+                <a:latin typeface="Times New Roman" pitchFamily="34" charset="0"/>
+                <a:ea typeface="Times New Roman" pitchFamily="34" charset="-122"/>
+                <a:cs typeface="Times New Roman" pitchFamily="34" charset="-120"/>
+              </a:rPr>
+              <a:t>Water released from dams: </a:t>
+            </a:r>
+            <a:pPr algn="l" indent="0" marL="0">
+              <a:spcAft>
+                <a:spcPts val="800"/>
+              </a:spcAft>
+              <a:buNone/>
+            </a:pPr>
+            <a:r>
+              <a:rPr lang="en-US" sz="4000" dirty="0">
+                <a:solidFill>
+                  <a:srgbClr val="111111"/>
+                </a:solidFill>
+                <a:latin typeface="Times New Roman" pitchFamily="34" charset="0"/>
+                <a:ea typeface="Times New Roman" pitchFamily="34" charset="-122"/>
+                <a:cs typeface="Times New Roman" pitchFamily="34" charset="-120"/>
+              </a:rPr>
+              <a:t>Water released from the Lagdo Dam raises the Benue.</a:t>
+            </a:r>
+            <a:endParaRPr lang="en-US" sz="4000" dirty="0"/>
+          </a:p>
+          <a:p>
+            <a:pPr algn="l" indent="0" marL="0">
+              <a:spcAft>
+                <a:spcPts val="800"/>
+              </a:spcAft>
+              <a:buNone/>
+            </a:pPr>
+            <a:r>
+              <a:rPr lang="en-US" sz="4000" b="1" dirty="0">
+                <a:solidFill>
+                  <a:srgbClr val="111111"/>
+                </a:solidFill>
+                <a:latin typeface="Times New Roman" pitchFamily="34" charset="0"/>
+                <a:ea typeface="Times New Roman" pitchFamily="34" charset="-122"/>
+                <a:cs typeface="Times New Roman" pitchFamily="34" charset="-120"/>
+              </a:rPr>
+              <a:t>Blocked drains: </a:t>
+            </a:r>
+            <a:pPr algn="l" indent="0" marL="0">
+              <a:spcAft>
+                <a:spcPts val="800"/>
+              </a:spcAft>
+              <a:buNone/>
+            </a:pPr>
+            <a:r>
+              <a:rPr lang="en-US" sz="4000" dirty="0">
+                <a:solidFill>
+                  <a:srgbClr val="111111"/>
+                </a:solidFill>
+                <a:latin typeface="Times New Roman" pitchFamily="34" charset="0"/>
+                <a:ea typeface="Times New Roman" pitchFamily="34" charset="-122"/>
+                <a:cs typeface="Times New Roman" pitchFamily="34" charset="-120"/>
+              </a:rPr>
+              <a:t>Rubbish blocks gutters in towns.</a:t>
+            </a:r>
+            <a:endParaRPr lang="en-US" sz="4000" dirty="0"/>
+          </a:p>
+          <a:p>
+            <a:pPr algn="l" indent="0" marL="0">
+              <a:spcAft>
+                <a:spcPts val="800"/>
+              </a:spcAft>
+              <a:buNone/>
+            </a:pPr>
+            <a:r>
+              <a:rPr lang="en-US" sz="4000" b="1" dirty="0">
+                <a:solidFill>
+                  <a:srgbClr val="111111"/>
+                </a:solidFill>
+                <a:latin typeface="Times New Roman" pitchFamily="34" charset="0"/>
+                <a:ea typeface="Times New Roman" pitchFamily="34" charset="-122"/>
+                <a:cs typeface="Times New Roman" pitchFamily="34" charset="-120"/>
+              </a:rPr>
+              <a:t>Building on floodplains: </a:t>
+            </a:r>
+            <a:pPr algn="l" indent="0" marL="0">
+              <a:spcAft>
+                <a:spcPts val="800"/>
+              </a:spcAft>
+              <a:buNone/>
+            </a:pPr>
+            <a:r>
+              <a:rPr lang="en-US" sz="4000" dirty="0">
+                <a:solidFill>
+                  <a:srgbClr val="111111"/>
+                </a:solidFill>
+                <a:latin typeface="Times New Roman" pitchFamily="34" charset="0"/>
+                <a:ea typeface="Times New Roman" pitchFamily="34" charset="-122"/>
+                <a:cs typeface="Times New Roman" pitchFamily="34" charset="-120"/>
+              </a:rPr>
+              <a:t>Houses are built on low land near rivers.</a:t>
+            </a:r>
+            <a:endParaRPr lang="en-US" sz="4000" dirty="0"/>
           </a:p>
         </p:txBody>
       </p:sp>
@@ -13789,7 +15015,7 @@
         <p:spPr>
           <a:xfrm>
             <a:off x="0" y="658368"/>
-            <a:ext cx="3840480" cy="5833872"/>
+            <a:ext cx="2468880" cy="5833872"/>
           </a:xfrm>
           <a:prstGeom prst="rect">
             <a:avLst/>
@@ -13804,8 +15030,8 @@
         </p:nvSpPr>
         <p:spPr>
           <a:xfrm>
-            <a:off x="4069080" y="1005840"/>
-            <a:ext cx="7802575" cy="731520"/>
+            <a:off x="2697480" y="1005840"/>
+            <a:ext cx="9174175" cy="731520"/>
           </a:xfrm>
           <a:prstGeom prst="rect">
             <a:avLst/>
@@ -13831,7 +15057,7 @@
                 <a:ea typeface="Times New Roman" pitchFamily="34" charset="-122"/>
                 <a:cs typeface="Times New Roman" pitchFamily="34" charset="-120"/>
               </a:rPr>
-              <a:t>2. Droughts</a:t>
+              <a:t>1. Floods</a:t>
             </a:r>
             <a:endParaRPr lang="en-US" sz="3600" dirty="0"/>
           </a:p>
@@ -13845,8 +15071,47 @@
         </p:nvSpPr>
         <p:spPr>
           <a:xfrm>
-            <a:off x="4069080" y="1783080"/>
-            <a:ext cx="7802575" cy="4663440"/>
+            <a:off x="2697480" y="1737360"/>
+            <a:ext cx="9174175" cy="457200"/>
+          </a:xfrm>
+          <a:prstGeom prst="rect">
+            <a:avLst/>
+          </a:prstGeom>
+          <a:noFill/>
+          <a:ln/>
+        </p:spPr>
+        <p:txBody>
+          <a:bodyPr wrap="square" lIns="0" tIns="0" rIns="0" bIns="0" rtlCol="0" anchor="ctr"/>
+          <a:lstStyle/>
+          <a:p>
+            <a:pPr algn="l" indent="0" marL="0">
+              <a:buNone/>
+            </a:pPr>
+            <a:r>
+              <a:rPr lang="en-US" sz="3200" b="1" dirty="0">
+                <a:solidFill>
+                  <a:srgbClr val="990011"/>
+                </a:solidFill>
+                <a:latin typeface="Times New Roman" pitchFamily="34" charset="0"/>
+                <a:ea typeface="Times New Roman" pitchFamily="34" charset="-122"/>
+                <a:cs typeface="Times New Roman" pitchFamily="34" charset="-120"/>
+              </a:rPr>
+              <a:t>C) Effects</a:t>
+            </a:r>
+            <a:endParaRPr lang="en-US" sz="3200" dirty="0"/>
+          </a:p>
+        </p:txBody>
+      </p:sp>
+      <p:sp>
+        <p:nvSpPr>
+          <p:cNvPr id="6" name="Text 3"/>
+          <p:cNvSpPr/>
+          <p:nvPr/>
+        </p:nvSpPr>
+        <p:spPr>
+          <a:xfrm>
+            <a:off x="2697480" y="2240280"/>
+            <a:ext cx="9174175" cy="4206240"/>
           </a:xfrm>
           <a:prstGeom prst="rect">
             <a:avLst/>
@@ -13865,7 +15130,7 @@
               <a:buNone/>
             </a:pPr>
             <a:r>
-              <a:rPr lang="en-US" sz="4000" b="1" dirty="0">
+              <a:rPr lang="en-US" sz="4000" i="1" dirty="0">
                 <a:solidFill>
                   <a:srgbClr val="111111"/>
                 </a:solidFill>
@@ -13873,8 +15138,11 @@
                 <a:ea typeface="Times New Roman" pitchFamily="34" charset="-122"/>
                 <a:cs typeface="Times New Roman" pitchFamily="34" charset="-120"/>
               </a:rPr>
-              <a:t>Causes: </a:t>
-            </a:r>
+              <a:t>Floods have the following effects:</a:t>
+            </a:r>
+            <a:endParaRPr lang="en-US" sz="4000" dirty="0"/>
+          </a:p>
+          <a:p>
             <a:pPr algn="l" indent="0" marL="0">
               <a:spcAft>
                 <a:spcPts val="800"/>
@@ -13882,7 +15150,7 @@
               <a:buNone/>
             </a:pPr>
             <a:r>
-              <a:rPr lang="en-US" sz="4000" dirty="0">
+              <a:rPr lang="en-US" sz="4000" b="1" dirty="0">
                 <a:solidFill>
                   <a:srgbClr val="111111"/>
                 </a:solidFill>
@@ -13890,11 +15158,8 @@
                 <a:ea typeface="Times New Roman" pitchFamily="34" charset="-122"/>
                 <a:cs typeface="Times New Roman" pitchFamily="34" charset="-120"/>
               </a:rPr>
-              <a:t>Low and irregular rainfall, very high temperatures and a long dry season cause droughts.</a:t>
-            </a:r>
-            <a:endParaRPr lang="en-US" sz="4000" dirty="0"/>
-          </a:p>
-          <a:p>
+              <a:t>Destruction: </a:t>
+            </a:r>
             <a:pPr algn="l" indent="0" marL="0">
               <a:spcAft>
                 <a:spcPts val="800"/>
@@ -13902,7 +15167,7 @@
               <a:buNone/>
             </a:pPr>
             <a:r>
-              <a:rPr lang="en-US" sz="4000" b="1" dirty="0">
+              <a:rPr lang="en-US" sz="4000" dirty="0">
                 <a:solidFill>
                   <a:srgbClr val="111111"/>
                 </a:solidFill>
@@ -13910,8 +15175,11 @@
                 <a:ea typeface="Times New Roman" pitchFamily="34" charset="-122"/>
                 <a:cs typeface="Times New Roman" pitchFamily="34" charset="-120"/>
               </a:rPr>
-              <a:t>Effects: </a:t>
-            </a:r>
+              <a:t>Houses, crops and roads are destroyed.</a:t>
+            </a:r>
+            <a:endParaRPr lang="en-US" sz="4000" dirty="0"/>
+          </a:p>
+          <a:p>
             <a:pPr algn="l" indent="0" marL="0">
               <a:spcAft>
                 <a:spcPts val="800"/>
@@ -13919,7 +15187,7 @@
               <a:buNone/>
             </a:pPr>
             <a:r>
-              <a:rPr lang="en-US" sz="4000" dirty="0">
+              <a:rPr lang="en-US" sz="4000" b="1" dirty="0">
                 <a:solidFill>
                   <a:srgbClr val="111111"/>
                 </a:solidFill>
@@ -13927,7 +15195,61 @@
                 <a:ea typeface="Times New Roman" pitchFamily="34" charset="-122"/>
                 <a:cs typeface="Times New Roman" pitchFamily="34" charset="-120"/>
               </a:rPr>
-              <a:t>Crops fail, animals die, wells dry up, and people suffer hunger and migrate.</a:t>
+              <a:t>Loss of life: </a:t>
+            </a:r>
+            <a:pPr algn="l" indent="0" marL="0">
+              <a:spcAft>
+                <a:spcPts val="800"/>
+              </a:spcAft>
+              <a:buNone/>
+            </a:pPr>
+            <a:r>
+              <a:rPr lang="en-US" sz="4000" dirty="0">
+                <a:solidFill>
+                  <a:srgbClr val="111111"/>
+                </a:solidFill>
+                <a:latin typeface="Times New Roman" pitchFamily="34" charset="0"/>
+                <a:ea typeface="Times New Roman" pitchFamily="34" charset="-122"/>
+                <a:cs typeface="Times New Roman" pitchFamily="34" charset="-120"/>
+              </a:rPr>
+              <a:t>People and animals drown.</a:t>
+            </a:r>
+            <a:endParaRPr lang="en-US" sz="4000" dirty="0"/>
+          </a:p>
+          <a:p>
+            <a:pPr algn="l" indent="0" marL="0">
+              <a:spcAft>
+                <a:spcPts val="800"/>
+              </a:spcAft>
+              <a:buNone/>
+            </a:pPr>
+            <a:r>
+              <a:rPr lang="en-US" sz="4000" b="1" dirty="0">
+                <a:solidFill>
+                  <a:srgbClr val="111111"/>
+                </a:solidFill>
+                <a:latin typeface="Times New Roman" pitchFamily="34" charset="0"/>
+                <a:ea typeface="Times New Roman" pitchFamily="34" charset="-122"/>
+                <a:cs typeface="Times New Roman" pitchFamily="34" charset="-120"/>
+              </a:rPr>
+              <a:t>Diseases: </a:t>
+            </a:r>
+            <a:pPr algn="l" indent="0" marL="0">
+              <a:spcAft>
+                <a:spcPts val="800"/>
+              </a:spcAft>
+              <a:buNone/>
+            </a:pPr>
+            <a:r>
+              <a:rPr lang="en-US" sz="4000" dirty="0">
+                <a:solidFill>
+                  <a:srgbClr val="111111"/>
+                </a:solidFill>
+                <a:latin typeface="Times New Roman" pitchFamily="34" charset="0"/>
+                <a:ea typeface="Times New Roman" pitchFamily="34" charset="-122"/>
+                <a:cs typeface="Times New Roman" pitchFamily="34" charset="-120"/>
+              </a:rPr>
+              <a:t>Cholera and malaria spread.</a:t>
             </a:r>
             <a:endParaRPr lang="en-US" sz="4000" dirty="0"/>
           </a:p>
@@ -14104,7 +15426,7 @@
                 <a:ea typeface="Times New Roman" pitchFamily="34" charset="-122"/>
                 <a:cs typeface="Times New Roman" pitchFamily="34" charset="-120"/>
               </a:rPr>
-              <a:t>2. Droughts (continued)</a:t>
+              <a:t>1. Floods</a:t>
             </a:r>
             <a:endParaRPr lang="en-US" sz="3600" dirty="0"/>
           </a:p>
@@ -14118,8 +15440,47 @@
         </p:nvSpPr>
         <p:spPr>
           <a:xfrm>
-            <a:off x="5349240" y="1783080"/>
-            <a:ext cx="6522415" cy="4663440"/>
+            <a:off x="5349240" y="1737360"/>
+            <a:ext cx="6522415" cy="457200"/>
+          </a:xfrm>
+          <a:prstGeom prst="rect">
+            <a:avLst/>
+          </a:prstGeom>
+          <a:noFill/>
+          <a:ln/>
+        </p:spPr>
+        <p:txBody>
+          <a:bodyPr wrap="square" lIns="0" tIns="0" rIns="0" bIns="0" rtlCol="0" anchor="ctr"/>
+          <a:lstStyle/>
+          <a:p>
+            <a:pPr algn="l" indent="0" marL="0">
+              <a:buNone/>
+            </a:pPr>
+            <a:r>
+              <a:rPr lang="en-US" sz="3200" b="1" dirty="0">
+                <a:solidFill>
+                  <a:srgbClr val="990011"/>
+                </a:solidFill>
+                <a:latin typeface="Times New Roman" pitchFamily="34" charset="0"/>
+                <a:ea typeface="Times New Roman" pitchFamily="34" charset="-122"/>
+                <a:cs typeface="Times New Roman" pitchFamily="34" charset="-120"/>
+              </a:rPr>
+              <a:t>D) Adaptation and Mitigation</a:t>
+            </a:r>
+            <a:endParaRPr lang="en-US" sz="3200" dirty="0"/>
+          </a:p>
+        </p:txBody>
+      </p:sp>
+      <p:sp>
+        <p:nvSpPr>
+          <p:cNvPr id="6" name="Text 3"/>
+          <p:cNvSpPr/>
+          <p:nvPr/>
+        </p:nvSpPr>
+        <p:spPr>
+          <a:xfrm>
+            <a:off x="5349240" y="2240280"/>
+            <a:ext cx="6522415" cy="4206240"/>
           </a:xfrm>
           <a:prstGeom prst="rect">
             <a:avLst/>
@@ -14138,7 +15499,7 @@
               <a:buNone/>
             </a:pPr>
             <a:r>
-              <a:rPr lang="en-US" sz="4000" b="1" dirty="0">
+              <a:rPr lang="en-US" sz="4000" i="1" dirty="0">
                 <a:solidFill>
                   <a:srgbClr val="111111"/>
                 </a:solidFill>
@@ -14146,8 +15507,11 @@
                 <a:ea typeface="Times New Roman" pitchFamily="34" charset="-122"/>
                 <a:cs typeface="Times New Roman" pitchFamily="34" charset="-120"/>
               </a:rPr>
-              <a:t>Adaptation and mitigation: </a:t>
-            </a:r>
+              <a:t>Flood damage is reduced by the following measures:</a:t>
+            </a:r>
+            <a:endParaRPr lang="en-US" sz="4000" dirty="0"/>
+          </a:p>
+          <a:p>
             <a:pPr algn="l" indent="0" marL="0">
               <a:spcAft>
                 <a:spcPts val="800"/>
@@ -14155,7 +15519,7 @@
               <a:buNone/>
             </a:pPr>
             <a:r>
-              <a:rPr lang="en-US" sz="4000" dirty="0">
+              <a:rPr lang="en-US" sz="4000" b="1" dirty="0">
                 <a:solidFill>
                   <a:srgbClr val="111111"/>
                 </a:solidFill>
@@ -14163,7 +15527,61 @@
                 <a:ea typeface="Times New Roman" pitchFamily="34" charset="-122"/>
                 <a:cs typeface="Times New Roman" pitchFamily="34" charset="-120"/>
               </a:rPr>
-              <a:t>Irrigation, water storage, drought-resistant crops and food reserves reduce the effects.</a:t>
+              <a:t>Dykes: </a:t>
+            </a:r>
+            <a:pPr algn="l" indent="0" marL="0">
+              <a:spcAft>
+                <a:spcPts val="800"/>
+              </a:spcAft>
+              <a:buNone/>
+            </a:pPr>
+            <a:r>
+              <a:rPr lang="en-US" sz="4000" dirty="0">
+                <a:solidFill>
+                  <a:srgbClr val="111111"/>
+                </a:solidFill>
+                <a:latin typeface="Times New Roman" pitchFamily="34" charset="0"/>
+                <a:ea typeface="Times New Roman" pitchFamily="34" charset="-122"/>
+                <a:cs typeface="Times New Roman" pitchFamily="34" charset="-120"/>
+              </a:rPr>
+              <a:t>Walls of earth hold back the river.</a:t>
+            </a:r>
+            <a:endParaRPr lang="en-US" sz="4000" dirty="0"/>
+          </a:p>
+          <a:p>
+            <a:pPr algn="l" indent="0" marL="0">
+              <a:spcAft>
+                <a:spcPts val="800"/>
+              </a:spcAft>
+              <a:buNone/>
+            </a:pPr>
+            <a:r>
+              <a:rPr lang="en-US" sz="4000" b="1" dirty="0">
+                <a:solidFill>
+                  <a:srgbClr val="111111"/>
+                </a:solidFill>
+                <a:latin typeface="Times New Roman" pitchFamily="34" charset="0"/>
+                <a:ea typeface="Times New Roman" pitchFamily="34" charset="-122"/>
+                <a:cs typeface="Times New Roman" pitchFamily="34" charset="-120"/>
+              </a:rPr>
+              <a:t>Clean drains: </a:t>
+            </a:r>
+            <a:pPr algn="l" indent="0" marL="0">
+              <a:spcAft>
+                <a:spcPts val="800"/>
+              </a:spcAft>
+              <a:buNone/>
+            </a:pPr>
+            <a:r>
+              <a:rPr lang="en-US" sz="4000" dirty="0">
+                <a:solidFill>
+                  <a:srgbClr val="111111"/>
+                </a:solidFill>
+                <a:latin typeface="Times New Roman" pitchFamily="34" charset="0"/>
+                <a:ea typeface="Times New Roman" pitchFamily="34" charset="-122"/>
+                <a:cs typeface="Times New Roman" pitchFamily="34" charset="-120"/>
+              </a:rPr>
+              <a:t>Gutters are kept free of rubbish.</a:t>
             </a:r>
             <a:endParaRPr lang="en-US" sz="4000" dirty="0"/>
           </a:p>
@@ -14281,129 +15699,9 @@
           </a:p>
         </p:txBody>
       </p:sp>
-      <p:sp>
-        <p:nvSpPr>
-          <p:cNvPr id="3" name="Text 1"/>
-          <p:cNvSpPr/>
-          <p:nvPr/>
-        </p:nvSpPr>
-        <p:spPr>
-          <a:xfrm>
-            <a:off x="365760" y="1005840"/>
-            <a:ext cx="11460175" cy="731520"/>
-          </a:xfrm>
-          <a:prstGeom prst="rect">
-            <a:avLst/>
-          </a:prstGeom>
-          <a:noFill/>
-          <a:ln/>
-        </p:spPr>
-        <p:txBody>
-          <a:bodyPr wrap="square" lIns="0" tIns="0" rIns="0" bIns="0" rtlCol="0" anchor="ctr">
-            <a:normAutofit/>
-          </a:bodyPr>
-          <a:lstStyle/>
-          <a:p>
-            <a:pPr algn="ctr" indent="0" marL="0">
-              <a:buNone/>
-            </a:pPr>
-            <a:r>
-              <a:rPr lang="en-US" sz="3600" b="1" dirty="0">
-                <a:solidFill>
-                  <a:srgbClr val="990011"/>
-                </a:solidFill>
-                <a:latin typeface="Times New Roman" pitchFamily="34" charset="0"/>
-                <a:ea typeface="Times New Roman" pitchFamily="34" charset="-122"/>
-                <a:cs typeface="Times New Roman" pitchFamily="34" charset="-120"/>
-              </a:rPr>
-              <a:t>3. Desertification</a:t>
-            </a:r>
-            <a:endParaRPr lang="en-US" sz="3600" dirty="0"/>
-          </a:p>
-        </p:txBody>
-      </p:sp>
-      <p:sp>
-        <p:nvSpPr>
-          <p:cNvPr id="4" name="Text 2"/>
-          <p:cNvSpPr/>
-          <p:nvPr/>
-        </p:nvSpPr>
-        <p:spPr>
-          <a:xfrm>
-            <a:off x="365760" y="1783080"/>
-            <a:ext cx="4846320" cy="4617720"/>
-          </a:xfrm>
-          <a:prstGeom prst="rect">
-            <a:avLst/>
-          </a:prstGeom>
-          <a:noFill/>
-          <a:ln/>
-        </p:spPr>
-        <p:txBody>
-          <a:bodyPr wrap="square" lIns="0" tIns="0" rIns="0" bIns="0" rtlCol="0" anchor="t"/>
-          <a:lstStyle/>
-          <a:p>
-            <a:pPr algn="l" indent="0" marL="0">
-              <a:spcAft>
-                <a:spcPts val="800"/>
-              </a:spcAft>
-              <a:buNone/>
-            </a:pPr>
-            <a:r>
-              <a:rPr lang="en-US" sz="3600" i="1" dirty="0">
-                <a:solidFill>
-                  <a:srgbClr val="111111"/>
-                </a:solidFill>
-                <a:latin typeface="Times New Roman" pitchFamily="34" charset="0"/>
-                <a:ea typeface="Times New Roman" pitchFamily="34" charset="-122"/>
-                <a:cs typeface="Times New Roman" pitchFamily="34" charset="-120"/>
-              </a:rPr>
-              <a:t>Desertification is explained as follows:</a:t>
-            </a:r>
-            <a:endParaRPr lang="en-US" sz="3600" dirty="0"/>
-          </a:p>
-          <a:p>
-            <a:pPr algn="l" indent="0" marL="0">
-              <a:spcAft>
-                <a:spcPts val="800"/>
-              </a:spcAft>
-              <a:buNone/>
-            </a:pPr>
-            <a:r>
-              <a:rPr lang="en-US" sz="3600" b="1" dirty="0">
-                <a:solidFill>
-                  <a:srgbClr val="111111"/>
-                </a:solidFill>
-                <a:latin typeface="Times New Roman" pitchFamily="34" charset="0"/>
-                <a:ea typeface="Times New Roman" pitchFamily="34" charset="-122"/>
-                <a:cs typeface="Times New Roman" pitchFamily="34" charset="-120"/>
-              </a:rPr>
-              <a:t>Areas of occurrence: </a:t>
-            </a:r>
-            <a:pPr algn="l" indent="0" marL="0">
-              <a:spcAft>
-                <a:spcPts val="800"/>
-              </a:spcAft>
-              <a:buNone/>
-            </a:pPr>
-            <a:r>
-              <a:rPr lang="en-US" sz="3600" dirty="0">
-                <a:solidFill>
-                  <a:srgbClr val="111111"/>
-                </a:solidFill>
-                <a:latin typeface="Times New Roman" pitchFamily="34" charset="0"/>
-                <a:ea typeface="Times New Roman" pitchFamily="34" charset="-122"/>
-                <a:cs typeface="Times New Roman" pitchFamily="34" charset="-120"/>
-              </a:rPr>
-              <a:t>Desertification affects the Sahel, including the Far North of Cameroon around Lake Chad.</a:t>
-            </a:r>
-            <a:endParaRPr lang="en-US" sz="3600" dirty="0"/>
-          </a:p>
-        </p:txBody>
-      </p:sp>
       <p:pic>
         <p:nvPicPr>
-          <p:cNvPr id="5" name="Image 0" descr="/home/claude/f4/img/v2/drought_big.png">    </p:cNvPr>
+          <p:cNvPr id="3" name="Image 0" descr="/home/claude/f4/img/minesec_sheet.png">    </p:cNvPr>
           <p:cNvPicPr>
             <a:picLocks noChangeAspect="1"/>
           </p:cNvPicPr>
@@ -14417,8 +15715,8 @@
         </p:blipFill>
         <p:spPr>
           <a:xfrm>
-            <a:off x="5349240" y="2617506"/>
-            <a:ext cx="6659575" cy="2601397"/>
+            <a:off x="0" y="658368"/>
+            <a:ext cx="5120640" cy="5833872"/>
           </a:xfrm>
           <a:prstGeom prst="rect">
             <a:avLst/>
@@ -14427,14 +15725,14 @@
       </p:pic>
       <p:sp>
         <p:nvSpPr>
-          <p:cNvPr id="6" name="Text 3"/>
+          <p:cNvPr id="4" name="Text 1"/>
           <p:cNvSpPr/>
           <p:nvPr/>
         </p:nvSpPr>
         <p:spPr>
           <a:xfrm>
-            <a:off x="5349240" y="6089904"/>
-            <a:ext cx="6659575" cy="347472"/>
+            <a:off x="5349240" y="1005840"/>
+            <a:ext cx="6522415" cy="731520"/>
           </a:xfrm>
           <a:prstGeom prst="rect">
             <a:avLst/>
@@ -14443,24 +15741,161 @@
           <a:ln/>
         </p:spPr>
         <p:txBody>
-          <a:bodyPr wrap="square" lIns="0" tIns="0" rIns="0" bIns="0" rtlCol="0" anchor="ctr"/>
+          <a:bodyPr wrap="square" lIns="0" tIns="0" rIns="0" bIns="0" rtlCol="0" anchor="ctr">
+            <a:normAutofit/>
+          </a:bodyPr>
           <a:lstStyle/>
           <a:p>
             <a:pPr algn="ctr" indent="0" marL="0">
               <a:buNone/>
             </a:pPr>
             <a:r>
-              <a:rPr lang="en-US" sz="1600" i="1" dirty="0">
-                <a:solidFill>
-                  <a:srgbClr val="555555"/>
+              <a:rPr lang="en-US" sz="3600" b="1" dirty="0">
+                <a:solidFill>
+                  <a:srgbClr val="990011"/>
                 </a:solidFill>
                 <a:latin typeface="Times New Roman" pitchFamily="34" charset="0"/>
                 <a:ea typeface="Times New Roman" pitchFamily="34" charset="-122"/>
                 <a:cs typeface="Times New Roman" pitchFamily="34" charset="-120"/>
               </a:rPr>
-              <a:t>Illustration: crops dried by drought</a:t>
-            </a:r>
-            <a:endParaRPr lang="en-US" sz="1600" dirty="0"/>
+              <a:t>1. Floods</a:t>
+            </a:r>
+            <a:endParaRPr lang="en-US" sz="3600" dirty="0"/>
+          </a:p>
+        </p:txBody>
+      </p:sp>
+      <p:sp>
+        <p:nvSpPr>
+          <p:cNvPr id="5" name="Text 2"/>
+          <p:cNvSpPr/>
+          <p:nvPr/>
+        </p:nvSpPr>
+        <p:spPr>
+          <a:xfrm>
+            <a:off x="5349240" y="1737360"/>
+            <a:ext cx="6522415" cy="457200"/>
+          </a:xfrm>
+          <a:prstGeom prst="rect">
+            <a:avLst/>
+          </a:prstGeom>
+          <a:noFill/>
+          <a:ln/>
+        </p:spPr>
+        <p:txBody>
+          <a:bodyPr wrap="square" lIns="0" tIns="0" rIns="0" bIns="0" rtlCol="0" anchor="ctr"/>
+          <a:lstStyle/>
+          <a:p>
+            <a:pPr algn="l" indent="0" marL="0">
+              <a:buNone/>
+            </a:pPr>
+            <a:r>
+              <a:rPr lang="en-US" sz="2500" b="1" dirty="0">
+                <a:solidFill>
+                  <a:srgbClr val="990011"/>
+                </a:solidFill>
+                <a:latin typeface="Times New Roman" pitchFamily="34" charset="0"/>
+                <a:ea typeface="Times New Roman" pitchFamily="34" charset="-122"/>
+                <a:cs typeface="Times New Roman" pitchFamily="34" charset="-120"/>
+              </a:rPr>
+              <a:t>D) Adaptation and Mitigation (continued)</a:t>
+            </a:r>
+            <a:endParaRPr lang="en-US" sz="2500" dirty="0"/>
+          </a:p>
+        </p:txBody>
+      </p:sp>
+      <p:sp>
+        <p:nvSpPr>
+          <p:cNvPr id="6" name="Text 3"/>
+          <p:cNvSpPr/>
+          <p:nvPr/>
+        </p:nvSpPr>
+        <p:spPr>
+          <a:xfrm>
+            <a:off x="5349240" y="2240280"/>
+            <a:ext cx="6522415" cy="4206240"/>
+          </a:xfrm>
+          <a:prstGeom prst="rect">
+            <a:avLst/>
+          </a:prstGeom>
+          <a:noFill/>
+          <a:ln/>
+        </p:spPr>
+        <p:txBody>
+          <a:bodyPr wrap="square" lIns="0" tIns="0" rIns="0" bIns="0" rtlCol="0" anchor="t"/>
+          <a:lstStyle/>
+          <a:p>
+            <a:pPr algn="l" indent="0" marL="0">
+              <a:spcAft>
+                <a:spcPts val="800"/>
+              </a:spcAft>
+              <a:buNone/>
+            </a:pPr>
+            <a:r>
+              <a:rPr lang="en-US" sz="4000" b="1" dirty="0">
+                <a:solidFill>
+                  <a:srgbClr val="111111"/>
+                </a:solidFill>
+                <a:latin typeface="Times New Roman" pitchFamily="34" charset="0"/>
+                <a:ea typeface="Times New Roman" pitchFamily="34" charset="-122"/>
+                <a:cs typeface="Times New Roman" pitchFamily="34" charset="-120"/>
+              </a:rPr>
+              <a:t>Early warnings: </a:t>
+            </a:r>
+            <a:pPr algn="l" indent="0" marL="0">
+              <a:spcAft>
+                <a:spcPts val="800"/>
+              </a:spcAft>
+              <a:buNone/>
+            </a:pPr>
+            <a:r>
+              <a:rPr lang="en-US" sz="4000" dirty="0">
+                <a:solidFill>
+                  <a:srgbClr val="111111"/>
+                </a:solidFill>
+                <a:latin typeface="Times New Roman" pitchFamily="34" charset="0"/>
+                <a:ea typeface="Times New Roman" pitchFamily="34" charset="-122"/>
+                <a:cs typeface="Times New Roman" pitchFamily="34" charset="-120"/>
+              </a:rPr>
+              <a:t>People are warned before the water rises.</a:t>
+            </a:r>
+            <a:endParaRPr lang="en-US" sz="4000" dirty="0"/>
+          </a:p>
+          <a:p>
+            <a:pPr algn="l" indent="0" marL="0">
+              <a:spcAft>
+                <a:spcPts val="800"/>
+              </a:spcAft>
+              <a:buNone/>
+            </a:pPr>
+            <a:r>
+              <a:rPr lang="en-US" sz="4000" b="1" dirty="0">
+                <a:solidFill>
+                  <a:srgbClr val="111111"/>
+                </a:solidFill>
+                <a:latin typeface="Times New Roman" pitchFamily="34" charset="0"/>
+                <a:ea typeface="Times New Roman" pitchFamily="34" charset="-122"/>
+                <a:cs typeface="Times New Roman" pitchFamily="34" charset="-120"/>
+              </a:rPr>
+              <a:t>Building on high ground: </a:t>
+            </a:r>
+            <a:pPr algn="l" indent="0" marL="0">
+              <a:spcAft>
+                <a:spcPts val="800"/>
+              </a:spcAft>
+              <a:buNone/>
+            </a:pPr>
+            <a:r>
+              <a:rPr lang="en-US" sz="4000" dirty="0">
+                <a:solidFill>
+                  <a:srgbClr val="111111"/>
+                </a:solidFill>
+                <a:latin typeface="Times New Roman" pitchFamily="34" charset="0"/>
+                <a:ea typeface="Times New Roman" pitchFamily="34" charset="-122"/>
+                <a:cs typeface="Times New Roman" pitchFamily="34" charset="-120"/>
+              </a:rPr>
+              <a:t>Houses are built away from floodplains.</a:t>
+            </a:r>
+            <a:endParaRPr lang="en-US" sz="4000" dirty="0"/>
           </a:p>
         </p:txBody>
       </p:sp>
@@ -14576,9 +16011,170 @@
           </a:p>
         </p:txBody>
       </p:sp>
+      <p:sp>
+        <p:nvSpPr>
+          <p:cNvPr id="3" name="Text 1"/>
+          <p:cNvSpPr/>
+          <p:nvPr/>
+        </p:nvSpPr>
+        <p:spPr>
+          <a:xfrm>
+            <a:off x="365760" y="1005840"/>
+            <a:ext cx="11460175" cy="731520"/>
+          </a:xfrm>
+          <a:prstGeom prst="rect">
+            <a:avLst/>
+          </a:prstGeom>
+          <a:noFill/>
+          <a:ln/>
+        </p:spPr>
+        <p:txBody>
+          <a:bodyPr wrap="square" lIns="0" tIns="0" rIns="0" bIns="0" rtlCol="0" anchor="ctr">
+            <a:normAutofit/>
+          </a:bodyPr>
+          <a:lstStyle/>
+          <a:p>
+            <a:pPr algn="ctr" indent="0" marL="0">
+              <a:buNone/>
+            </a:pPr>
+            <a:r>
+              <a:rPr lang="en-US" sz="3600" b="1" dirty="0">
+                <a:solidFill>
+                  <a:srgbClr val="990011"/>
+                </a:solidFill>
+                <a:latin typeface="Times New Roman" pitchFamily="34" charset="0"/>
+                <a:ea typeface="Times New Roman" pitchFamily="34" charset="-122"/>
+                <a:cs typeface="Times New Roman" pitchFamily="34" charset="-120"/>
+              </a:rPr>
+              <a:t>2. Droughts</a:t>
+            </a:r>
+            <a:endParaRPr lang="en-US" sz="3600" dirty="0"/>
+          </a:p>
+        </p:txBody>
+      </p:sp>
+      <p:sp>
+        <p:nvSpPr>
+          <p:cNvPr id="4" name="Text 2"/>
+          <p:cNvSpPr/>
+          <p:nvPr/>
+        </p:nvSpPr>
+        <p:spPr>
+          <a:xfrm>
+            <a:off x="365760" y="1737360"/>
+            <a:ext cx="5120640" cy="457200"/>
+          </a:xfrm>
+          <a:prstGeom prst="rect">
+            <a:avLst/>
+          </a:prstGeom>
+          <a:noFill/>
+          <a:ln/>
+        </p:spPr>
+        <p:txBody>
+          <a:bodyPr wrap="square" lIns="0" tIns="0" rIns="0" bIns="0" rtlCol="0" anchor="ctr">
+            <a:normAutofit/>
+          </a:bodyPr>
+          <a:lstStyle/>
+          <a:p>
+            <a:pPr algn="l" indent="0" marL="0">
+              <a:buNone/>
+            </a:pPr>
+            <a:r>
+              <a:rPr lang="en-US" sz="3000" b="1" dirty="0">
+                <a:solidFill>
+                  <a:srgbClr val="990011"/>
+                </a:solidFill>
+                <a:latin typeface="Times New Roman" pitchFamily="34" charset="0"/>
+                <a:ea typeface="Times New Roman" pitchFamily="34" charset="-122"/>
+                <a:cs typeface="Times New Roman" pitchFamily="34" charset="-120"/>
+              </a:rPr>
+              <a:t>A) Areas of Occurrence</a:t>
+            </a:r>
+            <a:endParaRPr lang="en-US" sz="3000" dirty="0"/>
+          </a:p>
+        </p:txBody>
+      </p:sp>
+      <p:sp>
+        <p:nvSpPr>
+          <p:cNvPr id="5" name="Text 3"/>
+          <p:cNvSpPr/>
+          <p:nvPr/>
+        </p:nvSpPr>
+        <p:spPr>
+          <a:xfrm>
+            <a:off x="365760" y="2240280"/>
+            <a:ext cx="4846320" cy="4160520"/>
+          </a:xfrm>
+          <a:prstGeom prst="rect">
+            <a:avLst/>
+          </a:prstGeom>
+          <a:noFill/>
+          <a:ln/>
+        </p:spPr>
+        <p:txBody>
+          <a:bodyPr wrap="square" lIns="0" tIns="0" rIns="0" bIns="0" rtlCol="0" anchor="t"/>
+          <a:lstStyle/>
+          <a:p>
+            <a:pPr algn="l" indent="0" marL="0">
+              <a:spcAft>
+                <a:spcPts val="800"/>
+              </a:spcAft>
+              <a:buNone/>
+            </a:pPr>
+            <a:r>
+              <a:rPr lang="en-US" sz="3600" i="1" dirty="0">
+                <a:solidFill>
+                  <a:srgbClr val="111111"/>
+                </a:solidFill>
+                <a:latin typeface="Times New Roman" pitchFamily="34" charset="0"/>
+                <a:ea typeface="Times New Roman" pitchFamily="34" charset="-122"/>
+                <a:cs typeface="Times New Roman" pitchFamily="34" charset="-120"/>
+              </a:rPr>
+              <a:t>Droughts occur in the following areas:</a:t>
+            </a:r>
+            <a:endParaRPr lang="en-US" sz="3600" dirty="0"/>
+          </a:p>
+          <a:p>
+            <a:pPr algn="l" indent="0" marL="0">
+              <a:spcAft>
+                <a:spcPts val="800"/>
+              </a:spcAft>
+              <a:buNone/>
+            </a:pPr>
+            <a:r>
+              <a:rPr lang="en-US" sz="3600" b="1" dirty="0">
+                <a:solidFill>
+                  <a:srgbClr val="111111"/>
+                </a:solidFill>
+                <a:latin typeface="Times New Roman" pitchFamily="34" charset="0"/>
+                <a:ea typeface="Times New Roman" pitchFamily="34" charset="-122"/>
+                <a:cs typeface="Times New Roman" pitchFamily="34" charset="-120"/>
+              </a:rPr>
+              <a:t>The Sahel: </a:t>
+            </a:r>
+            <a:pPr algn="l" indent="0" marL="0">
+              <a:spcAft>
+                <a:spcPts val="800"/>
+              </a:spcAft>
+              <a:buNone/>
+            </a:pPr>
+            <a:r>
+              <a:rPr lang="en-US" sz="3600" dirty="0">
+                <a:solidFill>
+                  <a:srgbClr val="111111"/>
+                </a:solidFill>
+                <a:latin typeface="Times New Roman" pitchFamily="34" charset="0"/>
+                <a:ea typeface="Times New Roman" pitchFamily="34" charset="-122"/>
+                <a:cs typeface="Times New Roman" pitchFamily="34" charset="-120"/>
+              </a:rPr>
+              <a:t>It includes the North and the Far North of Cameroon.</a:t>
+            </a:r>
+            <a:endParaRPr lang="en-US" sz="3600" dirty="0"/>
+          </a:p>
+        </p:txBody>
+      </p:sp>
       <p:pic>
         <p:nvPicPr>
-          <p:cNvPr id="3" name="Image 0" descr="/home/claude/f4/img/minesec_sheet.png">    </p:cNvPr>
+          <p:cNvPr id="6" name="Image 0" descr="/home/claude/f4/img/v2/f2t_drought.jpg">    </p:cNvPr>
           <p:cNvPicPr>
             <a:picLocks noChangeAspect="1"/>
           </p:cNvPicPr>
@@ -14592,8 +16188,8 @@
         </p:blipFill>
         <p:spPr>
           <a:xfrm>
-            <a:off x="0" y="658368"/>
-            <a:ext cx="3840480" cy="5833872"/>
+            <a:off x="5349240" y="2071212"/>
+            <a:ext cx="6659575" cy="3693983"/>
           </a:xfrm>
           <a:prstGeom prst="rect">
             <a:avLst/>
@@ -14602,14 +16198,14 @@
       </p:pic>
       <p:sp>
         <p:nvSpPr>
-          <p:cNvPr id="4" name="Text 1"/>
+          <p:cNvPr id="7" name="Text 4"/>
           <p:cNvSpPr/>
           <p:nvPr/>
         </p:nvSpPr>
         <p:spPr>
           <a:xfrm>
-            <a:off x="4069080" y="1005840"/>
-            <a:ext cx="7802575" cy="731520"/>
+            <a:off x="5349240" y="6089904"/>
+            <a:ext cx="6659575" cy="347472"/>
           </a:xfrm>
           <a:prstGeom prst="rect">
             <a:avLst/>
@@ -14618,122 +16214,24 @@
           <a:ln/>
         </p:spPr>
         <p:txBody>
-          <a:bodyPr wrap="square" lIns="0" tIns="0" rIns="0" bIns="0" rtlCol="0" anchor="ctr">
-            <a:normAutofit/>
-          </a:bodyPr>
+          <a:bodyPr wrap="square" lIns="0" tIns="0" rIns="0" bIns="0" rtlCol="0" anchor="ctr"/>
           <a:lstStyle/>
           <a:p>
             <a:pPr algn="ctr" indent="0" marL="0">
               <a:buNone/>
             </a:pPr>
             <a:r>
-              <a:rPr lang="en-US" sz="3600" b="1" dirty="0">
-                <a:solidFill>
-                  <a:srgbClr val="990011"/>
+              <a:rPr lang="en-US" sz="1600" i="1" dirty="0">
+                <a:solidFill>
+                  <a:srgbClr val="555555"/>
                 </a:solidFill>
                 <a:latin typeface="Times New Roman" pitchFamily="34" charset="0"/>
                 <a:ea typeface="Times New Roman" pitchFamily="34" charset="-122"/>
                 <a:cs typeface="Times New Roman" pitchFamily="34" charset="-120"/>
               </a:rPr>
-              <a:t>3. Desertification</a:t>
-            </a:r>
-            <a:endParaRPr lang="en-US" sz="3600" dirty="0"/>
-          </a:p>
-        </p:txBody>
-      </p:sp>
-      <p:sp>
-        <p:nvSpPr>
-          <p:cNvPr id="5" name="Text 2"/>
-          <p:cNvSpPr/>
-          <p:nvPr/>
-        </p:nvSpPr>
-        <p:spPr>
-          <a:xfrm>
-            <a:off x="4069080" y="1783080"/>
-            <a:ext cx="7802575" cy="4663440"/>
-          </a:xfrm>
-          <a:prstGeom prst="rect">
-            <a:avLst/>
-          </a:prstGeom>
-          <a:noFill/>
-          <a:ln/>
-        </p:spPr>
-        <p:txBody>
-          <a:bodyPr wrap="square" lIns="0" tIns="0" rIns="0" bIns="0" rtlCol="0" anchor="t"/>
-          <a:lstStyle/>
-          <a:p>
-            <a:pPr algn="l" indent="0" marL="0">
-              <a:spcAft>
-                <a:spcPts val="800"/>
-              </a:spcAft>
-              <a:buNone/>
-            </a:pPr>
-            <a:r>
-              <a:rPr lang="en-US" sz="4000" b="1" dirty="0">
-                <a:solidFill>
-                  <a:srgbClr val="111111"/>
-                </a:solidFill>
-                <a:latin typeface="Times New Roman" pitchFamily="34" charset="0"/>
-                <a:ea typeface="Times New Roman" pitchFamily="34" charset="-122"/>
-                <a:cs typeface="Times New Roman" pitchFamily="34" charset="-120"/>
-              </a:rPr>
-              <a:t>Causes: </a:t>
-            </a:r>
-            <a:pPr algn="l" indent="0" marL="0">
-              <a:spcAft>
-                <a:spcPts val="800"/>
-              </a:spcAft>
-              <a:buNone/>
-            </a:pPr>
-            <a:r>
-              <a:rPr lang="en-US" sz="4000" dirty="0">
-                <a:solidFill>
-                  <a:srgbClr val="111111"/>
-                </a:solidFill>
-                <a:latin typeface="Times New Roman" pitchFamily="34" charset="0"/>
-                <a:ea typeface="Times New Roman" pitchFamily="34" charset="-122"/>
-                <a:cs typeface="Times New Roman" pitchFamily="34" charset="-120"/>
-              </a:rPr>
-              <a:t>Overgrazing, cutting trees for firewood, bush fires, poor farming and repeated droughts cause desertification.</a:t>
-            </a:r>
-            <a:endParaRPr lang="en-US" sz="4000" dirty="0"/>
-          </a:p>
-          <a:p>
-            <a:pPr algn="l" indent="0" marL="0">
-              <a:spcAft>
-                <a:spcPts val="800"/>
-              </a:spcAft>
-              <a:buNone/>
-            </a:pPr>
-            <a:r>
-              <a:rPr lang="en-US" sz="4000" b="1" dirty="0">
-                <a:solidFill>
-                  <a:srgbClr val="111111"/>
-                </a:solidFill>
-                <a:latin typeface="Times New Roman" pitchFamily="34" charset="0"/>
-                <a:ea typeface="Times New Roman" pitchFamily="34" charset="-122"/>
-                <a:cs typeface="Times New Roman" pitchFamily="34" charset="-120"/>
-              </a:rPr>
-              <a:t>Effects: </a:t>
-            </a:r>
-            <a:pPr algn="l" indent="0" marL="0">
-              <a:spcAft>
-                <a:spcPts val="800"/>
-              </a:spcAft>
-              <a:buNone/>
-            </a:pPr>
-            <a:r>
-              <a:rPr lang="en-US" sz="4000" dirty="0">
-                <a:solidFill>
-                  <a:srgbClr val="111111"/>
-                </a:solidFill>
-                <a:latin typeface="Times New Roman" pitchFamily="34" charset="0"/>
-                <a:ea typeface="Times New Roman" pitchFamily="34" charset="-122"/>
-                <a:cs typeface="Times New Roman" pitchFamily="34" charset="-120"/>
-              </a:rPr>
-              <a:t>Soils become poor, sand covers fields, water becomes scarce and people migrate.</a:t>
-            </a:r>
-            <a:endParaRPr lang="en-US" sz="4000" dirty="0"/>
+              <a:t>Illustration: dry land</a:t>
+            </a:r>
+            <a:endParaRPr lang="en-US" sz="1600" dirty="0"/>
           </a:p>
         </p:txBody>
       </p:sp>
@@ -14849,109 +16347,9 @@
           </a:p>
         </p:txBody>
       </p:sp>
-      <p:sp>
-        <p:nvSpPr>
-          <p:cNvPr id="3" name="Text 1"/>
-          <p:cNvSpPr/>
-          <p:nvPr/>
-        </p:nvSpPr>
-        <p:spPr>
-          <a:xfrm>
-            <a:off x="365760" y="1005840"/>
-            <a:ext cx="11460175" cy="731520"/>
-          </a:xfrm>
-          <a:prstGeom prst="rect">
-            <a:avLst/>
-          </a:prstGeom>
-          <a:noFill/>
-          <a:ln/>
-        </p:spPr>
-        <p:txBody>
-          <a:bodyPr wrap="square" lIns="0" tIns="0" rIns="0" bIns="0" rtlCol="0" anchor="ctr">
-            <a:normAutofit/>
-          </a:bodyPr>
-          <a:lstStyle/>
-          <a:p>
-            <a:pPr algn="ctr" indent="0" marL="0">
-              <a:buNone/>
-            </a:pPr>
-            <a:r>
-              <a:rPr lang="en-US" sz="3600" b="1" dirty="0">
-                <a:solidFill>
-                  <a:srgbClr val="990011"/>
-                </a:solidFill>
-                <a:latin typeface="Times New Roman" pitchFamily="34" charset="0"/>
-                <a:ea typeface="Times New Roman" pitchFamily="34" charset="-122"/>
-                <a:cs typeface="Times New Roman" pitchFamily="34" charset="-120"/>
-              </a:rPr>
-              <a:t>3. Desertification</a:t>
-            </a:r>
-            <a:endParaRPr lang="en-US" sz="3600" dirty="0"/>
-          </a:p>
-        </p:txBody>
-      </p:sp>
-      <p:sp>
-        <p:nvSpPr>
-          <p:cNvPr id="4" name="Text 2"/>
-          <p:cNvSpPr/>
-          <p:nvPr/>
-        </p:nvSpPr>
-        <p:spPr>
-          <a:xfrm>
-            <a:off x="365760" y="1783080"/>
-            <a:ext cx="4846320" cy="4617720"/>
-          </a:xfrm>
-          <a:prstGeom prst="rect">
-            <a:avLst/>
-          </a:prstGeom>
-          <a:noFill/>
-          <a:ln/>
-        </p:spPr>
-        <p:txBody>
-          <a:bodyPr wrap="square" lIns="0" tIns="0" rIns="0" bIns="0" rtlCol="0" anchor="t"/>
-          <a:lstStyle/>
-          <a:p>
-            <a:pPr algn="l" indent="0" marL="0">
-              <a:spcAft>
-                <a:spcPts val="800"/>
-              </a:spcAft>
-              <a:buNone/>
-            </a:pPr>
-            <a:r>
-              <a:rPr lang="en-US" sz="3600" b="1" dirty="0">
-                <a:solidFill>
-                  <a:srgbClr val="111111"/>
-                </a:solidFill>
-                <a:latin typeface="Times New Roman" pitchFamily="34" charset="0"/>
-                <a:ea typeface="Times New Roman" pitchFamily="34" charset="-122"/>
-                <a:cs typeface="Times New Roman" pitchFamily="34" charset="-120"/>
-              </a:rPr>
-              <a:t>Adaptation and mitigation: </a:t>
-            </a:r>
-            <a:pPr algn="l" indent="0" marL="0">
-              <a:spcAft>
-                <a:spcPts val="800"/>
-              </a:spcAft>
-              <a:buNone/>
-            </a:pPr>
-            <a:r>
-              <a:rPr lang="en-US" sz="3600" dirty="0">
-                <a:solidFill>
-                  <a:srgbClr val="111111"/>
-                </a:solidFill>
-                <a:latin typeface="Times New Roman" pitchFamily="34" charset="0"/>
-                <a:ea typeface="Times New Roman" pitchFamily="34" charset="-122"/>
-                <a:cs typeface="Times New Roman" pitchFamily="34" charset="-120"/>
-              </a:rPr>
-              <a:t>Tree planting (Sahel Vert, Great Green Wall), zaï pits, stone lines and control of grazing stop the desert.</a:t>
-            </a:r>
-            <a:endParaRPr lang="en-US" sz="3600" dirty="0"/>
-          </a:p>
-        </p:txBody>
-      </p:sp>
       <p:pic>
         <p:nvPicPr>
-          <p:cNvPr id="5" name="Image 0" descr="/home/claude/f4/img/v2/f4_zai.jpg">    </p:cNvPr>
+          <p:cNvPr id="3" name="Image 0" descr="/home/claude/f4/img/minesec_sheet.png">    </p:cNvPr>
           <p:cNvPicPr>
             <a:picLocks noChangeAspect="1"/>
           </p:cNvPicPr>
@@ -14965,8 +16363,8 @@
         </p:blipFill>
         <p:spPr>
           <a:xfrm>
-            <a:off x="5349240" y="2071212"/>
-            <a:ext cx="6659575" cy="3693983"/>
+            <a:off x="0" y="658368"/>
+            <a:ext cx="2468880" cy="5833872"/>
           </a:xfrm>
           <a:prstGeom prst="rect">
             <a:avLst/>
@@ -14975,14 +16373,14 @@
       </p:pic>
       <p:sp>
         <p:nvSpPr>
-          <p:cNvPr id="6" name="Text 3"/>
+          <p:cNvPr id="4" name="Text 1"/>
           <p:cNvSpPr/>
           <p:nvPr/>
         </p:nvSpPr>
         <p:spPr>
           <a:xfrm>
-            <a:off x="5349240" y="6089904"/>
-            <a:ext cx="6659575" cy="347472"/>
+            <a:off x="2697480" y="1005840"/>
+            <a:ext cx="9174175" cy="731520"/>
           </a:xfrm>
           <a:prstGeom prst="rect">
             <a:avLst/>
@@ -14991,24 +16389,181 @@
           <a:ln/>
         </p:spPr>
         <p:txBody>
-          <a:bodyPr wrap="square" lIns="0" tIns="0" rIns="0" bIns="0" rtlCol="0" anchor="ctr"/>
+          <a:bodyPr wrap="square" lIns="0" tIns="0" rIns="0" bIns="0" rtlCol="0" anchor="ctr">
+            <a:normAutofit/>
+          </a:bodyPr>
           <a:lstStyle/>
           <a:p>
             <a:pPr algn="ctr" indent="0" marL="0">
               <a:buNone/>
             </a:pPr>
             <a:r>
-              <a:rPr lang="en-US" sz="1600" i="1" dirty="0">
-                <a:solidFill>
-                  <a:srgbClr val="555555"/>
+              <a:rPr lang="en-US" sz="3600" b="1" dirty="0">
+                <a:solidFill>
+                  <a:srgbClr val="990011"/>
                 </a:solidFill>
                 <a:latin typeface="Times New Roman" pitchFamily="34" charset="0"/>
                 <a:ea typeface="Times New Roman" pitchFamily="34" charset="-122"/>
                 <a:cs typeface="Times New Roman" pitchFamily="34" charset="-120"/>
               </a:rPr>
-              <a:t>Illustration: zaï planting pits</a:t>
-            </a:r>
-            <a:endParaRPr lang="en-US" sz="1600" dirty="0"/>
+              <a:t>2. Droughts</a:t>
+            </a:r>
+            <a:endParaRPr lang="en-US" sz="3600" dirty="0"/>
+          </a:p>
+        </p:txBody>
+      </p:sp>
+      <p:sp>
+        <p:nvSpPr>
+          <p:cNvPr id="5" name="Text 2"/>
+          <p:cNvSpPr/>
+          <p:nvPr/>
+        </p:nvSpPr>
+        <p:spPr>
+          <a:xfrm>
+            <a:off x="2697480" y="1737360"/>
+            <a:ext cx="9174175" cy="457200"/>
+          </a:xfrm>
+          <a:prstGeom prst="rect">
+            <a:avLst/>
+          </a:prstGeom>
+          <a:noFill/>
+          <a:ln/>
+        </p:spPr>
+        <p:txBody>
+          <a:bodyPr wrap="square" lIns="0" tIns="0" rIns="0" bIns="0" rtlCol="0" anchor="ctr"/>
+          <a:lstStyle/>
+          <a:p>
+            <a:pPr algn="l" indent="0" marL="0">
+              <a:buNone/>
+            </a:pPr>
+            <a:r>
+              <a:rPr lang="en-US" sz="3200" b="1" dirty="0">
+                <a:solidFill>
+                  <a:srgbClr val="990011"/>
+                </a:solidFill>
+                <a:latin typeface="Times New Roman" pitchFamily="34" charset="0"/>
+                <a:ea typeface="Times New Roman" pitchFamily="34" charset="-122"/>
+                <a:cs typeface="Times New Roman" pitchFamily="34" charset="-120"/>
+              </a:rPr>
+              <a:t>B) Causes</a:t>
+            </a:r>
+            <a:endParaRPr lang="en-US" sz="3200" dirty="0"/>
+          </a:p>
+        </p:txBody>
+      </p:sp>
+      <p:sp>
+        <p:nvSpPr>
+          <p:cNvPr id="6" name="Text 3"/>
+          <p:cNvSpPr/>
+          <p:nvPr/>
+        </p:nvSpPr>
+        <p:spPr>
+          <a:xfrm>
+            <a:off x="2697480" y="2240280"/>
+            <a:ext cx="9174175" cy="4206240"/>
+          </a:xfrm>
+          <a:prstGeom prst="rect">
+            <a:avLst/>
+          </a:prstGeom>
+          <a:noFill/>
+          <a:ln/>
+        </p:spPr>
+        <p:txBody>
+          <a:bodyPr wrap="square" lIns="0" tIns="0" rIns="0" bIns="0" rtlCol="0" anchor="t"/>
+          <a:lstStyle/>
+          <a:p>
+            <a:pPr algn="l" indent="0" marL="0">
+              <a:spcAft>
+                <a:spcPts val="800"/>
+              </a:spcAft>
+              <a:buNone/>
+            </a:pPr>
+            <a:r>
+              <a:rPr lang="en-US" sz="4000" i="1" dirty="0">
+                <a:solidFill>
+                  <a:srgbClr val="111111"/>
+                </a:solidFill>
+                <a:latin typeface="Times New Roman" pitchFamily="34" charset="0"/>
+                <a:ea typeface="Times New Roman" pitchFamily="34" charset="-122"/>
+                <a:cs typeface="Times New Roman" pitchFamily="34" charset="-120"/>
+              </a:rPr>
+              <a:t>Droughts are caused by the following factors:</a:t>
+            </a:r>
+            <a:endParaRPr lang="en-US" sz="4000" dirty="0"/>
+          </a:p>
+          <a:p>
+            <a:pPr algn="l" indent="0" marL="0">
+              <a:spcAft>
+                <a:spcPts val="800"/>
+              </a:spcAft>
+              <a:buNone/>
+            </a:pPr>
+            <a:r>
+              <a:rPr lang="en-US" sz="4000" b="1" dirty="0">
+                <a:solidFill>
+                  <a:srgbClr val="111111"/>
+                </a:solidFill>
+                <a:latin typeface="Times New Roman" pitchFamily="34" charset="0"/>
+                <a:ea typeface="Times New Roman" pitchFamily="34" charset="-122"/>
+                <a:cs typeface="Times New Roman" pitchFamily="34" charset="-120"/>
+              </a:rPr>
+              <a:t>Low and irregular rainfall: </a:t>
+            </a:r>
+            <a:pPr algn="l" indent="0" marL="0">
+              <a:spcAft>
+                <a:spcPts val="800"/>
+              </a:spcAft>
+              <a:buNone/>
+            </a:pPr>
+            <a:r>
+              <a:rPr lang="en-US" sz="4000" dirty="0">
+                <a:solidFill>
+                  <a:srgbClr val="111111"/>
+                </a:solidFill>
+                <a:latin typeface="Times New Roman" pitchFamily="34" charset="0"/>
+                <a:ea typeface="Times New Roman" pitchFamily="34" charset="-122"/>
+                <a:cs typeface="Times New Roman" pitchFamily="34" charset="-120"/>
+              </a:rPr>
+              <a:t>Too little rain falls, or it stops too early.</a:t>
+            </a:r>
+            <a:endParaRPr lang="en-US" sz="4000" dirty="0"/>
+          </a:p>
+          <a:p>
+            <a:pPr algn="l" indent="0" marL="0">
+              <a:spcAft>
+                <a:spcPts val="800"/>
+              </a:spcAft>
+              <a:buNone/>
+            </a:pPr>
+            <a:r>
+              <a:rPr lang="en-US" sz="4000" b="1" dirty="0">
+                <a:solidFill>
+                  <a:srgbClr val="111111"/>
+                </a:solidFill>
+                <a:latin typeface="Times New Roman" pitchFamily="34" charset="0"/>
+                <a:ea typeface="Times New Roman" pitchFamily="34" charset="-122"/>
+                <a:cs typeface="Times New Roman" pitchFamily="34" charset="-120"/>
+              </a:rPr>
+              <a:t>Very high temperatures: </a:t>
+            </a:r>
+            <a:pPr algn="l" indent="0" marL="0">
+              <a:spcAft>
+                <a:spcPts val="800"/>
+              </a:spcAft>
+              <a:buNone/>
+            </a:pPr>
+            <a:r>
+              <a:rPr lang="en-US" sz="4000" dirty="0">
+                <a:solidFill>
+                  <a:srgbClr val="111111"/>
+                </a:solidFill>
+                <a:latin typeface="Times New Roman" pitchFamily="34" charset="0"/>
+                <a:ea typeface="Times New Roman" pitchFamily="34" charset="-122"/>
+                <a:cs typeface="Times New Roman" pitchFamily="34" charset="-120"/>
+              </a:rPr>
+              <a:t>Heat dries the soil and the plants.</a:t>
+            </a:r>
+            <a:endParaRPr lang="en-US" sz="4000" dirty="0"/>
           </a:p>
         </p:txBody>
       </p:sp>
@@ -15357,7 +16912,7 @@
                 <a:ea typeface="Calibri" pitchFamily="34" charset="-122"/>
                 <a:cs typeface="Calibri" pitchFamily="34" charset="-120"/>
               </a:rPr>
-              <a:t>FORMATIVE EVALUATION</a:t>
+              <a:t>BOARD SUMMARY</a:t>
             </a:r>
             <a:endParaRPr lang="en-US" sz="1400" dirty="0"/>
           </a:p>
@@ -15422,7 +16977,7 @@
                 <a:ea typeface="Times New Roman" pitchFamily="34" charset="-122"/>
                 <a:cs typeface="Times New Roman" pitchFamily="34" charset="-120"/>
               </a:rPr>
-              <a:t>Evaluation 1</a:t>
+              <a:t>2. Droughts</a:t>
             </a:r>
             <a:endParaRPr lang="en-US" sz="3600" dirty="0"/>
           </a:p>
@@ -15436,8 +16991,47 @@
         </p:nvSpPr>
         <p:spPr>
           <a:xfrm>
-            <a:off x="5349240" y="1783080"/>
-            <a:ext cx="6522415" cy="4663440"/>
+            <a:off x="5349240" y="1737360"/>
+            <a:ext cx="6522415" cy="457200"/>
+          </a:xfrm>
+          <a:prstGeom prst="rect">
+            <a:avLst/>
+          </a:prstGeom>
+          <a:noFill/>
+          <a:ln/>
+        </p:spPr>
+        <p:txBody>
+          <a:bodyPr wrap="square" lIns="0" tIns="0" rIns="0" bIns="0" rtlCol="0" anchor="ctr"/>
+          <a:lstStyle/>
+          <a:p>
+            <a:pPr algn="l" indent="0" marL="0">
+              <a:buNone/>
+            </a:pPr>
+            <a:r>
+              <a:rPr lang="en-US" sz="3200" b="1" dirty="0">
+                <a:solidFill>
+                  <a:srgbClr val="990011"/>
+                </a:solidFill>
+                <a:latin typeface="Times New Roman" pitchFamily="34" charset="0"/>
+                <a:ea typeface="Times New Roman" pitchFamily="34" charset="-122"/>
+                <a:cs typeface="Times New Roman" pitchFamily="34" charset="-120"/>
+              </a:rPr>
+              <a:t>B) Causes (continued)</a:t>
+            </a:r>
+            <a:endParaRPr lang="en-US" sz="3200" dirty="0"/>
+          </a:p>
+        </p:txBody>
+      </p:sp>
+      <p:sp>
+        <p:nvSpPr>
+          <p:cNvPr id="6" name="Text 3"/>
+          <p:cNvSpPr/>
+          <p:nvPr/>
+        </p:nvSpPr>
+        <p:spPr>
+          <a:xfrm>
+            <a:off x="5349240" y="2240280"/>
+            <a:ext cx="6522415" cy="4206240"/>
           </a:xfrm>
           <a:prstGeom prst="rect">
             <a:avLst/>
@@ -15456,7 +17050,7 @@
               <a:buNone/>
             </a:pPr>
             <a:r>
-              <a:rPr lang="en-US" sz="4000" dirty="0">
+              <a:rPr lang="en-US" sz="4000" b="1" dirty="0">
                 <a:solidFill>
                   <a:srgbClr val="111111"/>
                 </a:solidFill>
@@ -15464,7 +17058,24 @@
                 <a:ea typeface="Times New Roman" pitchFamily="34" charset="-122"/>
                 <a:cs typeface="Times New Roman" pitchFamily="34" charset="-120"/>
               </a:rPr>
-              <a:t>What is desertification?</a:t>
+              <a:t>A long dry season: </a:t>
+            </a:r>
+            <a:pPr algn="l" indent="0" marL="0">
+              <a:spcAft>
+                <a:spcPts val="800"/>
+              </a:spcAft>
+              <a:buNone/>
+            </a:pPr>
+            <a:r>
+              <a:rPr lang="en-US" sz="4000" dirty="0">
+                <a:solidFill>
+                  <a:srgbClr val="111111"/>
+                </a:solidFill>
+                <a:latin typeface="Times New Roman" pitchFamily="34" charset="0"/>
+                <a:ea typeface="Times New Roman" pitchFamily="34" charset="-122"/>
+                <a:cs typeface="Times New Roman" pitchFamily="34" charset="-120"/>
+              </a:rPr>
+              <a:t>No rain falls for many months.</a:t>
             </a:r>
             <a:endParaRPr lang="en-US" sz="4000" dirty="0"/>
           </a:p>
@@ -15576,7 +17187,7 @@
                 <a:ea typeface="Calibri" pitchFamily="34" charset="-122"/>
                 <a:cs typeface="Calibri" pitchFamily="34" charset="-120"/>
               </a:rPr>
-              <a:t>FORMATIVE EVALUATION</a:t>
+              <a:t>BOARD SUMMARY</a:t>
             </a:r>
             <a:endParaRPr lang="en-US" sz="1400" dirty="0"/>
           </a:p>
@@ -15599,7 +17210,7 @@
         <p:spPr>
           <a:xfrm>
             <a:off x="0" y="658368"/>
-            <a:ext cx="5120640" cy="5833872"/>
+            <a:ext cx="2468880" cy="5833872"/>
           </a:xfrm>
           <a:prstGeom prst="rect">
             <a:avLst/>
@@ -15614,8 +17225,8 @@
         </p:nvSpPr>
         <p:spPr>
           <a:xfrm>
-            <a:off x="5349240" y="1005840"/>
-            <a:ext cx="6522415" cy="731520"/>
+            <a:off x="2697480" y="1005840"/>
+            <a:ext cx="9174175" cy="731520"/>
           </a:xfrm>
           <a:prstGeom prst="rect">
             <a:avLst/>
@@ -15641,7 +17252,7 @@
                 <a:ea typeface="Times New Roman" pitchFamily="34" charset="-122"/>
                 <a:cs typeface="Times New Roman" pitchFamily="34" charset="-120"/>
               </a:rPr>
-              <a:t>Expected Answer</a:t>
+              <a:t>2. Droughts</a:t>
             </a:r>
             <a:endParaRPr lang="en-US" sz="3600" dirty="0"/>
           </a:p>
@@ -15655,8 +17266,47 @@
         </p:nvSpPr>
         <p:spPr>
           <a:xfrm>
-            <a:off x="5349240" y="1783080"/>
-            <a:ext cx="6522415" cy="4663440"/>
+            <a:off x="2697480" y="1737360"/>
+            <a:ext cx="9174175" cy="457200"/>
+          </a:xfrm>
+          <a:prstGeom prst="rect">
+            <a:avLst/>
+          </a:prstGeom>
+          <a:noFill/>
+          <a:ln/>
+        </p:spPr>
+        <p:txBody>
+          <a:bodyPr wrap="square" lIns="0" tIns="0" rIns="0" bIns="0" rtlCol="0" anchor="ctr"/>
+          <a:lstStyle/>
+          <a:p>
+            <a:pPr algn="l" indent="0" marL="0">
+              <a:buNone/>
+            </a:pPr>
+            <a:r>
+              <a:rPr lang="en-US" sz="3200" b="1" dirty="0">
+                <a:solidFill>
+                  <a:srgbClr val="990011"/>
+                </a:solidFill>
+                <a:latin typeface="Times New Roman" pitchFamily="34" charset="0"/>
+                <a:ea typeface="Times New Roman" pitchFamily="34" charset="-122"/>
+                <a:cs typeface="Times New Roman" pitchFamily="34" charset="-120"/>
+              </a:rPr>
+              <a:t>C) Effects</a:t>
+            </a:r>
+            <a:endParaRPr lang="en-US" sz="3200" dirty="0"/>
+          </a:p>
+        </p:txBody>
+      </p:sp>
+      <p:sp>
+        <p:nvSpPr>
+          <p:cNvPr id="6" name="Text 3"/>
+          <p:cNvSpPr/>
+          <p:nvPr/>
+        </p:nvSpPr>
+        <p:spPr>
+          <a:xfrm>
+            <a:off x="2697480" y="2240280"/>
+            <a:ext cx="9174175" cy="4206240"/>
           </a:xfrm>
           <a:prstGeom prst="rect">
             <a:avLst/>
@@ -15675,7 +17325,7 @@
               <a:buNone/>
             </a:pPr>
             <a:r>
-              <a:rPr lang="en-US" sz="4000" dirty="0">
+              <a:rPr lang="en-US" sz="4000" i="1" dirty="0">
                 <a:solidFill>
                   <a:srgbClr val="111111"/>
                 </a:solidFill>
@@ -15683,7 +17333,118 @@
                 <a:ea typeface="Times New Roman" pitchFamily="34" charset="-122"/>
                 <a:cs typeface="Times New Roman" pitchFamily="34" charset="-120"/>
               </a:rPr>
-              <a:t>The spread of the desert.</a:t>
+              <a:t>Droughts have the following effects:</a:t>
+            </a:r>
+            <a:endParaRPr lang="en-US" sz="4000" dirty="0"/>
+          </a:p>
+          <a:p>
+            <a:pPr algn="l" indent="0" marL="0">
+              <a:spcAft>
+                <a:spcPts val="800"/>
+              </a:spcAft>
+              <a:buNone/>
+            </a:pPr>
+            <a:r>
+              <a:rPr lang="en-US" sz="4000" b="1" dirty="0">
+                <a:solidFill>
+                  <a:srgbClr val="111111"/>
+                </a:solidFill>
+                <a:latin typeface="Times New Roman" pitchFamily="34" charset="0"/>
+                <a:ea typeface="Times New Roman" pitchFamily="34" charset="-122"/>
+                <a:cs typeface="Times New Roman" pitchFamily="34" charset="-120"/>
+              </a:rPr>
+              <a:t>Crop failure: </a:t>
+            </a:r>
+            <a:pPr algn="l" indent="0" marL="0">
+              <a:spcAft>
+                <a:spcPts val="800"/>
+              </a:spcAft>
+              <a:buNone/>
+            </a:pPr>
+            <a:r>
+              <a:rPr lang="en-US" sz="4000" dirty="0">
+                <a:solidFill>
+                  <a:srgbClr val="111111"/>
+                </a:solidFill>
+                <a:latin typeface="Times New Roman" pitchFamily="34" charset="0"/>
+                <a:ea typeface="Times New Roman" pitchFamily="34" charset="-122"/>
+                <a:cs typeface="Times New Roman" pitchFamily="34" charset="-120"/>
+              </a:rPr>
+              <a:t>Crops dry up and harvests are poor.</a:t>
+            </a:r>
+            <a:endParaRPr lang="en-US" sz="4000" dirty="0"/>
+          </a:p>
+          <a:p>
+            <a:pPr algn="l" indent="0" marL="0">
+              <a:spcAft>
+                <a:spcPts val="800"/>
+              </a:spcAft>
+              <a:buNone/>
+            </a:pPr>
+            <a:r>
+              <a:rPr lang="en-US" sz="4000" b="1" dirty="0">
+                <a:solidFill>
+                  <a:srgbClr val="111111"/>
+                </a:solidFill>
+                <a:latin typeface="Times New Roman" pitchFamily="34" charset="0"/>
+                <a:ea typeface="Times New Roman" pitchFamily="34" charset="-122"/>
+                <a:cs typeface="Times New Roman" pitchFamily="34" charset="-120"/>
+              </a:rPr>
+              <a:t>Death of animals: </a:t>
+            </a:r>
+            <a:pPr algn="l" indent="0" marL="0">
+              <a:spcAft>
+                <a:spcPts val="800"/>
+              </a:spcAft>
+              <a:buNone/>
+            </a:pPr>
+            <a:r>
+              <a:rPr lang="en-US" sz="4000" dirty="0">
+                <a:solidFill>
+                  <a:srgbClr val="111111"/>
+                </a:solidFill>
+                <a:latin typeface="Times New Roman" pitchFamily="34" charset="0"/>
+                <a:ea typeface="Times New Roman" pitchFamily="34" charset="-122"/>
+                <a:cs typeface="Times New Roman" pitchFamily="34" charset="-120"/>
+              </a:rPr>
+              <a:t>Cattle and goats die of thirst and hunger.</a:t>
+            </a:r>
+            <a:endParaRPr lang="en-US" sz="4000" dirty="0"/>
+          </a:p>
+          <a:p>
+            <a:pPr algn="l" indent="0" marL="0">
+              <a:spcAft>
+                <a:spcPts val="800"/>
+              </a:spcAft>
+              <a:buNone/>
+            </a:pPr>
+            <a:r>
+              <a:rPr lang="en-US" sz="4000" b="1" dirty="0">
+                <a:solidFill>
+                  <a:srgbClr val="111111"/>
+                </a:solidFill>
+                <a:latin typeface="Times New Roman" pitchFamily="34" charset="0"/>
+                <a:ea typeface="Times New Roman" pitchFamily="34" charset="-122"/>
+                <a:cs typeface="Times New Roman" pitchFamily="34" charset="-120"/>
+              </a:rPr>
+              <a:t>Drying wells: </a:t>
+            </a:r>
+            <a:pPr algn="l" indent="0" marL="0">
+              <a:spcAft>
+                <a:spcPts val="800"/>
+              </a:spcAft>
+              <a:buNone/>
+            </a:pPr>
+            <a:r>
+              <a:rPr lang="en-US" sz="4000" dirty="0">
+                <a:solidFill>
+                  <a:srgbClr val="111111"/>
+                </a:solidFill>
+                <a:latin typeface="Times New Roman" pitchFamily="34" charset="0"/>
+                <a:ea typeface="Times New Roman" pitchFamily="34" charset="-122"/>
+                <a:cs typeface="Times New Roman" pitchFamily="34" charset="-120"/>
+              </a:rPr>
+              <a:t>Wells and rivers dry up.</a:t>
             </a:r>
             <a:endParaRPr lang="en-US" sz="4000" dirty="0"/>
           </a:p>
@@ -15795,7 +17556,7 @@
                 <a:ea typeface="Calibri" pitchFamily="34" charset="-122"/>
                 <a:cs typeface="Calibri" pitchFamily="34" charset="-120"/>
               </a:rPr>
-              <a:t>FORMATIVE EVALUATION</a:t>
+              <a:t>BOARD SUMMARY</a:t>
             </a:r>
             <a:endParaRPr lang="en-US" sz="1400" dirty="0"/>
           </a:p>
@@ -15860,7 +17621,7 @@
                 <a:ea typeface="Times New Roman" pitchFamily="34" charset="-122"/>
                 <a:cs typeface="Times New Roman" pitchFamily="34" charset="-120"/>
               </a:rPr>
-              <a:t>Evaluation 2</a:t>
+              <a:t>2. Droughts</a:t>
             </a:r>
             <a:endParaRPr lang="en-US" sz="3600" dirty="0"/>
           </a:p>
@@ -15874,8 +17635,47 @@
         </p:nvSpPr>
         <p:spPr>
           <a:xfrm>
-            <a:off x="5349240" y="1783080"/>
-            <a:ext cx="6522415" cy="4663440"/>
+            <a:off x="5349240" y="1737360"/>
+            <a:ext cx="6522415" cy="457200"/>
+          </a:xfrm>
+          <a:prstGeom prst="rect">
+            <a:avLst/>
+          </a:prstGeom>
+          <a:noFill/>
+          <a:ln/>
+        </p:spPr>
+        <p:txBody>
+          <a:bodyPr wrap="square" lIns="0" tIns="0" rIns="0" bIns="0" rtlCol="0" anchor="ctr"/>
+          <a:lstStyle/>
+          <a:p>
+            <a:pPr algn="l" indent="0" marL="0">
+              <a:buNone/>
+            </a:pPr>
+            <a:r>
+              <a:rPr lang="en-US" sz="3200" b="1" dirty="0">
+                <a:solidFill>
+                  <a:srgbClr val="990011"/>
+                </a:solidFill>
+                <a:latin typeface="Times New Roman" pitchFamily="34" charset="0"/>
+                <a:ea typeface="Times New Roman" pitchFamily="34" charset="-122"/>
+                <a:cs typeface="Times New Roman" pitchFamily="34" charset="-120"/>
+              </a:rPr>
+              <a:t>C) Effects (continued)</a:t>
+            </a:r>
+            <a:endParaRPr lang="en-US" sz="3200" dirty="0"/>
+          </a:p>
+        </p:txBody>
+      </p:sp>
+      <p:sp>
+        <p:nvSpPr>
+          <p:cNvPr id="6" name="Text 3"/>
+          <p:cNvSpPr/>
+          <p:nvPr/>
+        </p:nvSpPr>
+        <p:spPr>
+          <a:xfrm>
+            <a:off x="5349240" y="2240280"/>
+            <a:ext cx="6522415" cy="4206240"/>
           </a:xfrm>
           <a:prstGeom prst="rect">
             <a:avLst/>
@@ -15894,7 +17694,7 @@
               <a:buNone/>
             </a:pPr>
             <a:r>
-              <a:rPr lang="en-US" sz="4000" dirty="0">
+              <a:rPr lang="en-US" sz="4000" b="1" dirty="0">
                 <a:solidFill>
                   <a:srgbClr val="111111"/>
                 </a:solidFill>
@@ -15902,7 +17702,24 @@
                 <a:ea typeface="Times New Roman" pitchFamily="34" charset="-122"/>
                 <a:cs typeface="Times New Roman" pitchFamily="34" charset="-120"/>
               </a:rPr>
-              <a:t>Give one way to fight desertification.</a:t>
+              <a:t>Hunger and migration: </a:t>
+            </a:r>
+            <a:pPr algn="l" indent="0" marL="0">
+              <a:spcAft>
+                <a:spcPts val="800"/>
+              </a:spcAft>
+              <a:buNone/>
+            </a:pPr>
+            <a:r>
+              <a:rPr lang="en-US" sz="4000" dirty="0">
+                <a:solidFill>
+                  <a:srgbClr val="111111"/>
+                </a:solidFill>
+                <a:latin typeface="Times New Roman" pitchFamily="34" charset="0"/>
+                <a:ea typeface="Times New Roman" pitchFamily="34" charset="-122"/>
+                <a:cs typeface="Times New Roman" pitchFamily="34" charset="-120"/>
+              </a:rPr>
+              <a:t>People suffer hunger and leave their villages.</a:t>
             </a:r>
             <a:endParaRPr lang="en-US" sz="4000" dirty="0"/>
           </a:p>
@@ -16014,7 +17831,7 @@
                 <a:ea typeface="Calibri" pitchFamily="34" charset="-122"/>
                 <a:cs typeface="Calibri" pitchFamily="34" charset="-120"/>
               </a:rPr>
-              <a:t>FORMATIVE EVALUATION</a:t>
+              <a:t>BOARD SUMMARY</a:t>
             </a:r>
             <a:endParaRPr lang="en-US" sz="1400" dirty="0"/>
           </a:p>
@@ -16037,7 +17854,7 @@
         <p:spPr>
           <a:xfrm>
             <a:off x="0" y="658368"/>
-            <a:ext cx="5120640" cy="5833872"/>
+            <a:ext cx="3840480" cy="5833872"/>
           </a:xfrm>
           <a:prstGeom prst="rect">
             <a:avLst/>
@@ -16052,8 +17869,8 @@
         </p:nvSpPr>
         <p:spPr>
           <a:xfrm>
-            <a:off x="5349240" y="1005840"/>
-            <a:ext cx="6522415" cy="731520"/>
+            <a:off x="4069080" y="1005840"/>
+            <a:ext cx="7802575" cy="731520"/>
           </a:xfrm>
           <a:prstGeom prst="rect">
             <a:avLst/>
@@ -16079,7 +17896,7 @@
                 <a:ea typeface="Times New Roman" pitchFamily="34" charset="-122"/>
                 <a:cs typeface="Times New Roman" pitchFamily="34" charset="-120"/>
               </a:rPr>
-              <a:t>Expected Answer</a:t>
+              <a:t>2. Droughts</a:t>
             </a:r>
             <a:endParaRPr lang="en-US" sz="3600" dirty="0"/>
           </a:p>
@@ -16093,8 +17910,47 @@
         </p:nvSpPr>
         <p:spPr>
           <a:xfrm>
-            <a:off x="5349240" y="1783080"/>
-            <a:ext cx="6522415" cy="4663440"/>
+            <a:off x="4069080" y="1737360"/>
+            <a:ext cx="7802575" cy="457200"/>
+          </a:xfrm>
+          <a:prstGeom prst="rect">
+            <a:avLst/>
+          </a:prstGeom>
+          <a:noFill/>
+          <a:ln/>
+        </p:spPr>
+        <p:txBody>
+          <a:bodyPr wrap="square" lIns="0" tIns="0" rIns="0" bIns="0" rtlCol="0" anchor="ctr"/>
+          <a:lstStyle/>
+          <a:p>
+            <a:pPr algn="l" indent="0" marL="0">
+              <a:buNone/>
+            </a:pPr>
+            <a:r>
+              <a:rPr lang="en-US" sz="3200" b="1" dirty="0">
+                <a:solidFill>
+                  <a:srgbClr val="990011"/>
+                </a:solidFill>
+                <a:latin typeface="Times New Roman" pitchFamily="34" charset="0"/>
+                <a:ea typeface="Times New Roman" pitchFamily="34" charset="-122"/>
+                <a:cs typeface="Times New Roman" pitchFamily="34" charset="-120"/>
+              </a:rPr>
+              <a:t>D) Adaptation and Mitigation</a:t>
+            </a:r>
+            <a:endParaRPr lang="en-US" sz="3200" dirty="0"/>
+          </a:p>
+        </p:txBody>
+      </p:sp>
+      <p:sp>
+        <p:nvSpPr>
+          <p:cNvPr id="6" name="Text 3"/>
+          <p:cNvSpPr/>
+          <p:nvPr/>
+        </p:nvSpPr>
+        <p:spPr>
+          <a:xfrm>
+            <a:off x="4069080" y="2240280"/>
+            <a:ext cx="7802575" cy="4206240"/>
           </a:xfrm>
           <a:prstGeom prst="rect">
             <a:avLst/>
@@ -16113,7 +17969,7 @@
               <a:buNone/>
             </a:pPr>
             <a:r>
-              <a:rPr lang="en-US" sz="4000" dirty="0">
+              <a:rPr lang="en-US" sz="4000" i="1" dirty="0">
                 <a:solidFill>
                   <a:srgbClr val="111111"/>
                 </a:solidFill>
@@ -16121,7 +17977,81 @@
                 <a:ea typeface="Times New Roman" pitchFamily="34" charset="-122"/>
                 <a:cs typeface="Times New Roman" pitchFamily="34" charset="-120"/>
               </a:rPr>
-              <a:t>Plant trees (or stop overgrazing).</a:t>
+              <a:t>The effects of droughts are reduced by the following measures:</a:t>
+            </a:r>
+            <a:endParaRPr lang="en-US" sz="4000" dirty="0"/>
+          </a:p>
+          <a:p>
+            <a:pPr algn="l" indent="0" marL="0">
+              <a:spcAft>
+                <a:spcPts val="800"/>
+              </a:spcAft>
+              <a:buNone/>
+            </a:pPr>
+            <a:r>
+              <a:rPr lang="en-US" sz="4000" b="1" dirty="0">
+                <a:solidFill>
+                  <a:srgbClr val="111111"/>
+                </a:solidFill>
+                <a:latin typeface="Times New Roman" pitchFamily="34" charset="0"/>
+                <a:ea typeface="Times New Roman" pitchFamily="34" charset="-122"/>
+                <a:cs typeface="Times New Roman" pitchFamily="34" charset="-120"/>
+              </a:rPr>
+              <a:t>Irrigation: </a:t>
+            </a:r>
+            <a:pPr algn="l" indent="0" marL="0">
+              <a:spcAft>
+                <a:spcPts val="800"/>
+              </a:spcAft>
+              <a:buNone/>
+            </a:pPr>
+            <a:r>
+              <a:rPr lang="en-US" sz="4000" dirty="0">
+                <a:solidFill>
+                  <a:srgbClr val="111111"/>
+                </a:solidFill>
+                <a:latin typeface="Times New Roman" pitchFamily="34" charset="0"/>
+                <a:ea typeface="Times New Roman" pitchFamily="34" charset="-122"/>
+                <a:cs typeface="Times New Roman" pitchFamily="34" charset="-120"/>
+              </a:rPr>
+              <a:t>Crops are watered from rivers and wells.</a:t>
+            </a:r>
+            <a:endParaRPr lang="en-US" sz="4000" dirty="0"/>
+          </a:p>
+          <a:p>
+            <a:pPr algn="l" indent="0" marL="0">
+              <a:spcAft>
+                <a:spcPts val="800"/>
+              </a:spcAft>
+              <a:buNone/>
+            </a:pPr>
+            <a:r>
+              <a:rPr lang="en-US" sz="4000" b="1" dirty="0">
+                <a:solidFill>
+                  <a:srgbClr val="111111"/>
+                </a:solidFill>
+                <a:latin typeface="Times New Roman" pitchFamily="34" charset="0"/>
+                <a:ea typeface="Times New Roman" pitchFamily="34" charset="-122"/>
+                <a:cs typeface="Times New Roman" pitchFamily="34" charset="-120"/>
+              </a:rPr>
+              <a:t>Water storage: </a:t>
+            </a:r>
+            <a:pPr algn="l" indent="0" marL="0">
+              <a:spcAft>
+                <a:spcPts val="800"/>
+              </a:spcAft>
+              <a:buNone/>
+            </a:pPr>
+            <a:r>
+              <a:rPr lang="en-US" sz="4000" dirty="0">
+                <a:solidFill>
+                  <a:srgbClr val="111111"/>
+                </a:solidFill>
+                <a:latin typeface="Times New Roman" pitchFamily="34" charset="0"/>
+                <a:ea typeface="Times New Roman" pitchFamily="34" charset="-122"/>
+                <a:cs typeface="Times New Roman" pitchFamily="34" charset="-120"/>
+              </a:rPr>
+              <a:t>Rainwater is kept in tanks and ponds.</a:t>
             </a:r>
             <a:endParaRPr lang="en-US" sz="4000" dirty="0"/>
           </a:p>
@@ -16233,7 +18163,7 @@
                 <a:ea typeface="Calibri" pitchFamily="34" charset="-122"/>
                 <a:cs typeface="Calibri" pitchFamily="34" charset="-120"/>
               </a:rPr>
-              <a:t>REMEDIATION</a:t>
+              <a:t>BOARD SUMMARY</a:t>
             </a:r>
             <a:endParaRPr lang="en-US" sz="1400" dirty="0"/>
           </a:p>
@@ -16256,7 +18186,7 @@
         <p:spPr>
           <a:xfrm>
             <a:off x="0" y="658368"/>
-            <a:ext cx="2468880" cy="5833872"/>
+            <a:ext cx="5120640" cy="5833872"/>
           </a:xfrm>
           <a:prstGeom prst="rect">
             <a:avLst/>
@@ -16271,8 +18201,8 @@
         </p:nvSpPr>
         <p:spPr>
           <a:xfrm>
-            <a:off x="2697480" y="1005840"/>
-            <a:ext cx="9174175" cy="731520"/>
+            <a:off x="5349240" y="1005840"/>
+            <a:ext cx="6522415" cy="731520"/>
           </a:xfrm>
           <a:prstGeom prst="rect">
             <a:avLst/>
@@ -16298,7 +18228,7 @@
                 <a:ea typeface="Times New Roman" pitchFamily="34" charset="-122"/>
                 <a:cs typeface="Times New Roman" pitchFamily="34" charset="-120"/>
               </a:rPr>
-              <a:t>Remediation</a:t>
+              <a:t>2. Droughts</a:t>
             </a:r>
             <a:endParaRPr lang="en-US" sz="3600" dirty="0"/>
           </a:p>
@@ -16312,8 +18242,47 @@
         </p:nvSpPr>
         <p:spPr>
           <a:xfrm>
-            <a:off x="2697480" y="1783080"/>
-            <a:ext cx="9174175" cy="4663440"/>
+            <a:off x="5349240" y="1737360"/>
+            <a:ext cx="6522415" cy="457200"/>
+          </a:xfrm>
+          <a:prstGeom prst="rect">
+            <a:avLst/>
+          </a:prstGeom>
+          <a:noFill/>
+          <a:ln/>
+        </p:spPr>
+        <p:txBody>
+          <a:bodyPr wrap="square" lIns="0" tIns="0" rIns="0" bIns="0" rtlCol="0" anchor="ctr"/>
+          <a:lstStyle/>
+          <a:p>
+            <a:pPr algn="l" indent="0" marL="0">
+              <a:buNone/>
+            </a:pPr>
+            <a:r>
+              <a:rPr lang="en-US" sz="2500" b="1" dirty="0">
+                <a:solidFill>
+                  <a:srgbClr val="990011"/>
+                </a:solidFill>
+                <a:latin typeface="Times New Roman" pitchFamily="34" charset="0"/>
+                <a:ea typeface="Times New Roman" pitchFamily="34" charset="-122"/>
+                <a:cs typeface="Times New Roman" pitchFamily="34" charset="-120"/>
+              </a:rPr>
+              <a:t>D) Adaptation and Mitigation (continued)</a:t>
+            </a:r>
+            <a:endParaRPr lang="en-US" sz="2500" dirty="0"/>
+          </a:p>
+        </p:txBody>
+      </p:sp>
+      <p:sp>
+        <p:nvSpPr>
+          <p:cNvPr id="6" name="Text 3"/>
+          <p:cNvSpPr/>
+          <p:nvPr/>
+        </p:nvSpPr>
+        <p:spPr>
+          <a:xfrm>
+            <a:off x="5349240" y="2240280"/>
+            <a:ext cx="6522415" cy="4206240"/>
           </a:xfrm>
           <a:prstGeom prst="rect">
             <a:avLst/>
@@ -16340,18 +18309,13 @@
                 <a:ea typeface="Times New Roman" pitchFamily="34" charset="-122"/>
                 <a:cs typeface="Times New Roman" pitchFamily="34" charset="-120"/>
               </a:rPr>
-              <a:t>Fill in the blanks:</a:t>
-            </a:r>
-            <a:endParaRPr lang="en-US" sz="4000" dirty="0"/>
-          </a:p>
-          <a:p>
-            <a:pPr algn="l" marL="342900" indent="-342900">
+              <a:t>Drought-resistant crops: </a:t>
+            </a:r>
+            <a:pPr algn="l" indent="0" marL="0">
               <a:spcAft>
                 <a:spcPts val="800"/>
               </a:spcAft>
-              <a:buSzPct val="100000"/>
-              <a:buFont typeface="+mj-lt"/>
-              <a:buAutoNum type="arabicPeriod" startAt="1"/>
+              <a:buNone/>
             </a:pPr>
             <a:r>
               <a:rPr lang="en-US" sz="4000" dirty="0">
@@ -16362,21 +18326,19 @@
                 <a:ea typeface="Times New Roman" pitchFamily="34" charset="-122"/>
                 <a:cs typeface="Times New Roman" pitchFamily="34" charset="-120"/>
               </a:rPr>
-              <a:t>A long period without enough rain is a ______.</a:t>
+              <a:t>Farmers grow millet and sorghum.</a:t>
             </a:r>
             <a:endParaRPr lang="en-US" sz="4000" dirty="0"/>
           </a:p>
           <a:p>
-            <a:pPr algn="l" marL="342900" indent="-342900">
+            <a:pPr algn="l" indent="0" marL="0">
               <a:spcAft>
                 <a:spcPts val="800"/>
               </a:spcAft>
-              <a:buSzPct val="100000"/>
-              <a:buFont typeface="+mj-lt"/>
-              <a:buAutoNum type="arabicPeriod" startAt="1"/>
-            </a:pPr>
-            <a:r>
-              <a:rPr lang="en-US" sz="4000" dirty="0">
+              <a:buNone/>
+            </a:pPr>
+            <a:r>
+              <a:rPr lang="en-US" sz="4000" b="1" dirty="0">
                 <a:solidFill>
                   <a:srgbClr val="111111"/>
                 </a:solidFill>
@@ -16384,18 +18346,13 @@
                 <a:ea typeface="Times New Roman" pitchFamily="34" charset="-122"/>
                 <a:cs typeface="Times New Roman" pitchFamily="34" charset="-120"/>
               </a:rPr>
-              <a:t>The spread of the desert is ______.</a:t>
-            </a:r>
-            <a:endParaRPr lang="en-US" sz="4000" dirty="0"/>
-          </a:p>
-          <a:p>
-            <a:pPr algn="l" marL="342900" indent="-342900">
+              <a:t>Food reserves: </a:t>
+            </a:r>
+            <a:pPr algn="l" indent="0" marL="0">
               <a:spcAft>
                 <a:spcPts val="800"/>
               </a:spcAft>
-              <a:buSzPct val="100000"/>
-              <a:buFont typeface="+mj-lt"/>
-              <a:buAutoNum type="arabicPeriod" startAt="1"/>
+              <a:buNone/>
             </a:pPr>
             <a:r>
               <a:rPr lang="en-US" sz="4000" dirty="0">
@@ -16406,7 +18363,7 @@
                 <a:ea typeface="Times New Roman" pitchFamily="34" charset="-122"/>
                 <a:cs typeface="Times New Roman" pitchFamily="34" charset="-120"/>
               </a:rPr>
-              <a:t>In 2012, water from the ______ Dam flooded villages.</a:t>
+              <a:t>Grain is stored for bad years.</a:t>
             </a:r>
             <a:endParaRPr lang="en-US" sz="4000" dirty="0"/>
           </a:p>
@@ -16518,15 +18475,176 @@
                 <a:ea typeface="Calibri" pitchFamily="34" charset="-122"/>
                 <a:cs typeface="Calibri" pitchFamily="34" charset="-120"/>
               </a:rPr>
-              <a:t>HOMEWORK</a:t>
+              <a:t>BOARD SUMMARY</a:t>
             </a:r>
             <a:endParaRPr lang="en-US" sz="1400" dirty="0"/>
+          </a:p>
+        </p:txBody>
+      </p:sp>
+      <p:sp>
+        <p:nvSpPr>
+          <p:cNvPr id="3" name="Text 1"/>
+          <p:cNvSpPr/>
+          <p:nvPr/>
+        </p:nvSpPr>
+        <p:spPr>
+          <a:xfrm>
+            <a:off x="365760" y="1005840"/>
+            <a:ext cx="11460175" cy="731520"/>
+          </a:xfrm>
+          <a:prstGeom prst="rect">
+            <a:avLst/>
+          </a:prstGeom>
+          <a:noFill/>
+          <a:ln/>
+        </p:spPr>
+        <p:txBody>
+          <a:bodyPr wrap="square" lIns="0" tIns="0" rIns="0" bIns="0" rtlCol="0" anchor="ctr">
+            <a:normAutofit/>
+          </a:bodyPr>
+          <a:lstStyle/>
+          <a:p>
+            <a:pPr algn="ctr" indent="0" marL="0">
+              <a:buNone/>
+            </a:pPr>
+            <a:r>
+              <a:rPr lang="en-US" sz="3600" b="1" dirty="0">
+                <a:solidFill>
+                  <a:srgbClr val="990011"/>
+                </a:solidFill>
+                <a:latin typeface="Times New Roman" pitchFamily="34" charset="0"/>
+                <a:ea typeface="Times New Roman" pitchFamily="34" charset="-122"/>
+                <a:cs typeface="Times New Roman" pitchFamily="34" charset="-120"/>
+              </a:rPr>
+              <a:t>3. Desertification</a:t>
+            </a:r>
+            <a:endParaRPr lang="en-US" sz="3600" dirty="0"/>
+          </a:p>
+        </p:txBody>
+      </p:sp>
+      <p:sp>
+        <p:nvSpPr>
+          <p:cNvPr id="4" name="Text 2"/>
+          <p:cNvSpPr/>
+          <p:nvPr/>
+        </p:nvSpPr>
+        <p:spPr>
+          <a:xfrm>
+            <a:off x="365760" y="1737360"/>
+            <a:ext cx="5120640" cy="457200"/>
+          </a:xfrm>
+          <a:prstGeom prst="rect">
+            <a:avLst/>
+          </a:prstGeom>
+          <a:noFill/>
+          <a:ln/>
+        </p:spPr>
+        <p:txBody>
+          <a:bodyPr wrap="square" lIns="0" tIns="0" rIns="0" bIns="0" rtlCol="0" anchor="ctr">
+            <a:normAutofit/>
+          </a:bodyPr>
+          <a:lstStyle/>
+          <a:p>
+            <a:pPr algn="l" indent="0" marL="0">
+              <a:buNone/>
+            </a:pPr>
+            <a:r>
+              <a:rPr lang="en-US" sz="3000" b="1" dirty="0">
+                <a:solidFill>
+                  <a:srgbClr val="990011"/>
+                </a:solidFill>
+                <a:latin typeface="Times New Roman" pitchFamily="34" charset="0"/>
+                <a:ea typeface="Times New Roman" pitchFamily="34" charset="-122"/>
+                <a:cs typeface="Times New Roman" pitchFamily="34" charset="-120"/>
+              </a:rPr>
+              <a:t>A) Areas of Occurrence</a:t>
+            </a:r>
+            <a:endParaRPr lang="en-US" sz="3000" dirty="0"/>
+          </a:p>
+        </p:txBody>
+      </p:sp>
+      <p:sp>
+        <p:nvSpPr>
+          <p:cNvPr id="5" name="Text 3"/>
+          <p:cNvSpPr/>
+          <p:nvPr/>
+        </p:nvSpPr>
+        <p:spPr>
+          <a:xfrm>
+            <a:off x="365760" y="2240280"/>
+            <a:ext cx="4846320" cy="4160520"/>
+          </a:xfrm>
+          <a:prstGeom prst="rect">
+            <a:avLst/>
+          </a:prstGeom>
+          <a:noFill/>
+          <a:ln/>
+        </p:spPr>
+        <p:txBody>
+          <a:bodyPr wrap="square" lIns="0" tIns="0" rIns="0" bIns="0" rtlCol="0" anchor="t"/>
+          <a:lstStyle/>
+          <a:p>
+            <a:pPr algn="l" indent="0" marL="0">
+              <a:spcAft>
+                <a:spcPts val="800"/>
+              </a:spcAft>
+              <a:buNone/>
+            </a:pPr>
+            <a:r>
+              <a:rPr lang="en-US" sz="3600" i="1" dirty="0">
+                <a:solidFill>
+                  <a:srgbClr val="111111"/>
+                </a:solidFill>
+                <a:latin typeface="Times New Roman" pitchFamily="34" charset="0"/>
+                <a:ea typeface="Times New Roman" pitchFamily="34" charset="-122"/>
+                <a:cs typeface="Times New Roman" pitchFamily="34" charset="-120"/>
+              </a:rPr>
+              <a:t>Desertification occurs in the following areas:</a:t>
+            </a:r>
+            <a:endParaRPr lang="en-US" sz="3600" dirty="0"/>
+          </a:p>
+          <a:p>
+            <a:pPr algn="l" indent="0" marL="0">
+              <a:spcAft>
+                <a:spcPts val="800"/>
+              </a:spcAft>
+              <a:buNone/>
+            </a:pPr>
+            <a:r>
+              <a:rPr lang="en-US" sz="3600" b="1" dirty="0">
+                <a:solidFill>
+                  <a:srgbClr val="111111"/>
+                </a:solidFill>
+                <a:latin typeface="Times New Roman" pitchFamily="34" charset="0"/>
+                <a:ea typeface="Times New Roman" pitchFamily="34" charset="-122"/>
+                <a:cs typeface="Times New Roman" pitchFamily="34" charset="-120"/>
+              </a:rPr>
+              <a:t>The Sahel: </a:t>
+            </a:r>
+            <a:pPr algn="l" indent="0" marL="0">
+              <a:spcAft>
+                <a:spcPts val="800"/>
+              </a:spcAft>
+              <a:buNone/>
+            </a:pPr>
+            <a:r>
+              <a:rPr lang="en-US" sz="3600" dirty="0">
+                <a:solidFill>
+                  <a:srgbClr val="111111"/>
+                </a:solidFill>
+                <a:latin typeface="Times New Roman" pitchFamily="34" charset="0"/>
+                <a:ea typeface="Times New Roman" pitchFamily="34" charset="-122"/>
+                <a:cs typeface="Times New Roman" pitchFamily="34" charset="-120"/>
+              </a:rPr>
+              <a:t>It includes the Far North of Cameroon around Lake Chad.</a:t>
+            </a:r>
+            <a:endParaRPr lang="en-US" sz="3600" dirty="0"/>
           </a:p>
         </p:txBody>
       </p:sp>
       <p:pic>
         <p:nvPicPr>
-          <p:cNvPr id="3" name="Image 0" descr="/home/claude/f4/img/minesec_sheet.png">    </p:cNvPr>
+          <p:cNvPr id="6" name="Image 0" descr="/home/claude/f4/img/v2/drought_big.png">    </p:cNvPr>
           <p:cNvPicPr>
             <a:picLocks noChangeAspect="1"/>
           </p:cNvPicPr>
@@ -16540,8 +18658,8 @@
         </p:blipFill>
         <p:spPr>
           <a:xfrm>
-            <a:off x="0" y="658368"/>
-            <a:ext cx="5120640" cy="5833872"/>
+            <a:off x="5349240" y="2617506"/>
+            <a:ext cx="6659575" cy="2601397"/>
           </a:xfrm>
           <a:prstGeom prst="rect">
             <a:avLst/>
@@ -16550,14 +18668,14 @@
       </p:pic>
       <p:sp>
         <p:nvSpPr>
-          <p:cNvPr id="4" name="Text 1"/>
+          <p:cNvPr id="7" name="Text 4"/>
           <p:cNvSpPr/>
           <p:nvPr/>
         </p:nvSpPr>
         <p:spPr>
           <a:xfrm>
-            <a:off x="5349240" y="1005840"/>
-            <a:ext cx="6522415" cy="731520"/>
+            <a:off x="5349240" y="6089904"/>
+            <a:ext cx="6659575" cy="347472"/>
           </a:xfrm>
           <a:prstGeom prst="rect">
             <a:avLst/>
@@ -16566,68 +18684,24 @@
           <a:ln/>
         </p:spPr>
         <p:txBody>
-          <a:bodyPr wrap="square" lIns="0" tIns="0" rIns="0" bIns="0" rtlCol="0" anchor="ctr">
-            <a:normAutofit/>
-          </a:bodyPr>
+          <a:bodyPr wrap="square" lIns="0" tIns="0" rIns="0" bIns="0" rtlCol="0" anchor="ctr"/>
           <a:lstStyle/>
           <a:p>
             <a:pPr algn="ctr" indent="0" marL="0">
               <a:buNone/>
             </a:pPr>
             <a:r>
-              <a:rPr lang="en-US" sz="3600" b="1" dirty="0">
-                <a:solidFill>
-                  <a:srgbClr val="990011"/>
+              <a:rPr lang="en-US" sz="1600" i="1" dirty="0">
+                <a:solidFill>
+                  <a:srgbClr val="555555"/>
                 </a:solidFill>
                 <a:latin typeface="Times New Roman" pitchFamily="34" charset="0"/>
                 <a:ea typeface="Times New Roman" pitchFamily="34" charset="-122"/>
                 <a:cs typeface="Times New Roman" pitchFamily="34" charset="-120"/>
               </a:rPr>
-              <a:t>Homework</a:t>
-            </a:r>
-            <a:endParaRPr lang="en-US" sz="3600" dirty="0"/>
-          </a:p>
-        </p:txBody>
-      </p:sp>
-      <p:sp>
-        <p:nvSpPr>
-          <p:cNvPr id="5" name="Text 2"/>
-          <p:cNvSpPr/>
-          <p:nvPr/>
-        </p:nvSpPr>
-        <p:spPr>
-          <a:xfrm>
-            <a:off x="5349240" y="1783080"/>
-            <a:ext cx="6522415" cy="4663440"/>
-          </a:xfrm>
-          <a:prstGeom prst="rect">
-            <a:avLst/>
-          </a:prstGeom>
-          <a:noFill/>
-          <a:ln/>
-        </p:spPr>
-        <p:txBody>
-          <a:bodyPr wrap="square" lIns="0" tIns="0" rIns="0" bIns="0" rtlCol="0" anchor="t"/>
-          <a:lstStyle/>
-          <a:p>
-            <a:pPr algn="l" indent="0" marL="0">
-              <a:spcAft>
-                <a:spcPts val="800"/>
-              </a:spcAft>
-              <a:buNone/>
-            </a:pPr>
-            <a:r>
-              <a:rPr lang="en-US" sz="4000" dirty="0">
-                <a:solidFill>
-                  <a:srgbClr val="111111"/>
-                </a:solidFill>
-                <a:latin typeface="Times New Roman" pitchFamily="34" charset="0"/>
-                <a:ea typeface="Times New Roman" pitchFamily="34" charset="-122"/>
-                <a:cs typeface="Times New Roman" pitchFamily="34" charset="-120"/>
-              </a:rPr>
-              <a:t>Give two causes of water scarcity.</a:t>
-            </a:r>
-            <a:endParaRPr lang="en-US" sz="4000" dirty="0"/>
+              <a:t>Illustration: crops dried by drought</a:t>
+            </a:r>
+            <a:endParaRPr lang="en-US" sz="1600" dirty="0"/>
           </a:p>
         </p:txBody>
       </p:sp>
@@ -16737,7 +18811,7 @@
                 <a:ea typeface="Calibri" pitchFamily="34" charset="-122"/>
                 <a:cs typeface="Calibri" pitchFamily="34" charset="-120"/>
               </a:rPr>
-              <a:t>NEXT LESSON</a:t>
+              <a:t>BOARD SUMMARY</a:t>
             </a:r>
             <a:endParaRPr lang="en-US" sz="1400" dirty="0"/>
           </a:p>
@@ -16760,7 +18834,7 @@
         <p:spPr>
           <a:xfrm>
             <a:off x="0" y="658368"/>
-            <a:ext cx="5120640" cy="5833872"/>
+            <a:ext cx="1463040" cy="5833872"/>
           </a:xfrm>
           <a:prstGeom prst="rect">
             <a:avLst/>
@@ -16775,8 +18849,8 @@
         </p:nvSpPr>
         <p:spPr>
           <a:xfrm>
-            <a:off x="5349240" y="1005840"/>
-            <a:ext cx="6522415" cy="731520"/>
+            <a:off x="1691640" y="1005840"/>
+            <a:ext cx="10180015" cy="731520"/>
           </a:xfrm>
           <a:prstGeom prst="rect">
             <a:avLst/>
@@ -16802,7 +18876,7 @@
                 <a:ea typeface="Times New Roman" pitchFamily="34" charset="-122"/>
                 <a:cs typeface="Times New Roman" pitchFamily="34" charset="-120"/>
               </a:rPr>
-              <a:t>Next Lesson</a:t>
+              <a:t>3. Desertification</a:t>
             </a:r>
             <a:endParaRPr lang="en-US" sz="3600" dirty="0"/>
           </a:p>
@@ -16816,8 +18890,8 @@
         </p:nvSpPr>
         <p:spPr>
           <a:xfrm>
-            <a:off x="5349240" y="1783080"/>
-            <a:ext cx="6522415" cy="4663440"/>
+            <a:off x="1691640" y="1737360"/>
+            <a:ext cx="10180015" cy="457200"/>
           </a:xfrm>
           <a:prstGeom prst="rect">
             <a:avLst/>
@@ -16829,14 +18903,53 @@
           <a:bodyPr wrap="square" lIns="0" tIns="0" rIns="0" bIns="0" rtlCol="0" anchor="ctr"/>
           <a:lstStyle/>
           <a:p>
-            <a:pPr algn="ctr" indent="0" marL="0">
+            <a:pPr algn="l" indent="0" marL="0">
+              <a:buNone/>
+            </a:pPr>
+            <a:r>
+              <a:rPr lang="en-US" sz="3200" b="1" dirty="0">
+                <a:solidFill>
+                  <a:srgbClr val="990011"/>
+                </a:solidFill>
+                <a:latin typeface="Times New Roman" pitchFamily="34" charset="0"/>
+                <a:ea typeface="Times New Roman" pitchFamily="34" charset="-122"/>
+                <a:cs typeface="Times New Roman" pitchFamily="34" charset="-120"/>
+              </a:rPr>
+              <a:t>B) Causes</a:t>
+            </a:r>
+            <a:endParaRPr lang="en-US" sz="3200" dirty="0"/>
+          </a:p>
+        </p:txBody>
+      </p:sp>
+      <p:sp>
+        <p:nvSpPr>
+          <p:cNvPr id="6" name="Text 3"/>
+          <p:cNvSpPr/>
+          <p:nvPr/>
+        </p:nvSpPr>
+        <p:spPr>
+          <a:xfrm>
+            <a:off x="1691640" y="2240280"/>
+            <a:ext cx="10180015" cy="4206240"/>
+          </a:xfrm>
+          <a:prstGeom prst="rect">
+            <a:avLst/>
+          </a:prstGeom>
+          <a:noFill/>
+          <a:ln/>
+        </p:spPr>
+        <p:txBody>
+          <a:bodyPr wrap="square" lIns="0" tIns="0" rIns="0" bIns="0" rtlCol="0" anchor="t"/>
+          <a:lstStyle/>
+          <a:p>
+            <a:pPr algn="l" indent="0" marL="0">
               <a:spcAft>
                 <a:spcPts val="800"/>
               </a:spcAft>
               <a:buNone/>
             </a:pPr>
             <a:r>
-              <a:rPr lang="en-US" sz="4000" b="1" dirty="0">
+              <a:rPr lang="en-US" sz="4000" i="1" dirty="0">
                 <a:solidFill>
                   <a:srgbClr val="111111"/>
                 </a:solidFill>
@@ -16844,12 +18957,12 @@
                 <a:ea typeface="Times New Roman" pitchFamily="34" charset="-122"/>
                 <a:cs typeface="Times New Roman" pitchFamily="34" charset="-120"/>
               </a:rPr>
-              <a:t>Our next lesson will be on:</a:t>
+              <a:t>Desertification is caused by the following factors:</a:t>
             </a:r>
             <a:endParaRPr lang="en-US" sz="4000" dirty="0"/>
           </a:p>
           <a:p>
-            <a:pPr algn="ctr" indent="0" marL="0">
+            <a:pPr algn="l" indent="0" marL="0">
               <a:spcAft>
                 <a:spcPts val="800"/>
               </a:spcAft>
@@ -16858,13 +18971,104 @@
             <a:r>
               <a:rPr lang="en-US" sz="4000" b="1" dirty="0">
                 <a:solidFill>
-                  <a:srgbClr val="990011"/>
+                  <a:srgbClr val="111111"/>
                 </a:solidFill>
                 <a:latin typeface="Times New Roman" pitchFamily="34" charset="0"/>
                 <a:ea typeface="Times New Roman" pitchFamily="34" charset="-122"/>
                 <a:cs typeface="Times New Roman" pitchFamily="34" charset="-120"/>
               </a:rPr>
-              <a:t>Lesson 42: Water Scarcity</a:t>
+              <a:t>Overgrazing: </a:t>
+            </a:r>
+            <a:pPr algn="l" indent="0" marL="0">
+              <a:spcAft>
+                <a:spcPts val="800"/>
+              </a:spcAft>
+              <a:buNone/>
+            </a:pPr>
+            <a:r>
+              <a:rPr lang="en-US" sz="4000" dirty="0">
+                <a:solidFill>
+                  <a:srgbClr val="111111"/>
+                </a:solidFill>
+                <a:latin typeface="Times New Roman" pitchFamily="34" charset="0"/>
+                <a:ea typeface="Times New Roman" pitchFamily="34" charset="-122"/>
+                <a:cs typeface="Times New Roman" pitchFamily="34" charset="-120"/>
+              </a:rPr>
+              <a:t>Too many animals eat all the grass.</a:t>
+            </a:r>
+            <a:endParaRPr lang="en-US" sz="4000" dirty="0"/>
+          </a:p>
+          <a:p>
+            <a:pPr algn="l" indent="0" marL="0">
+              <a:spcAft>
+                <a:spcPts val="800"/>
+              </a:spcAft>
+              <a:buNone/>
+            </a:pPr>
+            <a:r>
+              <a:rPr lang="en-US" sz="4000" b="1" dirty="0">
+                <a:solidFill>
+                  <a:srgbClr val="111111"/>
+                </a:solidFill>
+                <a:latin typeface="Times New Roman" pitchFamily="34" charset="0"/>
+                <a:ea typeface="Times New Roman" pitchFamily="34" charset="-122"/>
+                <a:cs typeface="Times New Roman" pitchFamily="34" charset="-120"/>
+              </a:rPr>
+              <a:t>Cutting trees: </a:t>
+            </a:r>
+            <a:pPr algn="l" indent="0" marL="0">
+              <a:spcAft>
+                <a:spcPts val="800"/>
+              </a:spcAft>
+              <a:buNone/>
+            </a:pPr>
+            <a:r>
+              <a:rPr lang="en-US" sz="4000" dirty="0">
+                <a:solidFill>
+                  <a:srgbClr val="111111"/>
+                </a:solidFill>
+                <a:latin typeface="Times New Roman" pitchFamily="34" charset="0"/>
+                <a:ea typeface="Times New Roman" pitchFamily="34" charset="-122"/>
+                <a:cs typeface="Times New Roman" pitchFamily="34" charset="-120"/>
+              </a:rPr>
+              <a:t>Trees are cut for firewood.</a:t>
+            </a:r>
+            <a:endParaRPr lang="en-US" sz="4000" dirty="0"/>
+          </a:p>
+          <a:p>
+            <a:pPr algn="l" indent="0" marL="0">
+              <a:spcAft>
+                <a:spcPts val="800"/>
+              </a:spcAft>
+              <a:buNone/>
+            </a:pPr>
+            <a:r>
+              <a:rPr lang="en-US" sz="4000" b="1" dirty="0">
+                <a:solidFill>
+                  <a:srgbClr val="111111"/>
+                </a:solidFill>
+                <a:latin typeface="Times New Roman" pitchFamily="34" charset="0"/>
+                <a:ea typeface="Times New Roman" pitchFamily="34" charset="-122"/>
+                <a:cs typeface="Times New Roman" pitchFamily="34" charset="-120"/>
+              </a:rPr>
+              <a:t>Bush fires: </a:t>
+            </a:r>
+            <a:pPr algn="l" indent="0" marL="0">
+              <a:spcAft>
+                <a:spcPts val="800"/>
+              </a:spcAft>
+              <a:buNone/>
+            </a:pPr>
+            <a:r>
+              <a:rPr lang="en-US" sz="4000" dirty="0">
+                <a:solidFill>
+                  <a:srgbClr val="111111"/>
+                </a:solidFill>
+                <a:latin typeface="Times New Roman" pitchFamily="34" charset="0"/>
+                <a:ea typeface="Times New Roman" pitchFamily="34" charset="-122"/>
+                <a:cs typeface="Times New Roman" pitchFamily="34" charset="-120"/>
+              </a:rPr>
+              <a:t>Fires destroy the plant cover.</a:t>
             </a:r>
             <a:endParaRPr lang="en-US" sz="4000" dirty="0"/>
           </a:p>
@@ -16976,22 +19180,46 @@
                 <a:ea typeface="Calibri" pitchFamily="34" charset="-122"/>
                 <a:cs typeface="Calibri" pitchFamily="34" charset="-120"/>
               </a:rPr>
-              <a:t>BILINGUAL GAME</a:t>
+              <a:t>BOARD SUMMARY</a:t>
             </a:r>
             <a:endParaRPr lang="en-US" sz="1400" dirty="0"/>
           </a:p>
         </p:txBody>
       </p:sp>
-      <p:sp>
-        <p:nvSpPr>
-          <p:cNvPr id="3" name="Text 1"/>
+      <p:pic>
+        <p:nvPicPr>
+          <p:cNvPr id="3" name="Image 0" descr="/home/claude/f4/img/minesec_sheet.png">    </p:cNvPr>
+          <p:cNvPicPr>
+            <a:picLocks noChangeAspect="1"/>
+          </p:cNvPicPr>
+          <p:nvPr/>
+        </p:nvPicPr>
+        <p:blipFill>
+          <a:blip r:embed="rId1"/>
+          <a:stretch>
+            <a:fillRect/>
+          </a:stretch>
+        </p:blipFill>
+        <p:spPr>
+          <a:xfrm>
+            <a:off x="0" y="658368"/>
+            <a:ext cx="5120640" cy="5833872"/>
+          </a:xfrm>
+          <a:prstGeom prst="rect">
+            <a:avLst/>
+          </a:prstGeom>
+        </p:spPr>
+      </p:pic>
+      <p:sp>
+        <p:nvSpPr>
+          <p:cNvPr id="4" name="Text 1"/>
           <p:cNvSpPr/>
           <p:nvPr/>
         </p:nvSpPr>
         <p:spPr>
           <a:xfrm>
-            <a:off x="457200" y="1005840"/>
-            <a:ext cx="11277295" cy="731520"/>
+            <a:off x="5349240" y="1005840"/>
+            <a:ext cx="6522415" cy="731520"/>
           </a:xfrm>
           <a:prstGeom prst="rect">
             <a:avLst/>
@@ -17000,7 +19228,9 @@
           <a:ln/>
         </p:spPr>
         <p:txBody>
-          <a:bodyPr wrap="square" lIns="0" tIns="0" rIns="0" bIns="0" rtlCol="0" anchor="ctr"/>
+          <a:bodyPr wrap="square" lIns="0" tIns="0" rIns="0" bIns="0" rtlCol="0" anchor="ctr">
+            <a:normAutofit/>
+          </a:bodyPr>
           <a:lstStyle/>
           <a:p>
             <a:pPr algn="ctr" indent="0" marL="0">
@@ -17015,6 +19245,3422 @@
                 <a:ea typeface="Times New Roman" pitchFamily="34" charset="-122"/>
                 <a:cs typeface="Times New Roman" pitchFamily="34" charset="-120"/>
               </a:rPr>
+              <a:t>3. Desertification</a:t>
+            </a:r>
+            <a:endParaRPr lang="en-US" sz="3600" dirty="0"/>
+          </a:p>
+        </p:txBody>
+      </p:sp>
+      <p:sp>
+        <p:nvSpPr>
+          <p:cNvPr id="5" name="Text 2"/>
+          <p:cNvSpPr/>
+          <p:nvPr/>
+        </p:nvSpPr>
+        <p:spPr>
+          <a:xfrm>
+            <a:off x="5349240" y="1737360"/>
+            <a:ext cx="6522415" cy="457200"/>
+          </a:xfrm>
+          <a:prstGeom prst="rect">
+            <a:avLst/>
+          </a:prstGeom>
+          <a:noFill/>
+          <a:ln/>
+        </p:spPr>
+        <p:txBody>
+          <a:bodyPr wrap="square" lIns="0" tIns="0" rIns="0" bIns="0" rtlCol="0" anchor="ctr"/>
+          <a:lstStyle/>
+          <a:p>
+            <a:pPr algn="l" indent="0" marL="0">
+              <a:buNone/>
+            </a:pPr>
+            <a:r>
+              <a:rPr lang="en-US" sz="3200" b="1" dirty="0">
+                <a:solidFill>
+                  <a:srgbClr val="990011"/>
+                </a:solidFill>
+                <a:latin typeface="Times New Roman" pitchFamily="34" charset="0"/>
+                <a:ea typeface="Times New Roman" pitchFamily="34" charset="-122"/>
+                <a:cs typeface="Times New Roman" pitchFamily="34" charset="-120"/>
+              </a:rPr>
+              <a:t>B) Causes (continued)</a:t>
+            </a:r>
+            <a:endParaRPr lang="en-US" sz="3200" dirty="0"/>
+          </a:p>
+        </p:txBody>
+      </p:sp>
+      <p:sp>
+        <p:nvSpPr>
+          <p:cNvPr id="6" name="Text 3"/>
+          <p:cNvSpPr/>
+          <p:nvPr/>
+        </p:nvSpPr>
+        <p:spPr>
+          <a:xfrm>
+            <a:off x="5349240" y="2240280"/>
+            <a:ext cx="6522415" cy="4206240"/>
+          </a:xfrm>
+          <a:prstGeom prst="rect">
+            <a:avLst/>
+          </a:prstGeom>
+          <a:noFill/>
+          <a:ln/>
+        </p:spPr>
+        <p:txBody>
+          <a:bodyPr wrap="square" lIns="0" tIns="0" rIns="0" bIns="0" rtlCol="0" anchor="t"/>
+          <a:lstStyle/>
+          <a:p>
+            <a:pPr algn="l" indent="0" marL="0">
+              <a:spcAft>
+                <a:spcPts val="800"/>
+              </a:spcAft>
+              <a:buNone/>
+            </a:pPr>
+            <a:r>
+              <a:rPr lang="en-US" sz="4000" b="1" dirty="0">
+                <a:solidFill>
+                  <a:srgbClr val="111111"/>
+                </a:solidFill>
+                <a:latin typeface="Times New Roman" pitchFamily="34" charset="0"/>
+                <a:ea typeface="Times New Roman" pitchFamily="34" charset="-122"/>
+                <a:cs typeface="Times New Roman" pitchFamily="34" charset="-120"/>
+              </a:rPr>
+              <a:t>Repeated droughts: </a:t>
+            </a:r>
+            <a:pPr algn="l" indent="0" marL="0">
+              <a:spcAft>
+                <a:spcPts val="800"/>
+              </a:spcAft>
+              <a:buNone/>
+            </a:pPr>
+            <a:r>
+              <a:rPr lang="en-US" sz="4000" dirty="0">
+                <a:solidFill>
+                  <a:srgbClr val="111111"/>
+                </a:solidFill>
+                <a:latin typeface="Times New Roman" pitchFamily="34" charset="0"/>
+                <a:ea typeface="Times New Roman" pitchFamily="34" charset="-122"/>
+                <a:cs typeface="Times New Roman" pitchFamily="34" charset="-120"/>
+              </a:rPr>
+              <a:t>Many dry years kill the vegetation.</a:t>
+            </a:r>
+            <a:endParaRPr lang="en-US" sz="4000" dirty="0"/>
+          </a:p>
+        </p:txBody>
+      </p:sp>
+      <p:sp>
+        <p:nvSpPr>
+          <p:cNvPr id="25" name="Slide Number Placeholder 0"/>
+          <p:cNvSpPr>
+            <a:spLocks noGrp="1"/>
+          </p:cNvSpPr>
+          <p:nvPr>
+            <p:ph type="sldNum" sz="quarter" idx="4294967295"/>
+          </p:nvPr>
+        </p:nvSpPr>
+        <p:spPr>
+          <a:xfrm>
+            <a:off x="27432" y="91440"/>
+            <a:ext cx="585216" cy="475488"/>
+          </a:xfrm>
+          <a:prstGeom prst="rect">
+            <a:avLst/>
+          </a:prstGeom>
+          <a:extLst>
+            <a:ext uri="{C572A759-6A51-4108-AA02-DFA0A04FC94B}">
+              <ma14:wrappingTextBoxFlag xmlns:ma14="http://schemas.microsoft.com/office/mac/drawingml/2011/main" val="0"/>
+            </a:ext>
+          </a:extLst>
+        </p:spPr>
+        <p:txBody>
+          <a:bodyPr/>
+          <a:lstStyle>
+            <a:lvl1pPr>
+              <a:defRPr sz="2000">
+                <a:solidFill>
+                  <a:srgbClr val="FFFFFF"/>
+                </a:solidFill>
+                <a:latin typeface="Calibri"/>
+                <a:ea typeface="Calibri"/>
+                <a:cs typeface="Calibri"/>
+              </a:defRPr>
+            </a:lvl1pPr>
+          </a:lstStyle>
+          <a:p>
+            <a:pPr algn="ctr"/>
+            <a:fld id="{F7021451-1387-4CA6-816F-3879F97B5CBC}" type="slidenum">
+              <a:rPr b="1" lang="en-US"/>
+              <a:t>47</a:t>
+            </a:fld>
+            <a:endParaRPr lang="en-US"/>
+          </a:p>
+        </p:txBody>
+      </p:sp>
+    </p:spTree>
+  </p:cSld>
+  <p:clrMapOvr>
+    <a:masterClrMapping/>
+  </p:clrMapOvr>
+</p:sld>
+</file>
+
+<file path=ppt/slides/slide48.xml><?xml version="1.0" encoding="utf-8"?>
+<p:sld xmlns:a="http://schemas.openxmlformats.org/drawingml/2006/main" xmlns:r="http://schemas.openxmlformats.org/officeDocument/2006/relationships" xmlns:p="http://schemas.openxmlformats.org/presentationml/2006/main">
+  <p:cSld name="Slide 48">
+    <p:spTree>
+      <p:nvGrpSpPr>
+        <p:cNvPr id="1" name=""/>
+        <p:cNvGrpSpPr/>
+        <p:nvPr/>
+      </p:nvGrpSpPr>
+      <p:grpSpPr>
+        <a:xfrm>
+          <a:off x="0" y="0"/>
+          <a:ext cx="0" cy="0"/>
+          <a:chOff x="0" y="0"/>
+          <a:chExt cx="0" cy="0"/>
+        </a:xfrm>
+      </p:grpSpPr>
+      <p:sp>
+        <p:nvSpPr>
+          <p:cNvPr id="2" name="Text 0"/>
+          <p:cNvSpPr/>
+          <p:nvPr/>
+        </p:nvSpPr>
+        <p:spPr>
+          <a:xfrm>
+            <a:off x="457200" y="713232"/>
+            <a:ext cx="11368735" cy="274320"/>
+          </a:xfrm>
+          <a:prstGeom prst="rect">
+            <a:avLst/>
+          </a:prstGeom>
+          <a:noFill/>
+          <a:ln/>
+        </p:spPr>
+        <p:txBody>
+          <a:bodyPr wrap="square" lIns="0" tIns="0" rIns="0" bIns="0" rtlCol="0" anchor="ctr"/>
+          <a:lstStyle/>
+          <a:p>
+            <a:pPr algn="r" indent="0" marL="0">
+              <a:buNone/>
+            </a:pPr>
+            <a:r>
+              <a:rPr lang="en-US" sz="1400" b="1" dirty="0">
+                <a:solidFill>
+                  <a:srgbClr val="1C3F6E"/>
+                </a:solidFill>
+                <a:latin typeface="Calibri" pitchFamily="34" charset="0"/>
+                <a:ea typeface="Calibri" pitchFamily="34" charset="-122"/>
+                <a:cs typeface="Calibri" pitchFamily="34" charset="-120"/>
+              </a:rPr>
+              <a:t>BOARD SUMMARY</a:t>
+            </a:r>
+            <a:endParaRPr lang="en-US" sz="1400" dirty="0"/>
+          </a:p>
+        </p:txBody>
+      </p:sp>
+      <p:pic>
+        <p:nvPicPr>
+          <p:cNvPr id="3" name="Image 0" descr="/home/claude/f4/img/minesec_sheet.png">    </p:cNvPr>
+          <p:cNvPicPr>
+            <a:picLocks noChangeAspect="1"/>
+          </p:cNvPicPr>
+          <p:nvPr/>
+        </p:nvPicPr>
+        <p:blipFill>
+          <a:blip r:embed="rId1"/>
+          <a:stretch>
+            <a:fillRect/>
+          </a:stretch>
+        </p:blipFill>
+        <p:spPr>
+          <a:xfrm>
+            <a:off x="0" y="658368"/>
+            <a:ext cx="1463040" cy="5833872"/>
+          </a:xfrm>
+          <a:prstGeom prst="rect">
+            <a:avLst/>
+          </a:prstGeom>
+        </p:spPr>
+      </p:pic>
+      <p:sp>
+        <p:nvSpPr>
+          <p:cNvPr id="4" name="Text 1"/>
+          <p:cNvSpPr/>
+          <p:nvPr/>
+        </p:nvSpPr>
+        <p:spPr>
+          <a:xfrm>
+            <a:off x="1691640" y="1005840"/>
+            <a:ext cx="10180015" cy="731520"/>
+          </a:xfrm>
+          <a:prstGeom prst="rect">
+            <a:avLst/>
+          </a:prstGeom>
+          <a:noFill/>
+          <a:ln/>
+        </p:spPr>
+        <p:txBody>
+          <a:bodyPr wrap="square" lIns="0" tIns="0" rIns="0" bIns="0" rtlCol="0" anchor="ctr">
+            <a:normAutofit/>
+          </a:bodyPr>
+          <a:lstStyle/>
+          <a:p>
+            <a:pPr algn="ctr" indent="0" marL="0">
+              <a:buNone/>
+            </a:pPr>
+            <a:r>
+              <a:rPr lang="en-US" sz="3600" b="1" dirty="0">
+                <a:solidFill>
+                  <a:srgbClr val="990011"/>
+                </a:solidFill>
+                <a:latin typeface="Times New Roman" pitchFamily="34" charset="0"/>
+                <a:ea typeface="Times New Roman" pitchFamily="34" charset="-122"/>
+                <a:cs typeface="Times New Roman" pitchFamily="34" charset="-120"/>
+              </a:rPr>
+              <a:t>3. Desertification</a:t>
+            </a:r>
+            <a:endParaRPr lang="en-US" sz="3600" dirty="0"/>
+          </a:p>
+        </p:txBody>
+      </p:sp>
+      <p:sp>
+        <p:nvSpPr>
+          <p:cNvPr id="5" name="Text 2"/>
+          <p:cNvSpPr/>
+          <p:nvPr/>
+        </p:nvSpPr>
+        <p:spPr>
+          <a:xfrm>
+            <a:off x="1691640" y="1737360"/>
+            <a:ext cx="10180015" cy="457200"/>
+          </a:xfrm>
+          <a:prstGeom prst="rect">
+            <a:avLst/>
+          </a:prstGeom>
+          <a:noFill/>
+          <a:ln/>
+        </p:spPr>
+        <p:txBody>
+          <a:bodyPr wrap="square" lIns="0" tIns="0" rIns="0" bIns="0" rtlCol="0" anchor="ctr"/>
+          <a:lstStyle/>
+          <a:p>
+            <a:pPr algn="l" indent="0" marL="0">
+              <a:buNone/>
+            </a:pPr>
+            <a:r>
+              <a:rPr lang="en-US" sz="3200" b="1" dirty="0">
+                <a:solidFill>
+                  <a:srgbClr val="990011"/>
+                </a:solidFill>
+                <a:latin typeface="Times New Roman" pitchFamily="34" charset="0"/>
+                <a:ea typeface="Times New Roman" pitchFamily="34" charset="-122"/>
+                <a:cs typeface="Times New Roman" pitchFamily="34" charset="-120"/>
+              </a:rPr>
+              <a:t>C) Effects</a:t>
+            </a:r>
+            <a:endParaRPr lang="en-US" sz="3200" dirty="0"/>
+          </a:p>
+        </p:txBody>
+      </p:sp>
+      <p:sp>
+        <p:nvSpPr>
+          <p:cNvPr id="6" name="Text 3"/>
+          <p:cNvSpPr/>
+          <p:nvPr/>
+        </p:nvSpPr>
+        <p:spPr>
+          <a:xfrm>
+            <a:off x="1691640" y="2240280"/>
+            <a:ext cx="10180015" cy="4206240"/>
+          </a:xfrm>
+          <a:prstGeom prst="rect">
+            <a:avLst/>
+          </a:prstGeom>
+          <a:noFill/>
+          <a:ln/>
+        </p:spPr>
+        <p:txBody>
+          <a:bodyPr wrap="square" lIns="0" tIns="0" rIns="0" bIns="0" rtlCol="0" anchor="t"/>
+          <a:lstStyle/>
+          <a:p>
+            <a:pPr algn="l" indent="0" marL="0">
+              <a:spcAft>
+                <a:spcPts val="800"/>
+              </a:spcAft>
+              <a:buNone/>
+            </a:pPr>
+            <a:r>
+              <a:rPr lang="en-US" sz="4000" i="1" dirty="0">
+                <a:solidFill>
+                  <a:srgbClr val="111111"/>
+                </a:solidFill>
+                <a:latin typeface="Times New Roman" pitchFamily="34" charset="0"/>
+                <a:ea typeface="Times New Roman" pitchFamily="34" charset="-122"/>
+                <a:cs typeface="Times New Roman" pitchFamily="34" charset="-120"/>
+              </a:rPr>
+              <a:t>Desertification has the following effects:</a:t>
+            </a:r>
+            <a:endParaRPr lang="en-US" sz="4000" dirty="0"/>
+          </a:p>
+          <a:p>
+            <a:pPr algn="l" indent="0" marL="0">
+              <a:spcAft>
+                <a:spcPts val="800"/>
+              </a:spcAft>
+              <a:buNone/>
+            </a:pPr>
+            <a:r>
+              <a:rPr lang="en-US" sz="4000" b="1" dirty="0">
+                <a:solidFill>
+                  <a:srgbClr val="111111"/>
+                </a:solidFill>
+                <a:latin typeface="Times New Roman" pitchFamily="34" charset="0"/>
+                <a:ea typeface="Times New Roman" pitchFamily="34" charset="-122"/>
+                <a:cs typeface="Times New Roman" pitchFamily="34" charset="-120"/>
+              </a:rPr>
+              <a:t>Poor soils: </a:t>
+            </a:r>
+            <a:pPr algn="l" indent="0" marL="0">
+              <a:spcAft>
+                <a:spcPts val="800"/>
+              </a:spcAft>
+              <a:buNone/>
+            </a:pPr>
+            <a:r>
+              <a:rPr lang="en-US" sz="4000" dirty="0">
+                <a:solidFill>
+                  <a:srgbClr val="111111"/>
+                </a:solidFill>
+                <a:latin typeface="Times New Roman" pitchFamily="34" charset="0"/>
+                <a:ea typeface="Times New Roman" pitchFamily="34" charset="-122"/>
+                <a:cs typeface="Times New Roman" pitchFamily="34" charset="-120"/>
+              </a:rPr>
+              <a:t>Soils lose their fertility.</a:t>
+            </a:r>
+            <a:endParaRPr lang="en-US" sz="4000" dirty="0"/>
+          </a:p>
+          <a:p>
+            <a:pPr algn="l" indent="0" marL="0">
+              <a:spcAft>
+                <a:spcPts val="800"/>
+              </a:spcAft>
+              <a:buNone/>
+            </a:pPr>
+            <a:r>
+              <a:rPr lang="en-US" sz="4000" b="1" dirty="0">
+                <a:solidFill>
+                  <a:srgbClr val="111111"/>
+                </a:solidFill>
+                <a:latin typeface="Times New Roman" pitchFamily="34" charset="0"/>
+                <a:ea typeface="Times New Roman" pitchFamily="34" charset="-122"/>
+                <a:cs typeface="Times New Roman" pitchFamily="34" charset="-120"/>
+              </a:rPr>
+              <a:t>Moving sand: </a:t>
+            </a:r>
+            <a:pPr algn="l" indent="0" marL="0">
+              <a:spcAft>
+                <a:spcPts val="800"/>
+              </a:spcAft>
+              <a:buNone/>
+            </a:pPr>
+            <a:r>
+              <a:rPr lang="en-US" sz="4000" dirty="0">
+                <a:solidFill>
+                  <a:srgbClr val="111111"/>
+                </a:solidFill>
+                <a:latin typeface="Times New Roman" pitchFamily="34" charset="0"/>
+                <a:ea typeface="Times New Roman" pitchFamily="34" charset="-122"/>
+                <a:cs typeface="Times New Roman" pitchFamily="34" charset="-120"/>
+              </a:rPr>
+              <a:t>Sand covers fields and roads.</a:t>
+            </a:r>
+            <a:endParaRPr lang="en-US" sz="4000" dirty="0"/>
+          </a:p>
+          <a:p>
+            <a:pPr algn="l" indent="0" marL="0">
+              <a:spcAft>
+                <a:spcPts val="800"/>
+              </a:spcAft>
+              <a:buNone/>
+            </a:pPr>
+            <a:r>
+              <a:rPr lang="en-US" sz="4000" b="1" dirty="0">
+                <a:solidFill>
+                  <a:srgbClr val="111111"/>
+                </a:solidFill>
+                <a:latin typeface="Times New Roman" pitchFamily="34" charset="0"/>
+                <a:ea typeface="Times New Roman" pitchFamily="34" charset="-122"/>
+                <a:cs typeface="Times New Roman" pitchFamily="34" charset="-120"/>
+              </a:rPr>
+              <a:t>Water shortage: </a:t>
+            </a:r>
+            <a:pPr algn="l" indent="0" marL="0">
+              <a:spcAft>
+                <a:spcPts val="800"/>
+              </a:spcAft>
+              <a:buNone/>
+            </a:pPr>
+            <a:r>
+              <a:rPr lang="en-US" sz="4000" dirty="0">
+                <a:solidFill>
+                  <a:srgbClr val="111111"/>
+                </a:solidFill>
+                <a:latin typeface="Times New Roman" pitchFamily="34" charset="0"/>
+                <a:ea typeface="Times New Roman" pitchFamily="34" charset="-122"/>
+                <a:cs typeface="Times New Roman" pitchFamily="34" charset="-120"/>
+              </a:rPr>
+              <a:t>Water becomes scarce.</a:t>
+            </a:r>
+            <a:endParaRPr lang="en-US" sz="4000" dirty="0"/>
+          </a:p>
+          <a:p>
+            <a:pPr algn="l" indent="0" marL="0">
+              <a:spcAft>
+                <a:spcPts val="800"/>
+              </a:spcAft>
+              <a:buNone/>
+            </a:pPr>
+            <a:r>
+              <a:rPr lang="en-US" sz="4000" b="1" dirty="0">
+                <a:solidFill>
+                  <a:srgbClr val="111111"/>
+                </a:solidFill>
+                <a:latin typeface="Times New Roman" pitchFamily="34" charset="0"/>
+                <a:ea typeface="Times New Roman" pitchFamily="34" charset="-122"/>
+                <a:cs typeface="Times New Roman" pitchFamily="34" charset="-120"/>
+              </a:rPr>
+              <a:t>Migration: </a:t>
+            </a:r>
+            <a:pPr algn="l" indent="0" marL="0">
+              <a:spcAft>
+                <a:spcPts val="800"/>
+              </a:spcAft>
+              <a:buNone/>
+            </a:pPr>
+            <a:r>
+              <a:rPr lang="en-US" sz="4000" dirty="0">
+                <a:solidFill>
+                  <a:srgbClr val="111111"/>
+                </a:solidFill>
+                <a:latin typeface="Times New Roman" pitchFamily="34" charset="0"/>
+                <a:ea typeface="Times New Roman" pitchFamily="34" charset="-122"/>
+                <a:cs typeface="Times New Roman" pitchFamily="34" charset="-120"/>
+              </a:rPr>
+              <a:t>People leave the area.</a:t>
+            </a:r>
+            <a:endParaRPr lang="en-US" sz="4000" dirty="0"/>
+          </a:p>
+        </p:txBody>
+      </p:sp>
+      <p:sp>
+        <p:nvSpPr>
+          <p:cNvPr id="25" name="Slide Number Placeholder 0"/>
+          <p:cNvSpPr>
+            <a:spLocks noGrp="1"/>
+          </p:cNvSpPr>
+          <p:nvPr>
+            <p:ph type="sldNum" sz="quarter" idx="4294967295"/>
+          </p:nvPr>
+        </p:nvSpPr>
+        <p:spPr>
+          <a:xfrm>
+            <a:off x="27432" y="91440"/>
+            <a:ext cx="585216" cy="475488"/>
+          </a:xfrm>
+          <a:prstGeom prst="rect">
+            <a:avLst/>
+          </a:prstGeom>
+          <a:extLst>
+            <a:ext uri="{C572A759-6A51-4108-AA02-DFA0A04FC94B}">
+              <ma14:wrappingTextBoxFlag xmlns:ma14="http://schemas.microsoft.com/office/mac/drawingml/2011/main" val="0"/>
+            </a:ext>
+          </a:extLst>
+        </p:spPr>
+        <p:txBody>
+          <a:bodyPr/>
+          <a:lstStyle>
+            <a:lvl1pPr>
+              <a:defRPr sz="2000">
+                <a:solidFill>
+                  <a:srgbClr val="FFFFFF"/>
+                </a:solidFill>
+                <a:latin typeface="Calibri"/>
+                <a:ea typeface="Calibri"/>
+                <a:cs typeface="Calibri"/>
+              </a:defRPr>
+            </a:lvl1pPr>
+          </a:lstStyle>
+          <a:p>
+            <a:pPr algn="ctr"/>
+            <a:fld id="{F7021451-1387-4CA6-816F-3879F97B5CBC}" type="slidenum">
+              <a:rPr b="1" lang="en-US"/>
+              <a:t>48</a:t>
+            </a:fld>
+            <a:endParaRPr lang="en-US"/>
+          </a:p>
+        </p:txBody>
+      </p:sp>
+    </p:spTree>
+  </p:cSld>
+  <p:clrMapOvr>
+    <a:masterClrMapping/>
+  </p:clrMapOvr>
+</p:sld>
+</file>
+
+<file path=ppt/slides/slide49.xml><?xml version="1.0" encoding="utf-8"?>
+<p:sld xmlns:a="http://schemas.openxmlformats.org/drawingml/2006/main" xmlns:r="http://schemas.openxmlformats.org/officeDocument/2006/relationships" xmlns:p="http://schemas.openxmlformats.org/presentationml/2006/main">
+  <p:cSld name="Slide 49">
+    <p:spTree>
+      <p:nvGrpSpPr>
+        <p:cNvPr id="1" name=""/>
+        <p:cNvGrpSpPr/>
+        <p:nvPr/>
+      </p:nvGrpSpPr>
+      <p:grpSpPr>
+        <a:xfrm>
+          <a:off x="0" y="0"/>
+          <a:ext cx="0" cy="0"/>
+          <a:chOff x="0" y="0"/>
+          <a:chExt cx="0" cy="0"/>
+        </a:xfrm>
+      </p:grpSpPr>
+      <p:sp>
+        <p:nvSpPr>
+          <p:cNvPr id="2" name="Text 0"/>
+          <p:cNvSpPr/>
+          <p:nvPr/>
+        </p:nvSpPr>
+        <p:spPr>
+          <a:xfrm>
+            <a:off x="457200" y="713232"/>
+            <a:ext cx="11368735" cy="274320"/>
+          </a:xfrm>
+          <a:prstGeom prst="rect">
+            <a:avLst/>
+          </a:prstGeom>
+          <a:noFill/>
+          <a:ln/>
+        </p:spPr>
+        <p:txBody>
+          <a:bodyPr wrap="square" lIns="0" tIns="0" rIns="0" bIns="0" rtlCol="0" anchor="ctr"/>
+          <a:lstStyle/>
+          <a:p>
+            <a:pPr algn="r" indent="0" marL="0">
+              <a:buNone/>
+            </a:pPr>
+            <a:r>
+              <a:rPr lang="en-US" sz="1400" b="1" dirty="0">
+                <a:solidFill>
+                  <a:srgbClr val="1C3F6E"/>
+                </a:solidFill>
+                <a:latin typeface="Calibri" pitchFamily="34" charset="0"/>
+                <a:ea typeface="Calibri" pitchFamily="34" charset="-122"/>
+                <a:cs typeface="Calibri" pitchFamily="34" charset="-120"/>
+              </a:rPr>
+              <a:t>BOARD SUMMARY</a:t>
+            </a:r>
+            <a:endParaRPr lang="en-US" sz="1400" dirty="0"/>
+          </a:p>
+        </p:txBody>
+      </p:sp>
+      <p:pic>
+        <p:nvPicPr>
+          <p:cNvPr id="3" name="Image 0" descr="/home/claude/f4/img/minesec_sheet.png">    </p:cNvPr>
+          <p:cNvPicPr>
+            <a:picLocks noChangeAspect="1"/>
+          </p:cNvPicPr>
+          <p:nvPr/>
+        </p:nvPicPr>
+        <p:blipFill>
+          <a:blip r:embed="rId1"/>
+          <a:stretch>
+            <a:fillRect/>
+          </a:stretch>
+        </p:blipFill>
+        <p:spPr>
+          <a:xfrm>
+            <a:off x="0" y="658368"/>
+            <a:ext cx="5120640" cy="5833872"/>
+          </a:xfrm>
+          <a:prstGeom prst="rect">
+            <a:avLst/>
+          </a:prstGeom>
+        </p:spPr>
+      </p:pic>
+      <p:sp>
+        <p:nvSpPr>
+          <p:cNvPr id="4" name="Text 1"/>
+          <p:cNvSpPr/>
+          <p:nvPr/>
+        </p:nvSpPr>
+        <p:spPr>
+          <a:xfrm>
+            <a:off x="5349240" y="1005840"/>
+            <a:ext cx="6522415" cy="731520"/>
+          </a:xfrm>
+          <a:prstGeom prst="rect">
+            <a:avLst/>
+          </a:prstGeom>
+          <a:noFill/>
+          <a:ln/>
+        </p:spPr>
+        <p:txBody>
+          <a:bodyPr wrap="square" lIns="0" tIns="0" rIns="0" bIns="0" rtlCol="0" anchor="ctr">
+            <a:normAutofit/>
+          </a:bodyPr>
+          <a:lstStyle/>
+          <a:p>
+            <a:pPr algn="ctr" indent="0" marL="0">
+              <a:buNone/>
+            </a:pPr>
+            <a:r>
+              <a:rPr lang="en-US" sz="3600" b="1" dirty="0">
+                <a:solidFill>
+                  <a:srgbClr val="990011"/>
+                </a:solidFill>
+                <a:latin typeface="Times New Roman" pitchFamily="34" charset="0"/>
+                <a:ea typeface="Times New Roman" pitchFamily="34" charset="-122"/>
+                <a:cs typeface="Times New Roman" pitchFamily="34" charset="-120"/>
+              </a:rPr>
+              <a:t>3. Desertification</a:t>
+            </a:r>
+            <a:endParaRPr lang="en-US" sz="3600" dirty="0"/>
+          </a:p>
+        </p:txBody>
+      </p:sp>
+      <p:sp>
+        <p:nvSpPr>
+          <p:cNvPr id="5" name="Text 2"/>
+          <p:cNvSpPr/>
+          <p:nvPr/>
+        </p:nvSpPr>
+        <p:spPr>
+          <a:xfrm>
+            <a:off x="5349240" y="1737360"/>
+            <a:ext cx="6522415" cy="457200"/>
+          </a:xfrm>
+          <a:prstGeom prst="rect">
+            <a:avLst/>
+          </a:prstGeom>
+          <a:noFill/>
+          <a:ln/>
+        </p:spPr>
+        <p:txBody>
+          <a:bodyPr wrap="square" lIns="0" tIns="0" rIns="0" bIns="0" rtlCol="0" anchor="ctr"/>
+          <a:lstStyle/>
+          <a:p>
+            <a:pPr algn="l" indent="0" marL="0">
+              <a:buNone/>
+            </a:pPr>
+            <a:r>
+              <a:rPr lang="en-US" sz="3200" b="1" dirty="0">
+                <a:solidFill>
+                  <a:srgbClr val="990011"/>
+                </a:solidFill>
+                <a:latin typeface="Times New Roman" pitchFamily="34" charset="0"/>
+                <a:ea typeface="Times New Roman" pitchFamily="34" charset="-122"/>
+                <a:cs typeface="Times New Roman" pitchFamily="34" charset="-120"/>
+              </a:rPr>
+              <a:t>D) Adaptation and Mitigation</a:t>
+            </a:r>
+            <a:endParaRPr lang="en-US" sz="3200" dirty="0"/>
+          </a:p>
+        </p:txBody>
+      </p:sp>
+      <p:sp>
+        <p:nvSpPr>
+          <p:cNvPr id="6" name="Text 3"/>
+          <p:cNvSpPr/>
+          <p:nvPr/>
+        </p:nvSpPr>
+        <p:spPr>
+          <a:xfrm>
+            <a:off x="5349240" y="2240280"/>
+            <a:ext cx="6522415" cy="4206240"/>
+          </a:xfrm>
+          <a:prstGeom prst="rect">
+            <a:avLst/>
+          </a:prstGeom>
+          <a:noFill/>
+          <a:ln/>
+        </p:spPr>
+        <p:txBody>
+          <a:bodyPr wrap="square" lIns="0" tIns="0" rIns="0" bIns="0" rtlCol="0" anchor="t"/>
+          <a:lstStyle/>
+          <a:p>
+            <a:pPr algn="l" indent="0" marL="0">
+              <a:spcAft>
+                <a:spcPts val="800"/>
+              </a:spcAft>
+              <a:buNone/>
+            </a:pPr>
+            <a:r>
+              <a:rPr lang="en-US" sz="4000" i="1" dirty="0">
+                <a:solidFill>
+                  <a:srgbClr val="111111"/>
+                </a:solidFill>
+                <a:latin typeface="Times New Roman" pitchFamily="34" charset="0"/>
+                <a:ea typeface="Times New Roman" pitchFamily="34" charset="-122"/>
+                <a:cs typeface="Times New Roman" pitchFamily="34" charset="-120"/>
+              </a:rPr>
+              <a:t>Desertification is stopped by the following measures:</a:t>
+            </a:r>
+            <a:endParaRPr lang="en-US" sz="4000" dirty="0"/>
+          </a:p>
+          <a:p>
+            <a:pPr algn="l" indent="0" marL="0">
+              <a:spcAft>
+                <a:spcPts val="800"/>
+              </a:spcAft>
+              <a:buNone/>
+            </a:pPr>
+            <a:r>
+              <a:rPr lang="en-US" sz="4000" b="1" dirty="0">
+                <a:solidFill>
+                  <a:srgbClr val="111111"/>
+                </a:solidFill>
+                <a:latin typeface="Times New Roman" pitchFamily="34" charset="0"/>
+                <a:ea typeface="Times New Roman" pitchFamily="34" charset="-122"/>
+                <a:cs typeface="Times New Roman" pitchFamily="34" charset="-120"/>
+              </a:rPr>
+              <a:t>Tree planting: </a:t>
+            </a:r>
+            <a:pPr algn="l" indent="0" marL="0">
+              <a:spcAft>
+                <a:spcPts val="800"/>
+              </a:spcAft>
+              <a:buNone/>
+            </a:pPr>
+            <a:r>
+              <a:rPr lang="en-US" sz="4000" dirty="0">
+                <a:solidFill>
+                  <a:srgbClr val="111111"/>
+                </a:solidFill>
+                <a:latin typeface="Times New Roman" pitchFamily="34" charset="0"/>
+                <a:ea typeface="Times New Roman" pitchFamily="34" charset="-122"/>
+                <a:cs typeface="Times New Roman" pitchFamily="34" charset="-120"/>
+              </a:rPr>
+              <a:t>Operation Sahel Vert and the Great Green Wall plant trees.</a:t>
+            </a:r>
+            <a:endParaRPr lang="en-US" sz="4000" dirty="0"/>
+          </a:p>
+        </p:txBody>
+      </p:sp>
+      <p:sp>
+        <p:nvSpPr>
+          <p:cNvPr id="25" name="Slide Number Placeholder 0"/>
+          <p:cNvSpPr>
+            <a:spLocks noGrp="1"/>
+          </p:cNvSpPr>
+          <p:nvPr>
+            <p:ph type="sldNum" sz="quarter" idx="4294967295"/>
+          </p:nvPr>
+        </p:nvSpPr>
+        <p:spPr>
+          <a:xfrm>
+            <a:off x="27432" y="91440"/>
+            <a:ext cx="585216" cy="475488"/>
+          </a:xfrm>
+          <a:prstGeom prst="rect">
+            <a:avLst/>
+          </a:prstGeom>
+          <a:extLst>
+            <a:ext uri="{C572A759-6A51-4108-AA02-DFA0A04FC94B}">
+              <ma14:wrappingTextBoxFlag xmlns:ma14="http://schemas.microsoft.com/office/mac/drawingml/2011/main" val="0"/>
+            </a:ext>
+          </a:extLst>
+        </p:spPr>
+        <p:txBody>
+          <a:bodyPr/>
+          <a:lstStyle>
+            <a:lvl1pPr>
+              <a:defRPr sz="2000">
+                <a:solidFill>
+                  <a:srgbClr val="FFFFFF"/>
+                </a:solidFill>
+                <a:latin typeface="Calibri"/>
+                <a:ea typeface="Calibri"/>
+                <a:cs typeface="Calibri"/>
+              </a:defRPr>
+            </a:lvl1pPr>
+          </a:lstStyle>
+          <a:p>
+            <a:pPr algn="ctr"/>
+            <a:fld id="{F7021451-1387-4CA6-816F-3879F97B5CBC}" type="slidenum">
+              <a:rPr b="1" lang="en-US"/>
+              <a:t>49</a:t>
+            </a:fld>
+            <a:endParaRPr lang="en-US"/>
+          </a:p>
+        </p:txBody>
+      </p:sp>
+    </p:spTree>
+  </p:cSld>
+  <p:clrMapOvr>
+    <a:masterClrMapping/>
+  </p:clrMapOvr>
+</p:sld>
+</file>
+
+<file path=ppt/slides/slide5.xml><?xml version="1.0" encoding="utf-8"?>
+<p:sld xmlns:a="http://schemas.openxmlformats.org/drawingml/2006/main" xmlns:r="http://schemas.openxmlformats.org/officeDocument/2006/relationships" xmlns:p="http://schemas.openxmlformats.org/presentationml/2006/main">
+  <p:cSld name="Slide 5">
+    <p:spTree>
+      <p:nvGrpSpPr>
+        <p:cNvPr id="1" name=""/>
+        <p:cNvGrpSpPr/>
+        <p:nvPr/>
+      </p:nvGrpSpPr>
+      <p:grpSpPr>
+        <a:xfrm>
+          <a:off x="0" y="0"/>
+          <a:ext cx="0" cy="0"/>
+          <a:chOff x="0" y="0"/>
+          <a:chExt cx="0" cy="0"/>
+        </a:xfrm>
+      </p:grpSpPr>
+      <p:sp>
+        <p:nvSpPr>
+          <p:cNvPr id="2" name="Text 0"/>
+          <p:cNvSpPr/>
+          <p:nvPr/>
+        </p:nvSpPr>
+        <p:spPr>
+          <a:xfrm>
+            <a:off x="457200" y="713232"/>
+            <a:ext cx="11368735" cy="274320"/>
+          </a:xfrm>
+          <a:prstGeom prst="rect">
+            <a:avLst/>
+          </a:prstGeom>
+          <a:noFill/>
+          <a:ln/>
+        </p:spPr>
+        <p:txBody>
+          <a:bodyPr wrap="square" lIns="0" tIns="0" rIns="0" bIns="0" rtlCol="0" anchor="ctr"/>
+          <a:lstStyle/>
+          <a:p>
+            <a:pPr algn="r" indent="0" marL="0">
+              <a:buNone/>
+            </a:pPr>
+            <a:r>
+              <a:rPr lang="en-US" sz="1400" b="1" dirty="0">
+                <a:solidFill>
+                  <a:srgbClr val="1C3F6E"/>
+                </a:solidFill>
+                <a:latin typeface="Calibri" pitchFamily="34" charset="0"/>
+                <a:ea typeface="Calibri" pitchFamily="34" charset="-122"/>
+                <a:cs typeface="Calibri" pitchFamily="34" charset="-120"/>
+              </a:rPr>
+              <a:t>HOMEWORK CORRECTION</a:t>
+            </a:r>
+            <a:endParaRPr lang="en-US" sz="1400" dirty="0"/>
+          </a:p>
+        </p:txBody>
+      </p:sp>
+      <p:pic>
+        <p:nvPicPr>
+          <p:cNvPr id="3" name="Image 0" descr="/home/claude/f4/img/minesec_sheet.png">    </p:cNvPr>
+          <p:cNvPicPr>
+            <a:picLocks noChangeAspect="1"/>
+          </p:cNvPicPr>
+          <p:nvPr/>
+        </p:nvPicPr>
+        <p:blipFill>
+          <a:blip r:embed="rId1"/>
+          <a:stretch>
+            <a:fillRect/>
+          </a:stretch>
+        </p:blipFill>
+        <p:spPr>
+          <a:xfrm>
+            <a:off x="0" y="658368"/>
+            <a:ext cx="5120640" cy="5833872"/>
+          </a:xfrm>
+          <a:prstGeom prst="rect">
+            <a:avLst/>
+          </a:prstGeom>
+        </p:spPr>
+      </p:pic>
+      <p:sp>
+        <p:nvSpPr>
+          <p:cNvPr id="4" name="Text 1"/>
+          <p:cNvSpPr/>
+          <p:nvPr/>
+        </p:nvSpPr>
+        <p:spPr>
+          <a:xfrm>
+            <a:off x="5349240" y="1005840"/>
+            <a:ext cx="6522415" cy="731520"/>
+          </a:xfrm>
+          <a:prstGeom prst="rect">
+            <a:avLst/>
+          </a:prstGeom>
+          <a:noFill/>
+          <a:ln/>
+        </p:spPr>
+        <p:txBody>
+          <a:bodyPr wrap="square" lIns="0" tIns="0" rIns="0" bIns="0" rtlCol="0" anchor="ctr">
+            <a:normAutofit/>
+          </a:bodyPr>
+          <a:lstStyle/>
+          <a:p>
+            <a:pPr algn="ctr" indent="0" marL="0">
+              <a:buNone/>
+            </a:pPr>
+            <a:r>
+              <a:rPr lang="en-US" sz="3600" b="1" dirty="0">
+                <a:solidFill>
+                  <a:srgbClr val="990011"/>
+                </a:solidFill>
+                <a:latin typeface="Times New Roman" pitchFamily="34" charset="0"/>
+                <a:ea typeface="Times New Roman" pitchFamily="34" charset="-122"/>
+                <a:cs typeface="Times New Roman" pitchFamily="34" charset="-120"/>
+              </a:rPr>
+              <a:t>Correction: Possible Answer</a:t>
+            </a:r>
+            <a:endParaRPr lang="en-US" sz="3600" dirty="0"/>
+          </a:p>
+        </p:txBody>
+      </p:sp>
+      <p:sp>
+        <p:nvSpPr>
+          <p:cNvPr id="5" name="Text 2"/>
+          <p:cNvSpPr/>
+          <p:nvPr/>
+        </p:nvSpPr>
+        <p:spPr>
+          <a:xfrm>
+            <a:off x="5349240" y="1783080"/>
+            <a:ext cx="6522415" cy="4663440"/>
+          </a:xfrm>
+          <a:prstGeom prst="rect">
+            <a:avLst/>
+          </a:prstGeom>
+          <a:noFill/>
+          <a:ln/>
+        </p:spPr>
+        <p:txBody>
+          <a:bodyPr wrap="square" lIns="0" tIns="0" rIns="0" bIns="0" rtlCol="0" anchor="t"/>
+          <a:lstStyle/>
+          <a:p>
+            <a:pPr algn="l" indent="0" marL="0">
+              <a:spcAft>
+                <a:spcPts val="800"/>
+              </a:spcAft>
+              <a:buNone/>
+            </a:pPr>
+            <a:r>
+              <a:rPr lang="en-US" sz="4000" dirty="0">
+                <a:solidFill>
+                  <a:srgbClr val="111111"/>
+                </a:solidFill>
+                <a:latin typeface="Times New Roman" pitchFamily="34" charset="0"/>
+                <a:ea typeface="Times New Roman" pitchFamily="34" charset="-122"/>
+                <a:cs typeface="Times New Roman" pitchFamily="34" charset="-120"/>
+              </a:rPr>
+              <a:t>It is the lasting spread of desert conditions into dry lands.</a:t>
+            </a:r>
+            <a:endParaRPr lang="en-US" sz="4000" dirty="0"/>
+          </a:p>
+        </p:txBody>
+      </p:sp>
+      <p:sp>
+        <p:nvSpPr>
+          <p:cNvPr id="25" name="Slide Number Placeholder 0"/>
+          <p:cNvSpPr>
+            <a:spLocks noGrp="1"/>
+          </p:cNvSpPr>
+          <p:nvPr>
+            <p:ph type="sldNum" sz="quarter" idx="4294967295"/>
+          </p:nvPr>
+        </p:nvSpPr>
+        <p:spPr>
+          <a:xfrm>
+            <a:off x="27432" y="91440"/>
+            <a:ext cx="585216" cy="475488"/>
+          </a:xfrm>
+          <a:prstGeom prst="rect">
+            <a:avLst/>
+          </a:prstGeom>
+          <a:extLst>
+            <a:ext uri="{C572A759-6A51-4108-AA02-DFA0A04FC94B}">
+              <ma14:wrappingTextBoxFlag xmlns:ma14="http://schemas.microsoft.com/office/mac/drawingml/2011/main" val="0"/>
+            </a:ext>
+          </a:extLst>
+        </p:spPr>
+        <p:txBody>
+          <a:bodyPr/>
+          <a:lstStyle>
+            <a:lvl1pPr>
+              <a:defRPr sz="2000">
+                <a:solidFill>
+                  <a:srgbClr val="FFFFFF"/>
+                </a:solidFill>
+                <a:latin typeface="Calibri"/>
+                <a:ea typeface="Calibri"/>
+                <a:cs typeface="Calibri"/>
+              </a:defRPr>
+            </a:lvl1pPr>
+          </a:lstStyle>
+          <a:p>
+            <a:pPr algn="ctr"/>
+            <a:fld id="{F7021451-1387-4CA6-816F-3879F97B5CBC}" type="slidenum">
+              <a:rPr b="1" lang="en-US"/>
+              <a:t>5</a:t>
+            </a:fld>
+            <a:endParaRPr lang="en-US"/>
+          </a:p>
+        </p:txBody>
+      </p:sp>
+    </p:spTree>
+  </p:cSld>
+  <p:clrMapOvr>
+    <a:masterClrMapping/>
+  </p:clrMapOvr>
+</p:sld>
+</file>
+
+<file path=ppt/slides/slide50.xml><?xml version="1.0" encoding="utf-8"?>
+<p:sld xmlns:a="http://schemas.openxmlformats.org/drawingml/2006/main" xmlns:r="http://schemas.openxmlformats.org/officeDocument/2006/relationships" xmlns:p="http://schemas.openxmlformats.org/presentationml/2006/main">
+  <p:cSld name="Slide 50">
+    <p:spTree>
+      <p:nvGrpSpPr>
+        <p:cNvPr id="1" name=""/>
+        <p:cNvGrpSpPr/>
+        <p:nvPr/>
+      </p:nvGrpSpPr>
+      <p:grpSpPr>
+        <a:xfrm>
+          <a:off x="0" y="0"/>
+          <a:ext cx="0" cy="0"/>
+          <a:chOff x="0" y="0"/>
+          <a:chExt cx="0" cy="0"/>
+        </a:xfrm>
+      </p:grpSpPr>
+      <p:sp>
+        <p:nvSpPr>
+          <p:cNvPr id="2" name="Text 0"/>
+          <p:cNvSpPr/>
+          <p:nvPr/>
+        </p:nvSpPr>
+        <p:spPr>
+          <a:xfrm>
+            <a:off x="457200" y="713232"/>
+            <a:ext cx="11368735" cy="274320"/>
+          </a:xfrm>
+          <a:prstGeom prst="rect">
+            <a:avLst/>
+          </a:prstGeom>
+          <a:noFill/>
+          <a:ln/>
+        </p:spPr>
+        <p:txBody>
+          <a:bodyPr wrap="square" lIns="0" tIns="0" rIns="0" bIns="0" rtlCol="0" anchor="ctr"/>
+          <a:lstStyle/>
+          <a:p>
+            <a:pPr algn="r" indent="0" marL="0">
+              <a:buNone/>
+            </a:pPr>
+            <a:r>
+              <a:rPr lang="en-US" sz="1400" b="1" dirty="0">
+                <a:solidFill>
+                  <a:srgbClr val="1C3F6E"/>
+                </a:solidFill>
+                <a:latin typeface="Calibri" pitchFamily="34" charset="0"/>
+                <a:ea typeface="Calibri" pitchFamily="34" charset="-122"/>
+                <a:cs typeface="Calibri" pitchFamily="34" charset="-120"/>
+              </a:rPr>
+              <a:t>BOARD SUMMARY</a:t>
+            </a:r>
+            <a:endParaRPr lang="en-US" sz="1400" dirty="0"/>
+          </a:p>
+        </p:txBody>
+      </p:sp>
+      <p:sp>
+        <p:nvSpPr>
+          <p:cNvPr id="3" name="Text 1"/>
+          <p:cNvSpPr/>
+          <p:nvPr/>
+        </p:nvSpPr>
+        <p:spPr>
+          <a:xfrm>
+            <a:off x="365760" y="1005840"/>
+            <a:ext cx="11460175" cy="731520"/>
+          </a:xfrm>
+          <a:prstGeom prst="rect">
+            <a:avLst/>
+          </a:prstGeom>
+          <a:noFill/>
+          <a:ln/>
+        </p:spPr>
+        <p:txBody>
+          <a:bodyPr wrap="square" lIns="0" tIns="0" rIns="0" bIns="0" rtlCol="0" anchor="ctr">
+            <a:normAutofit/>
+          </a:bodyPr>
+          <a:lstStyle/>
+          <a:p>
+            <a:pPr algn="ctr" indent="0" marL="0">
+              <a:buNone/>
+            </a:pPr>
+            <a:r>
+              <a:rPr lang="en-US" sz="3600" b="1" dirty="0">
+                <a:solidFill>
+                  <a:srgbClr val="990011"/>
+                </a:solidFill>
+                <a:latin typeface="Times New Roman" pitchFamily="34" charset="0"/>
+                <a:ea typeface="Times New Roman" pitchFamily="34" charset="-122"/>
+                <a:cs typeface="Times New Roman" pitchFamily="34" charset="-120"/>
+              </a:rPr>
+              <a:t>3. Desertification</a:t>
+            </a:r>
+            <a:endParaRPr lang="en-US" sz="3600" dirty="0"/>
+          </a:p>
+        </p:txBody>
+      </p:sp>
+      <p:sp>
+        <p:nvSpPr>
+          <p:cNvPr id="4" name="Text 2"/>
+          <p:cNvSpPr/>
+          <p:nvPr/>
+        </p:nvSpPr>
+        <p:spPr>
+          <a:xfrm>
+            <a:off x="365760" y="1737360"/>
+            <a:ext cx="5120640" cy="457200"/>
+          </a:xfrm>
+          <a:prstGeom prst="rect">
+            <a:avLst/>
+          </a:prstGeom>
+          <a:noFill/>
+          <a:ln/>
+        </p:spPr>
+        <p:txBody>
+          <a:bodyPr wrap="square" lIns="0" tIns="0" rIns="0" bIns="0" rtlCol="0" anchor="ctr">
+            <a:normAutofit/>
+          </a:bodyPr>
+          <a:lstStyle/>
+          <a:p>
+            <a:pPr algn="l" indent="0" marL="0">
+              <a:buNone/>
+            </a:pPr>
+            <a:r>
+              <a:rPr lang="en-US" sz="3000" b="1" dirty="0">
+                <a:solidFill>
+                  <a:srgbClr val="990011"/>
+                </a:solidFill>
+                <a:latin typeface="Times New Roman" pitchFamily="34" charset="0"/>
+                <a:ea typeface="Times New Roman" pitchFamily="34" charset="-122"/>
+                <a:cs typeface="Times New Roman" pitchFamily="34" charset="-120"/>
+              </a:rPr>
+              <a:t>D) Adaptation and Mitigation</a:t>
+            </a:r>
+            <a:endParaRPr lang="en-US" sz="3000" dirty="0"/>
+          </a:p>
+        </p:txBody>
+      </p:sp>
+      <p:sp>
+        <p:nvSpPr>
+          <p:cNvPr id="5" name="Text 3"/>
+          <p:cNvSpPr/>
+          <p:nvPr/>
+        </p:nvSpPr>
+        <p:spPr>
+          <a:xfrm>
+            <a:off x="365760" y="2240280"/>
+            <a:ext cx="4846320" cy="4160520"/>
+          </a:xfrm>
+          <a:prstGeom prst="rect">
+            <a:avLst/>
+          </a:prstGeom>
+          <a:noFill/>
+          <a:ln/>
+        </p:spPr>
+        <p:txBody>
+          <a:bodyPr wrap="square" lIns="0" tIns="0" rIns="0" bIns="0" rtlCol="0" anchor="t"/>
+          <a:lstStyle/>
+          <a:p>
+            <a:pPr algn="l" indent="0" marL="0">
+              <a:spcAft>
+                <a:spcPts val="800"/>
+              </a:spcAft>
+              <a:buNone/>
+            </a:pPr>
+            <a:r>
+              <a:rPr lang="en-US" sz="3600" b="1" dirty="0">
+                <a:solidFill>
+                  <a:srgbClr val="111111"/>
+                </a:solidFill>
+                <a:latin typeface="Times New Roman" pitchFamily="34" charset="0"/>
+                <a:ea typeface="Times New Roman" pitchFamily="34" charset="-122"/>
+                <a:cs typeface="Times New Roman" pitchFamily="34" charset="-120"/>
+              </a:rPr>
+              <a:t>Zaï pits: </a:t>
+            </a:r>
+            <a:pPr algn="l" indent="0" marL="0">
+              <a:spcAft>
+                <a:spcPts val="800"/>
+              </a:spcAft>
+              <a:buNone/>
+            </a:pPr>
+            <a:r>
+              <a:rPr lang="en-US" sz="3600" dirty="0">
+                <a:solidFill>
+                  <a:srgbClr val="111111"/>
+                </a:solidFill>
+                <a:latin typeface="Times New Roman" pitchFamily="34" charset="0"/>
+                <a:ea typeface="Times New Roman" pitchFamily="34" charset="-122"/>
+                <a:cs typeface="Times New Roman" pitchFamily="34" charset="-120"/>
+              </a:rPr>
+              <a:t>Small pits keep water and manure near the plants.</a:t>
+            </a:r>
+            <a:endParaRPr lang="en-US" sz="3600" dirty="0"/>
+          </a:p>
+        </p:txBody>
+      </p:sp>
+      <p:pic>
+        <p:nvPicPr>
+          <p:cNvPr id="6" name="Image 0" descr="/home/claude/f4/img/v2/f4_zai.jpg">    </p:cNvPr>
+          <p:cNvPicPr>
+            <a:picLocks noChangeAspect="1"/>
+          </p:cNvPicPr>
+          <p:nvPr/>
+        </p:nvPicPr>
+        <p:blipFill>
+          <a:blip r:embed="rId1"/>
+          <a:stretch>
+            <a:fillRect/>
+          </a:stretch>
+        </p:blipFill>
+        <p:spPr>
+          <a:xfrm>
+            <a:off x="5349240" y="2071212"/>
+            <a:ext cx="6659575" cy="3693983"/>
+          </a:xfrm>
+          <a:prstGeom prst="rect">
+            <a:avLst/>
+          </a:prstGeom>
+        </p:spPr>
+      </p:pic>
+      <p:sp>
+        <p:nvSpPr>
+          <p:cNvPr id="7" name="Text 4"/>
+          <p:cNvSpPr/>
+          <p:nvPr/>
+        </p:nvSpPr>
+        <p:spPr>
+          <a:xfrm>
+            <a:off x="5349240" y="6089904"/>
+            <a:ext cx="6659575" cy="347472"/>
+          </a:xfrm>
+          <a:prstGeom prst="rect">
+            <a:avLst/>
+          </a:prstGeom>
+          <a:noFill/>
+          <a:ln/>
+        </p:spPr>
+        <p:txBody>
+          <a:bodyPr wrap="square" lIns="0" tIns="0" rIns="0" bIns="0" rtlCol="0" anchor="ctr"/>
+          <a:lstStyle/>
+          <a:p>
+            <a:pPr algn="ctr" indent="0" marL="0">
+              <a:buNone/>
+            </a:pPr>
+            <a:r>
+              <a:rPr lang="en-US" sz="1600" i="1" dirty="0">
+                <a:solidFill>
+                  <a:srgbClr val="555555"/>
+                </a:solidFill>
+                <a:latin typeface="Times New Roman" pitchFamily="34" charset="0"/>
+                <a:ea typeface="Times New Roman" pitchFamily="34" charset="-122"/>
+                <a:cs typeface="Times New Roman" pitchFamily="34" charset="-120"/>
+              </a:rPr>
+              <a:t>Illustration: zaï planting pits</a:t>
+            </a:r>
+            <a:endParaRPr lang="en-US" sz="1600" dirty="0"/>
+          </a:p>
+        </p:txBody>
+      </p:sp>
+      <p:sp>
+        <p:nvSpPr>
+          <p:cNvPr id="25" name="Slide Number Placeholder 0"/>
+          <p:cNvSpPr>
+            <a:spLocks noGrp="1"/>
+          </p:cNvSpPr>
+          <p:nvPr>
+            <p:ph type="sldNum" sz="quarter" idx="4294967295"/>
+          </p:nvPr>
+        </p:nvSpPr>
+        <p:spPr>
+          <a:xfrm>
+            <a:off x="27432" y="91440"/>
+            <a:ext cx="585216" cy="475488"/>
+          </a:xfrm>
+          <a:prstGeom prst="rect">
+            <a:avLst/>
+          </a:prstGeom>
+          <a:extLst>
+            <a:ext uri="{C572A759-6A51-4108-AA02-DFA0A04FC94B}">
+              <ma14:wrappingTextBoxFlag xmlns:ma14="http://schemas.microsoft.com/office/mac/drawingml/2011/main" val="0"/>
+            </a:ext>
+          </a:extLst>
+        </p:spPr>
+        <p:txBody>
+          <a:bodyPr/>
+          <a:lstStyle>
+            <a:lvl1pPr>
+              <a:defRPr sz="2000">
+                <a:solidFill>
+                  <a:srgbClr val="FFFFFF"/>
+                </a:solidFill>
+                <a:latin typeface="Calibri"/>
+                <a:ea typeface="Calibri"/>
+                <a:cs typeface="Calibri"/>
+              </a:defRPr>
+            </a:lvl1pPr>
+          </a:lstStyle>
+          <a:p>
+            <a:pPr algn="ctr"/>
+            <a:fld id="{F7021451-1387-4CA6-816F-3879F97B5CBC}" type="slidenum">
+              <a:rPr b="1" lang="en-US"/>
+              <a:t>50</a:t>
+            </a:fld>
+            <a:endParaRPr lang="en-US"/>
+          </a:p>
+        </p:txBody>
+      </p:sp>
+    </p:spTree>
+  </p:cSld>
+  <p:clrMapOvr>
+    <a:masterClrMapping/>
+  </p:clrMapOvr>
+</p:sld>
+</file>
+
+<file path=ppt/slides/slide51.xml><?xml version="1.0" encoding="utf-8"?>
+<p:sld xmlns:a="http://schemas.openxmlformats.org/drawingml/2006/main" xmlns:r="http://schemas.openxmlformats.org/officeDocument/2006/relationships" xmlns:p="http://schemas.openxmlformats.org/presentationml/2006/main">
+  <p:cSld name="Slide 51">
+    <p:spTree>
+      <p:nvGrpSpPr>
+        <p:cNvPr id="1" name=""/>
+        <p:cNvGrpSpPr/>
+        <p:nvPr/>
+      </p:nvGrpSpPr>
+      <p:grpSpPr>
+        <a:xfrm>
+          <a:off x="0" y="0"/>
+          <a:ext cx="0" cy="0"/>
+          <a:chOff x="0" y="0"/>
+          <a:chExt cx="0" cy="0"/>
+        </a:xfrm>
+      </p:grpSpPr>
+      <p:sp>
+        <p:nvSpPr>
+          <p:cNvPr id="2" name="Text 0"/>
+          <p:cNvSpPr/>
+          <p:nvPr/>
+        </p:nvSpPr>
+        <p:spPr>
+          <a:xfrm>
+            <a:off x="457200" y="713232"/>
+            <a:ext cx="11368735" cy="274320"/>
+          </a:xfrm>
+          <a:prstGeom prst="rect">
+            <a:avLst/>
+          </a:prstGeom>
+          <a:noFill/>
+          <a:ln/>
+        </p:spPr>
+        <p:txBody>
+          <a:bodyPr wrap="square" lIns="0" tIns="0" rIns="0" bIns="0" rtlCol="0" anchor="ctr"/>
+          <a:lstStyle/>
+          <a:p>
+            <a:pPr algn="r" indent="0" marL="0">
+              <a:buNone/>
+            </a:pPr>
+            <a:r>
+              <a:rPr lang="en-US" sz="1400" b="1" dirty="0">
+                <a:solidFill>
+                  <a:srgbClr val="1C3F6E"/>
+                </a:solidFill>
+                <a:latin typeface="Calibri" pitchFamily="34" charset="0"/>
+                <a:ea typeface="Calibri" pitchFamily="34" charset="-122"/>
+                <a:cs typeface="Calibri" pitchFamily="34" charset="-120"/>
+              </a:rPr>
+              <a:t>BOARD SUMMARY</a:t>
+            </a:r>
+            <a:endParaRPr lang="en-US" sz="1400" dirty="0"/>
+          </a:p>
+        </p:txBody>
+      </p:sp>
+      <p:pic>
+        <p:nvPicPr>
+          <p:cNvPr id="3" name="Image 0" descr="/home/claude/f4/img/minesec_sheet.png">    </p:cNvPr>
+          <p:cNvPicPr>
+            <a:picLocks noChangeAspect="1"/>
+          </p:cNvPicPr>
+          <p:nvPr/>
+        </p:nvPicPr>
+        <p:blipFill>
+          <a:blip r:embed="rId1"/>
+          <a:stretch>
+            <a:fillRect/>
+          </a:stretch>
+        </p:blipFill>
+        <p:spPr>
+          <a:xfrm>
+            <a:off x="0" y="658368"/>
+            <a:ext cx="5120640" cy="5833872"/>
+          </a:xfrm>
+          <a:prstGeom prst="rect">
+            <a:avLst/>
+          </a:prstGeom>
+        </p:spPr>
+      </p:pic>
+      <p:sp>
+        <p:nvSpPr>
+          <p:cNvPr id="4" name="Text 1"/>
+          <p:cNvSpPr/>
+          <p:nvPr/>
+        </p:nvSpPr>
+        <p:spPr>
+          <a:xfrm>
+            <a:off x="5349240" y="1005840"/>
+            <a:ext cx="6522415" cy="731520"/>
+          </a:xfrm>
+          <a:prstGeom prst="rect">
+            <a:avLst/>
+          </a:prstGeom>
+          <a:noFill/>
+          <a:ln/>
+        </p:spPr>
+        <p:txBody>
+          <a:bodyPr wrap="square" lIns="0" tIns="0" rIns="0" bIns="0" rtlCol="0" anchor="ctr">
+            <a:normAutofit/>
+          </a:bodyPr>
+          <a:lstStyle/>
+          <a:p>
+            <a:pPr algn="ctr" indent="0" marL="0">
+              <a:buNone/>
+            </a:pPr>
+            <a:r>
+              <a:rPr lang="en-US" sz="3600" b="1" dirty="0">
+                <a:solidFill>
+                  <a:srgbClr val="990011"/>
+                </a:solidFill>
+                <a:latin typeface="Times New Roman" pitchFamily="34" charset="0"/>
+                <a:ea typeface="Times New Roman" pitchFamily="34" charset="-122"/>
+                <a:cs typeface="Times New Roman" pitchFamily="34" charset="-120"/>
+              </a:rPr>
+              <a:t>3. Desertification</a:t>
+            </a:r>
+            <a:endParaRPr lang="en-US" sz="3600" dirty="0"/>
+          </a:p>
+        </p:txBody>
+      </p:sp>
+      <p:sp>
+        <p:nvSpPr>
+          <p:cNvPr id="5" name="Text 2"/>
+          <p:cNvSpPr/>
+          <p:nvPr/>
+        </p:nvSpPr>
+        <p:spPr>
+          <a:xfrm>
+            <a:off x="5349240" y="1737360"/>
+            <a:ext cx="6522415" cy="457200"/>
+          </a:xfrm>
+          <a:prstGeom prst="rect">
+            <a:avLst/>
+          </a:prstGeom>
+          <a:noFill/>
+          <a:ln/>
+        </p:spPr>
+        <p:txBody>
+          <a:bodyPr wrap="square" lIns="0" tIns="0" rIns="0" bIns="0" rtlCol="0" anchor="ctr"/>
+          <a:lstStyle/>
+          <a:p>
+            <a:pPr algn="l" indent="0" marL="0">
+              <a:buNone/>
+            </a:pPr>
+            <a:r>
+              <a:rPr lang="en-US" sz="3200" b="1" dirty="0">
+                <a:solidFill>
+                  <a:srgbClr val="990011"/>
+                </a:solidFill>
+                <a:latin typeface="Times New Roman" pitchFamily="34" charset="0"/>
+                <a:ea typeface="Times New Roman" pitchFamily="34" charset="-122"/>
+                <a:cs typeface="Times New Roman" pitchFamily="34" charset="-120"/>
+              </a:rPr>
+              <a:t>D) Adaptation and Mitigation</a:t>
+            </a:r>
+            <a:endParaRPr lang="en-US" sz="3200" dirty="0"/>
+          </a:p>
+        </p:txBody>
+      </p:sp>
+      <p:sp>
+        <p:nvSpPr>
+          <p:cNvPr id="6" name="Text 3"/>
+          <p:cNvSpPr/>
+          <p:nvPr/>
+        </p:nvSpPr>
+        <p:spPr>
+          <a:xfrm>
+            <a:off x="5349240" y="2240280"/>
+            <a:ext cx="6522415" cy="4206240"/>
+          </a:xfrm>
+          <a:prstGeom prst="rect">
+            <a:avLst/>
+          </a:prstGeom>
+          <a:noFill/>
+          <a:ln/>
+        </p:spPr>
+        <p:txBody>
+          <a:bodyPr wrap="square" lIns="0" tIns="0" rIns="0" bIns="0" rtlCol="0" anchor="t"/>
+          <a:lstStyle/>
+          <a:p>
+            <a:pPr algn="l" indent="0" marL="0">
+              <a:spcAft>
+                <a:spcPts val="800"/>
+              </a:spcAft>
+              <a:buNone/>
+            </a:pPr>
+            <a:r>
+              <a:rPr lang="en-US" sz="4000" b="1" dirty="0">
+                <a:solidFill>
+                  <a:srgbClr val="111111"/>
+                </a:solidFill>
+                <a:latin typeface="Times New Roman" pitchFamily="34" charset="0"/>
+                <a:ea typeface="Times New Roman" pitchFamily="34" charset="-122"/>
+                <a:cs typeface="Times New Roman" pitchFamily="34" charset="-120"/>
+              </a:rPr>
+              <a:t>Stone lines: </a:t>
+            </a:r>
+            <a:pPr algn="l" indent="0" marL="0">
+              <a:spcAft>
+                <a:spcPts val="800"/>
+              </a:spcAft>
+              <a:buNone/>
+            </a:pPr>
+            <a:r>
+              <a:rPr lang="en-US" sz="4000" dirty="0">
+                <a:solidFill>
+                  <a:srgbClr val="111111"/>
+                </a:solidFill>
+                <a:latin typeface="Times New Roman" pitchFamily="34" charset="0"/>
+                <a:ea typeface="Times New Roman" pitchFamily="34" charset="-122"/>
+                <a:cs typeface="Times New Roman" pitchFamily="34" charset="-120"/>
+              </a:rPr>
+              <a:t>Lines of stones slow down runoff.</a:t>
+            </a:r>
+            <a:endParaRPr lang="en-US" sz="4000" dirty="0"/>
+          </a:p>
+          <a:p>
+            <a:pPr algn="l" indent="0" marL="0">
+              <a:spcAft>
+                <a:spcPts val="800"/>
+              </a:spcAft>
+              <a:buNone/>
+            </a:pPr>
+            <a:r>
+              <a:rPr lang="en-US" sz="4000" b="1" dirty="0">
+                <a:solidFill>
+                  <a:srgbClr val="111111"/>
+                </a:solidFill>
+                <a:latin typeface="Times New Roman" pitchFamily="34" charset="0"/>
+                <a:ea typeface="Times New Roman" pitchFamily="34" charset="-122"/>
+                <a:cs typeface="Times New Roman" pitchFamily="34" charset="-120"/>
+              </a:rPr>
+              <a:t>Control of grazing: </a:t>
+            </a:r>
+            <a:pPr algn="l" indent="0" marL="0">
+              <a:spcAft>
+                <a:spcPts val="800"/>
+              </a:spcAft>
+              <a:buNone/>
+            </a:pPr>
+            <a:r>
+              <a:rPr lang="en-US" sz="4000" dirty="0">
+                <a:solidFill>
+                  <a:srgbClr val="111111"/>
+                </a:solidFill>
+                <a:latin typeface="Times New Roman" pitchFamily="34" charset="0"/>
+                <a:ea typeface="Times New Roman" pitchFamily="34" charset="-122"/>
+                <a:cs typeface="Times New Roman" pitchFamily="34" charset="-120"/>
+              </a:rPr>
+              <a:t>The number of animals is limited.</a:t>
+            </a:r>
+            <a:endParaRPr lang="en-US" sz="4000" dirty="0"/>
+          </a:p>
+        </p:txBody>
+      </p:sp>
+      <p:sp>
+        <p:nvSpPr>
+          <p:cNvPr id="25" name="Slide Number Placeholder 0"/>
+          <p:cNvSpPr>
+            <a:spLocks noGrp="1"/>
+          </p:cNvSpPr>
+          <p:nvPr>
+            <p:ph type="sldNum" sz="quarter" idx="4294967295"/>
+          </p:nvPr>
+        </p:nvSpPr>
+        <p:spPr>
+          <a:xfrm>
+            <a:off x="27432" y="91440"/>
+            <a:ext cx="585216" cy="475488"/>
+          </a:xfrm>
+          <a:prstGeom prst="rect">
+            <a:avLst/>
+          </a:prstGeom>
+          <a:extLst>
+            <a:ext uri="{C572A759-6A51-4108-AA02-DFA0A04FC94B}">
+              <ma14:wrappingTextBoxFlag xmlns:ma14="http://schemas.microsoft.com/office/mac/drawingml/2011/main" val="0"/>
+            </a:ext>
+          </a:extLst>
+        </p:spPr>
+        <p:txBody>
+          <a:bodyPr/>
+          <a:lstStyle>
+            <a:lvl1pPr>
+              <a:defRPr sz="2000">
+                <a:solidFill>
+                  <a:srgbClr val="FFFFFF"/>
+                </a:solidFill>
+                <a:latin typeface="Calibri"/>
+                <a:ea typeface="Calibri"/>
+                <a:cs typeface="Calibri"/>
+              </a:defRPr>
+            </a:lvl1pPr>
+          </a:lstStyle>
+          <a:p>
+            <a:pPr algn="ctr"/>
+            <a:fld id="{F7021451-1387-4CA6-816F-3879F97B5CBC}" type="slidenum">
+              <a:rPr b="1" lang="en-US"/>
+              <a:t>51</a:t>
+            </a:fld>
+            <a:endParaRPr lang="en-US"/>
+          </a:p>
+        </p:txBody>
+      </p:sp>
+    </p:spTree>
+  </p:cSld>
+  <p:clrMapOvr>
+    <a:masterClrMapping/>
+  </p:clrMapOvr>
+</p:sld>
+</file>
+
+<file path=ppt/slides/slide52.xml><?xml version="1.0" encoding="utf-8"?>
+<p:sld xmlns:a="http://schemas.openxmlformats.org/drawingml/2006/main" xmlns:r="http://schemas.openxmlformats.org/officeDocument/2006/relationships" xmlns:p="http://schemas.openxmlformats.org/presentationml/2006/main">
+  <p:cSld name="Slide 52">
+    <p:spTree>
+      <p:nvGrpSpPr>
+        <p:cNvPr id="1" name=""/>
+        <p:cNvGrpSpPr/>
+        <p:nvPr/>
+      </p:nvGrpSpPr>
+      <p:grpSpPr>
+        <a:xfrm>
+          <a:off x="0" y="0"/>
+          <a:ext cx="0" cy="0"/>
+          <a:chOff x="0" y="0"/>
+          <a:chExt cx="0" cy="0"/>
+        </a:xfrm>
+      </p:grpSpPr>
+      <p:sp>
+        <p:nvSpPr>
+          <p:cNvPr id="2" name="Text 0"/>
+          <p:cNvSpPr/>
+          <p:nvPr/>
+        </p:nvSpPr>
+        <p:spPr>
+          <a:xfrm>
+            <a:off x="457200" y="713232"/>
+            <a:ext cx="11368735" cy="274320"/>
+          </a:xfrm>
+          <a:prstGeom prst="rect">
+            <a:avLst/>
+          </a:prstGeom>
+          <a:noFill/>
+          <a:ln/>
+        </p:spPr>
+        <p:txBody>
+          <a:bodyPr wrap="square" lIns="0" tIns="0" rIns="0" bIns="0" rtlCol="0" anchor="ctr"/>
+          <a:lstStyle/>
+          <a:p>
+            <a:pPr algn="r" indent="0" marL="0">
+              <a:buNone/>
+            </a:pPr>
+            <a:r>
+              <a:rPr lang="en-US" sz="1400" b="1" dirty="0">
+                <a:solidFill>
+                  <a:srgbClr val="1C3F6E"/>
+                </a:solidFill>
+                <a:latin typeface="Calibri" pitchFamily="34" charset="0"/>
+                <a:ea typeface="Calibri" pitchFamily="34" charset="-122"/>
+                <a:cs typeface="Calibri" pitchFamily="34" charset="-120"/>
+              </a:rPr>
+              <a:t>FORMATIVE EVALUATION</a:t>
+            </a:r>
+            <a:endParaRPr lang="en-US" sz="1400" dirty="0"/>
+          </a:p>
+        </p:txBody>
+      </p:sp>
+      <p:pic>
+        <p:nvPicPr>
+          <p:cNvPr id="3" name="Image 0" descr="/home/claude/f4/img/minesec_sheet.png">    </p:cNvPr>
+          <p:cNvPicPr>
+            <a:picLocks noChangeAspect="1"/>
+          </p:cNvPicPr>
+          <p:nvPr/>
+        </p:nvPicPr>
+        <p:blipFill>
+          <a:blip r:embed="rId1"/>
+          <a:stretch>
+            <a:fillRect/>
+          </a:stretch>
+        </p:blipFill>
+        <p:spPr>
+          <a:xfrm>
+            <a:off x="0" y="658368"/>
+            <a:ext cx="5120640" cy="5833872"/>
+          </a:xfrm>
+          <a:prstGeom prst="rect">
+            <a:avLst/>
+          </a:prstGeom>
+        </p:spPr>
+      </p:pic>
+      <p:sp>
+        <p:nvSpPr>
+          <p:cNvPr id="4" name="Text 1"/>
+          <p:cNvSpPr/>
+          <p:nvPr/>
+        </p:nvSpPr>
+        <p:spPr>
+          <a:xfrm>
+            <a:off x="5349240" y="1005840"/>
+            <a:ext cx="6522415" cy="731520"/>
+          </a:xfrm>
+          <a:prstGeom prst="rect">
+            <a:avLst/>
+          </a:prstGeom>
+          <a:noFill/>
+          <a:ln/>
+        </p:spPr>
+        <p:txBody>
+          <a:bodyPr wrap="square" lIns="0" tIns="0" rIns="0" bIns="0" rtlCol="0" anchor="ctr">
+            <a:normAutofit/>
+          </a:bodyPr>
+          <a:lstStyle/>
+          <a:p>
+            <a:pPr algn="ctr" indent="0" marL="0">
+              <a:buNone/>
+            </a:pPr>
+            <a:r>
+              <a:rPr lang="en-US" sz="3600" b="1" dirty="0">
+                <a:solidFill>
+                  <a:srgbClr val="990011"/>
+                </a:solidFill>
+                <a:latin typeface="Times New Roman" pitchFamily="34" charset="0"/>
+                <a:ea typeface="Times New Roman" pitchFamily="34" charset="-122"/>
+                <a:cs typeface="Times New Roman" pitchFamily="34" charset="-120"/>
+              </a:rPr>
+              <a:t>Evaluation 1</a:t>
+            </a:r>
+            <a:endParaRPr lang="en-US" sz="3600" dirty="0"/>
+          </a:p>
+        </p:txBody>
+      </p:sp>
+      <p:sp>
+        <p:nvSpPr>
+          <p:cNvPr id="5" name="Text 2"/>
+          <p:cNvSpPr/>
+          <p:nvPr/>
+        </p:nvSpPr>
+        <p:spPr>
+          <a:xfrm>
+            <a:off x="5349240" y="1783080"/>
+            <a:ext cx="6522415" cy="4663440"/>
+          </a:xfrm>
+          <a:prstGeom prst="rect">
+            <a:avLst/>
+          </a:prstGeom>
+          <a:noFill/>
+          <a:ln/>
+        </p:spPr>
+        <p:txBody>
+          <a:bodyPr wrap="square" lIns="0" tIns="0" rIns="0" bIns="0" rtlCol="0" anchor="t"/>
+          <a:lstStyle/>
+          <a:p>
+            <a:pPr algn="l" indent="0" marL="0">
+              <a:spcAft>
+                <a:spcPts val="800"/>
+              </a:spcAft>
+              <a:buNone/>
+            </a:pPr>
+            <a:r>
+              <a:rPr lang="en-US" sz="4000" dirty="0">
+                <a:solidFill>
+                  <a:srgbClr val="111111"/>
+                </a:solidFill>
+                <a:latin typeface="Times New Roman" pitchFamily="34" charset="0"/>
+                <a:ea typeface="Times New Roman" pitchFamily="34" charset="-122"/>
+                <a:cs typeface="Times New Roman" pitchFamily="34" charset="-120"/>
+              </a:rPr>
+              <a:t>What is desertification?</a:t>
+            </a:r>
+            <a:endParaRPr lang="en-US" sz="4000" dirty="0"/>
+          </a:p>
+        </p:txBody>
+      </p:sp>
+      <p:sp>
+        <p:nvSpPr>
+          <p:cNvPr id="25" name="Slide Number Placeholder 0"/>
+          <p:cNvSpPr>
+            <a:spLocks noGrp="1"/>
+          </p:cNvSpPr>
+          <p:nvPr>
+            <p:ph type="sldNum" sz="quarter" idx="4294967295"/>
+          </p:nvPr>
+        </p:nvSpPr>
+        <p:spPr>
+          <a:xfrm>
+            <a:off x="27432" y="91440"/>
+            <a:ext cx="585216" cy="475488"/>
+          </a:xfrm>
+          <a:prstGeom prst="rect">
+            <a:avLst/>
+          </a:prstGeom>
+          <a:extLst>
+            <a:ext uri="{C572A759-6A51-4108-AA02-DFA0A04FC94B}">
+              <ma14:wrappingTextBoxFlag xmlns:ma14="http://schemas.microsoft.com/office/mac/drawingml/2011/main" val="0"/>
+            </a:ext>
+          </a:extLst>
+        </p:spPr>
+        <p:txBody>
+          <a:bodyPr/>
+          <a:lstStyle>
+            <a:lvl1pPr>
+              <a:defRPr sz="2000">
+                <a:solidFill>
+                  <a:srgbClr val="FFFFFF"/>
+                </a:solidFill>
+                <a:latin typeface="Calibri"/>
+                <a:ea typeface="Calibri"/>
+                <a:cs typeface="Calibri"/>
+              </a:defRPr>
+            </a:lvl1pPr>
+          </a:lstStyle>
+          <a:p>
+            <a:pPr algn="ctr"/>
+            <a:fld id="{F7021451-1387-4CA6-816F-3879F97B5CBC}" type="slidenum">
+              <a:rPr b="1" lang="en-US"/>
+              <a:t>52</a:t>
+            </a:fld>
+            <a:endParaRPr lang="en-US"/>
+          </a:p>
+        </p:txBody>
+      </p:sp>
+    </p:spTree>
+  </p:cSld>
+  <p:clrMapOvr>
+    <a:masterClrMapping/>
+  </p:clrMapOvr>
+</p:sld>
+</file>
+
+<file path=ppt/slides/slide53.xml><?xml version="1.0" encoding="utf-8"?>
+<p:sld xmlns:a="http://schemas.openxmlformats.org/drawingml/2006/main" xmlns:r="http://schemas.openxmlformats.org/officeDocument/2006/relationships" xmlns:p="http://schemas.openxmlformats.org/presentationml/2006/main">
+  <p:cSld name="Slide 53">
+    <p:spTree>
+      <p:nvGrpSpPr>
+        <p:cNvPr id="1" name=""/>
+        <p:cNvGrpSpPr/>
+        <p:nvPr/>
+      </p:nvGrpSpPr>
+      <p:grpSpPr>
+        <a:xfrm>
+          <a:off x="0" y="0"/>
+          <a:ext cx="0" cy="0"/>
+          <a:chOff x="0" y="0"/>
+          <a:chExt cx="0" cy="0"/>
+        </a:xfrm>
+      </p:grpSpPr>
+      <p:sp>
+        <p:nvSpPr>
+          <p:cNvPr id="2" name="Text 0"/>
+          <p:cNvSpPr/>
+          <p:nvPr/>
+        </p:nvSpPr>
+        <p:spPr>
+          <a:xfrm>
+            <a:off x="457200" y="713232"/>
+            <a:ext cx="11368735" cy="274320"/>
+          </a:xfrm>
+          <a:prstGeom prst="rect">
+            <a:avLst/>
+          </a:prstGeom>
+          <a:noFill/>
+          <a:ln/>
+        </p:spPr>
+        <p:txBody>
+          <a:bodyPr wrap="square" lIns="0" tIns="0" rIns="0" bIns="0" rtlCol="0" anchor="ctr"/>
+          <a:lstStyle/>
+          <a:p>
+            <a:pPr algn="r" indent="0" marL="0">
+              <a:buNone/>
+            </a:pPr>
+            <a:r>
+              <a:rPr lang="en-US" sz="1400" b="1" dirty="0">
+                <a:solidFill>
+                  <a:srgbClr val="1C3F6E"/>
+                </a:solidFill>
+                <a:latin typeface="Calibri" pitchFamily="34" charset="0"/>
+                <a:ea typeface="Calibri" pitchFamily="34" charset="-122"/>
+                <a:cs typeface="Calibri" pitchFamily="34" charset="-120"/>
+              </a:rPr>
+              <a:t>FORMATIVE EVALUATION</a:t>
+            </a:r>
+            <a:endParaRPr lang="en-US" sz="1400" dirty="0"/>
+          </a:p>
+        </p:txBody>
+      </p:sp>
+      <p:pic>
+        <p:nvPicPr>
+          <p:cNvPr id="3" name="Image 0" descr="/home/claude/f4/img/minesec_sheet.png">    </p:cNvPr>
+          <p:cNvPicPr>
+            <a:picLocks noChangeAspect="1"/>
+          </p:cNvPicPr>
+          <p:nvPr/>
+        </p:nvPicPr>
+        <p:blipFill>
+          <a:blip r:embed="rId1"/>
+          <a:stretch>
+            <a:fillRect/>
+          </a:stretch>
+        </p:blipFill>
+        <p:spPr>
+          <a:xfrm>
+            <a:off x="0" y="658368"/>
+            <a:ext cx="5120640" cy="5833872"/>
+          </a:xfrm>
+          <a:prstGeom prst="rect">
+            <a:avLst/>
+          </a:prstGeom>
+        </p:spPr>
+      </p:pic>
+      <p:sp>
+        <p:nvSpPr>
+          <p:cNvPr id="4" name="Text 1"/>
+          <p:cNvSpPr/>
+          <p:nvPr/>
+        </p:nvSpPr>
+        <p:spPr>
+          <a:xfrm>
+            <a:off x="5349240" y="1005840"/>
+            <a:ext cx="6522415" cy="731520"/>
+          </a:xfrm>
+          <a:prstGeom prst="rect">
+            <a:avLst/>
+          </a:prstGeom>
+          <a:noFill/>
+          <a:ln/>
+        </p:spPr>
+        <p:txBody>
+          <a:bodyPr wrap="square" lIns="0" tIns="0" rIns="0" bIns="0" rtlCol="0" anchor="ctr">
+            <a:normAutofit/>
+          </a:bodyPr>
+          <a:lstStyle/>
+          <a:p>
+            <a:pPr algn="ctr" indent="0" marL="0">
+              <a:buNone/>
+            </a:pPr>
+            <a:r>
+              <a:rPr lang="en-US" sz="3600" b="1" dirty="0">
+                <a:solidFill>
+                  <a:srgbClr val="990011"/>
+                </a:solidFill>
+                <a:latin typeface="Times New Roman" pitchFamily="34" charset="0"/>
+                <a:ea typeface="Times New Roman" pitchFamily="34" charset="-122"/>
+                <a:cs typeface="Times New Roman" pitchFamily="34" charset="-120"/>
+              </a:rPr>
+              <a:t>Expected Answer</a:t>
+            </a:r>
+            <a:endParaRPr lang="en-US" sz="3600" dirty="0"/>
+          </a:p>
+        </p:txBody>
+      </p:sp>
+      <p:sp>
+        <p:nvSpPr>
+          <p:cNvPr id="5" name="Text 2"/>
+          <p:cNvSpPr/>
+          <p:nvPr/>
+        </p:nvSpPr>
+        <p:spPr>
+          <a:xfrm>
+            <a:off x="5349240" y="1783080"/>
+            <a:ext cx="6522415" cy="4663440"/>
+          </a:xfrm>
+          <a:prstGeom prst="rect">
+            <a:avLst/>
+          </a:prstGeom>
+          <a:noFill/>
+          <a:ln/>
+        </p:spPr>
+        <p:txBody>
+          <a:bodyPr wrap="square" lIns="0" tIns="0" rIns="0" bIns="0" rtlCol="0" anchor="t"/>
+          <a:lstStyle/>
+          <a:p>
+            <a:pPr algn="l" indent="0" marL="0">
+              <a:spcAft>
+                <a:spcPts val="800"/>
+              </a:spcAft>
+              <a:buNone/>
+            </a:pPr>
+            <a:r>
+              <a:rPr lang="en-US" sz="4000" dirty="0">
+                <a:solidFill>
+                  <a:srgbClr val="111111"/>
+                </a:solidFill>
+                <a:latin typeface="Times New Roman" pitchFamily="34" charset="0"/>
+                <a:ea typeface="Times New Roman" pitchFamily="34" charset="-122"/>
+                <a:cs typeface="Times New Roman" pitchFamily="34" charset="-120"/>
+              </a:rPr>
+              <a:t>The spread of the desert.</a:t>
+            </a:r>
+            <a:endParaRPr lang="en-US" sz="4000" dirty="0"/>
+          </a:p>
+        </p:txBody>
+      </p:sp>
+      <p:sp>
+        <p:nvSpPr>
+          <p:cNvPr id="25" name="Slide Number Placeholder 0"/>
+          <p:cNvSpPr>
+            <a:spLocks noGrp="1"/>
+          </p:cNvSpPr>
+          <p:nvPr>
+            <p:ph type="sldNum" sz="quarter" idx="4294967295"/>
+          </p:nvPr>
+        </p:nvSpPr>
+        <p:spPr>
+          <a:xfrm>
+            <a:off x="27432" y="91440"/>
+            <a:ext cx="585216" cy="475488"/>
+          </a:xfrm>
+          <a:prstGeom prst="rect">
+            <a:avLst/>
+          </a:prstGeom>
+          <a:extLst>
+            <a:ext uri="{C572A759-6A51-4108-AA02-DFA0A04FC94B}">
+              <ma14:wrappingTextBoxFlag xmlns:ma14="http://schemas.microsoft.com/office/mac/drawingml/2011/main" val="0"/>
+            </a:ext>
+          </a:extLst>
+        </p:spPr>
+        <p:txBody>
+          <a:bodyPr/>
+          <a:lstStyle>
+            <a:lvl1pPr>
+              <a:defRPr sz="2000">
+                <a:solidFill>
+                  <a:srgbClr val="FFFFFF"/>
+                </a:solidFill>
+                <a:latin typeface="Calibri"/>
+                <a:ea typeface="Calibri"/>
+                <a:cs typeface="Calibri"/>
+              </a:defRPr>
+            </a:lvl1pPr>
+          </a:lstStyle>
+          <a:p>
+            <a:pPr algn="ctr"/>
+            <a:fld id="{F7021451-1387-4CA6-816F-3879F97B5CBC}" type="slidenum">
+              <a:rPr b="1" lang="en-US"/>
+              <a:t>53</a:t>
+            </a:fld>
+            <a:endParaRPr lang="en-US"/>
+          </a:p>
+        </p:txBody>
+      </p:sp>
+    </p:spTree>
+  </p:cSld>
+  <p:clrMapOvr>
+    <a:masterClrMapping/>
+  </p:clrMapOvr>
+</p:sld>
+</file>
+
+<file path=ppt/slides/slide54.xml><?xml version="1.0" encoding="utf-8"?>
+<p:sld xmlns:a="http://schemas.openxmlformats.org/drawingml/2006/main" xmlns:r="http://schemas.openxmlformats.org/officeDocument/2006/relationships" xmlns:p="http://schemas.openxmlformats.org/presentationml/2006/main">
+  <p:cSld name="Slide 54">
+    <p:spTree>
+      <p:nvGrpSpPr>
+        <p:cNvPr id="1" name=""/>
+        <p:cNvGrpSpPr/>
+        <p:nvPr/>
+      </p:nvGrpSpPr>
+      <p:grpSpPr>
+        <a:xfrm>
+          <a:off x="0" y="0"/>
+          <a:ext cx="0" cy="0"/>
+          <a:chOff x="0" y="0"/>
+          <a:chExt cx="0" cy="0"/>
+        </a:xfrm>
+      </p:grpSpPr>
+      <p:sp>
+        <p:nvSpPr>
+          <p:cNvPr id="2" name="Text 0"/>
+          <p:cNvSpPr/>
+          <p:nvPr/>
+        </p:nvSpPr>
+        <p:spPr>
+          <a:xfrm>
+            <a:off x="457200" y="713232"/>
+            <a:ext cx="11368735" cy="274320"/>
+          </a:xfrm>
+          <a:prstGeom prst="rect">
+            <a:avLst/>
+          </a:prstGeom>
+          <a:noFill/>
+          <a:ln/>
+        </p:spPr>
+        <p:txBody>
+          <a:bodyPr wrap="square" lIns="0" tIns="0" rIns="0" bIns="0" rtlCol="0" anchor="ctr"/>
+          <a:lstStyle/>
+          <a:p>
+            <a:pPr algn="r" indent="0" marL="0">
+              <a:buNone/>
+            </a:pPr>
+            <a:r>
+              <a:rPr lang="en-US" sz="1400" b="1" dirty="0">
+                <a:solidFill>
+                  <a:srgbClr val="1C3F6E"/>
+                </a:solidFill>
+                <a:latin typeface="Calibri" pitchFamily="34" charset="0"/>
+                <a:ea typeface="Calibri" pitchFamily="34" charset="-122"/>
+                <a:cs typeface="Calibri" pitchFamily="34" charset="-120"/>
+              </a:rPr>
+              <a:t>FORMATIVE EVALUATION</a:t>
+            </a:r>
+            <a:endParaRPr lang="en-US" sz="1400" dirty="0"/>
+          </a:p>
+        </p:txBody>
+      </p:sp>
+      <p:pic>
+        <p:nvPicPr>
+          <p:cNvPr id="3" name="Image 0" descr="/home/claude/f4/img/minesec_sheet.png">    </p:cNvPr>
+          <p:cNvPicPr>
+            <a:picLocks noChangeAspect="1"/>
+          </p:cNvPicPr>
+          <p:nvPr/>
+        </p:nvPicPr>
+        <p:blipFill>
+          <a:blip r:embed="rId1"/>
+          <a:stretch>
+            <a:fillRect/>
+          </a:stretch>
+        </p:blipFill>
+        <p:spPr>
+          <a:xfrm>
+            <a:off x="0" y="658368"/>
+            <a:ext cx="5120640" cy="5833872"/>
+          </a:xfrm>
+          <a:prstGeom prst="rect">
+            <a:avLst/>
+          </a:prstGeom>
+        </p:spPr>
+      </p:pic>
+      <p:sp>
+        <p:nvSpPr>
+          <p:cNvPr id="4" name="Text 1"/>
+          <p:cNvSpPr/>
+          <p:nvPr/>
+        </p:nvSpPr>
+        <p:spPr>
+          <a:xfrm>
+            <a:off x="5349240" y="1005840"/>
+            <a:ext cx="6522415" cy="731520"/>
+          </a:xfrm>
+          <a:prstGeom prst="rect">
+            <a:avLst/>
+          </a:prstGeom>
+          <a:noFill/>
+          <a:ln/>
+        </p:spPr>
+        <p:txBody>
+          <a:bodyPr wrap="square" lIns="0" tIns="0" rIns="0" bIns="0" rtlCol="0" anchor="ctr">
+            <a:normAutofit/>
+          </a:bodyPr>
+          <a:lstStyle/>
+          <a:p>
+            <a:pPr algn="ctr" indent="0" marL="0">
+              <a:buNone/>
+            </a:pPr>
+            <a:r>
+              <a:rPr lang="en-US" sz="3600" b="1" dirty="0">
+                <a:solidFill>
+                  <a:srgbClr val="990011"/>
+                </a:solidFill>
+                <a:latin typeface="Times New Roman" pitchFamily="34" charset="0"/>
+                <a:ea typeface="Times New Roman" pitchFamily="34" charset="-122"/>
+                <a:cs typeface="Times New Roman" pitchFamily="34" charset="-120"/>
+              </a:rPr>
+              <a:t>Evaluation 2</a:t>
+            </a:r>
+            <a:endParaRPr lang="en-US" sz="3600" dirty="0"/>
+          </a:p>
+        </p:txBody>
+      </p:sp>
+      <p:sp>
+        <p:nvSpPr>
+          <p:cNvPr id="5" name="Text 2"/>
+          <p:cNvSpPr/>
+          <p:nvPr/>
+        </p:nvSpPr>
+        <p:spPr>
+          <a:xfrm>
+            <a:off x="5349240" y="1783080"/>
+            <a:ext cx="6522415" cy="4663440"/>
+          </a:xfrm>
+          <a:prstGeom prst="rect">
+            <a:avLst/>
+          </a:prstGeom>
+          <a:noFill/>
+          <a:ln/>
+        </p:spPr>
+        <p:txBody>
+          <a:bodyPr wrap="square" lIns="0" tIns="0" rIns="0" bIns="0" rtlCol="0" anchor="t"/>
+          <a:lstStyle/>
+          <a:p>
+            <a:pPr algn="l" indent="0" marL="0">
+              <a:spcAft>
+                <a:spcPts val="800"/>
+              </a:spcAft>
+              <a:buNone/>
+            </a:pPr>
+            <a:r>
+              <a:rPr lang="en-US" sz="4000" dirty="0">
+                <a:solidFill>
+                  <a:srgbClr val="111111"/>
+                </a:solidFill>
+                <a:latin typeface="Times New Roman" pitchFamily="34" charset="0"/>
+                <a:ea typeface="Times New Roman" pitchFamily="34" charset="-122"/>
+                <a:cs typeface="Times New Roman" pitchFamily="34" charset="-120"/>
+              </a:rPr>
+              <a:t>Give one way to fight desertification.</a:t>
+            </a:r>
+            <a:endParaRPr lang="en-US" sz="4000" dirty="0"/>
+          </a:p>
+        </p:txBody>
+      </p:sp>
+      <p:sp>
+        <p:nvSpPr>
+          <p:cNvPr id="25" name="Slide Number Placeholder 0"/>
+          <p:cNvSpPr>
+            <a:spLocks noGrp="1"/>
+          </p:cNvSpPr>
+          <p:nvPr>
+            <p:ph type="sldNum" sz="quarter" idx="4294967295"/>
+          </p:nvPr>
+        </p:nvSpPr>
+        <p:spPr>
+          <a:xfrm>
+            <a:off x="27432" y="91440"/>
+            <a:ext cx="585216" cy="475488"/>
+          </a:xfrm>
+          <a:prstGeom prst="rect">
+            <a:avLst/>
+          </a:prstGeom>
+          <a:extLst>
+            <a:ext uri="{C572A759-6A51-4108-AA02-DFA0A04FC94B}">
+              <ma14:wrappingTextBoxFlag xmlns:ma14="http://schemas.microsoft.com/office/mac/drawingml/2011/main" val="0"/>
+            </a:ext>
+          </a:extLst>
+        </p:spPr>
+        <p:txBody>
+          <a:bodyPr/>
+          <a:lstStyle>
+            <a:lvl1pPr>
+              <a:defRPr sz="2000">
+                <a:solidFill>
+                  <a:srgbClr val="FFFFFF"/>
+                </a:solidFill>
+                <a:latin typeface="Calibri"/>
+                <a:ea typeface="Calibri"/>
+                <a:cs typeface="Calibri"/>
+              </a:defRPr>
+            </a:lvl1pPr>
+          </a:lstStyle>
+          <a:p>
+            <a:pPr algn="ctr"/>
+            <a:fld id="{F7021451-1387-4CA6-816F-3879F97B5CBC}" type="slidenum">
+              <a:rPr b="1" lang="en-US"/>
+              <a:t>54</a:t>
+            </a:fld>
+            <a:endParaRPr lang="en-US"/>
+          </a:p>
+        </p:txBody>
+      </p:sp>
+    </p:spTree>
+  </p:cSld>
+  <p:clrMapOvr>
+    <a:masterClrMapping/>
+  </p:clrMapOvr>
+</p:sld>
+</file>
+
+<file path=ppt/slides/slide55.xml><?xml version="1.0" encoding="utf-8"?>
+<p:sld xmlns:a="http://schemas.openxmlformats.org/drawingml/2006/main" xmlns:r="http://schemas.openxmlformats.org/officeDocument/2006/relationships" xmlns:p="http://schemas.openxmlformats.org/presentationml/2006/main">
+  <p:cSld name="Slide 55">
+    <p:spTree>
+      <p:nvGrpSpPr>
+        <p:cNvPr id="1" name=""/>
+        <p:cNvGrpSpPr/>
+        <p:nvPr/>
+      </p:nvGrpSpPr>
+      <p:grpSpPr>
+        <a:xfrm>
+          <a:off x="0" y="0"/>
+          <a:ext cx="0" cy="0"/>
+          <a:chOff x="0" y="0"/>
+          <a:chExt cx="0" cy="0"/>
+        </a:xfrm>
+      </p:grpSpPr>
+      <p:sp>
+        <p:nvSpPr>
+          <p:cNvPr id="2" name="Text 0"/>
+          <p:cNvSpPr/>
+          <p:nvPr/>
+        </p:nvSpPr>
+        <p:spPr>
+          <a:xfrm>
+            <a:off x="457200" y="713232"/>
+            <a:ext cx="11368735" cy="274320"/>
+          </a:xfrm>
+          <a:prstGeom prst="rect">
+            <a:avLst/>
+          </a:prstGeom>
+          <a:noFill/>
+          <a:ln/>
+        </p:spPr>
+        <p:txBody>
+          <a:bodyPr wrap="square" lIns="0" tIns="0" rIns="0" bIns="0" rtlCol="0" anchor="ctr"/>
+          <a:lstStyle/>
+          <a:p>
+            <a:pPr algn="r" indent="0" marL="0">
+              <a:buNone/>
+            </a:pPr>
+            <a:r>
+              <a:rPr lang="en-US" sz="1400" b="1" dirty="0">
+                <a:solidFill>
+                  <a:srgbClr val="1C3F6E"/>
+                </a:solidFill>
+                <a:latin typeface="Calibri" pitchFamily="34" charset="0"/>
+                <a:ea typeface="Calibri" pitchFamily="34" charset="-122"/>
+                <a:cs typeface="Calibri" pitchFamily="34" charset="-120"/>
+              </a:rPr>
+              <a:t>FORMATIVE EVALUATION</a:t>
+            </a:r>
+            <a:endParaRPr lang="en-US" sz="1400" dirty="0"/>
+          </a:p>
+        </p:txBody>
+      </p:sp>
+      <p:pic>
+        <p:nvPicPr>
+          <p:cNvPr id="3" name="Image 0" descr="/home/claude/f4/img/minesec_sheet.png">    </p:cNvPr>
+          <p:cNvPicPr>
+            <a:picLocks noChangeAspect="1"/>
+          </p:cNvPicPr>
+          <p:nvPr/>
+        </p:nvPicPr>
+        <p:blipFill>
+          <a:blip r:embed="rId1"/>
+          <a:stretch>
+            <a:fillRect/>
+          </a:stretch>
+        </p:blipFill>
+        <p:spPr>
+          <a:xfrm>
+            <a:off x="0" y="658368"/>
+            <a:ext cx="5120640" cy="5833872"/>
+          </a:xfrm>
+          <a:prstGeom prst="rect">
+            <a:avLst/>
+          </a:prstGeom>
+        </p:spPr>
+      </p:pic>
+      <p:sp>
+        <p:nvSpPr>
+          <p:cNvPr id="4" name="Text 1"/>
+          <p:cNvSpPr/>
+          <p:nvPr/>
+        </p:nvSpPr>
+        <p:spPr>
+          <a:xfrm>
+            <a:off x="5349240" y="1005840"/>
+            <a:ext cx="6522415" cy="731520"/>
+          </a:xfrm>
+          <a:prstGeom prst="rect">
+            <a:avLst/>
+          </a:prstGeom>
+          <a:noFill/>
+          <a:ln/>
+        </p:spPr>
+        <p:txBody>
+          <a:bodyPr wrap="square" lIns="0" tIns="0" rIns="0" bIns="0" rtlCol="0" anchor="ctr">
+            <a:normAutofit/>
+          </a:bodyPr>
+          <a:lstStyle/>
+          <a:p>
+            <a:pPr algn="ctr" indent="0" marL="0">
+              <a:buNone/>
+            </a:pPr>
+            <a:r>
+              <a:rPr lang="en-US" sz="3600" b="1" dirty="0">
+                <a:solidFill>
+                  <a:srgbClr val="990011"/>
+                </a:solidFill>
+                <a:latin typeface="Times New Roman" pitchFamily="34" charset="0"/>
+                <a:ea typeface="Times New Roman" pitchFamily="34" charset="-122"/>
+                <a:cs typeface="Times New Roman" pitchFamily="34" charset="-120"/>
+              </a:rPr>
+              <a:t>Expected Answer</a:t>
+            </a:r>
+            <a:endParaRPr lang="en-US" sz="3600" dirty="0"/>
+          </a:p>
+        </p:txBody>
+      </p:sp>
+      <p:sp>
+        <p:nvSpPr>
+          <p:cNvPr id="5" name="Text 2"/>
+          <p:cNvSpPr/>
+          <p:nvPr/>
+        </p:nvSpPr>
+        <p:spPr>
+          <a:xfrm>
+            <a:off x="5349240" y="1783080"/>
+            <a:ext cx="6522415" cy="4663440"/>
+          </a:xfrm>
+          <a:prstGeom prst="rect">
+            <a:avLst/>
+          </a:prstGeom>
+          <a:noFill/>
+          <a:ln/>
+        </p:spPr>
+        <p:txBody>
+          <a:bodyPr wrap="square" lIns="0" tIns="0" rIns="0" bIns="0" rtlCol="0" anchor="t"/>
+          <a:lstStyle/>
+          <a:p>
+            <a:pPr algn="l" indent="0" marL="0">
+              <a:spcAft>
+                <a:spcPts val="800"/>
+              </a:spcAft>
+              <a:buNone/>
+            </a:pPr>
+            <a:r>
+              <a:rPr lang="en-US" sz="4000" dirty="0">
+                <a:solidFill>
+                  <a:srgbClr val="111111"/>
+                </a:solidFill>
+                <a:latin typeface="Times New Roman" pitchFamily="34" charset="0"/>
+                <a:ea typeface="Times New Roman" pitchFamily="34" charset="-122"/>
+                <a:cs typeface="Times New Roman" pitchFamily="34" charset="-120"/>
+              </a:rPr>
+              <a:t>Plant trees (or stop overgrazing).</a:t>
+            </a:r>
+            <a:endParaRPr lang="en-US" sz="4000" dirty="0"/>
+          </a:p>
+        </p:txBody>
+      </p:sp>
+      <p:sp>
+        <p:nvSpPr>
+          <p:cNvPr id="25" name="Slide Number Placeholder 0"/>
+          <p:cNvSpPr>
+            <a:spLocks noGrp="1"/>
+          </p:cNvSpPr>
+          <p:nvPr>
+            <p:ph type="sldNum" sz="quarter" idx="4294967295"/>
+          </p:nvPr>
+        </p:nvSpPr>
+        <p:spPr>
+          <a:xfrm>
+            <a:off x="27432" y="91440"/>
+            <a:ext cx="585216" cy="475488"/>
+          </a:xfrm>
+          <a:prstGeom prst="rect">
+            <a:avLst/>
+          </a:prstGeom>
+          <a:extLst>
+            <a:ext uri="{C572A759-6A51-4108-AA02-DFA0A04FC94B}">
+              <ma14:wrappingTextBoxFlag xmlns:ma14="http://schemas.microsoft.com/office/mac/drawingml/2011/main" val="0"/>
+            </a:ext>
+          </a:extLst>
+        </p:spPr>
+        <p:txBody>
+          <a:bodyPr/>
+          <a:lstStyle>
+            <a:lvl1pPr>
+              <a:defRPr sz="2000">
+                <a:solidFill>
+                  <a:srgbClr val="FFFFFF"/>
+                </a:solidFill>
+                <a:latin typeface="Calibri"/>
+                <a:ea typeface="Calibri"/>
+                <a:cs typeface="Calibri"/>
+              </a:defRPr>
+            </a:lvl1pPr>
+          </a:lstStyle>
+          <a:p>
+            <a:pPr algn="ctr"/>
+            <a:fld id="{F7021451-1387-4CA6-816F-3879F97B5CBC}" type="slidenum">
+              <a:rPr b="1" lang="en-US"/>
+              <a:t>55</a:t>
+            </a:fld>
+            <a:endParaRPr lang="en-US"/>
+          </a:p>
+        </p:txBody>
+      </p:sp>
+    </p:spTree>
+  </p:cSld>
+  <p:clrMapOvr>
+    <a:masterClrMapping/>
+  </p:clrMapOvr>
+</p:sld>
+</file>
+
+<file path=ppt/slides/slide56.xml><?xml version="1.0" encoding="utf-8"?>
+<p:sld xmlns:a="http://schemas.openxmlformats.org/drawingml/2006/main" xmlns:r="http://schemas.openxmlformats.org/officeDocument/2006/relationships" xmlns:p="http://schemas.openxmlformats.org/presentationml/2006/main">
+  <p:cSld name="Slide 56">
+    <p:spTree>
+      <p:nvGrpSpPr>
+        <p:cNvPr id="1" name=""/>
+        <p:cNvGrpSpPr/>
+        <p:nvPr/>
+      </p:nvGrpSpPr>
+      <p:grpSpPr>
+        <a:xfrm>
+          <a:off x="0" y="0"/>
+          <a:ext cx="0" cy="0"/>
+          <a:chOff x="0" y="0"/>
+          <a:chExt cx="0" cy="0"/>
+        </a:xfrm>
+      </p:grpSpPr>
+      <p:sp>
+        <p:nvSpPr>
+          <p:cNvPr id="2" name="Text 0"/>
+          <p:cNvSpPr/>
+          <p:nvPr/>
+        </p:nvSpPr>
+        <p:spPr>
+          <a:xfrm>
+            <a:off x="457200" y="713232"/>
+            <a:ext cx="11368735" cy="274320"/>
+          </a:xfrm>
+          <a:prstGeom prst="rect">
+            <a:avLst/>
+          </a:prstGeom>
+          <a:noFill/>
+          <a:ln/>
+        </p:spPr>
+        <p:txBody>
+          <a:bodyPr wrap="square" lIns="0" tIns="0" rIns="0" bIns="0" rtlCol="0" anchor="ctr"/>
+          <a:lstStyle/>
+          <a:p>
+            <a:pPr algn="r" indent="0" marL="0">
+              <a:buNone/>
+            </a:pPr>
+            <a:r>
+              <a:rPr lang="en-US" sz="1400" b="1" dirty="0">
+                <a:solidFill>
+                  <a:srgbClr val="1C3F6E"/>
+                </a:solidFill>
+                <a:latin typeface="Calibri" pitchFamily="34" charset="0"/>
+                <a:ea typeface="Calibri" pitchFamily="34" charset="-122"/>
+                <a:cs typeface="Calibri" pitchFamily="34" charset="-120"/>
+              </a:rPr>
+              <a:t>REMEDIATION</a:t>
+            </a:r>
+            <a:endParaRPr lang="en-US" sz="1400" dirty="0"/>
+          </a:p>
+        </p:txBody>
+      </p:sp>
+      <p:pic>
+        <p:nvPicPr>
+          <p:cNvPr id="3" name="Image 0" descr="/home/claude/f4/img/minesec_sheet.png">    </p:cNvPr>
+          <p:cNvPicPr>
+            <a:picLocks noChangeAspect="1"/>
+          </p:cNvPicPr>
+          <p:nvPr/>
+        </p:nvPicPr>
+        <p:blipFill>
+          <a:blip r:embed="rId1"/>
+          <a:stretch>
+            <a:fillRect/>
+          </a:stretch>
+        </p:blipFill>
+        <p:spPr>
+          <a:xfrm>
+            <a:off x="0" y="658368"/>
+            <a:ext cx="2468880" cy="5833872"/>
+          </a:xfrm>
+          <a:prstGeom prst="rect">
+            <a:avLst/>
+          </a:prstGeom>
+        </p:spPr>
+      </p:pic>
+      <p:sp>
+        <p:nvSpPr>
+          <p:cNvPr id="4" name="Text 1"/>
+          <p:cNvSpPr/>
+          <p:nvPr/>
+        </p:nvSpPr>
+        <p:spPr>
+          <a:xfrm>
+            <a:off x="2697480" y="1005840"/>
+            <a:ext cx="9174175" cy="731520"/>
+          </a:xfrm>
+          <a:prstGeom prst="rect">
+            <a:avLst/>
+          </a:prstGeom>
+          <a:noFill/>
+          <a:ln/>
+        </p:spPr>
+        <p:txBody>
+          <a:bodyPr wrap="square" lIns="0" tIns="0" rIns="0" bIns="0" rtlCol="0" anchor="ctr">
+            <a:normAutofit/>
+          </a:bodyPr>
+          <a:lstStyle/>
+          <a:p>
+            <a:pPr algn="ctr" indent="0" marL="0">
+              <a:buNone/>
+            </a:pPr>
+            <a:r>
+              <a:rPr lang="en-US" sz="3600" b="1" dirty="0">
+                <a:solidFill>
+                  <a:srgbClr val="990011"/>
+                </a:solidFill>
+                <a:latin typeface="Times New Roman" pitchFamily="34" charset="0"/>
+                <a:ea typeface="Times New Roman" pitchFamily="34" charset="-122"/>
+                <a:cs typeface="Times New Roman" pitchFamily="34" charset="-120"/>
+              </a:rPr>
+              <a:t>Remediation</a:t>
+            </a:r>
+            <a:endParaRPr lang="en-US" sz="3600" dirty="0"/>
+          </a:p>
+        </p:txBody>
+      </p:sp>
+      <p:sp>
+        <p:nvSpPr>
+          <p:cNvPr id="5" name="Text 2"/>
+          <p:cNvSpPr/>
+          <p:nvPr/>
+        </p:nvSpPr>
+        <p:spPr>
+          <a:xfrm>
+            <a:off x="2697480" y="1783080"/>
+            <a:ext cx="9174175" cy="4663440"/>
+          </a:xfrm>
+          <a:prstGeom prst="rect">
+            <a:avLst/>
+          </a:prstGeom>
+          <a:noFill/>
+          <a:ln/>
+        </p:spPr>
+        <p:txBody>
+          <a:bodyPr wrap="square" lIns="0" tIns="0" rIns="0" bIns="0" rtlCol="0" anchor="t"/>
+          <a:lstStyle/>
+          <a:p>
+            <a:pPr algn="l" indent="0" marL="0">
+              <a:spcAft>
+                <a:spcPts val="800"/>
+              </a:spcAft>
+              <a:buNone/>
+            </a:pPr>
+            <a:r>
+              <a:rPr lang="en-US" sz="4000" b="1" dirty="0">
+                <a:solidFill>
+                  <a:srgbClr val="111111"/>
+                </a:solidFill>
+                <a:latin typeface="Times New Roman" pitchFamily="34" charset="0"/>
+                <a:ea typeface="Times New Roman" pitchFamily="34" charset="-122"/>
+                <a:cs typeface="Times New Roman" pitchFamily="34" charset="-120"/>
+              </a:rPr>
+              <a:t>Fill in the blanks:</a:t>
+            </a:r>
+            <a:endParaRPr lang="en-US" sz="4000" dirty="0"/>
+          </a:p>
+          <a:p>
+            <a:pPr algn="l" marL="342900" indent="-342900">
+              <a:spcAft>
+                <a:spcPts val="800"/>
+              </a:spcAft>
+              <a:buSzPct val="100000"/>
+              <a:buFont typeface="+mj-lt"/>
+              <a:buAutoNum type="arabicPeriod" startAt="1"/>
+            </a:pPr>
+            <a:r>
+              <a:rPr lang="en-US" sz="4000" dirty="0">
+                <a:solidFill>
+                  <a:srgbClr val="111111"/>
+                </a:solidFill>
+                <a:latin typeface="Times New Roman" pitchFamily="34" charset="0"/>
+                <a:ea typeface="Times New Roman" pitchFamily="34" charset="-122"/>
+                <a:cs typeface="Times New Roman" pitchFamily="34" charset="-120"/>
+              </a:rPr>
+              <a:t>A long period without enough rain is a ______.</a:t>
+            </a:r>
+            <a:endParaRPr lang="en-US" sz="4000" dirty="0"/>
+          </a:p>
+          <a:p>
+            <a:pPr algn="l" marL="342900" indent="-342900">
+              <a:spcAft>
+                <a:spcPts val="800"/>
+              </a:spcAft>
+              <a:buSzPct val="100000"/>
+              <a:buFont typeface="+mj-lt"/>
+              <a:buAutoNum type="arabicPeriod" startAt="1"/>
+            </a:pPr>
+            <a:r>
+              <a:rPr lang="en-US" sz="4000" dirty="0">
+                <a:solidFill>
+                  <a:srgbClr val="111111"/>
+                </a:solidFill>
+                <a:latin typeface="Times New Roman" pitchFamily="34" charset="0"/>
+                <a:ea typeface="Times New Roman" pitchFamily="34" charset="-122"/>
+                <a:cs typeface="Times New Roman" pitchFamily="34" charset="-120"/>
+              </a:rPr>
+              <a:t>The spread of the desert is ______.</a:t>
+            </a:r>
+            <a:endParaRPr lang="en-US" sz="4000" dirty="0"/>
+          </a:p>
+          <a:p>
+            <a:pPr algn="l" marL="342900" indent="-342900">
+              <a:spcAft>
+                <a:spcPts val="800"/>
+              </a:spcAft>
+              <a:buSzPct val="100000"/>
+              <a:buFont typeface="+mj-lt"/>
+              <a:buAutoNum type="arabicPeriod" startAt="1"/>
+            </a:pPr>
+            <a:r>
+              <a:rPr lang="en-US" sz="4000" dirty="0">
+                <a:solidFill>
+                  <a:srgbClr val="111111"/>
+                </a:solidFill>
+                <a:latin typeface="Times New Roman" pitchFamily="34" charset="0"/>
+                <a:ea typeface="Times New Roman" pitchFamily="34" charset="-122"/>
+                <a:cs typeface="Times New Roman" pitchFamily="34" charset="-120"/>
+              </a:rPr>
+              <a:t>In 2012, water from the ______ Dam flooded villages.</a:t>
+            </a:r>
+            <a:endParaRPr lang="en-US" sz="4000" dirty="0"/>
+          </a:p>
+        </p:txBody>
+      </p:sp>
+      <p:sp>
+        <p:nvSpPr>
+          <p:cNvPr id="25" name="Slide Number Placeholder 0"/>
+          <p:cNvSpPr>
+            <a:spLocks noGrp="1"/>
+          </p:cNvSpPr>
+          <p:nvPr>
+            <p:ph type="sldNum" sz="quarter" idx="4294967295"/>
+          </p:nvPr>
+        </p:nvSpPr>
+        <p:spPr>
+          <a:xfrm>
+            <a:off x="27432" y="91440"/>
+            <a:ext cx="585216" cy="475488"/>
+          </a:xfrm>
+          <a:prstGeom prst="rect">
+            <a:avLst/>
+          </a:prstGeom>
+          <a:extLst>
+            <a:ext uri="{C572A759-6A51-4108-AA02-DFA0A04FC94B}">
+              <ma14:wrappingTextBoxFlag xmlns:ma14="http://schemas.microsoft.com/office/mac/drawingml/2011/main" val="0"/>
+            </a:ext>
+          </a:extLst>
+        </p:spPr>
+        <p:txBody>
+          <a:bodyPr/>
+          <a:lstStyle>
+            <a:lvl1pPr>
+              <a:defRPr sz="2000">
+                <a:solidFill>
+                  <a:srgbClr val="FFFFFF"/>
+                </a:solidFill>
+                <a:latin typeface="Calibri"/>
+                <a:ea typeface="Calibri"/>
+                <a:cs typeface="Calibri"/>
+              </a:defRPr>
+            </a:lvl1pPr>
+          </a:lstStyle>
+          <a:p>
+            <a:pPr algn="ctr"/>
+            <a:fld id="{F7021451-1387-4CA6-816F-3879F97B5CBC}" type="slidenum">
+              <a:rPr b="1" lang="en-US"/>
+              <a:t>56</a:t>
+            </a:fld>
+            <a:endParaRPr lang="en-US"/>
+          </a:p>
+        </p:txBody>
+      </p:sp>
+    </p:spTree>
+  </p:cSld>
+  <p:clrMapOvr>
+    <a:masterClrMapping/>
+  </p:clrMapOvr>
+</p:sld>
+</file>
+
+<file path=ppt/slides/slide57.xml><?xml version="1.0" encoding="utf-8"?>
+<p:sld xmlns:a="http://schemas.openxmlformats.org/drawingml/2006/main" xmlns:r="http://schemas.openxmlformats.org/officeDocument/2006/relationships" xmlns:p="http://schemas.openxmlformats.org/presentationml/2006/main">
+  <p:cSld name="Slide 57">
+    <p:spTree>
+      <p:nvGrpSpPr>
+        <p:cNvPr id="1" name=""/>
+        <p:cNvGrpSpPr/>
+        <p:nvPr/>
+      </p:nvGrpSpPr>
+      <p:grpSpPr>
+        <a:xfrm>
+          <a:off x="0" y="0"/>
+          <a:ext cx="0" cy="0"/>
+          <a:chOff x="0" y="0"/>
+          <a:chExt cx="0" cy="0"/>
+        </a:xfrm>
+      </p:grpSpPr>
+      <p:sp>
+        <p:nvSpPr>
+          <p:cNvPr id="2" name="Text 0"/>
+          <p:cNvSpPr/>
+          <p:nvPr/>
+        </p:nvSpPr>
+        <p:spPr>
+          <a:xfrm>
+            <a:off x="457200" y="713232"/>
+            <a:ext cx="11368735" cy="274320"/>
+          </a:xfrm>
+          <a:prstGeom prst="rect">
+            <a:avLst/>
+          </a:prstGeom>
+          <a:noFill/>
+          <a:ln/>
+        </p:spPr>
+        <p:txBody>
+          <a:bodyPr wrap="square" lIns="0" tIns="0" rIns="0" bIns="0" rtlCol="0" anchor="ctr"/>
+          <a:lstStyle/>
+          <a:p>
+            <a:pPr algn="r" indent="0" marL="0">
+              <a:buNone/>
+            </a:pPr>
+            <a:r>
+              <a:rPr lang="en-US" sz="1400" b="1" dirty="0">
+                <a:solidFill>
+                  <a:srgbClr val="1C3F6E"/>
+                </a:solidFill>
+                <a:latin typeface="Calibri" pitchFamily="34" charset="0"/>
+                <a:ea typeface="Calibri" pitchFamily="34" charset="-122"/>
+                <a:cs typeface="Calibri" pitchFamily="34" charset="-120"/>
+              </a:rPr>
+              <a:t>HOMEWORK</a:t>
+            </a:r>
+            <a:endParaRPr lang="en-US" sz="1400" dirty="0"/>
+          </a:p>
+        </p:txBody>
+      </p:sp>
+      <p:pic>
+        <p:nvPicPr>
+          <p:cNvPr id="3" name="Image 0" descr="/home/claude/f4/img/minesec_sheet.png">    </p:cNvPr>
+          <p:cNvPicPr>
+            <a:picLocks noChangeAspect="1"/>
+          </p:cNvPicPr>
+          <p:nvPr/>
+        </p:nvPicPr>
+        <p:blipFill>
+          <a:blip r:embed="rId1"/>
+          <a:stretch>
+            <a:fillRect/>
+          </a:stretch>
+        </p:blipFill>
+        <p:spPr>
+          <a:xfrm>
+            <a:off x="0" y="658368"/>
+            <a:ext cx="5120640" cy="5833872"/>
+          </a:xfrm>
+          <a:prstGeom prst="rect">
+            <a:avLst/>
+          </a:prstGeom>
+        </p:spPr>
+      </p:pic>
+      <p:sp>
+        <p:nvSpPr>
+          <p:cNvPr id="4" name="Text 1"/>
+          <p:cNvSpPr/>
+          <p:nvPr/>
+        </p:nvSpPr>
+        <p:spPr>
+          <a:xfrm>
+            <a:off x="5349240" y="1005840"/>
+            <a:ext cx="6522415" cy="731520"/>
+          </a:xfrm>
+          <a:prstGeom prst="rect">
+            <a:avLst/>
+          </a:prstGeom>
+          <a:noFill/>
+          <a:ln/>
+        </p:spPr>
+        <p:txBody>
+          <a:bodyPr wrap="square" lIns="0" tIns="0" rIns="0" bIns="0" rtlCol="0" anchor="ctr">
+            <a:normAutofit/>
+          </a:bodyPr>
+          <a:lstStyle/>
+          <a:p>
+            <a:pPr algn="ctr" indent="0" marL="0">
+              <a:buNone/>
+            </a:pPr>
+            <a:r>
+              <a:rPr lang="en-US" sz="3600" b="1" dirty="0">
+                <a:solidFill>
+                  <a:srgbClr val="990011"/>
+                </a:solidFill>
+                <a:latin typeface="Times New Roman" pitchFamily="34" charset="0"/>
+                <a:ea typeface="Times New Roman" pitchFamily="34" charset="-122"/>
+                <a:cs typeface="Times New Roman" pitchFamily="34" charset="-120"/>
+              </a:rPr>
+              <a:t>Homework</a:t>
+            </a:r>
+            <a:endParaRPr lang="en-US" sz="3600" dirty="0"/>
+          </a:p>
+        </p:txBody>
+      </p:sp>
+      <p:sp>
+        <p:nvSpPr>
+          <p:cNvPr id="5" name="Text 2"/>
+          <p:cNvSpPr/>
+          <p:nvPr/>
+        </p:nvSpPr>
+        <p:spPr>
+          <a:xfrm>
+            <a:off x="5349240" y="1783080"/>
+            <a:ext cx="6522415" cy="4663440"/>
+          </a:xfrm>
+          <a:prstGeom prst="rect">
+            <a:avLst/>
+          </a:prstGeom>
+          <a:noFill/>
+          <a:ln/>
+        </p:spPr>
+        <p:txBody>
+          <a:bodyPr wrap="square" lIns="0" tIns="0" rIns="0" bIns="0" rtlCol="0" anchor="t"/>
+          <a:lstStyle/>
+          <a:p>
+            <a:pPr algn="l" indent="0" marL="0">
+              <a:spcAft>
+                <a:spcPts val="800"/>
+              </a:spcAft>
+              <a:buNone/>
+            </a:pPr>
+            <a:r>
+              <a:rPr lang="en-US" sz="4000" dirty="0">
+                <a:solidFill>
+                  <a:srgbClr val="111111"/>
+                </a:solidFill>
+                <a:latin typeface="Times New Roman" pitchFamily="34" charset="0"/>
+                <a:ea typeface="Times New Roman" pitchFamily="34" charset="-122"/>
+                <a:cs typeface="Times New Roman" pitchFamily="34" charset="-120"/>
+              </a:rPr>
+              <a:t>Give two causes of water scarcity.</a:t>
+            </a:r>
+            <a:endParaRPr lang="en-US" sz="4000" dirty="0"/>
+          </a:p>
+        </p:txBody>
+      </p:sp>
+      <p:sp>
+        <p:nvSpPr>
+          <p:cNvPr id="25" name="Slide Number Placeholder 0"/>
+          <p:cNvSpPr>
+            <a:spLocks noGrp="1"/>
+          </p:cNvSpPr>
+          <p:nvPr>
+            <p:ph type="sldNum" sz="quarter" idx="4294967295"/>
+          </p:nvPr>
+        </p:nvSpPr>
+        <p:spPr>
+          <a:xfrm>
+            <a:off x="27432" y="91440"/>
+            <a:ext cx="585216" cy="475488"/>
+          </a:xfrm>
+          <a:prstGeom prst="rect">
+            <a:avLst/>
+          </a:prstGeom>
+          <a:extLst>
+            <a:ext uri="{C572A759-6A51-4108-AA02-DFA0A04FC94B}">
+              <ma14:wrappingTextBoxFlag xmlns:ma14="http://schemas.microsoft.com/office/mac/drawingml/2011/main" val="0"/>
+            </a:ext>
+          </a:extLst>
+        </p:spPr>
+        <p:txBody>
+          <a:bodyPr/>
+          <a:lstStyle>
+            <a:lvl1pPr>
+              <a:defRPr sz="2000">
+                <a:solidFill>
+                  <a:srgbClr val="FFFFFF"/>
+                </a:solidFill>
+                <a:latin typeface="Calibri"/>
+                <a:ea typeface="Calibri"/>
+                <a:cs typeface="Calibri"/>
+              </a:defRPr>
+            </a:lvl1pPr>
+          </a:lstStyle>
+          <a:p>
+            <a:pPr algn="ctr"/>
+            <a:fld id="{F7021451-1387-4CA6-816F-3879F97B5CBC}" type="slidenum">
+              <a:rPr b="1" lang="en-US"/>
+              <a:t>57</a:t>
+            </a:fld>
+            <a:endParaRPr lang="en-US"/>
+          </a:p>
+        </p:txBody>
+      </p:sp>
+    </p:spTree>
+  </p:cSld>
+  <p:clrMapOvr>
+    <a:masterClrMapping/>
+  </p:clrMapOvr>
+</p:sld>
+</file>
+
+<file path=ppt/slides/slide58.xml><?xml version="1.0" encoding="utf-8"?>
+<p:sld xmlns:a="http://schemas.openxmlformats.org/drawingml/2006/main" xmlns:r="http://schemas.openxmlformats.org/officeDocument/2006/relationships" xmlns:p="http://schemas.openxmlformats.org/presentationml/2006/main">
+  <p:cSld name="Slide 58">
+    <p:spTree>
+      <p:nvGrpSpPr>
+        <p:cNvPr id="1" name=""/>
+        <p:cNvGrpSpPr/>
+        <p:nvPr/>
+      </p:nvGrpSpPr>
+      <p:grpSpPr>
+        <a:xfrm>
+          <a:off x="0" y="0"/>
+          <a:ext cx="0" cy="0"/>
+          <a:chOff x="0" y="0"/>
+          <a:chExt cx="0" cy="0"/>
+        </a:xfrm>
+      </p:grpSpPr>
+      <p:sp>
+        <p:nvSpPr>
+          <p:cNvPr id="2" name="Text 0"/>
+          <p:cNvSpPr/>
+          <p:nvPr/>
+        </p:nvSpPr>
+        <p:spPr>
+          <a:xfrm>
+            <a:off x="457200" y="713232"/>
+            <a:ext cx="11368735" cy="274320"/>
+          </a:xfrm>
+          <a:prstGeom prst="rect">
+            <a:avLst/>
+          </a:prstGeom>
+          <a:noFill/>
+          <a:ln/>
+        </p:spPr>
+        <p:txBody>
+          <a:bodyPr wrap="square" lIns="0" tIns="0" rIns="0" bIns="0" rtlCol="0" anchor="ctr"/>
+          <a:lstStyle/>
+          <a:p>
+            <a:pPr algn="r" indent="0" marL="0">
+              <a:buNone/>
+            </a:pPr>
+            <a:r>
+              <a:rPr lang="en-US" sz="1400" b="1" dirty="0">
+                <a:solidFill>
+                  <a:srgbClr val="1C3F6E"/>
+                </a:solidFill>
+                <a:latin typeface="Calibri" pitchFamily="34" charset="0"/>
+                <a:ea typeface="Calibri" pitchFamily="34" charset="-122"/>
+                <a:cs typeface="Calibri" pitchFamily="34" charset="-120"/>
+              </a:rPr>
+              <a:t>NEXT LESSON</a:t>
+            </a:r>
+            <a:endParaRPr lang="en-US" sz="1400" dirty="0"/>
+          </a:p>
+        </p:txBody>
+      </p:sp>
+      <p:pic>
+        <p:nvPicPr>
+          <p:cNvPr id="3" name="Image 0" descr="/home/claude/f4/img/minesec_sheet.png">    </p:cNvPr>
+          <p:cNvPicPr>
+            <a:picLocks noChangeAspect="1"/>
+          </p:cNvPicPr>
+          <p:nvPr/>
+        </p:nvPicPr>
+        <p:blipFill>
+          <a:blip r:embed="rId1"/>
+          <a:stretch>
+            <a:fillRect/>
+          </a:stretch>
+        </p:blipFill>
+        <p:spPr>
+          <a:xfrm>
+            <a:off x="0" y="658368"/>
+            <a:ext cx="5120640" cy="5833872"/>
+          </a:xfrm>
+          <a:prstGeom prst="rect">
+            <a:avLst/>
+          </a:prstGeom>
+        </p:spPr>
+      </p:pic>
+      <p:sp>
+        <p:nvSpPr>
+          <p:cNvPr id="4" name="Text 1"/>
+          <p:cNvSpPr/>
+          <p:nvPr/>
+        </p:nvSpPr>
+        <p:spPr>
+          <a:xfrm>
+            <a:off x="5349240" y="1005840"/>
+            <a:ext cx="6522415" cy="731520"/>
+          </a:xfrm>
+          <a:prstGeom prst="rect">
+            <a:avLst/>
+          </a:prstGeom>
+          <a:noFill/>
+          <a:ln/>
+        </p:spPr>
+        <p:txBody>
+          <a:bodyPr wrap="square" lIns="0" tIns="0" rIns="0" bIns="0" rtlCol="0" anchor="ctr">
+            <a:normAutofit/>
+          </a:bodyPr>
+          <a:lstStyle/>
+          <a:p>
+            <a:pPr algn="ctr" indent="0" marL="0">
+              <a:buNone/>
+            </a:pPr>
+            <a:r>
+              <a:rPr lang="en-US" sz="3600" b="1" dirty="0">
+                <a:solidFill>
+                  <a:srgbClr val="990011"/>
+                </a:solidFill>
+                <a:latin typeface="Times New Roman" pitchFamily="34" charset="0"/>
+                <a:ea typeface="Times New Roman" pitchFamily="34" charset="-122"/>
+                <a:cs typeface="Times New Roman" pitchFamily="34" charset="-120"/>
+              </a:rPr>
+              <a:t>Next Lesson</a:t>
+            </a:r>
+            <a:endParaRPr lang="en-US" sz="3600" dirty="0"/>
+          </a:p>
+        </p:txBody>
+      </p:sp>
+      <p:sp>
+        <p:nvSpPr>
+          <p:cNvPr id="5" name="Text 2"/>
+          <p:cNvSpPr/>
+          <p:nvPr/>
+        </p:nvSpPr>
+        <p:spPr>
+          <a:xfrm>
+            <a:off x="5349240" y="1783080"/>
+            <a:ext cx="6522415" cy="4663440"/>
+          </a:xfrm>
+          <a:prstGeom prst="rect">
+            <a:avLst/>
+          </a:prstGeom>
+          <a:noFill/>
+          <a:ln/>
+        </p:spPr>
+        <p:txBody>
+          <a:bodyPr wrap="square" lIns="0" tIns="0" rIns="0" bIns="0" rtlCol="0" anchor="ctr"/>
+          <a:lstStyle/>
+          <a:p>
+            <a:pPr algn="ctr" indent="0" marL="0">
+              <a:spcAft>
+                <a:spcPts val="800"/>
+              </a:spcAft>
+              <a:buNone/>
+            </a:pPr>
+            <a:r>
+              <a:rPr lang="en-US" sz="4000" b="1" dirty="0">
+                <a:solidFill>
+                  <a:srgbClr val="111111"/>
+                </a:solidFill>
+                <a:latin typeface="Times New Roman" pitchFamily="34" charset="0"/>
+                <a:ea typeface="Times New Roman" pitchFamily="34" charset="-122"/>
+                <a:cs typeface="Times New Roman" pitchFamily="34" charset="-120"/>
+              </a:rPr>
+              <a:t>Our next lesson will be on:</a:t>
+            </a:r>
+            <a:endParaRPr lang="en-US" sz="4000" dirty="0"/>
+          </a:p>
+          <a:p>
+            <a:pPr algn="ctr" indent="0" marL="0">
+              <a:spcAft>
+                <a:spcPts val="800"/>
+              </a:spcAft>
+              <a:buNone/>
+            </a:pPr>
+            <a:r>
+              <a:rPr lang="en-US" sz="4000" b="1" dirty="0">
+                <a:solidFill>
+                  <a:srgbClr val="990011"/>
+                </a:solidFill>
+                <a:latin typeface="Times New Roman" pitchFamily="34" charset="0"/>
+                <a:ea typeface="Times New Roman" pitchFamily="34" charset="-122"/>
+                <a:cs typeface="Times New Roman" pitchFamily="34" charset="-120"/>
+              </a:rPr>
+              <a:t>Lesson 42: Water Scarcity</a:t>
+            </a:r>
+            <a:endParaRPr lang="en-US" sz="4000" dirty="0"/>
+          </a:p>
+        </p:txBody>
+      </p:sp>
+      <p:sp>
+        <p:nvSpPr>
+          <p:cNvPr id="25" name="Slide Number Placeholder 0"/>
+          <p:cNvSpPr>
+            <a:spLocks noGrp="1"/>
+          </p:cNvSpPr>
+          <p:nvPr>
+            <p:ph type="sldNum" sz="quarter" idx="4294967295"/>
+          </p:nvPr>
+        </p:nvSpPr>
+        <p:spPr>
+          <a:xfrm>
+            <a:off x="27432" y="91440"/>
+            <a:ext cx="585216" cy="475488"/>
+          </a:xfrm>
+          <a:prstGeom prst="rect">
+            <a:avLst/>
+          </a:prstGeom>
+          <a:extLst>
+            <a:ext uri="{C572A759-6A51-4108-AA02-DFA0A04FC94B}">
+              <ma14:wrappingTextBoxFlag xmlns:ma14="http://schemas.microsoft.com/office/mac/drawingml/2011/main" val="0"/>
+            </a:ext>
+          </a:extLst>
+        </p:spPr>
+        <p:txBody>
+          <a:bodyPr/>
+          <a:lstStyle>
+            <a:lvl1pPr>
+              <a:defRPr sz="2000">
+                <a:solidFill>
+                  <a:srgbClr val="FFFFFF"/>
+                </a:solidFill>
+                <a:latin typeface="Calibri"/>
+                <a:ea typeface="Calibri"/>
+                <a:cs typeface="Calibri"/>
+              </a:defRPr>
+            </a:lvl1pPr>
+          </a:lstStyle>
+          <a:p>
+            <a:pPr algn="ctr"/>
+            <a:fld id="{F7021451-1387-4CA6-816F-3879F97B5CBC}" type="slidenum">
+              <a:rPr b="1" lang="en-US"/>
+              <a:t>58</a:t>
+            </a:fld>
+            <a:endParaRPr lang="en-US"/>
+          </a:p>
+        </p:txBody>
+      </p:sp>
+    </p:spTree>
+  </p:cSld>
+  <p:clrMapOvr>
+    <a:masterClrMapping/>
+  </p:clrMapOvr>
+</p:sld>
+</file>
+
+<file path=ppt/slides/slide59.xml><?xml version="1.0" encoding="utf-8"?>
+<p:sld xmlns:a="http://schemas.openxmlformats.org/drawingml/2006/main" xmlns:r="http://schemas.openxmlformats.org/officeDocument/2006/relationships" xmlns:p="http://schemas.openxmlformats.org/presentationml/2006/main">
+  <p:cSld name="Slide 59">
+    <p:spTree>
+      <p:nvGrpSpPr>
+        <p:cNvPr id="1" name=""/>
+        <p:cNvGrpSpPr/>
+        <p:nvPr/>
+      </p:nvGrpSpPr>
+      <p:grpSpPr>
+        <a:xfrm>
+          <a:off x="0" y="0"/>
+          <a:ext cx="0" cy="0"/>
+          <a:chOff x="0" y="0"/>
+          <a:chExt cx="0" cy="0"/>
+        </a:xfrm>
+      </p:grpSpPr>
+      <p:sp>
+        <p:nvSpPr>
+          <p:cNvPr id="2" name="Text 0"/>
+          <p:cNvSpPr/>
+          <p:nvPr/>
+        </p:nvSpPr>
+        <p:spPr>
+          <a:xfrm>
+            <a:off x="457200" y="713232"/>
+            <a:ext cx="11368735" cy="274320"/>
+          </a:xfrm>
+          <a:prstGeom prst="rect">
+            <a:avLst/>
+          </a:prstGeom>
+          <a:noFill/>
+          <a:ln/>
+        </p:spPr>
+        <p:txBody>
+          <a:bodyPr wrap="square" lIns="0" tIns="0" rIns="0" bIns="0" rtlCol="0" anchor="ctr"/>
+          <a:lstStyle/>
+          <a:p>
+            <a:pPr algn="r" indent="0" marL="0">
+              <a:buNone/>
+            </a:pPr>
+            <a:r>
+              <a:rPr lang="en-US" sz="1400" b="1" dirty="0">
+                <a:solidFill>
+                  <a:srgbClr val="1C3F6E"/>
+                </a:solidFill>
+                <a:latin typeface="Calibri" pitchFamily="34" charset="0"/>
+                <a:ea typeface="Calibri" pitchFamily="34" charset="-122"/>
+                <a:cs typeface="Calibri" pitchFamily="34" charset="-120"/>
+              </a:rPr>
+              <a:t>BILINGUAL GAME</a:t>
+            </a:r>
+            <a:endParaRPr lang="en-US" sz="1400" dirty="0"/>
+          </a:p>
+        </p:txBody>
+      </p:sp>
+      <p:sp>
+        <p:nvSpPr>
+          <p:cNvPr id="3" name="Text 1"/>
+          <p:cNvSpPr/>
+          <p:nvPr/>
+        </p:nvSpPr>
+        <p:spPr>
+          <a:xfrm>
+            <a:off x="457200" y="1005840"/>
+            <a:ext cx="11277295" cy="731520"/>
+          </a:xfrm>
+          <a:prstGeom prst="rect">
+            <a:avLst/>
+          </a:prstGeom>
+          <a:noFill/>
+          <a:ln/>
+        </p:spPr>
+        <p:txBody>
+          <a:bodyPr wrap="square" lIns="0" tIns="0" rIns="0" bIns="0" rtlCol="0" anchor="ctr"/>
+          <a:lstStyle/>
+          <a:p>
+            <a:pPr algn="ctr" indent="0" marL="0">
+              <a:buNone/>
+            </a:pPr>
+            <a:r>
+              <a:rPr lang="en-US" sz="3600" b="1" dirty="0">
+                <a:solidFill>
+                  <a:srgbClr val="990011"/>
+                </a:solidFill>
+                <a:latin typeface="Times New Roman" pitchFamily="34" charset="0"/>
+                <a:ea typeface="Times New Roman" pitchFamily="34" charset="-122"/>
+                <a:cs typeface="Times New Roman" pitchFamily="34" charset="-120"/>
+              </a:rPr>
               <a:t>Bilingual Game (Jeu Bilingue)</a:t>
             </a:r>
             <a:endParaRPr lang="en-US" sz="3600" dirty="0"/>
@@ -17023,7 +22669,7 @@
       </p:sp>
       <p:graphicFrame>
         <p:nvGraphicFramePr>
-          <p:cNvPr id="48" name="Table 0"/>
+          <p:cNvPr id="60" name="Table 0"/>
           <p:cNvGraphicFramePr>
             <a:graphicFrameLocks noGrp="1"/>
           </p:cNvGraphicFramePr>
@@ -18335,7 +23981,7 @@
             <a:pPr algn="ctr"/>
             <a:fld id="{F7021451-1387-4CA6-816F-3879F97B5CBC}" type="slidenum">
               <a:rPr b="1" lang="en-US"/>
-              <a:t>47</a:t>
+              <a:t>59</a:t>
             </a:fld>
             <a:endParaRPr lang="en-US"/>
           </a:p>
@@ -18349,9 +23995,9 @@
 </p:sld>
 </file>
 
-<file path=ppt/slides/slide48.xml><?xml version="1.0" encoding="utf-8"?>
+<file path=ppt/slides/slide6.xml><?xml version="1.0" encoding="utf-8"?>
 <p:sld xmlns:a="http://schemas.openxmlformats.org/drawingml/2006/main" xmlns:r="http://schemas.openxmlformats.org/officeDocument/2006/relationships" xmlns:p="http://schemas.openxmlformats.org/presentationml/2006/main">
-  <p:cSld name="Slide 48">
+  <p:cSld name="Slide 6">
     <p:spTree>
       <p:nvGrpSpPr>
         <p:cNvPr id="1" name=""/>
@@ -18399,22 +24045,46 @@
                 <a:ea typeface="Calibri" pitchFamily="34" charset="-122"/>
                 <a:cs typeface="Calibri" pitchFamily="34" charset="-120"/>
               </a:rPr>
-              <a:t>LOGBOOK</a:t>
+              <a:t>LESSON PLAN</a:t>
             </a:r>
             <a:endParaRPr lang="en-US" sz="1400" dirty="0"/>
           </a:p>
         </p:txBody>
       </p:sp>
-      <p:sp>
-        <p:nvSpPr>
-          <p:cNvPr id="3" name="Text 1"/>
+      <p:pic>
+        <p:nvPicPr>
+          <p:cNvPr id="3" name="Image 0" descr="/home/claude/f4/img/minesec_sheet.png">    </p:cNvPr>
+          <p:cNvPicPr>
+            <a:picLocks noChangeAspect="1"/>
+          </p:cNvPicPr>
+          <p:nvPr/>
+        </p:nvPicPr>
+        <p:blipFill>
+          <a:blip r:embed="rId1"/>
+          <a:stretch>
+            <a:fillRect/>
+          </a:stretch>
+        </p:blipFill>
+        <p:spPr>
+          <a:xfrm>
+            <a:off x="0" y="658368"/>
+            <a:ext cx="2468880" cy="5833872"/>
+          </a:xfrm>
+          <a:prstGeom prst="rect">
+            <a:avLst/>
+          </a:prstGeom>
+        </p:spPr>
+      </p:pic>
+      <p:sp>
+        <p:nvSpPr>
+          <p:cNvPr id="4" name="Text 1"/>
           <p:cNvSpPr/>
           <p:nvPr/>
         </p:nvSpPr>
         <p:spPr>
           <a:xfrm>
-            <a:off x="457200" y="1005840"/>
-            <a:ext cx="11277295" cy="731520"/>
+            <a:off x="2697480" y="1005840"/>
+            <a:ext cx="9174175" cy="731520"/>
           </a:xfrm>
           <a:prstGeom prst="rect">
             <a:avLst/>
@@ -18423,7 +24093,9 @@
           <a:ln/>
         </p:spPr>
         <p:txBody>
-          <a:bodyPr wrap="square" lIns="0" tIns="0" rIns="0" bIns="0" rtlCol="0" anchor="ctr"/>
+          <a:bodyPr wrap="square" lIns="0" tIns="0" rIns="0" bIns="0" rtlCol="0" anchor="ctr">
+            <a:normAutofit/>
+          </a:bodyPr>
           <a:lstStyle/>
           <a:p>
             <a:pPr algn="ctr" indent="0" marL="0">
@@ -18438,6 +24110,311 @@
                 <a:ea typeface="Times New Roman" pitchFamily="34" charset="-122"/>
                 <a:cs typeface="Times New Roman" pitchFamily="34" charset="-120"/>
               </a:rPr>
+              <a:t>Lesson Plan</a:t>
+            </a:r>
+            <a:endParaRPr lang="en-US" sz="3600" dirty="0"/>
+          </a:p>
+        </p:txBody>
+      </p:sp>
+      <p:sp>
+        <p:nvSpPr>
+          <p:cNvPr id="5" name="Text 2"/>
+          <p:cNvSpPr/>
+          <p:nvPr/>
+        </p:nvSpPr>
+        <p:spPr>
+          <a:xfrm>
+            <a:off x="2697480" y="1783080"/>
+            <a:ext cx="9174175" cy="4663440"/>
+          </a:xfrm>
+          <a:prstGeom prst="rect">
+            <a:avLst/>
+          </a:prstGeom>
+          <a:noFill/>
+          <a:ln/>
+        </p:spPr>
+        <p:txBody>
+          <a:bodyPr wrap="square" lIns="0" tIns="0" rIns="0" bIns="0" rtlCol="0" anchor="t"/>
+          <a:lstStyle/>
+          <a:p>
+            <a:pPr algn="l" marL="342900" indent="-342900">
+              <a:spcAft>
+                <a:spcPts val="800"/>
+              </a:spcAft>
+              <a:buSzPct val="100000"/>
+              <a:buFont typeface="+mj-lt"/>
+              <a:buAutoNum type="arabicPeriod" startAt="1"/>
+            </a:pPr>
+            <a:r>
+              <a:rPr lang="en-US" sz="4000" dirty="0">
+                <a:solidFill>
+                  <a:srgbClr val="111111"/>
+                </a:solidFill>
+                <a:latin typeface="Times New Roman" pitchFamily="34" charset="0"/>
+                <a:ea typeface="Times New Roman" pitchFamily="34" charset="-122"/>
+                <a:cs typeface="Times New Roman" pitchFamily="34" charset="-120"/>
+              </a:rPr>
+              <a:t>Correction of the homework</a:t>
+            </a:r>
+            <a:endParaRPr lang="en-US" sz="4000" dirty="0"/>
+          </a:p>
+          <a:p>
+            <a:pPr algn="l" marL="342900" indent="-342900">
+              <a:spcAft>
+                <a:spcPts val="800"/>
+              </a:spcAft>
+              <a:buSzPct val="100000"/>
+              <a:buFont typeface="+mj-lt"/>
+              <a:buAutoNum type="arabicPeriod" startAt="1"/>
+            </a:pPr>
+            <a:r>
+              <a:rPr lang="en-US" sz="4000" dirty="0">
+                <a:solidFill>
+                  <a:srgbClr val="111111"/>
+                </a:solidFill>
+                <a:latin typeface="Times New Roman" pitchFamily="34" charset="0"/>
+                <a:ea typeface="Times New Roman" pitchFamily="34" charset="-122"/>
+                <a:cs typeface="Times New Roman" pitchFamily="34" charset="-120"/>
+              </a:rPr>
+              <a:t>Objectives and recall</a:t>
+            </a:r>
+            <a:endParaRPr lang="en-US" sz="4000" dirty="0"/>
+          </a:p>
+          <a:p>
+            <a:pPr algn="l" marL="342900" indent="-342900">
+              <a:spcAft>
+                <a:spcPts val="800"/>
+              </a:spcAft>
+              <a:buSzPct val="100000"/>
+              <a:buFont typeface="+mj-lt"/>
+              <a:buAutoNum type="arabicPeriod" startAt="1"/>
+            </a:pPr>
+            <a:r>
+              <a:rPr lang="en-US" sz="4000" dirty="0">
+                <a:solidFill>
+                  <a:srgbClr val="111111"/>
+                </a:solidFill>
+                <a:latin typeface="Times New Roman" pitchFamily="34" charset="0"/>
+                <a:ea typeface="Times New Roman" pitchFamily="34" charset="-122"/>
+                <a:cs typeface="Times New Roman" pitchFamily="34" charset="-120"/>
+              </a:rPr>
+              <a:t>Real-life situation and action to take</a:t>
+            </a:r>
+            <a:endParaRPr lang="en-US" sz="4000" dirty="0"/>
+          </a:p>
+          <a:p>
+            <a:pPr algn="l" marL="342900" indent="-342900">
+              <a:spcAft>
+                <a:spcPts val="800"/>
+              </a:spcAft>
+              <a:buSzPct val="100000"/>
+              <a:buFont typeface="+mj-lt"/>
+              <a:buAutoNum type="arabicPeriod" startAt="1"/>
+            </a:pPr>
+            <a:r>
+              <a:rPr lang="en-US" sz="4000" dirty="0">
+                <a:solidFill>
+                  <a:srgbClr val="111111"/>
+                </a:solidFill>
+                <a:latin typeface="Times New Roman" pitchFamily="34" charset="0"/>
+                <a:ea typeface="Times New Roman" pitchFamily="34" charset="-122"/>
+                <a:cs typeface="Times New Roman" pitchFamily="34" charset="-120"/>
+              </a:rPr>
+              <a:t>Learning activities</a:t>
+            </a:r>
+            <a:endParaRPr lang="en-US" sz="4000" dirty="0"/>
+          </a:p>
+          <a:p>
+            <a:pPr algn="l" marL="342900" indent="-342900">
+              <a:spcAft>
+                <a:spcPts val="800"/>
+              </a:spcAft>
+              <a:buSzPct val="100000"/>
+              <a:buFont typeface="+mj-lt"/>
+              <a:buAutoNum type="arabicPeriod" startAt="1"/>
+            </a:pPr>
+            <a:r>
+              <a:rPr lang="en-US" sz="4000" dirty="0">
+                <a:solidFill>
+                  <a:srgbClr val="111111"/>
+                </a:solidFill>
+                <a:latin typeface="Times New Roman" pitchFamily="34" charset="0"/>
+                <a:ea typeface="Times New Roman" pitchFamily="34" charset="-122"/>
+                <a:cs typeface="Times New Roman" pitchFamily="34" charset="-120"/>
+              </a:rPr>
+              <a:t>Board summary</a:t>
+            </a:r>
+            <a:endParaRPr lang="en-US" sz="4000" dirty="0"/>
+          </a:p>
+          <a:p>
+            <a:pPr algn="l" marL="342900" indent="-342900">
+              <a:spcAft>
+                <a:spcPts val="800"/>
+              </a:spcAft>
+              <a:buSzPct val="100000"/>
+              <a:buFont typeface="+mj-lt"/>
+              <a:buAutoNum type="arabicPeriod" startAt="1"/>
+            </a:pPr>
+            <a:r>
+              <a:rPr lang="en-US" sz="4000" dirty="0">
+                <a:solidFill>
+                  <a:srgbClr val="111111"/>
+                </a:solidFill>
+                <a:latin typeface="Times New Roman" pitchFamily="34" charset="0"/>
+                <a:ea typeface="Times New Roman" pitchFamily="34" charset="-122"/>
+                <a:cs typeface="Times New Roman" pitchFamily="34" charset="-120"/>
+              </a:rPr>
+              <a:t>Evaluation, remediation and homework</a:t>
+            </a:r>
+            <a:endParaRPr lang="en-US" sz="4000" dirty="0"/>
+          </a:p>
+        </p:txBody>
+      </p:sp>
+      <p:sp>
+        <p:nvSpPr>
+          <p:cNvPr id="25" name="Slide Number Placeholder 0"/>
+          <p:cNvSpPr>
+            <a:spLocks noGrp="1"/>
+          </p:cNvSpPr>
+          <p:nvPr>
+            <p:ph type="sldNum" sz="quarter" idx="4294967295"/>
+          </p:nvPr>
+        </p:nvSpPr>
+        <p:spPr>
+          <a:xfrm>
+            <a:off x="27432" y="91440"/>
+            <a:ext cx="585216" cy="475488"/>
+          </a:xfrm>
+          <a:prstGeom prst="rect">
+            <a:avLst/>
+          </a:prstGeom>
+          <a:extLst>
+            <a:ext uri="{C572A759-6A51-4108-AA02-DFA0A04FC94B}">
+              <ma14:wrappingTextBoxFlag xmlns:ma14="http://schemas.microsoft.com/office/mac/drawingml/2011/main" val="0"/>
+            </a:ext>
+          </a:extLst>
+        </p:spPr>
+        <p:txBody>
+          <a:bodyPr/>
+          <a:lstStyle>
+            <a:lvl1pPr>
+              <a:defRPr sz="2000">
+                <a:solidFill>
+                  <a:srgbClr val="FFFFFF"/>
+                </a:solidFill>
+                <a:latin typeface="Calibri"/>
+                <a:ea typeface="Calibri"/>
+                <a:cs typeface="Calibri"/>
+              </a:defRPr>
+            </a:lvl1pPr>
+          </a:lstStyle>
+          <a:p>
+            <a:pPr algn="ctr"/>
+            <a:fld id="{F7021451-1387-4CA6-816F-3879F97B5CBC}" type="slidenum">
+              <a:rPr b="1" lang="en-US"/>
+              <a:t>6</a:t>
+            </a:fld>
+            <a:endParaRPr lang="en-US"/>
+          </a:p>
+        </p:txBody>
+      </p:sp>
+    </p:spTree>
+  </p:cSld>
+  <p:clrMapOvr>
+    <a:masterClrMapping/>
+  </p:clrMapOvr>
+</p:sld>
+</file>
+
+<file path=ppt/slides/slide60.xml><?xml version="1.0" encoding="utf-8"?>
+<p:sld xmlns:a="http://schemas.openxmlformats.org/drawingml/2006/main" xmlns:r="http://schemas.openxmlformats.org/officeDocument/2006/relationships" xmlns:p="http://schemas.openxmlformats.org/presentationml/2006/main">
+  <p:cSld name="Slide 60">
+    <p:spTree>
+      <p:nvGrpSpPr>
+        <p:cNvPr id="1" name=""/>
+        <p:cNvGrpSpPr/>
+        <p:nvPr/>
+      </p:nvGrpSpPr>
+      <p:grpSpPr>
+        <a:xfrm>
+          <a:off x="0" y="0"/>
+          <a:ext cx="0" cy="0"/>
+          <a:chOff x="0" y="0"/>
+          <a:chExt cx="0" cy="0"/>
+        </a:xfrm>
+      </p:grpSpPr>
+      <p:sp>
+        <p:nvSpPr>
+          <p:cNvPr id="2" name="Text 0"/>
+          <p:cNvSpPr/>
+          <p:nvPr/>
+        </p:nvSpPr>
+        <p:spPr>
+          <a:xfrm>
+            <a:off x="457200" y="713232"/>
+            <a:ext cx="11368735" cy="274320"/>
+          </a:xfrm>
+          <a:prstGeom prst="rect">
+            <a:avLst/>
+          </a:prstGeom>
+          <a:noFill/>
+          <a:ln/>
+        </p:spPr>
+        <p:txBody>
+          <a:bodyPr wrap="square" lIns="0" tIns="0" rIns="0" bIns="0" rtlCol="0" anchor="ctr"/>
+          <a:lstStyle/>
+          <a:p>
+            <a:pPr algn="r" indent="0" marL="0">
+              <a:buNone/>
+            </a:pPr>
+            <a:r>
+              <a:rPr lang="en-US" sz="1400" b="1" dirty="0">
+                <a:solidFill>
+                  <a:srgbClr val="1C3F6E"/>
+                </a:solidFill>
+                <a:latin typeface="Calibri" pitchFamily="34" charset="0"/>
+                <a:ea typeface="Calibri" pitchFamily="34" charset="-122"/>
+                <a:cs typeface="Calibri" pitchFamily="34" charset="-120"/>
+              </a:rPr>
+              <a:t>LOGBOOK</a:t>
+            </a:r>
+            <a:endParaRPr lang="en-US" sz="1400" dirty="0"/>
+          </a:p>
+        </p:txBody>
+      </p:sp>
+      <p:sp>
+        <p:nvSpPr>
+          <p:cNvPr id="3" name="Text 1"/>
+          <p:cNvSpPr/>
+          <p:nvPr/>
+        </p:nvSpPr>
+        <p:spPr>
+          <a:xfrm>
+            <a:off x="457200" y="1005840"/>
+            <a:ext cx="11277295" cy="731520"/>
+          </a:xfrm>
+          <a:prstGeom prst="rect">
+            <a:avLst/>
+          </a:prstGeom>
+          <a:noFill/>
+          <a:ln/>
+        </p:spPr>
+        <p:txBody>
+          <a:bodyPr wrap="square" lIns="0" tIns="0" rIns="0" bIns="0" rtlCol="0" anchor="ctr"/>
+          <a:lstStyle/>
+          <a:p>
+            <a:pPr algn="ctr" indent="0" marL="0">
+              <a:buNone/>
+            </a:pPr>
+            <a:r>
+              <a:rPr lang="en-US" sz="3600" b="1" dirty="0">
+                <a:solidFill>
+                  <a:srgbClr val="990011"/>
+                </a:solidFill>
+                <a:latin typeface="Times New Roman" pitchFamily="34" charset="0"/>
+                <a:ea typeface="Times New Roman" pitchFamily="34" charset="-122"/>
+                <a:cs typeface="Times New Roman" pitchFamily="34" charset="-120"/>
+              </a:rPr>
               <a:t>Official Logbook (1/2)</a:t>
             </a:r>
             <a:endParaRPr lang="en-US" sz="3600" dirty="0"/>
@@ -18446,7 +24423,7 @@
       </p:sp>
       <p:graphicFrame>
         <p:nvGraphicFramePr>
-          <p:cNvPr id="49" name="Table 0"/>
+          <p:cNvPr id="61" name="Table 0"/>
           <p:cNvGraphicFramePr>
             <a:graphicFrameLocks noGrp="1"/>
           </p:cNvGraphicFramePr>
@@ -19068,7 +25045,7 @@
             <a:pPr algn="ctr"/>
             <a:fld id="{F7021451-1387-4CA6-816F-3879F97B5CBC}" type="slidenum">
               <a:rPr b="1" lang="en-US"/>
-              <a:t>48</a:t>
+              <a:t>60</a:t>
             </a:fld>
             <a:endParaRPr lang="en-US"/>
           </a:p>
@@ -19082,9 +25059,9 @@
 </p:sld>
 </file>
 
-<file path=ppt/slides/slide49.xml><?xml version="1.0" encoding="utf-8"?>
+<file path=ppt/slides/slide61.xml><?xml version="1.0" encoding="utf-8"?>
 <p:sld xmlns:a="http://schemas.openxmlformats.org/drawingml/2006/main" xmlns:r="http://schemas.openxmlformats.org/officeDocument/2006/relationships" xmlns:p="http://schemas.openxmlformats.org/presentationml/2006/main">
-  <p:cSld name="Slide 49">
+  <p:cSld name="Slide 61">
     <p:spTree>
       <p:nvGrpSpPr>
         <p:cNvPr id="1" name=""/>
@@ -19179,7 +25156,7 @@
       </p:sp>
       <p:graphicFrame>
         <p:nvGraphicFramePr>
-          <p:cNvPr id="50" name="Table 0"/>
+          <p:cNvPr id="62" name="Table 0"/>
           <p:cNvGraphicFramePr>
             <a:graphicFrameLocks noGrp="1"/>
           </p:cNvGraphicFramePr>
@@ -19289,7 +25266,7 @@
                           <a:ea typeface="Calibri" pitchFamily="34" charset="-122"/>
                           <a:cs typeface="Calibri" pitchFamily="34" charset="-120"/>
                         </a:rPr>
-                        <a:t>DEFINITIONS; Floods; Droughts; Desertification.</a:t>
+                        <a:t>DEFINITIONS; Areas of Occurrence; Causes; Effects; Adaptation and Mitigation.</a:t>
                       </a:r>
                       <a:endParaRPr lang="en-US" sz="1600" dirty="0">
                         <a:latin typeface="Calibri" charset="0"/>
@@ -19939,7 +25916,7 @@
             <a:pPr algn="ctr"/>
             <a:fld id="{F7021451-1387-4CA6-816F-3879F97B5CBC}" type="slidenum">
               <a:rPr b="1" lang="en-US"/>
-              <a:t>49</a:t>
+              <a:t>61</a:t>
             </a:fld>
             <a:endParaRPr lang="en-US"/>
           </a:p>
@@ -19953,9 +25930,9 @@
 </p:sld>
 </file>
 
-<file path=ppt/slides/slide5.xml><?xml version="1.0" encoding="utf-8"?>
+<file path=ppt/slides/slide62.xml><?xml version="1.0" encoding="utf-8"?>
 <p:sld xmlns:a="http://schemas.openxmlformats.org/drawingml/2006/main" xmlns:r="http://schemas.openxmlformats.org/officeDocument/2006/relationships" xmlns:p="http://schemas.openxmlformats.org/presentationml/2006/main">
-  <p:cSld name="Slide 5">
+  <p:cSld name="Slide 62">
     <p:spTree>
       <p:nvGrpSpPr>
         <p:cNvPr id="1" name=""/>
@@ -20003,7 +25980,7 @@
                 <a:ea typeface="Calibri" pitchFamily="34" charset="-122"/>
                 <a:cs typeface="Calibri" pitchFamily="34" charset="-120"/>
               </a:rPr>
-              <a:t>HOMEWORK CORRECTION</a:t>
+              <a:t>TEACHER'S NOTE</a:t>
             </a:r>
             <a:endParaRPr lang="en-US" sz="1400" dirty="0"/>
           </a:p>
@@ -20068,7 +26045,7 @@
                 <a:ea typeface="Times New Roman" pitchFamily="34" charset="-122"/>
                 <a:cs typeface="Times New Roman" pitchFamily="34" charset="-120"/>
               </a:rPr>
-              <a:t>Correction: Possible Answer</a:t>
+              <a:t>Teacher's Note</a:t>
             </a:r>
             <a:endParaRPr lang="en-US" sz="3600" dirty="0"/>
           </a:p>
@@ -20095,24 +26072,88 @@
           <a:bodyPr wrap="square" lIns="0" tIns="0" rIns="0" bIns="0" rtlCol="0" anchor="t"/>
           <a:lstStyle/>
           <a:p>
-            <a:pPr algn="l" indent="0" marL="0">
+            <a:pPr algn="l" marL="342900" indent="-342900">
               <a:spcAft>
                 <a:spcPts val="800"/>
               </a:spcAft>
-              <a:buNone/>
-            </a:pPr>
-            <a:r>
-              <a:rPr lang="en-US" sz="4000" dirty="0">
+              <a:buSzPct val="100000"/>
+              <a:buChar char="•"/>
+            </a:pPr>
+            <a:r>
+              <a:rPr lang="en-US" sz="2000" dirty="0">
                 <a:solidFill>
                   <a:srgbClr val="111111"/>
                 </a:solidFill>
-                <a:latin typeface="Times New Roman" pitchFamily="34" charset="0"/>
-                <a:ea typeface="Times New Roman" pitchFamily="34" charset="-122"/>
-                <a:cs typeface="Times New Roman" pitchFamily="34" charset="-120"/>
-              </a:rPr>
-              <a:t>It is the lasting spread of desert conditions into dry lands.</a:t>
-            </a:r>
-            <a:endParaRPr lang="en-US" sz="4000" dirty="0"/>
+                <a:latin typeface="Calibri" pitchFamily="34" charset="0"/>
+                <a:ea typeface="Calibri" pitchFamily="34" charset="-122"/>
+                <a:cs typeface="Calibri" pitchFamily="34" charset="-120"/>
+              </a:rPr>
+              <a:t>Timing: Homework correction, plan, objectives 4 min | Recall, situation, action 6 min | 3 activities 12 min | Board summary (copying) 15 min | Evaluation, remediation 5 min | Homework, next lesson 3 min | Logbook 5 min</a:t>
+            </a:r>
+            <a:endParaRPr lang="en-US" sz="2000" dirty="0"/>
+          </a:p>
+          <a:p>
+            <a:pPr algn="l" marL="342900" indent="-342900">
+              <a:spcAft>
+                <a:spcPts val="800"/>
+              </a:spcAft>
+              <a:buSzPct val="100000"/>
+              <a:buChar char="•"/>
+            </a:pPr>
+            <a:r>
+              <a:rPr lang="en-US" sz="2000" dirty="0">
+                <a:solidFill>
+                  <a:srgbClr val="111111"/>
+                </a:solidFill>
+                <a:latin typeface="Calibri" pitchFamily="34" charset="0"/>
+                <a:ea typeface="Calibri" pitchFamily="34" charset="-122"/>
+                <a:cs typeface="Calibri" pitchFamily="34" charset="-120"/>
+              </a:rPr>
+              <a:t>Without the projector (Activity 1): describe the flood of 2012.</a:t>
+            </a:r>
+            <a:endParaRPr lang="en-US" sz="2000" dirty="0"/>
+          </a:p>
+          <a:p>
+            <a:pPr algn="l" marL="342900" indent="-342900">
+              <a:spcAft>
+                <a:spcPts val="800"/>
+              </a:spcAft>
+              <a:buSzPct val="100000"/>
+              <a:buChar char="•"/>
+            </a:pPr>
+            <a:r>
+              <a:rPr lang="en-US" sz="2000" dirty="0">
+                <a:solidFill>
+                  <a:srgbClr val="111111"/>
+                </a:solidFill>
+                <a:latin typeface="Calibri" pitchFamily="34" charset="0"/>
+                <a:ea typeface="Calibri" pitchFamily="34" charset="-122"/>
+                <a:cs typeface="Calibri" pitchFamily="34" charset="-120"/>
+              </a:rPr>
+              <a:t>Without the projector (Activity 2): compare a dry year and a spreading desert.</a:t>
+            </a:r>
+            <a:endParaRPr lang="en-US" sz="2000" dirty="0"/>
+          </a:p>
+          <a:p>
+            <a:pPr algn="l" marL="342900" indent="-342900">
+              <a:spcAft>
+                <a:spcPts val="800"/>
+              </a:spcAft>
+              <a:buSzPct val="100000"/>
+              <a:buChar char="•"/>
+            </a:pPr>
+            <a:r>
+              <a:rPr lang="en-US" sz="2000" dirty="0">
+                <a:solidFill>
+                  <a:srgbClr val="111111"/>
+                </a:solidFill>
+                <a:latin typeface="Calibri" pitchFamily="34" charset="0"/>
+                <a:ea typeface="Calibri" pitchFamily="34" charset="-122"/>
+                <a:cs typeface="Calibri" pitchFamily="34" charset="-120"/>
+              </a:rPr>
+              <a:t>Without the projector (Activity 3): describe the zaï method.</a:t>
+            </a:r>
+            <a:endParaRPr lang="en-US" sz="2000" dirty="0"/>
           </a:p>
         </p:txBody>
       </p:sp>
@@ -20158,7 +26199,7 @@
             <a:pPr algn="ctr"/>
             <a:fld id="{F7021451-1387-4CA6-816F-3879F97B5CBC}" type="slidenum">
               <a:rPr b="1" lang="en-US"/>
-              <a:t>5</a:t>
+              <a:t>62</a:t>
             </a:fld>
             <a:endParaRPr lang="en-US"/>
           </a:p>
@@ -20172,9 +26213,9 @@
 </p:sld>
 </file>
 
-<file path=ppt/slides/slide50.xml><?xml version="1.0" encoding="utf-8"?>
+<file path=ppt/slides/slide63.xml><?xml version="1.0" encoding="utf-8"?>
 <p:sld xmlns:a="http://schemas.openxmlformats.org/drawingml/2006/main" xmlns:r="http://schemas.openxmlformats.org/officeDocument/2006/relationships" xmlns:p="http://schemas.openxmlformats.org/presentationml/2006/main">
-  <p:cSld name="Slide 50">
+  <p:cSld name="Slide 63">
     <p:spTree>
       <p:nvGrpSpPr>
         <p:cNvPr id="1" name=""/>
@@ -20222,7 +26263,7 @@
                 <a:ea typeface="Calibri" pitchFamily="34" charset="-122"/>
                 <a:cs typeface="Calibri" pitchFamily="34" charset="-120"/>
               </a:rPr>
-              <a:t>TEACHER'S NOTE</a:t>
+              <a:t>REFERENCES</a:t>
             </a:r>
             <a:endParaRPr lang="en-US" sz="1400" dirty="0"/>
           </a:p>
@@ -20245,7 +26286,7 @@
         <p:spPr>
           <a:xfrm>
             <a:off x="0" y="658368"/>
-            <a:ext cx="5120640" cy="5833872"/>
+            <a:ext cx="3840480" cy="5833872"/>
           </a:xfrm>
           <a:prstGeom prst="rect">
             <a:avLst/>
@@ -20260,8 +26301,8 @@
         </p:nvSpPr>
         <p:spPr>
           <a:xfrm>
-            <a:off x="5349240" y="1005840"/>
-            <a:ext cx="6522415" cy="731520"/>
+            <a:off x="4069080" y="1005840"/>
+            <a:ext cx="7802575" cy="731520"/>
           </a:xfrm>
           <a:prstGeom prst="rect">
             <a:avLst/>
@@ -20287,7 +26328,7 @@
                 <a:ea typeface="Times New Roman" pitchFamily="34" charset="-122"/>
                 <a:cs typeface="Times New Roman" pitchFamily="34" charset="-120"/>
               </a:rPr>
-              <a:t>Teacher's Note</a:t>
+              <a:t>References</a:t>
             </a:r>
             <a:endParaRPr lang="en-US" sz="3600" dirty="0"/>
           </a:p>
@@ -20301,8 +26342,8 @@
         </p:nvSpPr>
         <p:spPr>
           <a:xfrm>
-            <a:off x="5349240" y="1783080"/>
-            <a:ext cx="6522415" cy="4663440"/>
+            <a:off x="4069080" y="1783080"/>
+            <a:ext cx="7802575" cy="4663440"/>
           </a:xfrm>
           <a:prstGeom prst="rect">
             <a:avLst/>
@@ -20322,7 +26363,7 @@
               <a:buChar char="•"/>
             </a:pPr>
             <a:r>
-              <a:rPr lang="en-US" sz="2000" dirty="0">
+              <a:rPr lang="en-US" sz="1800" dirty="0">
                 <a:solidFill>
                   <a:srgbClr val="111111"/>
                 </a:solidFill>
@@ -20330,9 +26371,9 @@
                 <a:ea typeface="Calibri" pitchFamily="34" charset="-122"/>
                 <a:cs typeface="Calibri" pitchFamily="34" charset="-120"/>
               </a:rPr>
-              <a:t>Timing: Homework correction, plan, objectives 4 min | Recall, situation, action 6 min | 3 activities 12 min | Board summary (copying) 15 min | Evaluation, remediation 5 min | Homework, next lesson 3 min | Logbook 5 min</a:t>
-            </a:r>
-            <a:endParaRPr lang="en-US" sz="2000" dirty="0"/>
+              <a:t>National Geography Syllabus (MINESEC), Form 4 — Module 3: Weather and Climate.</a:t>
+            </a:r>
+            <a:endParaRPr lang="en-US" sz="1800" dirty="0"/>
           </a:p>
           <a:p>
             <a:pPr algn="l" marL="342900" indent="-342900">
@@ -20343,7 +26384,7 @@
               <a:buChar char="•"/>
             </a:pPr>
             <a:r>
-              <a:rPr lang="en-US" sz="2000" dirty="0">
+              <a:rPr lang="en-US" sz="1800" dirty="0">
                 <a:solidFill>
                   <a:srgbClr val="111111"/>
                 </a:solidFill>
@@ -20351,9 +26392,9 @@
                 <a:ea typeface="Calibri" pitchFamily="34" charset="-122"/>
                 <a:cs typeface="Calibri" pitchFamily="34" charset="-120"/>
               </a:rPr>
-              <a:t>Without the projector (Activity 1): describe the flood of 2012.</a:t>
-            </a:r>
-            <a:endParaRPr lang="en-US" sz="2000" dirty="0"/>
+              <a:t>Teacher's lesson notes (f4.docx), checked and corrected where necessary.</a:t>
+            </a:r>
+            <a:endParaRPr lang="en-US" sz="1800" dirty="0"/>
           </a:p>
           <a:p>
             <a:pPr algn="l" marL="342900" indent="-342900">
@@ -20364,7 +26405,7 @@
               <a:buChar char="•"/>
             </a:pPr>
             <a:r>
-              <a:rPr lang="en-US" sz="2000" dirty="0">
+              <a:rPr lang="en-US" sz="1800" dirty="0">
                 <a:solidFill>
                   <a:srgbClr val="111111"/>
                 </a:solidFill>
@@ -20372,9 +26413,9 @@
                 <a:ea typeface="Calibri" pitchFamily="34" charset="-122"/>
                 <a:cs typeface="Calibri" pitchFamily="34" charset="-120"/>
               </a:rPr>
-              <a:t>Without the projector (Activity 2): compare a dry year and a spreading desert.</a:t>
-            </a:r>
-            <a:endParaRPr lang="en-US" sz="2000" dirty="0"/>
+              <a:t>MINEPDED: Opération Sahel Vert; African Union: Great Green Wall.</a:t>
+            </a:r>
+            <a:endParaRPr lang="en-US" sz="1800" dirty="0"/>
           </a:p>
           <a:p>
             <a:pPr algn="l" marL="342900" indent="-342900">
@@ -20385,7 +26426,7 @@
               <a:buChar char="•"/>
             </a:pPr>
             <a:r>
-              <a:rPr lang="en-US" sz="2000" dirty="0">
+              <a:rPr lang="en-US" sz="1800" dirty="0">
                 <a:solidFill>
                   <a:srgbClr val="111111"/>
                 </a:solidFill>
@@ -20393,9 +26434,72 @@
                 <a:ea typeface="Calibri" pitchFamily="34" charset="-122"/>
                 <a:cs typeface="Calibri" pitchFamily="34" charset="-120"/>
               </a:rPr>
-              <a:t>Without the projector (Activity 3): describe the zaï method.</a:t>
-            </a:r>
-            <a:endParaRPr lang="en-US" sz="2000" dirty="0"/>
+              <a:t>Photo, Activity 1: “Flood in Accra” by Stig Nygaard, CC BY 2.0, via Flickr (https://www.flickr.com/photos/10259776@N00/181742000)</a:t>
+            </a:r>
+            <a:endParaRPr lang="en-US" sz="1800" dirty="0"/>
+          </a:p>
+          <a:p>
+            <a:pPr algn="l" marL="342900" indent="-342900">
+              <a:spcAft>
+                <a:spcPts val="800"/>
+              </a:spcAft>
+              <a:buSzPct val="100000"/>
+              <a:buChar char="•"/>
+            </a:pPr>
+            <a:r>
+              <a:rPr lang="en-US" sz="1800" dirty="0">
+                <a:solidFill>
+                  <a:srgbClr val="111111"/>
+                </a:solidFill>
+                <a:latin typeface="Calibri" pitchFamily="34" charset="0"/>
+                <a:ea typeface="Calibri" pitchFamily="34" charset="-122"/>
+                <a:cs typeface="Calibri" pitchFamily="34" charset="-120"/>
+              </a:rPr>
+              <a:t>Photo, Activity 2: “Imagine a world without trees” by aloshbennett, CC BY 2.0, via Flickr (https://www.flickr.com/photos/13203757@N00/3480223314)</a:t>
+            </a:r>
+            <a:endParaRPr lang="en-US" sz="1800" dirty="0"/>
+          </a:p>
+          <a:p>
+            <a:pPr algn="l" marL="342900" indent="-342900">
+              <a:spcAft>
+                <a:spcPts val="800"/>
+              </a:spcAft>
+              <a:buSzPct val="100000"/>
+              <a:buChar char="•"/>
+            </a:pPr>
+            <a:r>
+              <a:rPr lang="en-US" sz="1800" dirty="0">
+                <a:solidFill>
+                  <a:srgbClr val="111111"/>
+                </a:solidFill>
+                <a:latin typeface="Calibri" pitchFamily="34" charset="0"/>
+                <a:ea typeface="Calibri" pitchFamily="34" charset="-122"/>
+                <a:cs typeface="Calibri" pitchFamily="34" charset="-120"/>
+              </a:rPr>
+              <a:t>Photo, Activity 3: “Women sowing okra in zai holes” by abossuet, CC BY-NC 2.0, via Flickr (https://www.flickr.com/photos/30450178@N07/7175750825)</a:t>
+            </a:r>
+            <a:endParaRPr lang="en-US" sz="1800" dirty="0"/>
+          </a:p>
+          <a:p>
+            <a:pPr algn="l" marL="342900" indent="-342900">
+              <a:spcAft>
+                <a:spcPts val="800"/>
+              </a:spcAft>
+              <a:buSzPct val="100000"/>
+              <a:buChar char="•"/>
+            </a:pPr>
+            <a:r>
+              <a:rPr lang="en-US" sz="1800" dirty="0">
+                <a:solidFill>
+                  <a:srgbClr val="111111"/>
+                </a:solidFill>
+                <a:latin typeface="Calibri" pitchFamily="34" charset="0"/>
+                <a:ea typeface="Calibri" pitchFamily="34" charset="-122"/>
+                <a:cs typeface="Calibri" pitchFamily="34" charset="-120"/>
+              </a:rPr>
+              <a:t>Diagrams and animations: drawn for this lesson (Geography Department).</a:t>
+            </a:r>
+            <a:endParaRPr lang="en-US" sz="1800" dirty="0"/>
           </a:p>
         </p:txBody>
       </p:sp>
@@ -20441,684 +26545,7 @@
             <a:pPr algn="ctr"/>
             <a:fld id="{F7021451-1387-4CA6-816F-3879F97B5CBC}" type="slidenum">
               <a:rPr b="1" lang="en-US"/>
-              <a:t>50</a:t>
-            </a:fld>
-            <a:endParaRPr lang="en-US"/>
-          </a:p>
-        </p:txBody>
-      </p:sp>
-    </p:spTree>
-  </p:cSld>
-  <p:clrMapOvr>
-    <a:masterClrMapping/>
-  </p:clrMapOvr>
-</p:sld>
-</file>
-
-<file path=ppt/slides/slide51.xml><?xml version="1.0" encoding="utf-8"?>
-<p:sld xmlns:a="http://schemas.openxmlformats.org/drawingml/2006/main" xmlns:r="http://schemas.openxmlformats.org/officeDocument/2006/relationships" xmlns:p="http://schemas.openxmlformats.org/presentationml/2006/main">
-  <p:cSld name="Slide 51">
-    <p:spTree>
-      <p:nvGrpSpPr>
-        <p:cNvPr id="1" name=""/>
-        <p:cNvGrpSpPr/>
-        <p:nvPr/>
-      </p:nvGrpSpPr>
-      <p:grpSpPr>
-        <a:xfrm>
-          <a:off x="0" y="0"/>
-          <a:ext cx="0" cy="0"/>
-          <a:chOff x="0" y="0"/>
-          <a:chExt cx="0" cy="0"/>
-        </a:xfrm>
-      </p:grpSpPr>
-      <p:sp>
-        <p:nvSpPr>
-          <p:cNvPr id="2" name="Text 0"/>
-          <p:cNvSpPr/>
-          <p:nvPr/>
-        </p:nvSpPr>
-        <p:spPr>
-          <a:xfrm>
-            <a:off x="457200" y="713232"/>
-            <a:ext cx="11368735" cy="274320"/>
-          </a:xfrm>
-          <a:prstGeom prst="rect">
-            <a:avLst/>
-          </a:prstGeom>
-          <a:noFill/>
-          <a:ln/>
-        </p:spPr>
-        <p:txBody>
-          <a:bodyPr wrap="square" lIns="0" tIns="0" rIns="0" bIns="0" rtlCol="0" anchor="ctr"/>
-          <a:lstStyle/>
-          <a:p>
-            <a:pPr algn="r" indent="0" marL="0">
-              <a:buNone/>
-            </a:pPr>
-            <a:r>
-              <a:rPr lang="en-US" sz="1400" b="1" dirty="0">
-                <a:solidFill>
-                  <a:srgbClr val="1C3F6E"/>
-                </a:solidFill>
-                <a:latin typeface="Calibri" pitchFamily="34" charset="0"/>
-                <a:ea typeface="Calibri" pitchFamily="34" charset="-122"/>
-                <a:cs typeface="Calibri" pitchFamily="34" charset="-120"/>
-              </a:rPr>
-              <a:t>REFERENCES</a:t>
-            </a:r>
-            <a:endParaRPr lang="en-US" sz="1400" dirty="0"/>
-          </a:p>
-        </p:txBody>
-      </p:sp>
-      <p:pic>
-        <p:nvPicPr>
-          <p:cNvPr id="3" name="Image 0" descr="/home/claude/f4/img/minesec_sheet.png">    </p:cNvPr>
-          <p:cNvPicPr>
-            <a:picLocks noChangeAspect="1"/>
-          </p:cNvPicPr>
-          <p:nvPr/>
-        </p:nvPicPr>
-        <p:blipFill>
-          <a:blip r:embed="rId1"/>
-          <a:stretch>
-            <a:fillRect/>
-          </a:stretch>
-        </p:blipFill>
-        <p:spPr>
-          <a:xfrm>
-            <a:off x="0" y="658368"/>
-            <a:ext cx="3840480" cy="5833872"/>
-          </a:xfrm>
-          <a:prstGeom prst="rect">
-            <a:avLst/>
-          </a:prstGeom>
-        </p:spPr>
-      </p:pic>
-      <p:sp>
-        <p:nvSpPr>
-          <p:cNvPr id="4" name="Text 1"/>
-          <p:cNvSpPr/>
-          <p:nvPr/>
-        </p:nvSpPr>
-        <p:spPr>
-          <a:xfrm>
-            <a:off x="4069080" y="1005840"/>
-            <a:ext cx="7802575" cy="731520"/>
-          </a:xfrm>
-          <a:prstGeom prst="rect">
-            <a:avLst/>
-          </a:prstGeom>
-          <a:noFill/>
-          <a:ln/>
-        </p:spPr>
-        <p:txBody>
-          <a:bodyPr wrap="square" lIns="0" tIns="0" rIns="0" bIns="0" rtlCol="0" anchor="ctr">
-            <a:normAutofit/>
-          </a:bodyPr>
-          <a:lstStyle/>
-          <a:p>
-            <a:pPr algn="ctr" indent="0" marL="0">
-              <a:buNone/>
-            </a:pPr>
-            <a:r>
-              <a:rPr lang="en-US" sz="3600" b="1" dirty="0">
-                <a:solidFill>
-                  <a:srgbClr val="990011"/>
-                </a:solidFill>
-                <a:latin typeface="Times New Roman" pitchFamily="34" charset="0"/>
-                <a:ea typeface="Times New Roman" pitchFamily="34" charset="-122"/>
-                <a:cs typeface="Times New Roman" pitchFamily="34" charset="-120"/>
-              </a:rPr>
-              <a:t>References</a:t>
-            </a:r>
-            <a:endParaRPr lang="en-US" sz="3600" dirty="0"/>
-          </a:p>
-        </p:txBody>
-      </p:sp>
-      <p:sp>
-        <p:nvSpPr>
-          <p:cNvPr id="5" name="Text 2"/>
-          <p:cNvSpPr/>
-          <p:nvPr/>
-        </p:nvSpPr>
-        <p:spPr>
-          <a:xfrm>
-            <a:off x="4069080" y="1783080"/>
-            <a:ext cx="7802575" cy="4663440"/>
-          </a:xfrm>
-          <a:prstGeom prst="rect">
-            <a:avLst/>
-          </a:prstGeom>
-          <a:noFill/>
-          <a:ln/>
-        </p:spPr>
-        <p:txBody>
-          <a:bodyPr wrap="square" lIns="0" tIns="0" rIns="0" bIns="0" rtlCol="0" anchor="t"/>
-          <a:lstStyle/>
-          <a:p>
-            <a:pPr algn="l" marL="342900" indent="-342900">
-              <a:spcAft>
-                <a:spcPts val="800"/>
-              </a:spcAft>
-              <a:buSzPct val="100000"/>
-              <a:buChar char="•"/>
-            </a:pPr>
-            <a:r>
-              <a:rPr lang="en-US" sz="1800" dirty="0">
-                <a:solidFill>
-                  <a:srgbClr val="111111"/>
-                </a:solidFill>
-                <a:latin typeface="Calibri" pitchFamily="34" charset="0"/>
-                <a:ea typeface="Calibri" pitchFamily="34" charset="-122"/>
-                <a:cs typeface="Calibri" pitchFamily="34" charset="-120"/>
-              </a:rPr>
-              <a:t>National Geography Syllabus (MINESEC), Form 4 — Module 3: Weather and Climate.</a:t>
-            </a:r>
-            <a:endParaRPr lang="en-US" sz="1800" dirty="0"/>
-          </a:p>
-          <a:p>
-            <a:pPr algn="l" marL="342900" indent="-342900">
-              <a:spcAft>
-                <a:spcPts val="800"/>
-              </a:spcAft>
-              <a:buSzPct val="100000"/>
-              <a:buChar char="•"/>
-            </a:pPr>
-            <a:r>
-              <a:rPr lang="en-US" sz="1800" dirty="0">
-                <a:solidFill>
-                  <a:srgbClr val="111111"/>
-                </a:solidFill>
-                <a:latin typeface="Calibri" pitchFamily="34" charset="0"/>
-                <a:ea typeface="Calibri" pitchFamily="34" charset="-122"/>
-                <a:cs typeface="Calibri" pitchFamily="34" charset="-120"/>
-              </a:rPr>
-              <a:t>Teacher's lesson notes (f4.docx), checked and corrected where necessary.</a:t>
-            </a:r>
-            <a:endParaRPr lang="en-US" sz="1800" dirty="0"/>
-          </a:p>
-          <a:p>
-            <a:pPr algn="l" marL="342900" indent="-342900">
-              <a:spcAft>
-                <a:spcPts val="800"/>
-              </a:spcAft>
-              <a:buSzPct val="100000"/>
-              <a:buChar char="•"/>
-            </a:pPr>
-            <a:r>
-              <a:rPr lang="en-US" sz="1800" dirty="0">
-                <a:solidFill>
-                  <a:srgbClr val="111111"/>
-                </a:solidFill>
-                <a:latin typeface="Calibri" pitchFamily="34" charset="0"/>
-                <a:ea typeface="Calibri" pitchFamily="34" charset="-122"/>
-                <a:cs typeface="Calibri" pitchFamily="34" charset="-120"/>
-              </a:rPr>
-              <a:t>MINEPDED: Opération Sahel Vert; African Union: Great Green Wall.</a:t>
-            </a:r>
-            <a:endParaRPr lang="en-US" sz="1800" dirty="0"/>
-          </a:p>
-          <a:p>
-            <a:pPr algn="l" marL="342900" indent="-342900">
-              <a:spcAft>
-                <a:spcPts val="800"/>
-              </a:spcAft>
-              <a:buSzPct val="100000"/>
-              <a:buChar char="•"/>
-            </a:pPr>
-            <a:r>
-              <a:rPr lang="en-US" sz="1800" dirty="0">
-                <a:solidFill>
-                  <a:srgbClr val="111111"/>
-                </a:solidFill>
-                <a:latin typeface="Calibri" pitchFamily="34" charset="0"/>
-                <a:ea typeface="Calibri" pitchFamily="34" charset="-122"/>
-                <a:cs typeface="Calibri" pitchFamily="34" charset="-120"/>
-              </a:rPr>
-              <a:t>Photo, Activity 1: “Flood in Accra” by Stig Nygaard, CC BY 2.0, via Flickr (https://www.flickr.com/photos/10259776@N00/181742000)</a:t>
-            </a:r>
-            <a:endParaRPr lang="en-US" sz="1800" dirty="0"/>
-          </a:p>
-          <a:p>
-            <a:pPr algn="l" marL="342900" indent="-342900">
-              <a:spcAft>
-                <a:spcPts val="800"/>
-              </a:spcAft>
-              <a:buSzPct val="100000"/>
-              <a:buChar char="•"/>
-            </a:pPr>
-            <a:r>
-              <a:rPr lang="en-US" sz="1800" dirty="0">
-                <a:solidFill>
-                  <a:srgbClr val="111111"/>
-                </a:solidFill>
-                <a:latin typeface="Calibri" pitchFamily="34" charset="0"/>
-                <a:ea typeface="Calibri" pitchFamily="34" charset="-122"/>
-                <a:cs typeface="Calibri" pitchFamily="34" charset="-120"/>
-              </a:rPr>
-              <a:t>Photo, Activity 2: “Imagine a world without trees” by aloshbennett, CC BY 2.0, via Flickr (https://www.flickr.com/photos/13203757@N00/3480223314)</a:t>
-            </a:r>
-            <a:endParaRPr lang="en-US" sz="1800" dirty="0"/>
-          </a:p>
-          <a:p>
-            <a:pPr algn="l" marL="342900" indent="-342900">
-              <a:spcAft>
-                <a:spcPts val="800"/>
-              </a:spcAft>
-              <a:buSzPct val="100000"/>
-              <a:buChar char="•"/>
-            </a:pPr>
-            <a:r>
-              <a:rPr lang="en-US" sz="1800" dirty="0">
-                <a:solidFill>
-                  <a:srgbClr val="111111"/>
-                </a:solidFill>
-                <a:latin typeface="Calibri" pitchFamily="34" charset="0"/>
-                <a:ea typeface="Calibri" pitchFamily="34" charset="-122"/>
-                <a:cs typeface="Calibri" pitchFamily="34" charset="-120"/>
-              </a:rPr>
-              <a:t>Photo, Activity 3: “Women sowing okra in zai holes” by abossuet, CC BY-NC 2.0, via Flickr (https://www.flickr.com/photos/30450178@N07/7175750825)</a:t>
-            </a:r>
-            <a:endParaRPr lang="en-US" sz="1800" dirty="0"/>
-          </a:p>
-          <a:p>
-            <a:pPr algn="l" marL="342900" indent="-342900">
-              <a:spcAft>
-                <a:spcPts val="800"/>
-              </a:spcAft>
-              <a:buSzPct val="100000"/>
-              <a:buChar char="•"/>
-            </a:pPr>
-            <a:r>
-              <a:rPr lang="en-US" sz="1800" dirty="0">
-                <a:solidFill>
-                  <a:srgbClr val="111111"/>
-                </a:solidFill>
-                <a:latin typeface="Calibri" pitchFamily="34" charset="0"/>
-                <a:ea typeface="Calibri" pitchFamily="34" charset="-122"/>
-                <a:cs typeface="Calibri" pitchFamily="34" charset="-120"/>
-              </a:rPr>
-              <a:t>Diagrams and animations: drawn for this lesson (Geography Department).</a:t>
-            </a:r>
-            <a:endParaRPr lang="en-US" sz="1800" dirty="0"/>
-          </a:p>
-        </p:txBody>
-      </p:sp>
-      <p:sp>
-        <p:nvSpPr>
-          <p:cNvPr id="25" name="Slide Number Placeholder 0"/>
-          <p:cNvSpPr>
-            <a:spLocks noGrp="1"/>
-          </p:cNvSpPr>
-          <p:nvPr>
-            <p:ph type="sldNum" sz="quarter" idx="4294967295"/>
-          </p:nvPr>
-        </p:nvSpPr>
-        <p:spPr>
-          <a:xfrm>
-            <a:off x="27432" y="91440"/>
-            <a:ext cx="585216" cy="475488"/>
-          </a:xfrm>
-          <a:prstGeom prst="rect">
-            <a:avLst/>
-          </a:prstGeom>
-          <a:extLst>
-            <a:ext uri="{C572A759-6A51-4108-AA02-DFA0A04FC94B}">
-              <ma14:wrappingTextBoxFlag xmlns:ma14="http://schemas.microsoft.com/office/mac/drawingml/2011/main" val="0"/>
-            </a:ext>
-          </a:extLst>
-        </p:spPr>
-        <p:txBody>
-          <a:bodyPr/>
-          <a:lstStyle>
-            <a:lvl1pPr>
-              <a:defRPr sz="2000">
-                <a:solidFill>
-                  <a:srgbClr val="FFFFFF"/>
-                </a:solidFill>
-                <a:latin typeface="Calibri"/>
-                <a:ea typeface="Calibri"/>
-                <a:cs typeface="Calibri"/>
-              </a:defRPr>
-            </a:lvl1pPr>
-          </a:lstStyle>
-          <a:p>
-            <a:pPr algn="ctr"/>
-            <a:fld id="{F7021451-1387-4CA6-816F-3879F97B5CBC}" type="slidenum">
-              <a:rPr b="1" lang="en-US"/>
-              <a:t>51</a:t>
-            </a:fld>
-            <a:endParaRPr lang="en-US"/>
-          </a:p>
-        </p:txBody>
-      </p:sp>
-    </p:spTree>
-  </p:cSld>
-  <p:clrMapOvr>
-    <a:masterClrMapping/>
-  </p:clrMapOvr>
-</p:sld>
-</file>
-
-<file path=ppt/slides/slide6.xml><?xml version="1.0" encoding="utf-8"?>
-<p:sld xmlns:a="http://schemas.openxmlformats.org/drawingml/2006/main" xmlns:r="http://schemas.openxmlformats.org/officeDocument/2006/relationships" xmlns:p="http://schemas.openxmlformats.org/presentationml/2006/main">
-  <p:cSld name="Slide 6">
-    <p:spTree>
-      <p:nvGrpSpPr>
-        <p:cNvPr id="1" name=""/>
-        <p:cNvGrpSpPr/>
-        <p:nvPr/>
-      </p:nvGrpSpPr>
-      <p:grpSpPr>
-        <a:xfrm>
-          <a:off x="0" y="0"/>
-          <a:ext cx="0" cy="0"/>
-          <a:chOff x="0" y="0"/>
-          <a:chExt cx="0" cy="0"/>
-        </a:xfrm>
-      </p:grpSpPr>
-      <p:sp>
-        <p:nvSpPr>
-          <p:cNvPr id="2" name="Text 0"/>
-          <p:cNvSpPr/>
-          <p:nvPr/>
-        </p:nvSpPr>
-        <p:spPr>
-          <a:xfrm>
-            <a:off x="457200" y="713232"/>
-            <a:ext cx="11368735" cy="274320"/>
-          </a:xfrm>
-          <a:prstGeom prst="rect">
-            <a:avLst/>
-          </a:prstGeom>
-          <a:noFill/>
-          <a:ln/>
-        </p:spPr>
-        <p:txBody>
-          <a:bodyPr wrap="square" lIns="0" tIns="0" rIns="0" bIns="0" rtlCol="0" anchor="ctr"/>
-          <a:lstStyle/>
-          <a:p>
-            <a:pPr algn="r" indent="0" marL="0">
-              <a:buNone/>
-            </a:pPr>
-            <a:r>
-              <a:rPr lang="en-US" sz="1400" b="1" dirty="0">
-                <a:solidFill>
-                  <a:srgbClr val="1C3F6E"/>
-                </a:solidFill>
-                <a:latin typeface="Calibri" pitchFamily="34" charset="0"/>
-                <a:ea typeface="Calibri" pitchFamily="34" charset="-122"/>
-                <a:cs typeface="Calibri" pitchFamily="34" charset="-120"/>
-              </a:rPr>
-              <a:t>LESSON PLAN</a:t>
-            </a:r>
-            <a:endParaRPr lang="en-US" sz="1400" dirty="0"/>
-          </a:p>
-        </p:txBody>
-      </p:sp>
-      <p:pic>
-        <p:nvPicPr>
-          <p:cNvPr id="3" name="Image 0" descr="/home/claude/f4/img/minesec_sheet.png">    </p:cNvPr>
-          <p:cNvPicPr>
-            <a:picLocks noChangeAspect="1"/>
-          </p:cNvPicPr>
-          <p:nvPr/>
-        </p:nvPicPr>
-        <p:blipFill>
-          <a:blip r:embed="rId1"/>
-          <a:stretch>
-            <a:fillRect/>
-          </a:stretch>
-        </p:blipFill>
-        <p:spPr>
-          <a:xfrm>
-            <a:off x="0" y="658368"/>
-            <a:ext cx="2468880" cy="5833872"/>
-          </a:xfrm>
-          <a:prstGeom prst="rect">
-            <a:avLst/>
-          </a:prstGeom>
-        </p:spPr>
-      </p:pic>
-      <p:sp>
-        <p:nvSpPr>
-          <p:cNvPr id="4" name="Text 1"/>
-          <p:cNvSpPr/>
-          <p:nvPr/>
-        </p:nvSpPr>
-        <p:spPr>
-          <a:xfrm>
-            <a:off x="2697480" y="1005840"/>
-            <a:ext cx="9174175" cy="731520"/>
-          </a:xfrm>
-          <a:prstGeom prst="rect">
-            <a:avLst/>
-          </a:prstGeom>
-          <a:noFill/>
-          <a:ln/>
-        </p:spPr>
-        <p:txBody>
-          <a:bodyPr wrap="square" lIns="0" tIns="0" rIns="0" bIns="0" rtlCol="0" anchor="ctr">
-            <a:normAutofit/>
-          </a:bodyPr>
-          <a:lstStyle/>
-          <a:p>
-            <a:pPr algn="ctr" indent="0" marL="0">
-              <a:buNone/>
-            </a:pPr>
-            <a:r>
-              <a:rPr lang="en-US" sz="3600" b="1" dirty="0">
-                <a:solidFill>
-                  <a:srgbClr val="990011"/>
-                </a:solidFill>
-                <a:latin typeface="Times New Roman" pitchFamily="34" charset="0"/>
-                <a:ea typeface="Times New Roman" pitchFamily="34" charset="-122"/>
-                <a:cs typeface="Times New Roman" pitchFamily="34" charset="-120"/>
-              </a:rPr>
-              <a:t>Lesson Plan</a:t>
-            </a:r>
-            <a:endParaRPr lang="en-US" sz="3600" dirty="0"/>
-          </a:p>
-        </p:txBody>
-      </p:sp>
-      <p:sp>
-        <p:nvSpPr>
-          <p:cNvPr id="5" name="Text 2"/>
-          <p:cNvSpPr/>
-          <p:nvPr/>
-        </p:nvSpPr>
-        <p:spPr>
-          <a:xfrm>
-            <a:off x="2697480" y="1783080"/>
-            <a:ext cx="9174175" cy="4663440"/>
-          </a:xfrm>
-          <a:prstGeom prst="rect">
-            <a:avLst/>
-          </a:prstGeom>
-          <a:noFill/>
-          <a:ln/>
-        </p:spPr>
-        <p:txBody>
-          <a:bodyPr wrap="square" lIns="0" tIns="0" rIns="0" bIns="0" rtlCol="0" anchor="t"/>
-          <a:lstStyle/>
-          <a:p>
-            <a:pPr algn="l" marL="342900" indent="-342900">
-              <a:spcAft>
-                <a:spcPts val="800"/>
-              </a:spcAft>
-              <a:buSzPct val="100000"/>
-              <a:buFont typeface="+mj-lt"/>
-              <a:buAutoNum type="arabicPeriod" startAt="1"/>
-            </a:pPr>
-            <a:r>
-              <a:rPr lang="en-US" sz="4000" dirty="0">
-                <a:solidFill>
-                  <a:srgbClr val="111111"/>
-                </a:solidFill>
-                <a:latin typeface="Times New Roman" pitchFamily="34" charset="0"/>
-                <a:ea typeface="Times New Roman" pitchFamily="34" charset="-122"/>
-                <a:cs typeface="Times New Roman" pitchFamily="34" charset="-120"/>
-              </a:rPr>
-              <a:t>Correction of the homework</a:t>
-            </a:r>
-            <a:endParaRPr lang="en-US" sz="4000" dirty="0"/>
-          </a:p>
-          <a:p>
-            <a:pPr algn="l" marL="342900" indent="-342900">
-              <a:spcAft>
-                <a:spcPts val="800"/>
-              </a:spcAft>
-              <a:buSzPct val="100000"/>
-              <a:buFont typeface="+mj-lt"/>
-              <a:buAutoNum type="arabicPeriod" startAt="1"/>
-            </a:pPr>
-            <a:r>
-              <a:rPr lang="en-US" sz="4000" dirty="0">
-                <a:solidFill>
-                  <a:srgbClr val="111111"/>
-                </a:solidFill>
-                <a:latin typeface="Times New Roman" pitchFamily="34" charset="0"/>
-                <a:ea typeface="Times New Roman" pitchFamily="34" charset="-122"/>
-                <a:cs typeface="Times New Roman" pitchFamily="34" charset="-120"/>
-              </a:rPr>
-              <a:t>Objectives and recall</a:t>
-            </a:r>
-            <a:endParaRPr lang="en-US" sz="4000" dirty="0"/>
-          </a:p>
-          <a:p>
-            <a:pPr algn="l" marL="342900" indent="-342900">
-              <a:spcAft>
-                <a:spcPts val="800"/>
-              </a:spcAft>
-              <a:buSzPct val="100000"/>
-              <a:buFont typeface="+mj-lt"/>
-              <a:buAutoNum type="arabicPeriod" startAt="1"/>
-            </a:pPr>
-            <a:r>
-              <a:rPr lang="en-US" sz="4000" dirty="0">
-                <a:solidFill>
-                  <a:srgbClr val="111111"/>
-                </a:solidFill>
-                <a:latin typeface="Times New Roman" pitchFamily="34" charset="0"/>
-                <a:ea typeface="Times New Roman" pitchFamily="34" charset="-122"/>
-                <a:cs typeface="Times New Roman" pitchFamily="34" charset="-120"/>
-              </a:rPr>
-              <a:t>Real-life situation and action to take</a:t>
-            </a:r>
-            <a:endParaRPr lang="en-US" sz="4000" dirty="0"/>
-          </a:p>
-          <a:p>
-            <a:pPr algn="l" marL="342900" indent="-342900">
-              <a:spcAft>
-                <a:spcPts val="800"/>
-              </a:spcAft>
-              <a:buSzPct val="100000"/>
-              <a:buFont typeface="+mj-lt"/>
-              <a:buAutoNum type="arabicPeriod" startAt="1"/>
-            </a:pPr>
-            <a:r>
-              <a:rPr lang="en-US" sz="4000" dirty="0">
-                <a:solidFill>
-                  <a:srgbClr val="111111"/>
-                </a:solidFill>
-                <a:latin typeface="Times New Roman" pitchFamily="34" charset="0"/>
-                <a:ea typeface="Times New Roman" pitchFamily="34" charset="-122"/>
-                <a:cs typeface="Times New Roman" pitchFamily="34" charset="-120"/>
-              </a:rPr>
-              <a:t>Learning activities</a:t>
-            </a:r>
-            <a:endParaRPr lang="en-US" sz="4000" dirty="0"/>
-          </a:p>
-          <a:p>
-            <a:pPr algn="l" marL="342900" indent="-342900">
-              <a:spcAft>
-                <a:spcPts val="800"/>
-              </a:spcAft>
-              <a:buSzPct val="100000"/>
-              <a:buFont typeface="+mj-lt"/>
-              <a:buAutoNum type="arabicPeriod" startAt="1"/>
-            </a:pPr>
-            <a:r>
-              <a:rPr lang="en-US" sz="4000" dirty="0">
-                <a:solidFill>
-                  <a:srgbClr val="111111"/>
-                </a:solidFill>
-                <a:latin typeface="Times New Roman" pitchFamily="34" charset="0"/>
-                <a:ea typeface="Times New Roman" pitchFamily="34" charset="-122"/>
-                <a:cs typeface="Times New Roman" pitchFamily="34" charset="-120"/>
-              </a:rPr>
-              <a:t>Board summary</a:t>
-            </a:r>
-            <a:endParaRPr lang="en-US" sz="4000" dirty="0"/>
-          </a:p>
-          <a:p>
-            <a:pPr algn="l" marL="342900" indent="-342900">
-              <a:spcAft>
-                <a:spcPts val="800"/>
-              </a:spcAft>
-              <a:buSzPct val="100000"/>
-              <a:buFont typeface="+mj-lt"/>
-              <a:buAutoNum type="arabicPeriod" startAt="1"/>
-            </a:pPr>
-            <a:r>
-              <a:rPr lang="en-US" sz="4000" dirty="0">
-                <a:solidFill>
-                  <a:srgbClr val="111111"/>
-                </a:solidFill>
-                <a:latin typeface="Times New Roman" pitchFamily="34" charset="0"/>
-                <a:ea typeface="Times New Roman" pitchFamily="34" charset="-122"/>
-                <a:cs typeface="Times New Roman" pitchFamily="34" charset="-120"/>
-              </a:rPr>
-              <a:t>Evaluation, remediation and homework</a:t>
-            </a:r>
-            <a:endParaRPr lang="en-US" sz="4000" dirty="0"/>
-          </a:p>
-        </p:txBody>
-      </p:sp>
-      <p:sp>
-        <p:nvSpPr>
-          <p:cNvPr id="25" name="Slide Number Placeholder 0"/>
-          <p:cNvSpPr>
-            <a:spLocks noGrp="1"/>
-          </p:cNvSpPr>
-          <p:nvPr>
-            <p:ph type="sldNum" sz="quarter" idx="4294967295"/>
-          </p:nvPr>
-        </p:nvSpPr>
-        <p:spPr>
-          <a:xfrm>
-            <a:off x="27432" y="91440"/>
-            <a:ext cx="585216" cy="475488"/>
-          </a:xfrm>
-          <a:prstGeom prst="rect">
-            <a:avLst/>
-          </a:prstGeom>
-          <a:extLst>
-            <a:ext uri="{C572A759-6A51-4108-AA02-DFA0A04FC94B}">
-              <ma14:wrappingTextBoxFlag xmlns:ma14="http://schemas.microsoft.com/office/mac/drawingml/2011/main" val="0"/>
-            </a:ext>
-          </a:extLst>
-        </p:spPr>
-        <p:txBody>
-          <a:bodyPr/>
-          <a:lstStyle>
-            <a:lvl1pPr>
-              <a:defRPr sz="2000">
-                <a:solidFill>
-                  <a:srgbClr val="FFFFFF"/>
-                </a:solidFill>
-                <a:latin typeface="Calibri"/>
-                <a:ea typeface="Calibri"/>
-                <a:cs typeface="Calibri"/>
-              </a:defRPr>
-            </a:lvl1pPr>
-          </a:lstStyle>
-          <a:p>
-            <a:pPr algn="ctr"/>
-            <a:fld id="{F7021451-1387-4CA6-816F-3879F97B5CBC}" type="slidenum">
-              <a:rPr b="1" lang="en-US"/>
-              <a:t>6</a:t>
+              <a:t>63</a:t>
             </a:fld>
             <a:endParaRPr lang="en-US"/>
           </a:p>
